--- a/slides/6_feature_engineering.pptx
+++ b/slides/6_feature_engineering.pptx
@@ -5,7 +5,7 @@
     <p:sldMasterId id="2147483648" r:id="rId1"/>
   </p:sldMasterIdLst>
   <p:notesMasterIdLst>
-    <p:notesMasterId r:id="rId27"/>
+    <p:notesMasterId r:id="rId29"/>
   </p:notesMasterIdLst>
   <p:sldIdLst>
     <p:sldId id="256" r:id="rId2"/>
@@ -20,19 +20,21 @@
     <p:sldId id="272" r:id="rId11"/>
     <p:sldId id="273" r:id="rId12"/>
     <p:sldId id="274" r:id="rId13"/>
-    <p:sldId id="683" r:id="rId14"/>
-    <p:sldId id="275" r:id="rId15"/>
-    <p:sldId id="276" r:id="rId16"/>
-    <p:sldId id="277" r:id="rId17"/>
-    <p:sldId id="278" r:id="rId18"/>
-    <p:sldId id="636" r:id="rId19"/>
-    <p:sldId id="285" r:id="rId20"/>
-    <p:sldId id="280" r:id="rId21"/>
-    <p:sldId id="281" r:id="rId22"/>
-    <p:sldId id="282" r:id="rId23"/>
-    <p:sldId id="283" r:id="rId24"/>
-    <p:sldId id="669" r:id="rId25"/>
-    <p:sldId id="284" r:id="rId26"/>
+    <p:sldId id="712" r:id="rId14"/>
+    <p:sldId id="672" r:id="rId15"/>
+    <p:sldId id="793" r:id="rId16"/>
+    <p:sldId id="275" r:id="rId17"/>
+    <p:sldId id="276" r:id="rId18"/>
+    <p:sldId id="277" r:id="rId19"/>
+    <p:sldId id="278" r:id="rId20"/>
+    <p:sldId id="636" r:id="rId21"/>
+    <p:sldId id="285" r:id="rId22"/>
+    <p:sldId id="280" r:id="rId23"/>
+    <p:sldId id="281" r:id="rId24"/>
+    <p:sldId id="282" r:id="rId25"/>
+    <p:sldId id="283" r:id="rId26"/>
+    <p:sldId id="669" r:id="rId27"/>
+    <p:sldId id="284" r:id="rId28"/>
   </p:sldIdLst>
   <p:sldSz cx="12192000" cy="6858000"/>
   <p:notesSz cx="6858000" cy="9144000"/>
@@ -503,7 +505,7 @@
           <a:p>
             <a:fld id="{506E0FD1-891F-4B1E-916D-E9B585160BB8}" type="datetimeFigureOut">
               <a:rPr lang="en-GB" smtClean="0"/>
-              <a:t>11/01/2026</a:t>
+              <a:t>03/03/2026</a:t>
             </a:fld>
             <a:endParaRPr lang="en-GB"/>
           </a:p>
@@ -920,7 +922,7 @@
           <a:p>
             <a:fld id="{D68C3F22-27B2-44E3-9C5F-D08126455F6F}" type="datetime1">
               <a:rPr lang="en-GB" smtClean="0"/>
-              <a:t>11/01/2026</a:t>
+              <a:t>03/03/2026</a:t>
             </a:fld>
             <a:endParaRPr lang="en-GB"/>
           </a:p>
@@ -1120,7 +1122,7 @@
           <a:p>
             <a:fld id="{1CD03846-7BF6-4FB6-A921-FF3379ADBD4C}" type="datetime1">
               <a:rPr lang="en-GB" smtClean="0"/>
-              <a:t>11/01/2026</a:t>
+              <a:t>03/03/2026</a:t>
             </a:fld>
             <a:endParaRPr lang="en-GB"/>
           </a:p>
@@ -1330,7 +1332,7 @@
           <a:p>
             <a:fld id="{99E1B91A-3FD0-4144-9C84-63E9688ED2FE}" type="datetime1">
               <a:rPr lang="en-GB" smtClean="0"/>
-              <a:t>11/01/2026</a:t>
+              <a:t>03/03/2026</a:t>
             </a:fld>
             <a:endParaRPr lang="en-GB"/>
           </a:p>
@@ -1530,7 +1532,7 @@
           <a:p>
             <a:fld id="{5295ED7B-FEAD-4734-819F-93EF4B0EA908}" type="datetime1">
               <a:rPr lang="en-GB" smtClean="0"/>
-              <a:t>11/01/2026</a:t>
+              <a:t>03/03/2026</a:t>
             </a:fld>
             <a:endParaRPr lang="en-GB"/>
           </a:p>
@@ -1806,7 +1808,7 @@
           <a:p>
             <a:fld id="{D2D5D4B4-C926-4B45-8815-1ED8911179A2}" type="datetime1">
               <a:rPr lang="en-GB" smtClean="0"/>
-              <a:t>11/01/2026</a:t>
+              <a:t>03/03/2026</a:t>
             </a:fld>
             <a:endParaRPr lang="en-GB"/>
           </a:p>
@@ -2074,7 +2076,7 @@
           <a:p>
             <a:fld id="{B4C5210A-0E37-4935-93AF-69F21A5F712F}" type="datetime1">
               <a:rPr lang="en-GB" smtClean="0"/>
-              <a:t>11/01/2026</a:t>
+              <a:t>03/03/2026</a:t>
             </a:fld>
             <a:endParaRPr lang="en-GB"/>
           </a:p>
@@ -2489,7 +2491,7 @@
           <a:p>
             <a:fld id="{3D3A6B2F-436C-4691-80E8-9C890E000E9D}" type="datetime1">
               <a:rPr lang="en-GB" smtClean="0"/>
-              <a:t>11/01/2026</a:t>
+              <a:t>03/03/2026</a:t>
             </a:fld>
             <a:endParaRPr lang="en-GB"/>
           </a:p>
@@ -2631,7 +2633,7 @@
           <a:p>
             <a:fld id="{84385F4C-D74B-496F-8D21-97E3549C783B}" type="datetime1">
               <a:rPr lang="en-GB" smtClean="0"/>
-              <a:t>11/01/2026</a:t>
+              <a:t>03/03/2026</a:t>
             </a:fld>
             <a:endParaRPr lang="en-GB"/>
           </a:p>
@@ -2744,7 +2746,7 @@
           <a:p>
             <a:fld id="{0CBDCB32-C241-4703-A832-4EB47BD54E83}" type="datetime1">
               <a:rPr lang="en-GB" smtClean="0"/>
-              <a:t>11/01/2026</a:t>
+              <a:t>03/03/2026</a:t>
             </a:fld>
             <a:endParaRPr lang="en-GB"/>
           </a:p>
@@ -3057,7 +3059,7 @@
           <a:p>
             <a:fld id="{85C150FF-BE95-4D25-A16A-E368A81CBF24}" type="datetime1">
               <a:rPr lang="en-GB" smtClean="0"/>
-              <a:t>11/01/2026</a:t>
+              <a:t>03/03/2026</a:t>
             </a:fld>
             <a:endParaRPr lang="en-GB"/>
           </a:p>
@@ -3346,7 +3348,7 @@
           <a:p>
             <a:fld id="{F3C5DB4B-B349-43C9-A424-BADA723AD9F1}" type="datetime1">
               <a:rPr lang="en-GB" smtClean="0"/>
-              <a:t>11/01/2026</a:t>
+              <a:t>03/03/2026</a:t>
             </a:fld>
             <a:endParaRPr lang="en-GB"/>
           </a:p>
@@ -3589,7 +3591,7 @@
           <a:p>
             <a:fld id="{12632426-0A0C-405F-A3D0-2D11AA44702A}" type="datetime1">
               <a:rPr lang="en-GB" smtClean="0"/>
-              <a:t>11/01/2026</a:t>
+              <a:t>03/03/2026</a:t>
             </a:fld>
             <a:endParaRPr lang="en-GB"/>
           </a:p>
@@ -4441,85 +4443,55 @@
           <a:chExt cx="0" cy="0"/>
         </a:xfrm>
       </p:grpSpPr>
-      <p:pic>
-        <p:nvPicPr>
-          <p:cNvPr id="5" name="Picture 4">
-            <a:extLst>
-              <a:ext uri="{FF2B5EF4-FFF2-40B4-BE49-F238E27FC236}">
-                <a16:creationId xmlns:a16="http://schemas.microsoft.com/office/drawing/2014/main" id="{F2A48895-E3AE-F0C7-60C6-B360551C52D9}"/>
-              </a:ext>
-            </a:extLst>
-          </p:cNvPr>
-          <p:cNvPicPr>
-            <a:picLocks noChangeAspect="1"/>
-          </p:cNvPicPr>
-          <p:nvPr/>
-        </p:nvPicPr>
-        <p:blipFill>
-          <a:blip r:embed="rId2"/>
-          <a:stretch>
-            <a:fillRect/>
-          </a:stretch>
-        </p:blipFill>
+      <p:sp>
+        <p:nvSpPr>
+          <p:cNvPr id="2" name="Title 1">
+            <a:extLst>
+              <a:ext uri="{FF2B5EF4-FFF2-40B4-BE49-F238E27FC236}">
+                <a16:creationId xmlns:a16="http://schemas.microsoft.com/office/drawing/2014/main" id="{A62B46F5-540A-8319-5CB2-AEBE07CABE89}"/>
+              </a:ext>
+            </a:extLst>
+          </p:cNvPr>
+          <p:cNvSpPr>
+            <a:spLocks noGrp="1"/>
+          </p:cNvSpPr>
+          <p:nvPr>
+            <p:ph type="title"/>
+          </p:nvPr>
+        </p:nvSpPr>
+        <p:spPr/>
+        <p:txBody>
+          <a:bodyPr/>
+          <a:lstStyle/>
+          <a:p>
+            <a:r>
+              <a:rPr lang="en-GB" dirty="0"/>
+              <a:t>Embeddings</a:t>
+            </a:r>
+            <a:endParaRPr lang="en-DE" dirty="0"/>
+          </a:p>
+        </p:txBody>
+      </p:sp>
+      <p:sp>
+        <p:nvSpPr>
+          <p:cNvPr id="3" name="Content Placeholder 2">
+            <a:extLst>
+              <a:ext uri="{FF2B5EF4-FFF2-40B4-BE49-F238E27FC236}">
+                <a16:creationId xmlns:a16="http://schemas.microsoft.com/office/drawing/2014/main" id="{AE9A42FF-356B-8FF0-F726-7B70069EB14C}"/>
+              </a:ext>
+            </a:extLst>
+          </p:cNvPr>
+          <p:cNvSpPr>
+            <a:spLocks noGrp="1"/>
+          </p:cNvSpPr>
+          <p:nvPr>
+            <p:ph idx="1"/>
+          </p:nvPr>
+        </p:nvSpPr>
         <p:spPr>
           <a:xfrm>
-            <a:off x="6433758" y="2648915"/>
-            <a:ext cx="1657581" cy="2225563"/>
-          </a:xfrm>
-          <a:prstGeom prst="rect">
-            <a:avLst/>
-          </a:prstGeom>
-        </p:spPr>
-      </p:pic>
-      <p:sp>
-        <p:nvSpPr>
-          <p:cNvPr id="2" name="Title 1">
-            <a:extLst>
-              <a:ext uri="{FF2B5EF4-FFF2-40B4-BE49-F238E27FC236}">
-                <a16:creationId xmlns:a16="http://schemas.microsoft.com/office/drawing/2014/main" id="{A62B46F5-540A-8319-5CB2-AEBE07CABE89}"/>
-              </a:ext>
-            </a:extLst>
-          </p:cNvPr>
-          <p:cNvSpPr>
-            <a:spLocks noGrp="1"/>
-          </p:cNvSpPr>
-          <p:nvPr>
-            <p:ph type="title"/>
-          </p:nvPr>
-        </p:nvSpPr>
-        <p:spPr/>
-        <p:txBody>
-          <a:bodyPr/>
-          <a:lstStyle/>
-          <a:p>
-            <a:r>
-              <a:rPr lang="en-GB" dirty="0"/>
-              <a:t>Embeddings</a:t>
-            </a:r>
-            <a:endParaRPr lang="en-DE" dirty="0"/>
-          </a:p>
-        </p:txBody>
-      </p:sp>
-      <p:sp>
-        <p:nvSpPr>
-          <p:cNvPr id="3" name="Content Placeholder 2">
-            <a:extLst>
-              <a:ext uri="{FF2B5EF4-FFF2-40B4-BE49-F238E27FC236}">
-                <a16:creationId xmlns:a16="http://schemas.microsoft.com/office/drawing/2014/main" id="{AE9A42FF-356B-8FF0-F726-7B70069EB14C}"/>
-              </a:ext>
-            </a:extLst>
-          </p:cNvPr>
-          <p:cNvSpPr>
-            <a:spLocks noGrp="1"/>
-          </p:cNvSpPr>
-          <p:nvPr>
-            <p:ph idx="1"/>
-          </p:nvPr>
-        </p:nvSpPr>
-        <p:spPr>
-          <a:xfrm>
-            <a:off x="838199" y="1825625"/>
-            <a:ext cx="5552091" cy="4351338"/>
+            <a:off x="838198" y="1690688"/>
+            <a:ext cx="6287816" cy="5030787"/>
           </a:xfrm>
         </p:spPr>
         <p:txBody>
@@ -4532,102 +4504,146 @@
               <a:buNone/>
             </a:pPr>
             <a:r>
-              <a:rPr lang="en-GB" sz="2300" dirty="0"/>
+              <a:rPr lang="en-GB" sz="2000" dirty="0"/>
               <a:t>r</a:t>
             </a:r>
             <a:r>
-              <a:rPr lang="en-DE" sz="2300" dirty="0"/>
-              <a:t>epresentation of entities by vectors</a:t>
-            </a:r>
-            <a:endParaRPr lang="en-GB" sz="2300" dirty="0"/>
+              <a:rPr lang="en-DE" sz="2000" dirty="0"/>
+              <a:t>epresentation of entities </a:t>
+            </a:r>
+            <a:r>
+              <a:rPr lang="en-DE" sz="2000"/>
+              <a:t>by vectors</a:t>
+            </a:r>
+            <a:endParaRPr lang="en-GB" sz="2000" dirty="0"/>
           </a:p>
           <a:p>
             <a:pPr marL="0" indent="0">
               <a:buNone/>
             </a:pPr>
             <a:r>
-              <a:rPr lang="en-GB" sz="2300" dirty="0"/>
-              <a:t>s</a:t>
-            </a:r>
-            <a:r>
-              <a:rPr lang="en-DE" sz="2300" dirty="0"/>
-              <a:t>imilarity between embeddings by, e.g., cosine similarity </a:t>
-            </a:r>
-            <a:r>
-              <a:rPr lang="en-DE" sz="2300" dirty="0">
+              <a:rPr lang="en-GB" sz="2000" dirty="0">
                 <a:sym typeface="Wingdings" pitchFamily="2" charset="2"/>
               </a:rPr>
-              <a:t></a:t>
-            </a:r>
-            <a:r>
-              <a:rPr lang="en-DE" sz="2300" dirty="0"/>
-              <a:t> semantic similarity</a:t>
-            </a:r>
-            <a:endParaRPr lang="en-GB" sz="2300" dirty="0"/>
+              <a:t> </a:t>
+            </a:r>
+            <a:r>
+              <a:rPr lang="en-GB" sz="2000" dirty="0"/>
+              <a:t>semantic s</a:t>
+            </a:r>
+            <a:r>
+              <a:rPr lang="en-DE" sz="2000"/>
+              <a:t>imilarity</a:t>
+            </a:r>
+            <a:endParaRPr lang="en-GB" sz="2000" dirty="0"/>
           </a:p>
           <a:p>
             <a:pPr marL="0" indent="0">
               <a:buNone/>
             </a:pPr>
-            <a:r>
-              <a:rPr lang="en-GB" sz="2300" dirty="0"/>
-              <a:t>most famous application: w</a:t>
-            </a:r>
-            <a:r>
-              <a:rPr lang="en-DE" sz="2300" dirty="0"/>
-              <a:t>ord embeddings </a:t>
-            </a:r>
-            <a:r>
-              <a:rPr lang="en-DE" sz="2300" dirty="0">
-                <a:sym typeface="Wingdings" pitchFamily="2" charset="2"/>
-              </a:rPr>
-              <a:t> associations </a:t>
-            </a:r>
-            <a:r>
-              <a:rPr lang="en-DE" sz="2300" dirty="0"/>
-              <a:t>(natural language processing)</a:t>
-            </a:r>
+            <a:endParaRPr lang="en-GB" sz="2000" dirty="0"/>
           </a:p>
           <a:p>
             <a:pPr marL="0" indent="0">
               <a:buNone/>
             </a:pPr>
             <a:r>
-              <a:rPr lang="en-GB" sz="2400" dirty="0"/>
-              <a:t>learned via co-occurrence (e.g., </a:t>
-            </a:r>
-            <a:r>
-              <a:rPr lang="en-GB" sz="2400" dirty="0">
-                <a:hlinkClick r:id="rId3"/>
-              </a:rPr>
-              <a:t>word2vec</a:t>
-            </a:r>
-            <a:r>
-              <a:rPr lang="en-GB" sz="2400" dirty="0"/>
-              <a:t>)</a:t>
-            </a:r>
-            <a:endParaRPr lang="en-GB" sz="2300" dirty="0"/>
+              <a:rPr lang="en-GB" sz="2000" dirty="0"/>
+              <a:t>most famous application: w</a:t>
+            </a:r>
+            <a:r>
+              <a:rPr lang="en-DE" sz="2000"/>
+              <a:t>ord embeddings</a:t>
+            </a:r>
+            <a:endParaRPr lang="de-DE" sz="2000" dirty="0"/>
           </a:p>
           <a:p>
             <a:pPr marL="0" indent="0">
               <a:buNone/>
             </a:pPr>
             <a:r>
-              <a:rPr lang="en-GB" sz="2300" dirty="0"/>
-              <a:t>b</a:t>
-            </a:r>
-            <a:r>
-              <a:rPr lang="en-DE" sz="2300" dirty="0"/>
-              <a:t>ut general concept: embeddings of (categorical) features (e.g., products in recommendation engines)</a:t>
-            </a:r>
-            <a:endParaRPr lang="en-GB" sz="2300" dirty="0"/>
+              <a:rPr lang="en-DE" sz="2000">
+                <a:sym typeface="Wingdings" pitchFamily="2" charset="2"/>
+              </a:rPr>
+              <a:t> </a:t>
+            </a:r>
+            <a:r>
+              <a:rPr lang="en-DE" sz="2000" dirty="0">
+                <a:sym typeface="Wingdings" pitchFamily="2" charset="2"/>
+              </a:rPr>
+              <a:t>associations </a:t>
+            </a:r>
+            <a:r>
+              <a:rPr lang="en-DE" sz="2000" dirty="0"/>
+              <a:t>(natural language </a:t>
+            </a:r>
+            <a:r>
+              <a:rPr lang="en-DE" sz="2000"/>
+              <a:t>processing)</a:t>
+            </a:r>
+            <a:endParaRPr lang="en-GB" sz="2000" dirty="0"/>
           </a:p>
           <a:p>
             <a:pPr marL="0" indent="0">
               <a:buNone/>
             </a:pPr>
-            <a:r>
-              <a:rPr lang="en-GB" sz="2300" dirty="0"/>
+            <a:endParaRPr lang="en-GB" sz="2000" dirty="0"/>
+          </a:p>
+          <a:p>
+            <a:pPr marL="0" indent="0">
+              <a:buNone/>
+            </a:pPr>
+            <a:r>
+              <a:rPr lang="en-GB" sz="2000" dirty="0"/>
+              <a:t>b</a:t>
+            </a:r>
+            <a:r>
+              <a:rPr lang="en-DE" sz="2000" dirty="0"/>
+              <a:t>ut general concept: embeddings of (categorical) features (e.g., products in recommendation </a:t>
+            </a:r>
+            <a:r>
+              <a:rPr lang="en-DE" sz="2000"/>
+              <a:t>engines)</a:t>
+            </a:r>
+            <a:endParaRPr lang="en-GB" sz="2000" dirty="0"/>
+          </a:p>
+          <a:p>
+            <a:pPr marL="0" indent="0">
+              <a:buNone/>
+            </a:pPr>
+            <a:endParaRPr lang="en-GB" sz="2000" dirty="0"/>
+          </a:p>
+          <a:p>
+            <a:pPr marL="0" indent="0">
+              <a:buNone/>
+            </a:pPr>
+            <a:r>
+              <a:rPr lang="en-GB" sz="2000" dirty="0"/>
+              <a:t>learned via co-occurrence (e.g., </a:t>
+            </a:r>
+            <a:r>
+              <a:rPr lang="en-GB" sz="2000" dirty="0">
+                <a:hlinkClick r:id="rId2"/>
+              </a:rPr>
+              <a:t>word2vec</a:t>
+            </a:r>
+            <a:r>
+              <a:rPr lang="en-GB" sz="2000" dirty="0"/>
+              <a:t>)</a:t>
+            </a:r>
+          </a:p>
+          <a:p>
+            <a:pPr marL="0" indent="0">
+              <a:buNone/>
+            </a:pPr>
+            <a:endParaRPr lang="en-GB" sz="2000" dirty="0"/>
+          </a:p>
+          <a:p>
+            <a:pPr marL="0" indent="0">
+              <a:buNone/>
+            </a:pPr>
+            <a:r>
+              <a:rPr lang="en-GB" sz="2000" dirty="0"/>
               <a:t>end-to-end learning: embeddings layer in deep neural network, e.g., multi-layer perceptron (MLP)</a:t>
             </a:r>
           </a:p>
@@ -4647,7 +4663,7 @@
         </p:nvSpPr>
         <p:spPr>
           <a:xfrm>
-            <a:off x="10811339" y="6206399"/>
+            <a:off x="10901957" y="6206399"/>
             <a:ext cx="532518" cy="246221"/>
           </a:xfrm>
           <a:prstGeom prst="rect">
@@ -4663,7 +4679,7 @@
           <a:p>
             <a:r>
               <a:rPr lang="de-DE" sz="1000" dirty="0">
-                <a:hlinkClick r:id="rId4"/>
+                <a:hlinkClick r:id="rId3"/>
               </a:rPr>
               <a:t>source</a:t>
             </a:r>
@@ -4677,6 +4693,36 @@
             <a:extLst>
               <a:ext uri="{FF2B5EF4-FFF2-40B4-BE49-F238E27FC236}">
                 <a16:creationId xmlns:a16="http://schemas.microsoft.com/office/drawing/2014/main" id="{17D634FC-E599-9F20-47A7-FB10E27B9023}"/>
+              </a:ext>
+            </a:extLst>
+          </p:cNvPr>
+          <p:cNvPicPr>
+            <a:picLocks noChangeAspect="1"/>
+          </p:cNvPicPr>
+          <p:nvPr/>
+        </p:nvPicPr>
+        <p:blipFill>
+          <a:blip r:embed="rId4"/>
+          <a:stretch>
+            <a:fillRect/>
+          </a:stretch>
+        </p:blipFill>
+        <p:spPr>
+          <a:xfrm>
+            <a:off x="7410126" y="3454717"/>
+            <a:ext cx="4028543" cy="1926568"/>
+          </a:xfrm>
+          <a:prstGeom prst="rect">
+            <a:avLst/>
+          </a:prstGeom>
+        </p:spPr>
+      </p:pic>
+      <p:pic>
+        <p:nvPicPr>
+          <p:cNvPr id="8" name="Picture 7">
+            <a:extLst>
+              <a:ext uri="{FF2B5EF4-FFF2-40B4-BE49-F238E27FC236}">
+                <a16:creationId xmlns:a16="http://schemas.microsoft.com/office/drawing/2014/main" id="{67DD70A9-EEC9-B484-0A23-2CB9B1B57F48}"/>
               </a:ext>
             </a:extLst>
           </p:cNvPr>
@@ -4693,8 +4739,8 @@
         </p:blipFill>
         <p:spPr>
           <a:xfrm>
-            <a:off x="8019731" y="3454717"/>
-            <a:ext cx="4028543" cy="1926568"/>
+            <a:off x="8489675" y="5381285"/>
+            <a:ext cx="2944800" cy="202368"/>
           </a:xfrm>
           <a:prstGeom prst="rect">
             <a:avLst/>
@@ -4703,10 +4749,10 @@
       </p:pic>
       <p:pic>
         <p:nvPicPr>
-          <p:cNvPr id="8" name="Picture 7">
-            <a:extLst>
-              <a:ext uri="{FF2B5EF4-FFF2-40B4-BE49-F238E27FC236}">
-                <a16:creationId xmlns:a16="http://schemas.microsoft.com/office/drawing/2014/main" id="{67DD70A9-EEC9-B484-0A23-2CB9B1B57F48}"/>
+          <p:cNvPr id="10" name="Picture 9" descr="Chart, bar chart&#10;&#10;Description automatically generated">
+            <a:extLst>
+              <a:ext uri="{FF2B5EF4-FFF2-40B4-BE49-F238E27FC236}">
+                <a16:creationId xmlns:a16="http://schemas.microsoft.com/office/drawing/2014/main" id="{E3D52C29-171A-1108-3E4C-38871512D94C}"/>
               </a:ext>
             </a:extLst>
           </p:cNvPr>
@@ -4723,20 +4769,88 @@
         </p:blipFill>
         <p:spPr>
           <a:xfrm>
-            <a:off x="9099280" y="5381285"/>
-            <a:ext cx="2944800" cy="202368"/>
+            <a:off x="7609491" y="5712101"/>
+            <a:ext cx="3857297" cy="546333"/>
           </a:xfrm>
           <a:prstGeom prst="rect">
             <a:avLst/>
           </a:prstGeom>
         </p:spPr>
       </p:pic>
+      <p:sp>
+        <p:nvSpPr>
+          <p:cNvPr id="11" name="Slide Number Placeholder 10">
+            <a:extLst>
+              <a:ext uri="{FF2B5EF4-FFF2-40B4-BE49-F238E27FC236}">
+                <a16:creationId xmlns:a16="http://schemas.microsoft.com/office/drawing/2014/main" id="{F44C6BA1-9223-B550-520F-332D76958D76}"/>
+              </a:ext>
+            </a:extLst>
+          </p:cNvPr>
+          <p:cNvSpPr>
+            <a:spLocks noGrp="1"/>
+          </p:cNvSpPr>
+          <p:nvPr>
+            <p:ph type="sldNum" sz="quarter" idx="12"/>
+          </p:nvPr>
+        </p:nvSpPr>
+        <p:spPr/>
+        <p:txBody>
+          <a:bodyPr/>
+          <a:lstStyle/>
+          <a:p>
+            <a:fld id="{290AF890-0265-4349-BF13-E30F01A2AA85}" type="slidenum">
+              <a:rPr lang="en-DE" smtClean="0"/>
+              <a:t>13</a:t>
+            </a:fld>
+            <a:endParaRPr lang="en-DE"/>
+          </a:p>
+        </p:txBody>
+      </p:sp>
+      <p:sp>
+        <p:nvSpPr>
+          <p:cNvPr id="12" name="TextBox 11">
+            <a:extLst>
+              <a:ext uri="{FF2B5EF4-FFF2-40B4-BE49-F238E27FC236}">
+                <a16:creationId xmlns:a16="http://schemas.microsoft.com/office/drawing/2014/main" id="{BD6E5F51-20A2-7DF2-26E3-DD81994CAF95}"/>
+              </a:ext>
+            </a:extLst>
+          </p:cNvPr>
+          <p:cNvSpPr txBox="1"/>
+          <p:nvPr/>
+        </p:nvSpPr>
+        <p:spPr>
+          <a:xfrm>
+            <a:off x="7609491" y="2648915"/>
+            <a:ext cx="3658794" cy="707886"/>
+          </a:xfrm>
+          <a:prstGeom prst="rect">
+            <a:avLst/>
+          </a:prstGeom>
+          <a:noFill/>
+        </p:spPr>
+        <p:txBody>
+          <a:bodyPr wrap="square" rtlCol="0">
+            <a:spAutoFit/>
+          </a:bodyPr>
+          <a:lstStyle/>
+          <a:p>
+            <a:r>
+              <a:rPr lang="en-GB" sz="2000" dirty="0"/>
+              <a:t>b</a:t>
+            </a:r>
+            <a:r>
+              <a:rPr lang="en-DE" sz="2000" dirty="0"/>
+              <a:t>ut also direction of difference vectors interesting (analogies):</a:t>
+            </a:r>
+          </a:p>
+        </p:txBody>
+      </p:sp>
       <p:pic>
         <p:nvPicPr>
-          <p:cNvPr id="10" name="Picture 9" descr="Chart, bar chart&#10;&#10;Description automatically generated">
-            <a:extLst>
-              <a:ext uri="{FF2B5EF4-FFF2-40B4-BE49-F238E27FC236}">
-                <a16:creationId xmlns:a16="http://schemas.microsoft.com/office/drawing/2014/main" id="{E3D52C29-171A-1108-3E4C-38871512D94C}"/>
+          <p:cNvPr id="14" name="Picture 13" descr="Diagram&#10;&#10;Description automatically generated">
+            <a:extLst>
+              <a:ext uri="{FF2B5EF4-FFF2-40B4-BE49-F238E27FC236}">
+                <a16:creationId xmlns:a16="http://schemas.microsoft.com/office/drawing/2014/main" id="{7A803F76-A96C-AF3E-B8A0-FE1423AF278E}"/>
               </a:ext>
             </a:extLst>
           </p:cNvPr>
@@ -4753,105 +4867,7 @@
         </p:blipFill>
         <p:spPr>
           <a:xfrm>
-            <a:off x="8219096" y="5712101"/>
-            <a:ext cx="3857297" cy="546333"/>
-          </a:xfrm>
-          <a:prstGeom prst="rect">
-            <a:avLst/>
-          </a:prstGeom>
-        </p:spPr>
-      </p:pic>
-      <p:sp>
-        <p:nvSpPr>
-          <p:cNvPr id="11" name="Slide Number Placeholder 10">
-            <a:extLst>
-              <a:ext uri="{FF2B5EF4-FFF2-40B4-BE49-F238E27FC236}">
-                <a16:creationId xmlns:a16="http://schemas.microsoft.com/office/drawing/2014/main" id="{F44C6BA1-9223-B550-520F-332D76958D76}"/>
-              </a:ext>
-            </a:extLst>
-          </p:cNvPr>
-          <p:cNvSpPr>
-            <a:spLocks noGrp="1"/>
-          </p:cNvSpPr>
-          <p:nvPr>
-            <p:ph type="sldNum" sz="quarter" idx="12"/>
-          </p:nvPr>
-        </p:nvSpPr>
-        <p:spPr/>
-        <p:txBody>
-          <a:bodyPr/>
-          <a:lstStyle/>
-          <a:p>
-            <a:fld id="{290AF890-0265-4349-BF13-E30F01A2AA85}" type="slidenum">
-              <a:rPr lang="en-DE" smtClean="0"/>
-              <a:t>13</a:t>
-            </a:fld>
-            <a:endParaRPr lang="en-DE"/>
-          </a:p>
-        </p:txBody>
-      </p:sp>
-      <p:sp>
-        <p:nvSpPr>
-          <p:cNvPr id="12" name="TextBox 11">
-            <a:extLst>
-              <a:ext uri="{FF2B5EF4-FFF2-40B4-BE49-F238E27FC236}">
-                <a16:creationId xmlns:a16="http://schemas.microsoft.com/office/drawing/2014/main" id="{BD6E5F51-20A2-7DF2-26E3-DD81994CAF95}"/>
-              </a:ext>
-            </a:extLst>
-          </p:cNvPr>
-          <p:cNvSpPr txBox="1"/>
-          <p:nvPr/>
-        </p:nvSpPr>
-        <p:spPr>
-          <a:xfrm>
-            <a:off x="8219096" y="2648915"/>
-            <a:ext cx="3372650" cy="707886"/>
-          </a:xfrm>
-          <a:prstGeom prst="rect">
-            <a:avLst/>
-          </a:prstGeom>
-          <a:noFill/>
-        </p:spPr>
-        <p:txBody>
-          <a:bodyPr wrap="square" rtlCol="0">
-            <a:spAutoFit/>
-          </a:bodyPr>
-          <a:lstStyle/>
-          <a:p>
-            <a:r>
-              <a:rPr lang="en-GB" sz="2000" dirty="0"/>
-              <a:t>b</a:t>
-            </a:r>
-            <a:r>
-              <a:rPr lang="en-DE" sz="2000" dirty="0"/>
-              <a:t>ut also direction of difference vectors interesting (analogies):</a:t>
-            </a:r>
-          </a:p>
-        </p:txBody>
-      </p:sp>
-      <p:pic>
-        <p:nvPicPr>
-          <p:cNvPr id="14" name="Picture 13" descr="Diagram&#10;&#10;Description automatically generated">
-            <a:extLst>
-              <a:ext uri="{FF2B5EF4-FFF2-40B4-BE49-F238E27FC236}">
-                <a16:creationId xmlns:a16="http://schemas.microsoft.com/office/drawing/2014/main" id="{7A803F76-A96C-AF3E-B8A0-FE1423AF278E}"/>
-              </a:ext>
-            </a:extLst>
-          </p:cNvPr>
-          <p:cNvPicPr>
-            <a:picLocks noChangeAspect="1"/>
-          </p:cNvPicPr>
-          <p:nvPr/>
-        </p:nvPicPr>
-        <p:blipFill>
-          <a:blip r:embed="rId8"/>
-          <a:stretch>
-            <a:fillRect/>
-          </a:stretch>
-        </p:blipFill>
-        <p:spPr>
-          <a:xfrm>
-            <a:off x="8178698" y="400887"/>
+            <a:off x="7807994" y="400887"/>
             <a:ext cx="3658794" cy="2073317"/>
           </a:xfrm>
           <a:prstGeom prst="rect">
@@ -4862,7 +4878,7 @@
     </p:spTree>
     <p:extLst>
       <p:ext uri="{BB962C8B-B14F-4D97-AF65-F5344CB8AC3E}">
-        <p14:creationId xmlns:p14="http://schemas.microsoft.com/office/powerpoint/2010/main" val="1141733653"/>
+        <p14:creationId xmlns:p14="http://schemas.microsoft.com/office/powerpoint/2010/main" val="3273948103"/>
       </p:ext>
     </p:extLst>
   </p:cSld>
@@ -4891,10 +4907,10 @@
       </p:grpSpPr>
       <p:sp>
         <p:nvSpPr>
-          <p:cNvPr id="2" name="Titel 1">
-            <a:extLst>
-              <a:ext uri="{FF2B5EF4-FFF2-40B4-BE49-F238E27FC236}">
-                <a16:creationId xmlns:a16="http://schemas.microsoft.com/office/drawing/2014/main" id="{BDBD6BF8-3D11-D88B-C84A-AE77A321178F}"/>
+          <p:cNvPr id="2" name="Title 1">
+            <a:extLst>
+              <a:ext uri="{FF2B5EF4-FFF2-40B4-BE49-F238E27FC236}">
+                <a16:creationId xmlns:a16="http://schemas.microsoft.com/office/drawing/2014/main" id="{AD599BAF-CD48-A9DC-C9DE-C8CFE057A56D}"/>
               </a:ext>
             </a:extLst>
           </p:cNvPr>
@@ -4911,27 +4927,18 @@
           <a:lstStyle/>
           <a:p>
             <a:r>
-              <a:rPr lang="de-DE" dirty="0" err="1"/>
-              <a:t>Dimensionality</a:t>
-            </a:r>
-            <a:r>
-              <a:rPr lang="de-DE" dirty="0"/>
-              <a:t> </a:t>
-            </a:r>
-            <a:r>
-              <a:rPr lang="de-DE" dirty="0" err="1"/>
-              <a:t>Reduction</a:t>
-            </a:r>
-            <a:endParaRPr lang="de-DE" dirty="0"/>
-          </a:p>
-        </p:txBody>
-      </p:sp>
-      <p:sp>
-        <p:nvSpPr>
-          <p:cNvPr id="3" name="Inhaltsplatzhalter 2">
-            <a:extLst>
-              <a:ext uri="{FF2B5EF4-FFF2-40B4-BE49-F238E27FC236}">
-                <a16:creationId xmlns:a16="http://schemas.microsoft.com/office/drawing/2014/main" id="{5DBF8B8B-A809-EE1C-1E3D-A32FC508808F}"/>
+              <a:rPr lang="en-DE" dirty="0"/>
+              <a:t>Word Embeddings as Part of Language Model</a:t>
+            </a:r>
+          </a:p>
+        </p:txBody>
+      </p:sp>
+      <p:sp>
+        <p:nvSpPr>
+          <p:cNvPr id="3" name="Content Placeholder 2">
+            <a:extLst>
+              <a:ext uri="{FF2B5EF4-FFF2-40B4-BE49-F238E27FC236}">
+                <a16:creationId xmlns:a16="http://schemas.microsoft.com/office/drawing/2014/main" id="{8F702A78-E7E1-8AB3-28CF-DF22B7BBE8E0}"/>
               </a:ext>
             </a:extLst>
           </p:cNvPr>
@@ -4942,21 +4949,90 @@
             <p:ph idx="1"/>
           </p:nvPr>
         </p:nvSpPr>
-        <p:spPr/>
-        <p:txBody>
-          <a:bodyPr/>
-          <a:lstStyle/>
-          <a:p>
-            <a:endParaRPr lang="de-DE"/>
-          </a:p>
-        </p:txBody>
-      </p:sp>
-      <p:sp>
-        <p:nvSpPr>
-          <p:cNvPr id="4" name="Foliennummernplatzhalter 3">
-            <a:extLst>
-              <a:ext uri="{FF2B5EF4-FFF2-40B4-BE49-F238E27FC236}">
-                <a16:creationId xmlns:a16="http://schemas.microsoft.com/office/drawing/2014/main" id="{BE5B58E1-0E39-CD68-78F4-A3CF38272C75}"/>
+        <p:spPr>
+          <a:xfrm>
+            <a:off x="838200" y="1690688"/>
+            <a:ext cx="9245836" cy="2836643"/>
+          </a:xfrm>
+        </p:spPr>
+        <p:txBody>
+          <a:bodyPr>
+            <a:normAutofit/>
+          </a:bodyPr>
+          <a:lstStyle/>
+          <a:p>
+            <a:pPr marL="0" indent="0">
+              <a:buNone/>
+            </a:pPr>
+            <a:r>
+              <a:rPr lang="en-GB" sz="2600" dirty="0"/>
+              <a:t>l</a:t>
+            </a:r>
+            <a:r>
+              <a:rPr lang="en-DE" sz="2600" dirty="0"/>
+              <a:t>anguage models contain embedding matrix as part of learned parameters</a:t>
+            </a:r>
+          </a:p>
+          <a:p>
+            <a:pPr marL="0" indent="0">
+              <a:buNone/>
+            </a:pPr>
+            <a:r>
+              <a:rPr lang="en-GB" sz="2600" dirty="0"/>
+              <a:t>t</a:t>
+            </a:r>
+            <a:r>
+              <a:rPr lang="en-DE" sz="2600" dirty="0"/>
+              <a:t>ypically several hundred dimensions for word vectors</a:t>
+            </a:r>
+            <a:r>
+              <a:rPr lang="en-GB" sz="2600" dirty="0"/>
+              <a:t> (to be compared with vocabulary sizes of many thousands)</a:t>
+            </a:r>
+            <a:endParaRPr lang="en-DE" sz="2600" dirty="0"/>
+          </a:p>
+          <a:p>
+            <a:pPr marL="0" indent="0">
+              <a:buNone/>
+            </a:pPr>
+            <a:r>
+              <a:rPr lang="en-GB" sz="2600" dirty="0"/>
+              <a:t>(c</a:t>
+            </a:r>
+            <a:r>
+              <a:rPr lang="en-DE" sz="2600"/>
+              <a:t>an </a:t>
+            </a:r>
+            <a:r>
+              <a:rPr lang="de-DE" sz="2600" dirty="0"/>
+              <a:t>also </a:t>
+            </a:r>
+            <a:r>
+              <a:rPr lang="en-DE" sz="2600"/>
+              <a:t>be extracted and subsequently used as pretrained embeddings for ot</a:t>
+            </a:r>
+            <a:r>
+              <a:rPr lang="en-GB" sz="2600" dirty="0"/>
+              <a:t>he</a:t>
+            </a:r>
+            <a:r>
+              <a:rPr lang="en-DE" sz="2600"/>
+              <a:t>r task</a:t>
+            </a:r>
+            <a:r>
+              <a:rPr lang="de-DE" sz="2600" dirty="0"/>
+              <a:t>)</a:t>
+            </a:r>
+            <a:endParaRPr lang="en-DE" sz="2600" dirty="0"/>
+          </a:p>
+        </p:txBody>
+      </p:sp>
+      <p:sp>
+        <p:nvSpPr>
+          <p:cNvPr id="4" name="Slide Number Placeholder 3">
+            <a:extLst>
+              <a:ext uri="{FF2B5EF4-FFF2-40B4-BE49-F238E27FC236}">
+                <a16:creationId xmlns:a16="http://schemas.microsoft.com/office/drawing/2014/main" id="{FD935F2C-07D5-187B-BE3D-6ABF98E1F605}"/>
               </a:ext>
             </a:extLst>
           </p:cNvPr>
@@ -4972,18 +5048,186 @@
           <a:bodyPr/>
           <a:lstStyle/>
           <a:p>
-            <a:fld id="{08C366F5-AFAD-49CB-854A-9D9E238FCA13}" type="slidenum">
-              <a:rPr lang="en-GB" smtClean="0"/>
+            <a:fld id="{290AF890-0265-4349-BF13-E30F01A2AA85}" type="slidenum">
+              <a:rPr lang="en-DE" smtClean="0"/>
               <a:t>14</a:t>
             </a:fld>
-            <a:endParaRPr lang="en-GB"/>
+            <a:endParaRPr lang="en-DE"/>
+          </a:p>
+        </p:txBody>
+      </p:sp>
+      <p:pic>
+        <p:nvPicPr>
+          <p:cNvPr id="6" name="Picture 5" descr="A picture containing text&#10;&#10;Description automatically generated">
+            <a:extLst>
+              <a:ext uri="{FF2B5EF4-FFF2-40B4-BE49-F238E27FC236}">
+                <a16:creationId xmlns:a16="http://schemas.microsoft.com/office/drawing/2014/main" id="{C0D0DB44-137A-5A96-F654-84C6089EFDD2}"/>
+              </a:ext>
+            </a:extLst>
+          </p:cNvPr>
+          <p:cNvPicPr>
+            <a:picLocks noChangeAspect="1"/>
+          </p:cNvPicPr>
+          <p:nvPr/>
+        </p:nvPicPr>
+        <p:blipFill>
+          <a:blip r:embed="rId2"/>
+          <a:stretch>
+            <a:fillRect/>
+          </a:stretch>
+        </p:blipFill>
+        <p:spPr>
+          <a:xfrm>
+            <a:off x="1973311" y="4575994"/>
+            <a:ext cx="4455949" cy="2194144"/>
+          </a:xfrm>
+          <a:prstGeom prst="rect">
+            <a:avLst/>
+          </a:prstGeom>
+        </p:spPr>
+      </p:pic>
+      <p:pic>
+        <p:nvPicPr>
+          <p:cNvPr id="8" name="Picture 7" descr="Graphical user interface&#10;&#10;Description automatically generated">
+            <a:extLst>
+              <a:ext uri="{FF2B5EF4-FFF2-40B4-BE49-F238E27FC236}">
+                <a16:creationId xmlns:a16="http://schemas.microsoft.com/office/drawing/2014/main" id="{F0B691B1-6618-EEE6-E1AB-BB326F7FB6C4}"/>
+              </a:ext>
+            </a:extLst>
+          </p:cNvPr>
+          <p:cNvPicPr>
+            <a:picLocks noChangeAspect="1"/>
+          </p:cNvPicPr>
+          <p:nvPr/>
+        </p:nvPicPr>
+        <p:blipFill>
+          <a:blip r:embed="rId3"/>
+          <a:stretch>
+            <a:fillRect/>
+          </a:stretch>
+        </p:blipFill>
+        <p:spPr>
+          <a:xfrm>
+            <a:off x="6523903" y="4575994"/>
+            <a:ext cx="4572781" cy="2194144"/>
+          </a:xfrm>
+          <a:prstGeom prst="rect">
+            <a:avLst/>
+          </a:prstGeom>
+        </p:spPr>
+      </p:pic>
+      <p:pic>
+        <p:nvPicPr>
+          <p:cNvPr id="10" name="Picture 9">
+            <a:extLst>
+              <a:ext uri="{FF2B5EF4-FFF2-40B4-BE49-F238E27FC236}">
+                <a16:creationId xmlns:a16="http://schemas.microsoft.com/office/drawing/2014/main" id="{C0B38438-74D2-2EE4-9457-10563444E910}"/>
+              </a:ext>
+            </a:extLst>
+          </p:cNvPr>
+          <p:cNvPicPr>
+            <a:picLocks noChangeAspect="1"/>
+          </p:cNvPicPr>
+          <p:nvPr/>
+        </p:nvPicPr>
+        <p:blipFill>
+          <a:blip r:embed="rId4"/>
+          <a:stretch>
+            <a:fillRect/>
+          </a:stretch>
+        </p:blipFill>
+        <p:spPr>
+          <a:xfrm>
+            <a:off x="10084036" y="1551648"/>
+            <a:ext cx="1889669" cy="2537177"/>
+          </a:xfrm>
+          <a:prstGeom prst="rect">
+            <a:avLst/>
+          </a:prstGeom>
+        </p:spPr>
+      </p:pic>
+      <p:sp>
+        <p:nvSpPr>
+          <p:cNvPr id="11" name="TextBox 10">
+            <a:extLst>
+              <a:ext uri="{FF2B5EF4-FFF2-40B4-BE49-F238E27FC236}">
+                <a16:creationId xmlns:a16="http://schemas.microsoft.com/office/drawing/2014/main" id="{68EEB905-7F38-A25E-C89F-852AB8B256E0}"/>
+              </a:ext>
+            </a:extLst>
+          </p:cNvPr>
+          <p:cNvSpPr txBox="1"/>
+          <p:nvPr/>
+        </p:nvSpPr>
+        <p:spPr>
+          <a:xfrm>
+            <a:off x="11287235" y="5985682"/>
+            <a:ext cx="532518" cy="246221"/>
+          </a:xfrm>
+          <a:prstGeom prst="rect">
+            <a:avLst/>
+          </a:prstGeom>
+          <a:noFill/>
+        </p:spPr>
+        <p:txBody>
+          <a:bodyPr wrap="none" rtlCol="0">
+            <a:spAutoFit/>
+          </a:bodyPr>
+          <a:lstStyle/>
+          <a:p>
+            <a:r>
+              <a:rPr lang="de-DE" sz="1000" dirty="0">
+                <a:hlinkClick r:id="rId5"/>
+              </a:rPr>
+              <a:t>source</a:t>
+            </a:r>
+            <a:endParaRPr lang="de-DE" sz="1000" dirty="0"/>
+          </a:p>
+        </p:txBody>
+      </p:sp>
+      <p:sp>
+        <p:nvSpPr>
+          <p:cNvPr id="12" name="TextBox 11">
+            <a:extLst>
+              <a:ext uri="{FF2B5EF4-FFF2-40B4-BE49-F238E27FC236}">
+                <a16:creationId xmlns:a16="http://schemas.microsoft.com/office/drawing/2014/main" id="{B3D1DC02-65F0-4A86-0404-D87CFA3EB8B9}"/>
+              </a:ext>
+            </a:extLst>
+          </p:cNvPr>
+          <p:cNvSpPr txBox="1"/>
+          <p:nvPr/>
+        </p:nvSpPr>
+        <p:spPr>
+          <a:xfrm>
+            <a:off x="372247" y="5349900"/>
+            <a:ext cx="1410513" cy="646331"/>
+          </a:xfrm>
+          <a:prstGeom prst="rect">
+            <a:avLst/>
+          </a:prstGeom>
+          <a:noFill/>
+        </p:spPr>
+        <p:txBody>
+          <a:bodyPr wrap="square" rtlCol="0">
+            <a:spAutoFit/>
+          </a:bodyPr>
+          <a:lstStyle/>
+          <a:p>
+            <a:r>
+              <a:rPr lang="en-DE" dirty="0"/>
+              <a:t>next-word prediction</a:t>
+            </a:r>
+            <a:r>
+              <a:rPr lang="en-GB" dirty="0"/>
+              <a:t>:</a:t>
+            </a:r>
+            <a:endParaRPr lang="en-DE" dirty="0"/>
           </a:p>
         </p:txBody>
       </p:sp>
     </p:spTree>
     <p:extLst>
       <p:ext uri="{BB962C8B-B14F-4D97-AF65-F5344CB8AC3E}">
-        <p14:creationId xmlns:p14="http://schemas.microsoft.com/office/powerpoint/2010/main" val="1841594860"/>
+        <p14:creationId xmlns:p14="http://schemas.microsoft.com/office/powerpoint/2010/main" val="4055136420"/>
       </p:ext>
     </p:extLst>
   </p:cSld>
@@ -5012,10 +5256,10 @@
       </p:grpSpPr>
       <p:sp>
         <p:nvSpPr>
-          <p:cNvPr id="2" name="Titel 1">
-            <a:extLst>
-              <a:ext uri="{FF2B5EF4-FFF2-40B4-BE49-F238E27FC236}">
-                <a16:creationId xmlns:a16="http://schemas.microsoft.com/office/drawing/2014/main" id="{AE7B3083-59FB-DA8F-12C6-DF0A645DE621}"/>
+          <p:cNvPr id="5" name="Titel 4">
+            <a:extLst>
+              <a:ext uri="{FF2B5EF4-FFF2-40B4-BE49-F238E27FC236}">
+                <a16:creationId xmlns:a16="http://schemas.microsoft.com/office/drawing/2014/main" id="{BBCDC7E5-D7A7-4A4D-D7BA-4ADED892241B}"/>
               </a:ext>
             </a:extLst>
           </p:cNvPr>
@@ -5033,45 +5277,17 @@
           <a:p>
             <a:r>
               <a:rPr lang="de-DE" dirty="0" err="1"/>
-              <a:t>Principal</a:t>
+              <a:t>Tokenization</a:t>
             </a:r>
             <a:r>
               <a:rPr lang="de-DE" dirty="0"/>
-              <a:t> </a:t>
+              <a:t> &amp; </a:t>
             </a:r>
             <a:r>
               <a:rPr lang="de-DE" dirty="0" err="1"/>
-              <a:t>Component</a:t>
-            </a:r>
-            <a:r>
-              <a:rPr lang="de-DE" dirty="0"/>
-              <a:t> Analysis (PCA)</a:t>
-            </a:r>
-          </a:p>
-        </p:txBody>
-      </p:sp>
-      <p:sp>
-        <p:nvSpPr>
-          <p:cNvPr id="3" name="Inhaltsplatzhalter 2">
-            <a:extLst>
-              <a:ext uri="{FF2B5EF4-FFF2-40B4-BE49-F238E27FC236}">
-                <a16:creationId xmlns:a16="http://schemas.microsoft.com/office/drawing/2014/main" id="{B7809814-34C7-FCFF-C03A-378CFA8499B8}"/>
-              </a:ext>
-            </a:extLst>
-          </p:cNvPr>
-          <p:cNvSpPr>
-            <a:spLocks noGrp="1"/>
-          </p:cNvSpPr>
-          <p:nvPr>
-            <p:ph idx="1"/>
-          </p:nvPr>
-        </p:nvSpPr>
-        <p:spPr/>
-        <p:txBody>
-          <a:bodyPr/>
-          <a:lstStyle/>
-          <a:p>
-            <a:endParaRPr lang="de-DE"/>
+              <a:t>Embeddings</a:t>
+            </a:r>
+            <a:endParaRPr lang="de-DE" dirty="0"/>
           </a:p>
         </p:txBody>
       </p:sp>
@@ -5080,7 +5296,7 @@
           <p:cNvPr id="4" name="Foliennummernplatzhalter 3">
             <a:extLst>
               <a:ext uri="{FF2B5EF4-FFF2-40B4-BE49-F238E27FC236}">
-                <a16:creationId xmlns:a16="http://schemas.microsoft.com/office/drawing/2014/main" id="{A5D62EC6-ACEC-43A6-B331-EF1A0B5EB787}"/>
+                <a16:creationId xmlns:a16="http://schemas.microsoft.com/office/drawing/2014/main" id="{9E35D160-5F88-C8FA-1779-A31D24A90811}"/>
               </a:ext>
             </a:extLst>
           </p:cNvPr>
@@ -5096,7 +5312,7 @@
           <a:bodyPr/>
           <a:lstStyle/>
           <a:p>
-            <a:fld id="{08C366F5-AFAD-49CB-854A-9D9E238FCA13}" type="slidenum">
+            <a:fld id="{3D4C94FE-FF23-4504-88E9-14D481113291}" type="slidenum">
               <a:rPr lang="en-GB" smtClean="0"/>
               <a:t>15</a:t>
             </a:fld>
@@ -5104,10 +5320,84 @@
           </a:p>
         </p:txBody>
       </p:sp>
+      <p:pic>
+        <p:nvPicPr>
+          <p:cNvPr id="7" name="Grafik 6" descr="Ein Bild, das Text, Screenshot, Zahl, Diagramm enthält.&#10;&#10;KI-generierte Inhalte können fehlerhaft sein.">
+            <a:extLst>
+              <a:ext uri="{FF2B5EF4-FFF2-40B4-BE49-F238E27FC236}">
+                <a16:creationId xmlns:a16="http://schemas.microsoft.com/office/drawing/2014/main" id="{A9B50630-A54E-D44F-A579-EE71DE87491E}"/>
+              </a:ext>
+            </a:extLst>
+          </p:cNvPr>
+          <p:cNvPicPr>
+            <a:picLocks noChangeAspect="1"/>
+          </p:cNvPicPr>
+          <p:nvPr/>
+        </p:nvPicPr>
+        <p:blipFill>
+          <a:blip r:embed="rId2">
+            <a:extLst>
+              <a:ext uri="{28A0092B-C50C-407E-A947-70E740481C1C}">
+                <a14:useLocalDpi xmlns:a14="http://schemas.microsoft.com/office/drawing/2010/main" val="0"/>
+              </a:ext>
+            </a:extLst>
+          </a:blip>
+          <a:stretch>
+            <a:fillRect/>
+          </a:stretch>
+        </p:blipFill>
+        <p:spPr>
+          <a:xfrm>
+            <a:off x="1524000" y="1690688"/>
+            <a:ext cx="9144000" cy="4523984"/>
+          </a:xfrm>
+          <a:prstGeom prst="rect">
+            <a:avLst/>
+          </a:prstGeom>
+        </p:spPr>
+      </p:pic>
+      <p:sp>
+        <p:nvSpPr>
+          <p:cNvPr id="8" name="TextBox 10">
+            <a:extLst>
+              <a:ext uri="{FF2B5EF4-FFF2-40B4-BE49-F238E27FC236}">
+                <a16:creationId xmlns:a16="http://schemas.microsoft.com/office/drawing/2014/main" id="{59B2AC5B-C9B6-DFBA-0AA1-6A856780D62D}"/>
+              </a:ext>
+            </a:extLst>
+          </p:cNvPr>
+          <p:cNvSpPr txBox="1"/>
+          <p:nvPr/>
+        </p:nvSpPr>
+        <p:spPr>
+          <a:xfrm>
+            <a:off x="9715941" y="6214672"/>
+            <a:ext cx="567784" cy="246221"/>
+          </a:xfrm>
+          <a:prstGeom prst="rect">
+            <a:avLst/>
+          </a:prstGeom>
+          <a:noFill/>
+        </p:spPr>
+        <p:txBody>
+          <a:bodyPr wrap="none" rtlCol="0">
+            <a:spAutoFit/>
+          </a:bodyPr>
+          <a:lstStyle/>
+          <a:p>
+            <a:r>
+              <a:rPr lang="de-DE" sz="1000" dirty="0">
+                <a:hlinkClick r:id="rId3"/>
+              </a:rPr>
+              <a:t>source</a:t>
+            </a:r>
+            <a:endParaRPr lang="de-DE" sz="1000" dirty="0"/>
+          </a:p>
+        </p:txBody>
+      </p:sp>
     </p:spTree>
     <p:extLst>
       <p:ext uri="{BB962C8B-B14F-4D97-AF65-F5344CB8AC3E}">
-        <p14:creationId xmlns:p14="http://schemas.microsoft.com/office/powerpoint/2010/main" val="2193803085"/>
+        <p14:creationId xmlns:p14="http://schemas.microsoft.com/office/powerpoint/2010/main" val="2333349658"/>
       </p:ext>
     </p:extLst>
   </p:cSld>
@@ -5139,7 +5429,7 @@
           <p:cNvPr id="2" name="Titel 1">
             <a:extLst>
               <a:ext uri="{FF2B5EF4-FFF2-40B4-BE49-F238E27FC236}">
-                <a16:creationId xmlns:a16="http://schemas.microsoft.com/office/drawing/2014/main" id="{FFA6AFEC-8765-3AAD-81DF-22E46DF92DB8}"/>
+                <a16:creationId xmlns:a16="http://schemas.microsoft.com/office/drawing/2014/main" id="{BDBD6BF8-3D11-D88B-C84A-AE77A321178F}"/>
               </a:ext>
             </a:extLst>
           </p:cNvPr>
@@ -5157,7 +5447,7 @@
           <a:p>
             <a:r>
               <a:rPr lang="de-DE" dirty="0" err="1"/>
-              <a:t>Interpreting</a:t>
+              <a:t>Dimensionality</a:t>
             </a:r>
             <a:r>
               <a:rPr lang="de-DE" dirty="0"/>
@@ -5165,12 +5455,9 @@
             </a:r>
             <a:r>
               <a:rPr lang="de-DE" dirty="0" err="1"/>
-              <a:t>Principal</a:t>
-            </a:r>
-            <a:r>
-              <a:rPr lang="de-DE" dirty="0"/>
-              <a:t> Components</a:t>
-            </a:r>
+              <a:t>Reduction</a:t>
+            </a:r>
+            <a:endParaRPr lang="de-DE" dirty="0"/>
           </a:p>
         </p:txBody>
       </p:sp>
@@ -5179,7 +5466,7 @@
           <p:cNvPr id="3" name="Inhaltsplatzhalter 2">
             <a:extLst>
               <a:ext uri="{FF2B5EF4-FFF2-40B4-BE49-F238E27FC236}">
-                <a16:creationId xmlns:a16="http://schemas.microsoft.com/office/drawing/2014/main" id="{BC68A9FB-8232-AD4B-8546-A970004A857B}"/>
+                <a16:creationId xmlns:a16="http://schemas.microsoft.com/office/drawing/2014/main" id="{5DBF8B8B-A809-EE1C-1E3D-A32FC508808F}"/>
               </a:ext>
             </a:extLst>
           </p:cNvPr>
@@ -5204,7 +5491,7 @@
           <p:cNvPr id="4" name="Foliennummernplatzhalter 3">
             <a:extLst>
               <a:ext uri="{FF2B5EF4-FFF2-40B4-BE49-F238E27FC236}">
-                <a16:creationId xmlns:a16="http://schemas.microsoft.com/office/drawing/2014/main" id="{209CA560-5E44-0D4F-1B3A-321CECE9DB15}"/>
+                <a16:creationId xmlns:a16="http://schemas.microsoft.com/office/drawing/2014/main" id="{BE5B58E1-0E39-CD68-78F4-A3CF38272C75}"/>
               </a:ext>
             </a:extLst>
           </p:cNvPr>
@@ -5231,7 +5518,7 @@
     </p:spTree>
     <p:extLst>
       <p:ext uri="{BB962C8B-B14F-4D97-AF65-F5344CB8AC3E}">
-        <p14:creationId xmlns:p14="http://schemas.microsoft.com/office/powerpoint/2010/main" val="4133322017"/>
+        <p14:creationId xmlns:p14="http://schemas.microsoft.com/office/powerpoint/2010/main" val="1841594860"/>
       </p:ext>
     </p:extLst>
   </p:cSld>
@@ -5263,7 +5550,7 @@
           <p:cNvPr id="2" name="Titel 1">
             <a:extLst>
               <a:ext uri="{FF2B5EF4-FFF2-40B4-BE49-F238E27FC236}">
-                <a16:creationId xmlns:a16="http://schemas.microsoft.com/office/drawing/2014/main" id="{7BC65FE1-3D0F-A212-782E-9BD31CC63B98}"/>
+                <a16:creationId xmlns:a16="http://schemas.microsoft.com/office/drawing/2014/main" id="{AE7B3083-59FB-DA8F-12C6-DF0A645DE621}"/>
               </a:ext>
             </a:extLst>
           </p:cNvPr>
@@ -5281,17 +5568,20 @@
           <a:p>
             <a:r>
               <a:rPr lang="de-DE" dirty="0" err="1"/>
-              <a:t>Regularization</a:t>
+              <a:t>Principal</a:t>
             </a:r>
             <a:r>
               <a:rPr lang="de-DE" dirty="0"/>
-              <a:t> and Feature </a:t>
+              <a:t> </a:t>
             </a:r>
             <a:r>
               <a:rPr lang="de-DE" dirty="0" err="1"/>
-              <a:t>Selection</a:t>
-            </a:r>
-            <a:endParaRPr lang="de-DE" dirty="0"/>
+              <a:t>Component</a:t>
+            </a:r>
+            <a:r>
+              <a:rPr lang="de-DE" dirty="0"/>
+              <a:t> Analysis (PCA)</a:t>
+            </a:r>
           </a:p>
         </p:txBody>
       </p:sp>
@@ -5300,7 +5590,7 @@
           <p:cNvPr id="3" name="Inhaltsplatzhalter 2">
             <a:extLst>
               <a:ext uri="{FF2B5EF4-FFF2-40B4-BE49-F238E27FC236}">
-                <a16:creationId xmlns:a16="http://schemas.microsoft.com/office/drawing/2014/main" id="{EE0D3F02-061B-0FA9-ABF4-F9D34A0EF4A8}"/>
+                <a16:creationId xmlns:a16="http://schemas.microsoft.com/office/drawing/2014/main" id="{B7809814-34C7-FCFF-C03A-378CFA8499B8}"/>
               </a:ext>
             </a:extLst>
           </p:cNvPr>
@@ -5325,7 +5615,7 @@
           <p:cNvPr id="4" name="Foliennummernplatzhalter 3">
             <a:extLst>
               <a:ext uri="{FF2B5EF4-FFF2-40B4-BE49-F238E27FC236}">
-                <a16:creationId xmlns:a16="http://schemas.microsoft.com/office/drawing/2014/main" id="{B838E8F3-9DF8-C3E8-2EFC-8D44C8F5D9A3}"/>
+                <a16:creationId xmlns:a16="http://schemas.microsoft.com/office/drawing/2014/main" id="{A5D62EC6-ACEC-43A6-B331-EF1A0B5EB787}"/>
               </a:ext>
             </a:extLst>
           </p:cNvPr>
@@ -5352,7 +5642,7 @@
     </p:spTree>
     <p:extLst>
       <p:ext uri="{BB962C8B-B14F-4D97-AF65-F5344CB8AC3E}">
-        <p14:creationId xmlns:p14="http://schemas.microsoft.com/office/powerpoint/2010/main" val="2136778643"/>
+        <p14:creationId xmlns:p14="http://schemas.microsoft.com/office/powerpoint/2010/main" val="2193803085"/>
       </p:ext>
     </p:extLst>
   </p:cSld>
@@ -5381,6 +5671,560 @@
       </p:grpSpPr>
       <p:sp>
         <p:nvSpPr>
+          <p:cNvPr id="2" name="Titel 1">
+            <a:extLst>
+              <a:ext uri="{FF2B5EF4-FFF2-40B4-BE49-F238E27FC236}">
+                <a16:creationId xmlns:a16="http://schemas.microsoft.com/office/drawing/2014/main" id="{FFA6AFEC-8765-3AAD-81DF-22E46DF92DB8}"/>
+              </a:ext>
+            </a:extLst>
+          </p:cNvPr>
+          <p:cNvSpPr>
+            <a:spLocks noGrp="1"/>
+          </p:cNvSpPr>
+          <p:nvPr>
+            <p:ph type="title"/>
+          </p:nvPr>
+        </p:nvSpPr>
+        <p:spPr/>
+        <p:txBody>
+          <a:bodyPr/>
+          <a:lstStyle/>
+          <a:p>
+            <a:r>
+              <a:rPr lang="de-DE" dirty="0" err="1"/>
+              <a:t>Interpreting</a:t>
+            </a:r>
+            <a:r>
+              <a:rPr lang="de-DE" dirty="0"/>
+              <a:t> </a:t>
+            </a:r>
+            <a:r>
+              <a:rPr lang="de-DE" dirty="0" err="1"/>
+              <a:t>Principal</a:t>
+            </a:r>
+            <a:r>
+              <a:rPr lang="de-DE" dirty="0"/>
+              <a:t> Components</a:t>
+            </a:r>
+          </a:p>
+        </p:txBody>
+      </p:sp>
+      <p:sp>
+        <p:nvSpPr>
+          <p:cNvPr id="3" name="Inhaltsplatzhalter 2">
+            <a:extLst>
+              <a:ext uri="{FF2B5EF4-FFF2-40B4-BE49-F238E27FC236}">
+                <a16:creationId xmlns:a16="http://schemas.microsoft.com/office/drawing/2014/main" id="{BC68A9FB-8232-AD4B-8546-A970004A857B}"/>
+              </a:ext>
+            </a:extLst>
+          </p:cNvPr>
+          <p:cNvSpPr>
+            <a:spLocks noGrp="1"/>
+          </p:cNvSpPr>
+          <p:nvPr>
+            <p:ph idx="1"/>
+          </p:nvPr>
+        </p:nvSpPr>
+        <p:spPr/>
+        <p:txBody>
+          <a:bodyPr/>
+          <a:lstStyle/>
+          <a:p>
+            <a:endParaRPr lang="de-DE"/>
+          </a:p>
+        </p:txBody>
+      </p:sp>
+      <p:sp>
+        <p:nvSpPr>
+          <p:cNvPr id="4" name="Foliennummernplatzhalter 3">
+            <a:extLst>
+              <a:ext uri="{FF2B5EF4-FFF2-40B4-BE49-F238E27FC236}">
+                <a16:creationId xmlns:a16="http://schemas.microsoft.com/office/drawing/2014/main" id="{209CA560-5E44-0D4F-1B3A-321CECE9DB15}"/>
+              </a:ext>
+            </a:extLst>
+          </p:cNvPr>
+          <p:cNvSpPr>
+            <a:spLocks noGrp="1"/>
+          </p:cNvSpPr>
+          <p:nvPr>
+            <p:ph type="sldNum" sz="quarter" idx="12"/>
+          </p:nvPr>
+        </p:nvSpPr>
+        <p:spPr/>
+        <p:txBody>
+          <a:bodyPr/>
+          <a:lstStyle/>
+          <a:p>
+            <a:fld id="{08C366F5-AFAD-49CB-854A-9D9E238FCA13}" type="slidenum">
+              <a:rPr lang="en-GB" smtClean="0"/>
+              <a:t>18</a:t>
+            </a:fld>
+            <a:endParaRPr lang="en-GB"/>
+          </a:p>
+        </p:txBody>
+      </p:sp>
+    </p:spTree>
+    <p:extLst>
+      <p:ext uri="{BB962C8B-B14F-4D97-AF65-F5344CB8AC3E}">
+        <p14:creationId xmlns:p14="http://schemas.microsoft.com/office/powerpoint/2010/main" val="4133322017"/>
+      </p:ext>
+    </p:extLst>
+  </p:cSld>
+  <p:clrMapOvr>
+    <a:masterClrMapping/>
+  </p:clrMapOvr>
+</p:sld>
+</file>
+
+<file path=ppt/slides/slide19.xml><?xml version="1.0" encoding="utf-8"?>
+<p:sld xmlns:a="http://schemas.openxmlformats.org/drawingml/2006/main" xmlns:r="http://schemas.openxmlformats.org/officeDocument/2006/relationships" xmlns:p="http://schemas.openxmlformats.org/presentationml/2006/main">
+  <p:cSld>
+    <p:spTree>
+      <p:nvGrpSpPr>
+        <p:cNvPr id="1" name=""/>
+        <p:cNvGrpSpPr/>
+        <p:nvPr/>
+      </p:nvGrpSpPr>
+      <p:grpSpPr>
+        <a:xfrm>
+          <a:off x="0" y="0"/>
+          <a:ext cx="0" cy="0"/>
+          <a:chOff x="0" y="0"/>
+          <a:chExt cx="0" cy="0"/>
+        </a:xfrm>
+      </p:grpSpPr>
+      <p:sp>
+        <p:nvSpPr>
+          <p:cNvPr id="2" name="Titel 1">
+            <a:extLst>
+              <a:ext uri="{FF2B5EF4-FFF2-40B4-BE49-F238E27FC236}">
+                <a16:creationId xmlns:a16="http://schemas.microsoft.com/office/drawing/2014/main" id="{7BC65FE1-3D0F-A212-782E-9BD31CC63B98}"/>
+              </a:ext>
+            </a:extLst>
+          </p:cNvPr>
+          <p:cNvSpPr>
+            <a:spLocks noGrp="1"/>
+          </p:cNvSpPr>
+          <p:nvPr>
+            <p:ph type="title"/>
+          </p:nvPr>
+        </p:nvSpPr>
+        <p:spPr/>
+        <p:txBody>
+          <a:bodyPr/>
+          <a:lstStyle/>
+          <a:p>
+            <a:r>
+              <a:rPr lang="de-DE" dirty="0" err="1"/>
+              <a:t>Regularization</a:t>
+            </a:r>
+            <a:r>
+              <a:rPr lang="de-DE" dirty="0"/>
+              <a:t> and Feature </a:t>
+            </a:r>
+            <a:r>
+              <a:rPr lang="de-DE" dirty="0" err="1"/>
+              <a:t>Selection</a:t>
+            </a:r>
+            <a:endParaRPr lang="de-DE" dirty="0"/>
+          </a:p>
+        </p:txBody>
+      </p:sp>
+      <p:sp>
+        <p:nvSpPr>
+          <p:cNvPr id="3" name="Inhaltsplatzhalter 2">
+            <a:extLst>
+              <a:ext uri="{FF2B5EF4-FFF2-40B4-BE49-F238E27FC236}">
+                <a16:creationId xmlns:a16="http://schemas.microsoft.com/office/drawing/2014/main" id="{EE0D3F02-061B-0FA9-ABF4-F9D34A0EF4A8}"/>
+              </a:ext>
+            </a:extLst>
+          </p:cNvPr>
+          <p:cNvSpPr>
+            <a:spLocks noGrp="1"/>
+          </p:cNvSpPr>
+          <p:nvPr>
+            <p:ph idx="1"/>
+          </p:nvPr>
+        </p:nvSpPr>
+        <p:spPr/>
+        <p:txBody>
+          <a:bodyPr/>
+          <a:lstStyle/>
+          <a:p>
+            <a:endParaRPr lang="de-DE"/>
+          </a:p>
+        </p:txBody>
+      </p:sp>
+      <p:sp>
+        <p:nvSpPr>
+          <p:cNvPr id="4" name="Foliennummernplatzhalter 3">
+            <a:extLst>
+              <a:ext uri="{FF2B5EF4-FFF2-40B4-BE49-F238E27FC236}">
+                <a16:creationId xmlns:a16="http://schemas.microsoft.com/office/drawing/2014/main" id="{B838E8F3-9DF8-C3E8-2EFC-8D44C8F5D9A3}"/>
+              </a:ext>
+            </a:extLst>
+          </p:cNvPr>
+          <p:cNvSpPr>
+            <a:spLocks noGrp="1"/>
+          </p:cNvSpPr>
+          <p:nvPr>
+            <p:ph type="sldNum" sz="quarter" idx="12"/>
+          </p:nvPr>
+        </p:nvSpPr>
+        <p:spPr/>
+        <p:txBody>
+          <a:bodyPr/>
+          <a:lstStyle/>
+          <a:p>
+            <a:fld id="{08C366F5-AFAD-49CB-854A-9D9E238FCA13}" type="slidenum">
+              <a:rPr lang="en-GB" smtClean="0"/>
+              <a:t>19</a:t>
+            </a:fld>
+            <a:endParaRPr lang="en-GB"/>
+          </a:p>
+        </p:txBody>
+      </p:sp>
+    </p:spTree>
+    <p:extLst>
+      <p:ext uri="{BB962C8B-B14F-4D97-AF65-F5344CB8AC3E}">
+        <p14:creationId xmlns:p14="http://schemas.microsoft.com/office/powerpoint/2010/main" val="2136778643"/>
+      </p:ext>
+    </p:extLst>
+  </p:cSld>
+  <p:clrMapOvr>
+    <a:masterClrMapping/>
+  </p:clrMapOvr>
+</p:sld>
+</file>
+
+<file path=ppt/slides/slide2.xml><?xml version="1.0" encoding="utf-8"?>
+<p:sld xmlns:a="http://schemas.openxmlformats.org/drawingml/2006/main" xmlns:r="http://schemas.openxmlformats.org/officeDocument/2006/relationships" xmlns:p="http://schemas.openxmlformats.org/presentationml/2006/main">
+  <p:cSld>
+    <p:spTree>
+      <p:nvGrpSpPr>
+        <p:cNvPr id="1" name=""/>
+        <p:cNvGrpSpPr/>
+        <p:nvPr/>
+      </p:nvGrpSpPr>
+      <p:grpSpPr>
+        <a:xfrm>
+          <a:off x="0" y="0"/>
+          <a:ext cx="0" cy="0"/>
+          <a:chOff x="0" y="0"/>
+          <a:chExt cx="0" cy="0"/>
+        </a:xfrm>
+      </p:grpSpPr>
+      <p:sp>
+        <p:nvSpPr>
+          <p:cNvPr id="4" name="Title 3">
+            <a:extLst>
+              <a:ext uri="{FF2B5EF4-FFF2-40B4-BE49-F238E27FC236}">
+                <a16:creationId xmlns:a16="http://schemas.microsoft.com/office/drawing/2014/main" id="{080AD447-446B-E09E-6F4A-522C1DBB462E}"/>
+              </a:ext>
+            </a:extLst>
+          </p:cNvPr>
+          <p:cNvSpPr>
+            <a:spLocks noGrp="1"/>
+          </p:cNvSpPr>
+          <p:nvPr>
+            <p:ph type="title"/>
+          </p:nvPr>
+        </p:nvSpPr>
+        <p:spPr/>
+        <p:txBody>
+          <a:bodyPr/>
+          <a:lstStyle/>
+          <a:p>
+            <a:r>
+              <a:rPr lang="en-GB" dirty="0"/>
+              <a:t>Course Schedule</a:t>
+            </a:r>
+          </a:p>
+        </p:txBody>
+      </p:sp>
+      <p:sp>
+        <p:nvSpPr>
+          <p:cNvPr id="6" name="Inhaltsplatzhalter 5">
+            <a:extLst>
+              <a:ext uri="{FF2B5EF4-FFF2-40B4-BE49-F238E27FC236}">
+                <a16:creationId xmlns:a16="http://schemas.microsoft.com/office/drawing/2014/main" id="{CF502483-E45D-7D7D-D169-ACA4F8327D26}"/>
+              </a:ext>
+            </a:extLst>
+          </p:cNvPr>
+          <p:cNvSpPr>
+            <a:spLocks noGrp="1"/>
+          </p:cNvSpPr>
+          <p:nvPr>
+            <p:ph sz="half" idx="1"/>
+          </p:nvPr>
+        </p:nvSpPr>
+        <p:spPr/>
+        <p:txBody>
+          <a:bodyPr>
+            <a:normAutofit lnSpcReduction="10000"/>
+          </a:bodyPr>
+          <a:lstStyle/>
+          <a:p>
+            <a:pPr marL="514350" indent="-514350">
+              <a:buFont typeface="+mj-lt"/>
+              <a:buAutoNum type="arabicPeriod"/>
+            </a:pPr>
+            <a:r>
+              <a:rPr lang="de-DE" dirty="0" err="1"/>
+              <a:t>Exploratory</a:t>
+            </a:r>
+            <a:r>
+              <a:rPr lang="de-DE" dirty="0"/>
+              <a:t> Data Analysis</a:t>
+            </a:r>
+          </a:p>
+          <a:p>
+            <a:pPr marL="514350" indent="-514350">
+              <a:buFont typeface="+mj-lt"/>
+              <a:buAutoNum type="arabicPeriod"/>
+            </a:pPr>
+            <a:endParaRPr lang="de-DE" dirty="0"/>
+          </a:p>
+          <a:p>
+            <a:pPr marL="514350" indent="-514350">
+              <a:buFont typeface="+mj-lt"/>
+              <a:buAutoNum type="arabicPeriod"/>
+            </a:pPr>
+            <a:r>
+              <a:rPr lang="de-DE" dirty="0"/>
+              <a:t>Clustering</a:t>
+            </a:r>
+          </a:p>
+          <a:p>
+            <a:pPr marL="514350" indent="-514350">
+              <a:buFont typeface="+mj-lt"/>
+              <a:buAutoNum type="arabicPeriod"/>
+            </a:pPr>
+            <a:endParaRPr lang="de-DE" dirty="0"/>
+          </a:p>
+          <a:p>
+            <a:pPr marL="514350" indent="-514350">
+              <a:buFont typeface="+mj-lt"/>
+              <a:buAutoNum type="arabicPeriod"/>
+            </a:pPr>
+            <a:r>
+              <a:rPr lang="de-DE" dirty="0" err="1"/>
+              <a:t>Probabilistic</a:t>
+            </a:r>
+            <a:r>
+              <a:rPr lang="de-DE" dirty="0"/>
+              <a:t> Models</a:t>
+            </a:r>
+          </a:p>
+          <a:p>
+            <a:pPr marL="514350" indent="-514350">
+              <a:buFont typeface="+mj-lt"/>
+              <a:buAutoNum type="arabicPeriod"/>
+            </a:pPr>
+            <a:endParaRPr lang="de-DE" dirty="0"/>
+          </a:p>
+          <a:p>
+            <a:pPr marL="514350" indent="-514350">
+              <a:buFont typeface="+mj-lt"/>
+              <a:buAutoNum type="arabicPeriod"/>
+            </a:pPr>
+            <a:r>
+              <a:rPr lang="de-DE" dirty="0"/>
+              <a:t>Statistical </a:t>
+            </a:r>
+            <a:r>
+              <a:rPr lang="de-DE" dirty="0" err="1"/>
+              <a:t>Inference</a:t>
+            </a:r>
+            <a:endParaRPr lang="de-DE" dirty="0"/>
+          </a:p>
+          <a:p>
+            <a:pPr marL="514350" indent="-514350">
+              <a:buFont typeface="+mj-lt"/>
+              <a:buAutoNum type="arabicPeriod"/>
+            </a:pPr>
+            <a:endParaRPr lang="de-DE" dirty="0"/>
+          </a:p>
+          <a:p>
+            <a:pPr marL="514350" indent="-514350">
+              <a:buFont typeface="+mj-lt"/>
+              <a:buAutoNum type="arabicPeriod"/>
+            </a:pPr>
+            <a:r>
+              <a:rPr lang="de-DE" dirty="0" err="1"/>
+              <a:t>Machine</a:t>
+            </a:r>
+            <a:r>
+              <a:rPr lang="de-DE" dirty="0"/>
+              <a:t> Learning</a:t>
+            </a:r>
+          </a:p>
+        </p:txBody>
+      </p:sp>
+      <p:sp>
+        <p:nvSpPr>
+          <p:cNvPr id="7" name="Inhaltsplatzhalter 6">
+            <a:extLst>
+              <a:ext uri="{FF2B5EF4-FFF2-40B4-BE49-F238E27FC236}">
+                <a16:creationId xmlns:a16="http://schemas.microsoft.com/office/drawing/2014/main" id="{B671907E-FFFA-73EF-8E7D-4AB4EBDD957B}"/>
+              </a:ext>
+            </a:extLst>
+          </p:cNvPr>
+          <p:cNvSpPr>
+            <a:spLocks noGrp="1"/>
+          </p:cNvSpPr>
+          <p:nvPr>
+            <p:ph sz="half" idx="2"/>
+          </p:nvPr>
+        </p:nvSpPr>
+        <p:spPr/>
+        <p:txBody>
+          <a:bodyPr>
+            <a:normAutofit lnSpcReduction="10000"/>
+          </a:bodyPr>
+          <a:lstStyle/>
+          <a:p>
+            <a:pPr marL="514350" indent="-514350">
+              <a:buFont typeface="+mj-lt"/>
+              <a:buAutoNum type="arabicPeriod" startAt="6"/>
+            </a:pPr>
+            <a:r>
+              <a:rPr lang="de-DE" dirty="0"/>
+              <a:t>Feature Engineering</a:t>
+            </a:r>
+          </a:p>
+          <a:p>
+            <a:pPr marL="514350" indent="-514350">
+              <a:buFont typeface="+mj-lt"/>
+              <a:buAutoNum type="arabicPeriod" startAt="6"/>
+            </a:pPr>
+            <a:endParaRPr lang="de-DE" dirty="0"/>
+          </a:p>
+          <a:p>
+            <a:pPr marL="514350" indent="-514350">
+              <a:buFont typeface="+mj-lt"/>
+              <a:buAutoNum type="arabicPeriod" startAt="6"/>
+            </a:pPr>
+            <a:r>
+              <a:rPr lang="de-DE" dirty="0"/>
+              <a:t>Model Evaluation</a:t>
+            </a:r>
+          </a:p>
+          <a:p>
+            <a:pPr marL="514350" indent="-514350">
+              <a:buFont typeface="+mj-lt"/>
+              <a:buAutoNum type="arabicPeriod" startAt="6"/>
+            </a:pPr>
+            <a:endParaRPr lang="de-DE" dirty="0"/>
+          </a:p>
+          <a:p>
+            <a:pPr marL="514350" indent="-514350">
+              <a:buFont typeface="+mj-lt"/>
+              <a:buAutoNum type="arabicPeriod" startAt="6"/>
+            </a:pPr>
+            <a:r>
+              <a:rPr lang="de-DE" dirty="0"/>
+              <a:t>Deep Learning</a:t>
+            </a:r>
+          </a:p>
+          <a:p>
+            <a:pPr marL="514350" indent="-514350">
+              <a:buFont typeface="+mj-lt"/>
+              <a:buAutoNum type="arabicPeriod" startAt="6"/>
+            </a:pPr>
+            <a:endParaRPr lang="de-DE" dirty="0"/>
+          </a:p>
+          <a:p>
+            <a:pPr marL="514350" indent="-514350">
+              <a:buFont typeface="+mj-lt"/>
+              <a:buAutoNum type="arabicPeriod" startAt="6"/>
+            </a:pPr>
+            <a:r>
+              <a:rPr lang="de-DE" dirty="0"/>
+              <a:t>Time Series</a:t>
+            </a:r>
+          </a:p>
+          <a:p>
+            <a:pPr marL="514350" indent="-514350">
+              <a:buFont typeface="+mj-lt"/>
+              <a:buAutoNum type="arabicPeriod" startAt="6"/>
+            </a:pPr>
+            <a:endParaRPr lang="de-DE" dirty="0"/>
+          </a:p>
+          <a:p>
+            <a:pPr marL="514350" indent="-514350">
+              <a:buFont typeface="+mj-lt"/>
+              <a:buAutoNum type="arabicPeriod" startAt="6"/>
+            </a:pPr>
+            <a:r>
+              <a:rPr lang="de-DE" dirty="0" err="1"/>
+              <a:t>Causality</a:t>
+            </a:r>
+            <a:endParaRPr lang="de-DE" dirty="0"/>
+          </a:p>
+        </p:txBody>
+      </p:sp>
+      <p:sp>
+        <p:nvSpPr>
+          <p:cNvPr id="3" name="Slide Number Placeholder 2">
+            <a:extLst>
+              <a:ext uri="{FF2B5EF4-FFF2-40B4-BE49-F238E27FC236}">
+                <a16:creationId xmlns:a16="http://schemas.microsoft.com/office/drawing/2014/main" id="{A0664D44-83AC-6A7A-17E0-C1AE2ED18FF5}"/>
+              </a:ext>
+            </a:extLst>
+          </p:cNvPr>
+          <p:cNvSpPr>
+            <a:spLocks noGrp="1"/>
+          </p:cNvSpPr>
+          <p:nvPr>
+            <p:ph type="sldNum" sz="quarter" idx="12"/>
+          </p:nvPr>
+        </p:nvSpPr>
+        <p:spPr/>
+        <p:txBody>
+          <a:bodyPr/>
+          <a:lstStyle/>
+          <a:p>
+            <a:fld id="{08C366F5-AFAD-49CB-854A-9D9E238FCA13}" type="slidenum">
+              <a:rPr lang="en-GB" smtClean="0"/>
+              <a:t>2</a:t>
+            </a:fld>
+            <a:endParaRPr lang="en-GB" dirty="0"/>
+          </a:p>
+        </p:txBody>
+      </p:sp>
+    </p:spTree>
+    <p:extLst>
+      <p:ext uri="{BB962C8B-B14F-4D97-AF65-F5344CB8AC3E}">
+        <p14:creationId xmlns:p14="http://schemas.microsoft.com/office/powerpoint/2010/main" val="310336692"/>
+      </p:ext>
+    </p:extLst>
+  </p:cSld>
+  <p:clrMapOvr>
+    <a:masterClrMapping/>
+  </p:clrMapOvr>
+</p:sld>
+</file>
+
+<file path=ppt/slides/slide20.xml><?xml version="1.0" encoding="utf-8"?>
+<p:sld xmlns:a="http://schemas.openxmlformats.org/drawingml/2006/main" xmlns:r="http://schemas.openxmlformats.org/officeDocument/2006/relationships" xmlns:p="http://schemas.openxmlformats.org/presentationml/2006/main">
+  <p:cSld>
+    <p:spTree>
+      <p:nvGrpSpPr>
+        <p:cNvPr id="1" name=""/>
+        <p:cNvGrpSpPr/>
+        <p:nvPr/>
+      </p:nvGrpSpPr>
+      <p:grpSpPr>
+        <a:xfrm>
+          <a:off x="0" y="0"/>
+          <a:ext cx="0" cy="0"/>
+          <a:chOff x="0" y="0"/>
+          <a:chExt cx="0" cy="0"/>
+        </a:xfrm>
+      </p:grpSpPr>
+      <p:sp>
+        <p:nvSpPr>
           <p:cNvPr id="2" name="Title 1">
             <a:extLst>
               <a:ext uri="{FF2B5EF4-FFF2-40B4-BE49-F238E27FC236}">
@@ -5496,7 +6340,7 @@
           <a:p>
             <a:fld id="{C4CC4FF7-4194-DC4A-997C-EF4C65C96866}" type="slidenum">
               <a:rPr lang="en-DE" smtClean="0"/>
-              <a:t>18</a:t>
+              <a:t>20</a:t>
             </a:fld>
             <a:endParaRPr lang="en-DE"/>
           </a:p>
@@ -5583,7 +6427,7 @@
 </p:sld>
 </file>
 
-<file path=ppt/slides/slide19.xml><?xml version="1.0" encoding="utf-8"?>
+<file path=ppt/slides/slide21.xml><?xml version="1.0" encoding="utf-8"?>
 <p:sld xmlns:a="http://schemas.openxmlformats.org/drawingml/2006/main" xmlns:r="http://schemas.openxmlformats.org/officeDocument/2006/relationships" xmlns:p="http://schemas.openxmlformats.org/presentationml/2006/main">
   <p:cSld>
     <p:spTree>
@@ -6176,7 +7020,7 @@
           <a:p>
             <a:fld id="{C4CC4FF7-4194-DC4A-997C-EF4C65C96866}" type="slidenum">
               <a:rPr lang="en-DE" smtClean="0"/>
-              <a:t>19</a:t>
+              <a:t>21</a:t>
             </a:fld>
             <a:endParaRPr lang="en-DE"/>
           </a:p>
@@ -6346,559 +7190,6 @@
 </p:sld>
 </file>
 
-<file path=ppt/slides/slide2.xml><?xml version="1.0" encoding="utf-8"?>
-<p:sld xmlns:a="http://schemas.openxmlformats.org/drawingml/2006/main" xmlns:r="http://schemas.openxmlformats.org/officeDocument/2006/relationships" xmlns:p="http://schemas.openxmlformats.org/presentationml/2006/main">
-  <p:cSld>
-    <p:spTree>
-      <p:nvGrpSpPr>
-        <p:cNvPr id="1" name=""/>
-        <p:cNvGrpSpPr/>
-        <p:nvPr/>
-      </p:nvGrpSpPr>
-      <p:grpSpPr>
-        <a:xfrm>
-          <a:off x="0" y="0"/>
-          <a:ext cx="0" cy="0"/>
-          <a:chOff x="0" y="0"/>
-          <a:chExt cx="0" cy="0"/>
-        </a:xfrm>
-      </p:grpSpPr>
-      <p:sp>
-        <p:nvSpPr>
-          <p:cNvPr id="4" name="Title 3">
-            <a:extLst>
-              <a:ext uri="{FF2B5EF4-FFF2-40B4-BE49-F238E27FC236}">
-                <a16:creationId xmlns:a16="http://schemas.microsoft.com/office/drawing/2014/main" id="{080AD447-446B-E09E-6F4A-522C1DBB462E}"/>
-              </a:ext>
-            </a:extLst>
-          </p:cNvPr>
-          <p:cNvSpPr>
-            <a:spLocks noGrp="1"/>
-          </p:cNvSpPr>
-          <p:nvPr>
-            <p:ph type="title"/>
-          </p:nvPr>
-        </p:nvSpPr>
-        <p:spPr/>
-        <p:txBody>
-          <a:bodyPr/>
-          <a:lstStyle/>
-          <a:p>
-            <a:r>
-              <a:rPr lang="en-GB" dirty="0"/>
-              <a:t>Course Schedule</a:t>
-            </a:r>
-          </a:p>
-        </p:txBody>
-      </p:sp>
-      <p:sp>
-        <p:nvSpPr>
-          <p:cNvPr id="6" name="Inhaltsplatzhalter 5">
-            <a:extLst>
-              <a:ext uri="{FF2B5EF4-FFF2-40B4-BE49-F238E27FC236}">
-                <a16:creationId xmlns:a16="http://schemas.microsoft.com/office/drawing/2014/main" id="{CF502483-E45D-7D7D-D169-ACA4F8327D26}"/>
-              </a:ext>
-            </a:extLst>
-          </p:cNvPr>
-          <p:cNvSpPr>
-            <a:spLocks noGrp="1"/>
-          </p:cNvSpPr>
-          <p:nvPr>
-            <p:ph sz="half" idx="1"/>
-          </p:nvPr>
-        </p:nvSpPr>
-        <p:spPr/>
-        <p:txBody>
-          <a:bodyPr>
-            <a:normAutofit lnSpcReduction="10000"/>
-          </a:bodyPr>
-          <a:lstStyle/>
-          <a:p>
-            <a:pPr marL="514350" indent="-514350">
-              <a:buFont typeface="+mj-lt"/>
-              <a:buAutoNum type="arabicPeriod"/>
-            </a:pPr>
-            <a:r>
-              <a:rPr lang="de-DE" dirty="0" err="1"/>
-              <a:t>Exploratory</a:t>
-            </a:r>
-            <a:r>
-              <a:rPr lang="de-DE" dirty="0"/>
-              <a:t> Data Analysis</a:t>
-            </a:r>
-          </a:p>
-          <a:p>
-            <a:pPr marL="514350" indent="-514350">
-              <a:buFont typeface="+mj-lt"/>
-              <a:buAutoNum type="arabicPeriod"/>
-            </a:pPr>
-            <a:endParaRPr lang="de-DE" dirty="0"/>
-          </a:p>
-          <a:p>
-            <a:pPr marL="514350" indent="-514350">
-              <a:buFont typeface="+mj-lt"/>
-              <a:buAutoNum type="arabicPeriod"/>
-            </a:pPr>
-            <a:r>
-              <a:rPr lang="de-DE" dirty="0"/>
-              <a:t>Clustering</a:t>
-            </a:r>
-          </a:p>
-          <a:p>
-            <a:pPr marL="514350" indent="-514350">
-              <a:buFont typeface="+mj-lt"/>
-              <a:buAutoNum type="arabicPeriod"/>
-            </a:pPr>
-            <a:endParaRPr lang="de-DE" dirty="0"/>
-          </a:p>
-          <a:p>
-            <a:pPr marL="514350" indent="-514350">
-              <a:buFont typeface="+mj-lt"/>
-              <a:buAutoNum type="arabicPeriod"/>
-            </a:pPr>
-            <a:r>
-              <a:rPr lang="de-DE" dirty="0" err="1"/>
-              <a:t>Probabilistic</a:t>
-            </a:r>
-            <a:r>
-              <a:rPr lang="de-DE" dirty="0"/>
-              <a:t> Models</a:t>
-            </a:r>
-          </a:p>
-          <a:p>
-            <a:pPr marL="514350" indent="-514350">
-              <a:buFont typeface="+mj-lt"/>
-              <a:buAutoNum type="arabicPeriod"/>
-            </a:pPr>
-            <a:endParaRPr lang="de-DE" dirty="0"/>
-          </a:p>
-          <a:p>
-            <a:pPr marL="514350" indent="-514350">
-              <a:buFont typeface="+mj-lt"/>
-              <a:buAutoNum type="arabicPeriod"/>
-            </a:pPr>
-            <a:r>
-              <a:rPr lang="de-DE" dirty="0"/>
-              <a:t>Statistical </a:t>
-            </a:r>
-            <a:r>
-              <a:rPr lang="de-DE" dirty="0" err="1"/>
-              <a:t>Inference</a:t>
-            </a:r>
-            <a:endParaRPr lang="de-DE" dirty="0"/>
-          </a:p>
-          <a:p>
-            <a:pPr marL="514350" indent="-514350">
-              <a:buFont typeface="+mj-lt"/>
-              <a:buAutoNum type="arabicPeriod"/>
-            </a:pPr>
-            <a:endParaRPr lang="de-DE" dirty="0"/>
-          </a:p>
-          <a:p>
-            <a:pPr marL="514350" indent="-514350">
-              <a:buFont typeface="+mj-lt"/>
-              <a:buAutoNum type="arabicPeriod"/>
-            </a:pPr>
-            <a:r>
-              <a:rPr lang="de-DE" dirty="0" err="1"/>
-              <a:t>Machine</a:t>
-            </a:r>
-            <a:r>
-              <a:rPr lang="de-DE" dirty="0"/>
-              <a:t> Learning</a:t>
-            </a:r>
-          </a:p>
-        </p:txBody>
-      </p:sp>
-      <p:sp>
-        <p:nvSpPr>
-          <p:cNvPr id="7" name="Inhaltsplatzhalter 6">
-            <a:extLst>
-              <a:ext uri="{FF2B5EF4-FFF2-40B4-BE49-F238E27FC236}">
-                <a16:creationId xmlns:a16="http://schemas.microsoft.com/office/drawing/2014/main" id="{B671907E-FFFA-73EF-8E7D-4AB4EBDD957B}"/>
-              </a:ext>
-            </a:extLst>
-          </p:cNvPr>
-          <p:cNvSpPr>
-            <a:spLocks noGrp="1"/>
-          </p:cNvSpPr>
-          <p:nvPr>
-            <p:ph sz="half" idx="2"/>
-          </p:nvPr>
-        </p:nvSpPr>
-        <p:spPr/>
-        <p:txBody>
-          <a:bodyPr>
-            <a:normAutofit lnSpcReduction="10000"/>
-          </a:bodyPr>
-          <a:lstStyle/>
-          <a:p>
-            <a:pPr marL="514350" indent="-514350">
-              <a:buFont typeface="+mj-lt"/>
-              <a:buAutoNum type="arabicPeriod" startAt="6"/>
-            </a:pPr>
-            <a:r>
-              <a:rPr lang="de-DE" dirty="0"/>
-              <a:t>Feature Engineering</a:t>
-            </a:r>
-          </a:p>
-          <a:p>
-            <a:pPr marL="514350" indent="-514350">
-              <a:buFont typeface="+mj-lt"/>
-              <a:buAutoNum type="arabicPeriod" startAt="6"/>
-            </a:pPr>
-            <a:endParaRPr lang="de-DE" dirty="0"/>
-          </a:p>
-          <a:p>
-            <a:pPr marL="514350" indent="-514350">
-              <a:buFont typeface="+mj-lt"/>
-              <a:buAutoNum type="arabicPeriod" startAt="6"/>
-            </a:pPr>
-            <a:r>
-              <a:rPr lang="de-DE" dirty="0"/>
-              <a:t>Model Evaluation</a:t>
-            </a:r>
-          </a:p>
-          <a:p>
-            <a:pPr marL="514350" indent="-514350">
-              <a:buFont typeface="+mj-lt"/>
-              <a:buAutoNum type="arabicPeriod" startAt="6"/>
-            </a:pPr>
-            <a:endParaRPr lang="de-DE" dirty="0"/>
-          </a:p>
-          <a:p>
-            <a:pPr marL="514350" indent="-514350">
-              <a:buFont typeface="+mj-lt"/>
-              <a:buAutoNum type="arabicPeriod" startAt="6"/>
-            </a:pPr>
-            <a:r>
-              <a:rPr lang="de-DE" dirty="0"/>
-              <a:t>Deep Learning</a:t>
-            </a:r>
-          </a:p>
-          <a:p>
-            <a:pPr marL="514350" indent="-514350">
-              <a:buFont typeface="+mj-lt"/>
-              <a:buAutoNum type="arabicPeriod" startAt="6"/>
-            </a:pPr>
-            <a:endParaRPr lang="de-DE" dirty="0"/>
-          </a:p>
-          <a:p>
-            <a:pPr marL="514350" indent="-514350">
-              <a:buFont typeface="+mj-lt"/>
-              <a:buAutoNum type="arabicPeriod" startAt="6"/>
-            </a:pPr>
-            <a:r>
-              <a:rPr lang="de-DE" dirty="0"/>
-              <a:t>Time Series</a:t>
-            </a:r>
-          </a:p>
-          <a:p>
-            <a:pPr marL="514350" indent="-514350">
-              <a:buFont typeface="+mj-lt"/>
-              <a:buAutoNum type="arabicPeriod" startAt="6"/>
-            </a:pPr>
-            <a:endParaRPr lang="de-DE" dirty="0"/>
-          </a:p>
-          <a:p>
-            <a:pPr marL="514350" indent="-514350">
-              <a:buFont typeface="+mj-lt"/>
-              <a:buAutoNum type="arabicPeriod" startAt="6"/>
-            </a:pPr>
-            <a:r>
-              <a:rPr lang="de-DE" dirty="0" err="1"/>
-              <a:t>Causality</a:t>
-            </a:r>
-            <a:endParaRPr lang="de-DE" dirty="0"/>
-          </a:p>
-        </p:txBody>
-      </p:sp>
-      <p:sp>
-        <p:nvSpPr>
-          <p:cNvPr id="3" name="Slide Number Placeholder 2">
-            <a:extLst>
-              <a:ext uri="{FF2B5EF4-FFF2-40B4-BE49-F238E27FC236}">
-                <a16:creationId xmlns:a16="http://schemas.microsoft.com/office/drawing/2014/main" id="{A0664D44-83AC-6A7A-17E0-C1AE2ED18FF5}"/>
-              </a:ext>
-            </a:extLst>
-          </p:cNvPr>
-          <p:cNvSpPr>
-            <a:spLocks noGrp="1"/>
-          </p:cNvSpPr>
-          <p:nvPr>
-            <p:ph type="sldNum" sz="quarter" idx="12"/>
-          </p:nvPr>
-        </p:nvSpPr>
-        <p:spPr/>
-        <p:txBody>
-          <a:bodyPr/>
-          <a:lstStyle/>
-          <a:p>
-            <a:fld id="{08C366F5-AFAD-49CB-854A-9D9E238FCA13}" type="slidenum">
-              <a:rPr lang="en-GB" smtClean="0"/>
-              <a:t>2</a:t>
-            </a:fld>
-            <a:endParaRPr lang="en-GB" dirty="0"/>
-          </a:p>
-        </p:txBody>
-      </p:sp>
-    </p:spTree>
-    <p:extLst>
-      <p:ext uri="{BB962C8B-B14F-4D97-AF65-F5344CB8AC3E}">
-        <p14:creationId xmlns:p14="http://schemas.microsoft.com/office/powerpoint/2010/main" val="310336692"/>
-      </p:ext>
-    </p:extLst>
-  </p:cSld>
-  <p:clrMapOvr>
-    <a:masterClrMapping/>
-  </p:clrMapOvr>
-</p:sld>
-</file>
-
-<file path=ppt/slides/slide20.xml><?xml version="1.0" encoding="utf-8"?>
-<p:sld xmlns:a="http://schemas.openxmlformats.org/drawingml/2006/main" xmlns:r="http://schemas.openxmlformats.org/officeDocument/2006/relationships" xmlns:p="http://schemas.openxmlformats.org/presentationml/2006/main">
-  <p:cSld>
-    <p:spTree>
-      <p:nvGrpSpPr>
-        <p:cNvPr id="1" name=""/>
-        <p:cNvGrpSpPr/>
-        <p:nvPr/>
-      </p:nvGrpSpPr>
-      <p:grpSpPr>
-        <a:xfrm>
-          <a:off x="0" y="0"/>
-          <a:ext cx="0" cy="0"/>
-          <a:chOff x="0" y="0"/>
-          <a:chExt cx="0" cy="0"/>
-        </a:xfrm>
-      </p:grpSpPr>
-      <p:sp>
-        <p:nvSpPr>
-          <p:cNvPr id="2" name="Titel 1">
-            <a:extLst>
-              <a:ext uri="{FF2B5EF4-FFF2-40B4-BE49-F238E27FC236}">
-                <a16:creationId xmlns:a16="http://schemas.microsoft.com/office/drawing/2014/main" id="{DBACCFFB-9C8A-3344-6CB6-850411F5A9B9}"/>
-              </a:ext>
-            </a:extLst>
-          </p:cNvPr>
-          <p:cNvSpPr>
-            <a:spLocks noGrp="1"/>
-          </p:cNvSpPr>
-          <p:nvPr>
-            <p:ph type="title"/>
-          </p:nvPr>
-        </p:nvSpPr>
-        <p:spPr/>
-        <p:txBody>
-          <a:bodyPr/>
-          <a:lstStyle/>
-          <a:p>
-            <a:r>
-              <a:rPr lang="de-DE" dirty="0" err="1"/>
-              <a:t>Automatic</a:t>
-            </a:r>
-            <a:r>
-              <a:rPr lang="de-DE" dirty="0"/>
-              <a:t> </a:t>
-            </a:r>
-            <a:r>
-              <a:rPr lang="de-DE" dirty="0" err="1"/>
-              <a:t>Relevance</a:t>
-            </a:r>
-            <a:r>
-              <a:rPr lang="de-DE" dirty="0"/>
-              <a:t> Determination (ARD)</a:t>
-            </a:r>
-          </a:p>
-        </p:txBody>
-      </p:sp>
-      <p:sp>
-        <p:nvSpPr>
-          <p:cNvPr id="3" name="Inhaltsplatzhalter 2">
-            <a:extLst>
-              <a:ext uri="{FF2B5EF4-FFF2-40B4-BE49-F238E27FC236}">
-                <a16:creationId xmlns:a16="http://schemas.microsoft.com/office/drawing/2014/main" id="{7143B982-D0C2-2510-8BEB-176415008EF5}"/>
-              </a:ext>
-            </a:extLst>
-          </p:cNvPr>
-          <p:cNvSpPr>
-            <a:spLocks noGrp="1"/>
-          </p:cNvSpPr>
-          <p:nvPr>
-            <p:ph idx="1"/>
-          </p:nvPr>
-        </p:nvSpPr>
-        <p:spPr/>
-        <p:txBody>
-          <a:bodyPr/>
-          <a:lstStyle/>
-          <a:p>
-            <a:endParaRPr lang="de-DE"/>
-          </a:p>
-        </p:txBody>
-      </p:sp>
-      <p:sp>
-        <p:nvSpPr>
-          <p:cNvPr id="4" name="Foliennummernplatzhalter 3">
-            <a:extLst>
-              <a:ext uri="{FF2B5EF4-FFF2-40B4-BE49-F238E27FC236}">
-                <a16:creationId xmlns:a16="http://schemas.microsoft.com/office/drawing/2014/main" id="{A5F057AD-CB24-1B6C-D311-911DEFB8D41C}"/>
-              </a:ext>
-            </a:extLst>
-          </p:cNvPr>
-          <p:cNvSpPr>
-            <a:spLocks noGrp="1"/>
-          </p:cNvSpPr>
-          <p:nvPr>
-            <p:ph type="sldNum" sz="quarter" idx="12"/>
-          </p:nvPr>
-        </p:nvSpPr>
-        <p:spPr/>
-        <p:txBody>
-          <a:bodyPr/>
-          <a:lstStyle/>
-          <a:p>
-            <a:fld id="{08C366F5-AFAD-49CB-854A-9D9E238FCA13}" type="slidenum">
-              <a:rPr lang="en-GB" smtClean="0"/>
-              <a:t>20</a:t>
-            </a:fld>
-            <a:endParaRPr lang="en-GB"/>
-          </a:p>
-        </p:txBody>
-      </p:sp>
-    </p:spTree>
-    <p:extLst>
-      <p:ext uri="{BB962C8B-B14F-4D97-AF65-F5344CB8AC3E}">
-        <p14:creationId xmlns:p14="http://schemas.microsoft.com/office/powerpoint/2010/main" val="3959476641"/>
-      </p:ext>
-    </p:extLst>
-  </p:cSld>
-  <p:clrMapOvr>
-    <a:masterClrMapping/>
-  </p:clrMapOvr>
-</p:sld>
-</file>
-
-<file path=ppt/slides/slide21.xml><?xml version="1.0" encoding="utf-8"?>
-<p:sld xmlns:a="http://schemas.openxmlformats.org/drawingml/2006/main" xmlns:r="http://schemas.openxmlformats.org/officeDocument/2006/relationships" xmlns:p="http://schemas.openxmlformats.org/presentationml/2006/main">
-  <p:cSld>
-    <p:spTree>
-      <p:nvGrpSpPr>
-        <p:cNvPr id="1" name=""/>
-        <p:cNvGrpSpPr/>
-        <p:nvPr/>
-      </p:nvGrpSpPr>
-      <p:grpSpPr>
-        <a:xfrm>
-          <a:off x="0" y="0"/>
-          <a:ext cx="0" cy="0"/>
-          <a:chOff x="0" y="0"/>
-          <a:chExt cx="0" cy="0"/>
-        </a:xfrm>
-      </p:grpSpPr>
-      <p:sp>
-        <p:nvSpPr>
-          <p:cNvPr id="2" name="Titel 1">
-            <a:extLst>
-              <a:ext uri="{FF2B5EF4-FFF2-40B4-BE49-F238E27FC236}">
-                <a16:creationId xmlns:a16="http://schemas.microsoft.com/office/drawing/2014/main" id="{2BC99A6E-985A-BCAE-71DF-63142D9EC1DA}"/>
-              </a:ext>
-            </a:extLst>
-          </p:cNvPr>
-          <p:cNvSpPr>
-            <a:spLocks noGrp="1"/>
-          </p:cNvSpPr>
-          <p:nvPr>
-            <p:ph type="title"/>
-          </p:nvPr>
-        </p:nvSpPr>
-        <p:spPr/>
-        <p:txBody>
-          <a:bodyPr/>
-          <a:lstStyle/>
-          <a:p>
-            <a:r>
-              <a:rPr lang="de-DE" dirty="0"/>
-              <a:t>Handling </a:t>
-            </a:r>
-            <a:r>
-              <a:rPr lang="de-DE" dirty="0" err="1"/>
-              <a:t>Missing</a:t>
-            </a:r>
-            <a:r>
-              <a:rPr lang="de-DE" dirty="0"/>
-              <a:t> Values</a:t>
-            </a:r>
-          </a:p>
-        </p:txBody>
-      </p:sp>
-      <p:sp>
-        <p:nvSpPr>
-          <p:cNvPr id="3" name="Inhaltsplatzhalter 2">
-            <a:extLst>
-              <a:ext uri="{FF2B5EF4-FFF2-40B4-BE49-F238E27FC236}">
-                <a16:creationId xmlns:a16="http://schemas.microsoft.com/office/drawing/2014/main" id="{3D2E5862-7DC7-538D-50E5-A4A53633B1F2}"/>
-              </a:ext>
-            </a:extLst>
-          </p:cNvPr>
-          <p:cNvSpPr>
-            <a:spLocks noGrp="1"/>
-          </p:cNvSpPr>
-          <p:nvPr>
-            <p:ph idx="1"/>
-          </p:nvPr>
-        </p:nvSpPr>
-        <p:spPr/>
-        <p:txBody>
-          <a:bodyPr/>
-          <a:lstStyle/>
-          <a:p>
-            <a:endParaRPr lang="de-DE"/>
-          </a:p>
-        </p:txBody>
-      </p:sp>
-      <p:sp>
-        <p:nvSpPr>
-          <p:cNvPr id="4" name="Foliennummernplatzhalter 3">
-            <a:extLst>
-              <a:ext uri="{FF2B5EF4-FFF2-40B4-BE49-F238E27FC236}">
-                <a16:creationId xmlns:a16="http://schemas.microsoft.com/office/drawing/2014/main" id="{CEE1F3C2-F660-87DE-3784-C6B8FA9E4B31}"/>
-              </a:ext>
-            </a:extLst>
-          </p:cNvPr>
-          <p:cNvSpPr>
-            <a:spLocks noGrp="1"/>
-          </p:cNvSpPr>
-          <p:nvPr>
-            <p:ph type="sldNum" sz="quarter" idx="12"/>
-          </p:nvPr>
-        </p:nvSpPr>
-        <p:spPr/>
-        <p:txBody>
-          <a:bodyPr/>
-          <a:lstStyle/>
-          <a:p>
-            <a:fld id="{08C366F5-AFAD-49CB-854A-9D9E238FCA13}" type="slidenum">
-              <a:rPr lang="en-GB" smtClean="0"/>
-              <a:t>21</a:t>
-            </a:fld>
-            <a:endParaRPr lang="en-GB"/>
-          </a:p>
-        </p:txBody>
-      </p:sp>
-    </p:spTree>
-    <p:extLst>
-      <p:ext uri="{BB962C8B-B14F-4D97-AF65-F5344CB8AC3E}">
-        <p14:creationId xmlns:p14="http://schemas.microsoft.com/office/powerpoint/2010/main" val="2997267176"/>
-      </p:ext>
-    </p:extLst>
-  </p:cSld>
-  <p:clrMapOvr>
-    <a:masterClrMapping/>
-  </p:clrMapOvr>
-</p:sld>
-</file>
-
 <file path=ppt/slides/slide22.xml><?xml version="1.0" encoding="utf-8"?>
 <p:sld xmlns:a="http://schemas.openxmlformats.org/drawingml/2006/main" xmlns:r="http://schemas.openxmlformats.org/officeDocument/2006/relationships" xmlns:p="http://schemas.openxmlformats.org/presentationml/2006/main">
   <p:cSld>
@@ -6921,7 +7212,7 @@
           <p:cNvPr id="2" name="Titel 1">
             <a:extLst>
               <a:ext uri="{FF2B5EF4-FFF2-40B4-BE49-F238E27FC236}">
-                <a16:creationId xmlns:a16="http://schemas.microsoft.com/office/drawing/2014/main" id="{6E13DF55-62FC-108F-C35D-02114E3B96AB}"/>
+                <a16:creationId xmlns:a16="http://schemas.microsoft.com/office/drawing/2014/main" id="{DBACCFFB-9C8A-3344-6CB6-850411F5A9B9}"/>
               </a:ext>
             </a:extLst>
           </p:cNvPr>
@@ -6938,14 +7229,21 @@
           <a:lstStyle/>
           <a:p>
             <a:r>
+              <a:rPr lang="de-DE" dirty="0" err="1"/>
+              <a:t>Automatic</a:t>
+            </a:r>
+            <a:r>
               <a:rPr lang="de-DE" dirty="0"/>
-              <a:t>Imputation </a:t>
+              <a:t> </a:t>
             </a:r>
             <a:r>
               <a:rPr lang="de-DE" dirty="0" err="1"/>
-              <a:t>Strategies</a:t>
-            </a:r>
-            <a:endParaRPr lang="de-DE" dirty="0"/>
+              <a:t>Relevance</a:t>
+            </a:r>
+            <a:r>
+              <a:rPr lang="de-DE" dirty="0"/>
+              <a:t> Determination (ARD)</a:t>
+            </a:r>
           </a:p>
         </p:txBody>
       </p:sp>
@@ -6954,7 +7252,7 @@
           <p:cNvPr id="3" name="Inhaltsplatzhalter 2">
             <a:extLst>
               <a:ext uri="{FF2B5EF4-FFF2-40B4-BE49-F238E27FC236}">
-                <a16:creationId xmlns:a16="http://schemas.microsoft.com/office/drawing/2014/main" id="{58C6F1E1-2D09-57EF-8441-1D37701B01D0}"/>
+                <a16:creationId xmlns:a16="http://schemas.microsoft.com/office/drawing/2014/main" id="{7143B982-D0C2-2510-8BEB-176415008EF5}"/>
               </a:ext>
             </a:extLst>
           </p:cNvPr>
@@ -6979,7 +7277,7 @@
           <p:cNvPr id="4" name="Foliennummernplatzhalter 3">
             <a:extLst>
               <a:ext uri="{FF2B5EF4-FFF2-40B4-BE49-F238E27FC236}">
-                <a16:creationId xmlns:a16="http://schemas.microsoft.com/office/drawing/2014/main" id="{F9FAF73B-825C-EAD4-7CCA-FCF1CD576A82}"/>
+                <a16:creationId xmlns:a16="http://schemas.microsoft.com/office/drawing/2014/main" id="{A5F057AD-CB24-1B6C-D311-911DEFB8D41C}"/>
               </a:ext>
             </a:extLst>
           </p:cNvPr>
@@ -7006,7 +7304,7 @@
     </p:spTree>
     <p:extLst>
       <p:ext uri="{BB962C8B-B14F-4D97-AF65-F5344CB8AC3E}">
-        <p14:creationId xmlns:p14="http://schemas.microsoft.com/office/powerpoint/2010/main" val="1173938632"/>
+        <p14:creationId xmlns:p14="http://schemas.microsoft.com/office/powerpoint/2010/main" val="3959476641"/>
       </p:ext>
     </p:extLst>
   </p:cSld>
@@ -7038,7 +7336,7 @@
           <p:cNvPr id="2" name="Titel 1">
             <a:extLst>
               <a:ext uri="{FF2B5EF4-FFF2-40B4-BE49-F238E27FC236}">
-                <a16:creationId xmlns:a16="http://schemas.microsoft.com/office/drawing/2014/main" id="{DD4EE415-C8FF-FA3E-F6A4-91C674C5E724}"/>
+                <a16:creationId xmlns:a16="http://schemas.microsoft.com/office/drawing/2014/main" id="{2BC99A6E-985A-BCAE-71DF-63142D9EC1DA}"/>
               </a:ext>
             </a:extLst>
           </p:cNvPr>
@@ -7056,7 +7354,15 @@
           <a:p>
             <a:r>
               <a:rPr lang="de-DE" dirty="0"/>
-              <a:t>Feature Engineering Pipelines</a:t>
+              <a:t>Handling </a:t>
+            </a:r>
+            <a:r>
+              <a:rPr lang="de-DE" dirty="0" err="1"/>
+              <a:t>Missing</a:t>
+            </a:r>
+            <a:r>
+              <a:rPr lang="de-DE" dirty="0"/>
+              <a:t> Values</a:t>
             </a:r>
           </a:p>
         </p:txBody>
@@ -7066,7 +7372,7 @@
           <p:cNvPr id="3" name="Inhaltsplatzhalter 2">
             <a:extLst>
               <a:ext uri="{FF2B5EF4-FFF2-40B4-BE49-F238E27FC236}">
-                <a16:creationId xmlns:a16="http://schemas.microsoft.com/office/drawing/2014/main" id="{DE250263-A1D9-0375-3352-51387D02F95B}"/>
+                <a16:creationId xmlns:a16="http://schemas.microsoft.com/office/drawing/2014/main" id="{3D2E5862-7DC7-538D-50E5-A4A53633B1F2}"/>
               </a:ext>
             </a:extLst>
           </p:cNvPr>
@@ -7091,7 +7397,7 @@
           <p:cNvPr id="4" name="Foliennummernplatzhalter 3">
             <a:extLst>
               <a:ext uri="{FF2B5EF4-FFF2-40B4-BE49-F238E27FC236}">
-                <a16:creationId xmlns:a16="http://schemas.microsoft.com/office/drawing/2014/main" id="{6CCFB421-1136-E880-67A1-53A4654925D9}"/>
+                <a16:creationId xmlns:a16="http://schemas.microsoft.com/office/drawing/2014/main" id="{CEE1F3C2-F660-87DE-3784-C6B8FA9E4B31}"/>
               </a:ext>
             </a:extLst>
           </p:cNvPr>
@@ -7118,7 +7424,7 @@
     </p:spTree>
     <p:extLst>
       <p:ext uri="{BB962C8B-B14F-4D97-AF65-F5344CB8AC3E}">
-        <p14:creationId xmlns:p14="http://schemas.microsoft.com/office/powerpoint/2010/main" val="2711831897"/>
+        <p14:creationId xmlns:p14="http://schemas.microsoft.com/office/powerpoint/2010/main" val="2997267176"/>
       </p:ext>
     </p:extLst>
   </p:cSld>
@@ -7147,6 +7453,235 @@
       </p:grpSpPr>
       <p:sp>
         <p:nvSpPr>
+          <p:cNvPr id="2" name="Titel 1">
+            <a:extLst>
+              <a:ext uri="{FF2B5EF4-FFF2-40B4-BE49-F238E27FC236}">
+                <a16:creationId xmlns:a16="http://schemas.microsoft.com/office/drawing/2014/main" id="{6E13DF55-62FC-108F-C35D-02114E3B96AB}"/>
+              </a:ext>
+            </a:extLst>
+          </p:cNvPr>
+          <p:cNvSpPr>
+            <a:spLocks noGrp="1"/>
+          </p:cNvSpPr>
+          <p:nvPr>
+            <p:ph type="title"/>
+          </p:nvPr>
+        </p:nvSpPr>
+        <p:spPr/>
+        <p:txBody>
+          <a:bodyPr/>
+          <a:lstStyle/>
+          <a:p>
+            <a:r>
+              <a:rPr lang="de-DE" dirty="0"/>
+              <a:t>Imputation </a:t>
+            </a:r>
+            <a:r>
+              <a:rPr lang="de-DE" dirty="0" err="1"/>
+              <a:t>Strategies</a:t>
+            </a:r>
+            <a:endParaRPr lang="de-DE" dirty="0"/>
+          </a:p>
+        </p:txBody>
+      </p:sp>
+      <p:sp>
+        <p:nvSpPr>
+          <p:cNvPr id="3" name="Inhaltsplatzhalter 2">
+            <a:extLst>
+              <a:ext uri="{FF2B5EF4-FFF2-40B4-BE49-F238E27FC236}">
+                <a16:creationId xmlns:a16="http://schemas.microsoft.com/office/drawing/2014/main" id="{58C6F1E1-2D09-57EF-8441-1D37701B01D0}"/>
+              </a:ext>
+            </a:extLst>
+          </p:cNvPr>
+          <p:cNvSpPr>
+            <a:spLocks noGrp="1"/>
+          </p:cNvSpPr>
+          <p:nvPr>
+            <p:ph idx="1"/>
+          </p:nvPr>
+        </p:nvSpPr>
+        <p:spPr/>
+        <p:txBody>
+          <a:bodyPr/>
+          <a:lstStyle/>
+          <a:p>
+            <a:endParaRPr lang="de-DE"/>
+          </a:p>
+        </p:txBody>
+      </p:sp>
+      <p:sp>
+        <p:nvSpPr>
+          <p:cNvPr id="4" name="Foliennummernplatzhalter 3">
+            <a:extLst>
+              <a:ext uri="{FF2B5EF4-FFF2-40B4-BE49-F238E27FC236}">
+                <a16:creationId xmlns:a16="http://schemas.microsoft.com/office/drawing/2014/main" id="{F9FAF73B-825C-EAD4-7CCA-FCF1CD576A82}"/>
+              </a:ext>
+            </a:extLst>
+          </p:cNvPr>
+          <p:cNvSpPr>
+            <a:spLocks noGrp="1"/>
+          </p:cNvSpPr>
+          <p:nvPr>
+            <p:ph type="sldNum" sz="quarter" idx="12"/>
+          </p:nvPr>
+        </p:nvSpPr>
+        <p:spPr/>
+        <p:txBody>
+          <a:bodyPr/>
+          <a:lstStyle/>
+          <a:p>
+            <a:fld id="{08C366F5-AFAD-49CB-854A-9D9E238FCA13}" type="slidenum">
+              <a:rPr lang="en-GB" smtClean="0"/>
+              <a:t>24</a:t>
+            </a:fld>
+            <a:endParaRPr lang="en-GB"/>
+          </a:p>
+        </p:txBody>
+      </p:sp>
+    </p:spTree>
+    <p:extLst>
+      <p:ext uri="{BB962C8B-B14F-4D97-AF65-F5344CB8AC3E}">
+        <p14:creationId xmlns:p14="http://schemas.microsoft.com/office/powerpoint/2010/main" val="1173938632"/>
+      </p:ext>
+    </p:extLst>
+  </p:cSld>
+  <p:clrMapOvr>
+    <a:masterClrMapping/>
+  </p:clrMapOvr>
+</p:sld>
+</file>
+
+<file path=ppt/slides/slide25.xml><?xml version="1.0" encoding="utf-8"?>
+<p:sld xmlns:a="http://schemas.openxmlformats.org/drawingml/2006/main" xmlns:r="http://schemas.openxmlformats.org/officeDocument/2006/relationships" xmlns:p="http://schemas.openxmlformats.org/presentationml/2006/main">
+  <p:cSld>
+    <p:spTree>
+      <p:nvGrpSpPr>
+        <p:cNvPr id="1" name=""/>
+        <p:cNvGrpSpPr/>
+        <p:nvPr/>
+      </p:nvGrpSpPr>
+      <p:grpSpPr>
+        <a:xfrm>
+          <a:off x="0" y="0"/>
+          <a:ext cx="0" cy="0"/>
+          <a:chOff x="0" y="0"/>
+          <a:chExt cx="0" cy="0"/>
+        </a:xfrm>
+      </p:grpSpPr>
+      <p:sp>
+        <p:nvSpPr>
+          <p:cNvPr id="2" name="Titel 1">
+            <a:extLst>
+              <a:ext uri="{FF2B5EF4-FFF2-40B4-BE49-F238E27FC236}">
+                <a16:creationId xmlns:a16="http://schemas.microsoft.com/office/drawing/2014/main" id="{DD4EE415-C8FF-FA3E-F6A4-91C674C5E724}"/>
+              </a:ext>
+            </a:extLst>
+          </p:cNvPr>
+          <p:cNvSpPr>
+            <a:spLocks noGrp="1"/>
+          </p:cNvSpPr>
+          <p:nvPr>
+            <p:ph type="title"/>
+          </p:nvPr>
+        </p:nvSpPr>
+        <p:spPr/>
+        <p:txBody>
+          <a:bodyPr/>
+          <a:lstStyle/>
+          <a:p>
+            <a:r>
+              <a:rPr lang="de-DE" dirty="0"/>
+              <a:t>Feature Engineering Pipelines</a:t>
+            </a:r>
+          </a:p>
+        </p:txBody>
+      </p:sp>
+      <p:sp>
+        <p:nvSpPr>
+          <p:cNvPr id="3" name="Inhaltsplatzhalter 2">
+            <a:extLst>
+              <a:ext uri="{FF2B5EF4-FFF2-40B4-BE49-F238E27FC236}">
+                <a16:creationId xmlns:a16="http://schemas.microsoft.com/office/drawing/2014/main" id="{DE250263-A1D9-0375-3352-51387D02F95B}"/>
+              </a:ext>
+            </a:extLst>
+          </p:cNvPr>
+          <p:cNvSpPr>
+            <a:spLocks noGrp="1"/>
+          </p:cNvSpPr>
+          <p:nvPr>
+            <p:ph idx="1"/>
+          </p:nvPr>
+        </p:nvSpPr>
+        <p:spPr/>
+        <p:txBody>
+          <a:bodyPr/>
+          <a:lstStyle/>
+          <a:p>
+            <a:endParaRPr lang="de-DE"/>
+          </a:p>
+        </p:txBody>
+      </p:sp>
+      <p:sp>
+        <p:nvSpPr>
+          <p:cNvPr id="4" name="Foliennummernplatzhalter 3">
+            <a:extLst>
+              <a:ext uri="{FF2B5EF4-FFF2-40B4-BE49-F238E27FC236}">
+                <a16:creationId xmlns:a16="http://schemas.microsoft.com/office/drawing/2014/main" id="{6CCFB421-1136-E880-67A1-53A4654925D9}"/>
+              </a:ext>
+            </a:extLst>
+          </p:cNvPr>
+          <p:cNvSpPr>
+            <a:spLocks noGrp="1"/>
+          </p:cNvSpPr>
+          <p:nvPr>
+            <p:ph type="sldNum" sz="quarter" idx="12"/>
+          </p:nvPr>
+        </p:nvSpPr>
+        <p:spPr/>
+        <p:txBody>
+          <a:bodyPr/>
+          <a:lstStyle/>
+          <a:p>
+            <a:fld id="{08C366F5-AFAD-49CB-854A-9D9E238FCA13}" type="slidenum">
+              <a:rPr lang="en-GB" smtClean="0"/>
+              <a:t>25</a:t>
+            </a:fld>
+            <a:endParaRPr lang="en-GB"/>
+          </a:p>
+        </p:txBody>
+      </p:sp>
+    </p:spTree>
+    <p:extLst>
+      <p:ext uri="{BB962C8B-B14F-4D97-AF65-F5344CB8AC3E}">
+        <p14:creationId xmlns:p14="http://schemas.microsoft.com/office/powerpoint/2010/main" val="2711831897"/>
+      </p:ext>
+    </p:extLst>
+  </p:cSld>
+  <p:clrMapOvr>
+    <a:masterClrMapping/>
+  </p:clrMapOvr>
+</p:sld>
+</file>
+
+<file path=ppt/slides/slide26.xml><?xml version="1.0" encoding="utf-8"?>
+<p:sld xmlns:a="http://schemas.openxmlformats.org/drawingml/2006/main" xmlns:r="http://schemas.openxmlformats.org/officeDocument/2006/relationships" xmlns:p="http://schemas.openxmlformats.org/presentationml/2006/main">
+  <p:cSld>
+    <p:spTree>
+      <p:nvGrpSpPr>
+        <p:cNvPr id="1" name=""/>
+        <p:cNvGrpSpPr/>
+        <p:nvPr/>
+      </p:nvGrpSpPr>
+      <p:grpSpPr>
+        <a:xfrm>
+          <a:off x="0" y="0"/>
+          <a:ext cx="0" cy="0"/>
+          <a:chOff x="0" y="0"/>
+          <a:chExt cx="0" cy="0"/>
+        </a:xfrm>
+      </p:grpSpPr>
+      <p:sp>
+        <p:nvSpPr>
           <p:cNvPr id="3" name="Title 2">
             <a:extLst>
               <a:ext uri="{FF2B5EF4-FFF2-40B4-BE49-F238E27FC236}">
@@ -7202,7 +7737,7 @@
           <a:p>
             <a:fld id="{523A240F-EAFE-E84F-B44C-6D7A08E0E409}" type="slidenum">
               <a:rPr lang="en-US" smtClean="0"/>
-              <a:t>24</a:t>
+              <a:t>26</a:t>
             </a:fld>
             <a:endParaRPr lang="en-US" dirty="0"/>
           </a:p>
@@ -7771,7 +8306,7 @@
 </p:sld>
 </file>
 
-<file path=ppt/slides/slide25.xml><?xml version="1.0" encoding="utf-8"?>
+<file path=ppt/slides/slide27.xml><?xml version="1.0" encoding="utf-8"?>
 <p:sld xmlns:a="http://schemas.openxmlformats.org/drawingml/2006/main" xmlns:r="http://schemas.openxmlformats.org/officeDocument/2006/relationships" xmlns:p="http://schemas.openxmlformats.org/presentationml/2006/main">
   <p:cSld>
     <p:spTree>
@@ -7869,7 +8404,7 @@
           <a:p>
             <a:fld id="{08C366F5-AFAD-49CB-854A-9D9E238FCA13}" type="slidenum">
               <a:rPr lang="en-GB" smtClean="0"/>
-              <a:t>25</a:t>
+              <a:t>27</a:t>
             </a:fld>
             <a:endParaRPr lang="en-GB"/>
           </a:p>

--- a/slides/6_feature_engineering.pptx
+++ b/slides/6_feature_engineering.pptx
@@ -5,36 +5,37 @@
     <p:sldMasterId id="2147483648" r:id="rId1"/>
   </p:sldMasterIdLst>
   <p:notesMasterIdLst>
-    <p:notesMasterId r:id="rId29"/>
+    <p:notesMasterId r:id="rId30"/>
   </p:notesMasterIdLst>
   <p:sldIdLst>
     <p:sldId id="256" r:id="rId2"/>
     <p:sldId id="265" r:id="rId3"/>
     <p:sldId id="266" r:id="rId4"/>
-    <p:sldId id="267" r:id="rId5"/>
-    <p:sldId id="268" r:id="rId6"/>
-    <p:sldId id="269" r:id="rId7"/>
-    <p:sldId id="270" r:id="rId8"/>
-    <p:sldId id="271" r:id="rId9"/>
-    <p:sldId id="682" r:id="rId10"/>
-    <p:sldId id="272" r:id="rId11"/>
-    <p:sldId id="273" r:id="rId12"/>
-    <p:sldId id="274" r:id="rId13"/>
-    <p:sldId id="712" r:id="rId14"/>
-    <p:sldId id="672" r:id="rId15"/>
-    <p:sldId id="793" r:id="rId16"/>
-    <p:sldId id="275" r:id="rId17"/>
-    <p:sldId id="276" r:id="rId18"/>
-    <p:sldId id="277" r:id="rId19"/>
-    <p:sldId id="278" r:id="rId20"/>
-    <p:sldId id="636" r:id="rId21"/>
-    <p:sldId id="285" r:id="rId22"/>
-    <p:sldId id="280" r:id="rId23"/>
-    <p:sldId id="281" r:id="rId24"/>
-    <p:sldId id="282" r:id="rId25"/>
-    <p:sldId id="283" r:id="rId26"/>
-    <p:sldId id="669" r:id="rId27"/>
-    <p:sldId id="284" r:id="rId28"/>
+    <p:sldId id="298" r:id="rId5"/>
+    <p:sldId id="267" r:id="rId6"/>
+    <p:sldId id="268" r:id="rId7"/>
+    <p:sldId id="269" r:id="rId8"/>
+    <p:sldId id="270" r:id="rId9"/>
+    <p:sldId id="271" r:id="rId10"/>
+    <p:sldId id="682" r:id="rId11"/>
+    <p:sldId id="272" r:id="rId12"/>
+    <p:sldId id="273" r:id="rId13"/>
+    <p:sldId id="274" r:id="rId14"/>
+    <p:sldId id="712" r:id="rId15"/>
+    <p:sldId id="672" r:id="rId16"/>
+    <p:sldId id="793" r:id="rId17"/>
+    <p:sldId id="275" r:id="rId18"/>
+    <p:sldId id="276" r:id="rId19"/>
+    <p:sldId id="277" r:id="rId20"/>
+    <p:sldId id="278" r:id="rId21"/>
+    <p:sldId id="636" r:id="rId22"/>
+    <p:sldId id="285" r:id="rId23"/>
+    <p:sldId id="280" r:id="rId24"/>
+    <p:sldId id="281" r:id="rId25"/>
+    <p:sldId id="282" r:id="rId26"/>
+    <p:sldId id="283" r:id="rId27"/>
+    <p:sldId id="669" r:id="rId28"/>
+    <p:sldId id="284" r:id="rId29"/>
   </p:sldIdLst>
   <p:sldSz cx="12192000" cy="6858000"/>
   <p:notesSz cx="6858000" cy="9144000"/>
@@ -505,7 +506,7 @@
           <a:p>
             <a:fld id="{506E0FD1-891F-4B1E-916D-E9B585160BB8}" type="datetimeFigureOut">
               <a:rPr lang="en-GB" smtClean="0"/>
-              <a:t>03/03/2026</a:t>
+              <a:t>11/03/2026</a:t>
             </a:fld>
             <a:endParaRPr lang="en-GB"/>
           </a:p>
@@ -922,7 +923,7 @@
           <a:p>
             <a:fld id="{D68C3F22-27B2-44E3-9C5F-D08126455F6F}" type="datetime1">
               <a:rPr lang="en-GB" smtClean="0"/>
-              <a:t>03/03/2026</a:t>
+              <a:t>11/03/2026</a:t>
             </a:fld>
             <a:endParaRPr lang="en-GB"/>
           </a:p>
@@ -1122,7 +1123,7 @@
           <a:p>
             <a:fld id="{1CD03846-7BF6-4FB6-A921-FF3379ADBD4C}" type="datetime1">
               <a:rPr lang="en-GB" smtClean="0"/>
-              <a:t>03/03/2026</a:t>
+              <a:t>11/03/2026</a:t>
             </a:fld>
             <a:endParaRPr lang="en-GB"/>
           </a:p>
@@ -1332,7 +1333,7 @@
           <a:p>
             <a:fld id="{99E1B91A-3FD0-4144-9C84-63E9688ED2FE}" type="datetime1">
               <a:rPr lang="en-GB" smtClean="0"/>
-              <a:t>03/03/2026</a:t>
+              <a:t>11/03/2026</a:t>
             </a:fld>
             <a:endParaRPr lang="en-GB"/>
           </a:p>
@@ -1532,7 +1533,7 @@
           <a:p>
             <a:fld id="{5295ED7B-FEAD-4734-819F-93EF4B0EA908}" type="datetime1">
               <a:rPr lang="en-GB" smtClean="0"/>
-              <a:t>03/03/2026</a:t>
+              <a:t>11/03/2026</a:t>
             </a:fld>
             <a:endParaRPr lang="en-GB"/>
           </a:p>
@@ -1808,7 +1809,7 @@
           <a:p>
             <a:fld id="{D2D5D4B4-C926-4B45-8815-1ED8911179A2}" type="datetime1">
               <a:rPr lang="en-GB" smtClean="0"/>
-              <a:t>03/03/2026</a:t>
+              <a:t>11/03/2026</a:t>
             </a:fld>
             <a:endParaRPr lang="en-GB"/>
           </a:p>
@@ -2076,7 +2077,7 @@
           <a:p>
             <a:fld id="{B4C5210A-0E37-4935-93AF-69F21A5F712F}" type="datetime1">
               <a:rPr lang="en-GB" smtClean="0"/>
-              <a:t>03/03/2026</a:t>
+              <a:t>11/03/2026</a:t>
             </a:fld>
             <a:endParaRPr lang="en-GB"/>
           </a:p>
@@ -2491,7 +2492,7 @@
           <a:p>
             <a:fld id="{3D3A6B2F-436C-4691-80E8-9C890E000E9D}" type="datetime1">
               <a:rPr lang="en-GB" smtClean="0"/>
-              <a:t>03/03/2026</a:t>
+              <a:t>11/03/2026</a:t>
             </a:fld>
             <a:endParaRPr lang="en-GB"/>
           </a:p>
@@ -2633,7 +2634,7 @@
           <a:p>
             <a:fld id="{84385F4C-D74B-496F-8D21-97E3549C783B}" type="datetime1">
               <a:rPr lang="en-GB" smtClean="0"/>
-              <a:t>03/03/2026</a:t>
+              <a:t>11/03/2026</a:t>
             </a:fld>
             <a:endParaRPr lang="en-GB"/>
           </a:p>
@@ -2746,7 +2747,7 @@
           <a:p>
             <a:fld id="{0CBDCB32-C241-4703-A832-4EB47BD54E83}" type="datetime1">
               <a:rPr lang="en-GB" smtClean="0"/>
-              <a:t>03/03/2026</a:t>
+              <a:t>11/03/2026</a:t>
             </a:fld>
             <a:endParaRPr lang="en-GB"/>
           </a:p>
@@ -3059,7 +3060,7 @@
           <a:p>
             <a:fld id="{85C150FF-BE95-4D25-A16A-E368A81CBF24}" type="datetime1">
               <a:rPr lang="en-GB" smtClean="0"/>
-              <a:t>03/03/2026</a:t>
+              <a:t>11/03/2026</a:t>
             </a:fld>
             <a:endParaRPr lang="en-GB"/>
           </a:p>
@@ -3348,7 +3349,7 @@
           <a:p>
             <a:fld id="{F3C5DB4B-B349-43C9-A424-BADA723AD9F1}" type="datetime1">
               <a:rPr lang="en-GB" smtClean="0"/>
-              <a:t>03/03/2026</a:t>
+              <a:t>11/03/2026</a:t>
             </a:fld>
             <a:endParaRPr lang="en-GB"/>
           </a:p>
@@ -3591,7 +3592,7 @@
           <a:p>
             <a:fld id="{12632426-0A0C-405F-A3D0-2D11AA44702A}" type="datetime1">
               <a:rPr lang="en-GB" smtClean="0"/>
-              <a:t>03/03/2026</a:t>
+              <a:t>11/03/2026</a:t>
             </a:fld>
             <a:endParaRPr lang="en-GB"/>
           </a:p>
@@ -4097,10 +4098,10 @@
       </p:grpSpPr>
       <p:sp>
         <p:nvSpPr>
-          <p:cNvPr id="2" name="Titel 1">
-            <a:extLst>
-              <a:ext uri="{FF2B5EF4-FFF2-40B4-BE49-F238E27FC236}">
-                <a16:creationId xmlns:a16="http://schemas.microsoft.com/office/drawing/2014/main" id="{EE16BB78-5A1D-D18F-121B-56F0A89A2E3A}"/>
+          <p:cNvPr id="2" name="Title 1">
+            <a:extLst>
+              <a:ext uri="{FF2B5EF4-FFF2-40B4-BE49-F238E27FC236}">
+                <a16:creationId xmlns:a16="http://schemas.microsoft.com/office/drawing/2014/main" id="{A9196BE7-ED4C-5E2B-564B-33799AF07E7E}"/>
               </a:ext>
             </a:extLst>
           </p:cNvPr>
@@ -4117,22 +4118,18 @@
           <a:lstStyle/>
           <a:p>
             <a:r>
-              <a:rPr lang="de-DE" dirty="0" err="1"/>
-              <a:t>One</a:t>
-            </a:r>
-            <a:r>
-              <a:rPr lang="de-DE" dirty="0"/>
-              <a:t>-Hot Encoding</a:t>
-            </a:r>
-          </a:p>
-        </p:txBody>
-      </p:sp>
-      <p:sp>
-        <p:nvSpPr>
-          <p:cNvPr id="3" name="Inhaltsplatzhalter 2">
-            <a:extLst>
-              <a:ext uri="{FF2B5EF4-FFF2-40B4-BE49-F238E27FC236}">
-                <a16:creationId xmlns:a16="http://schemas.microsoft.com/office/drawing/2014/main" id="{CBFD71D2-F73E-37C5-322A-28888DF27125}"/>
+              <a:rPr lang="en-DE" dirty="0"/>
+              <a:t>Categorical Variables</a:t>
+            </a:r>
+          </a:p>
+        </p:txBody>
+      </p:sp>
+      <p:sp>
+        <p:nvSpPr>
+          <p:cNvPr id="3" name="Content Placeholder 2">
+            <a:extLst>
+              <a:ext uri="{FF2B5EF4-FFF2-40B4-BE49-F238E27FC236}">
+                <a16:creationId xmlns:a16="http://schemas.microsoft.com/office/drawing/2014/main" id="{F32FCC10-8545-2083-F633-36ECF823DC08}"/>
               </a:ext>
             </a:extLst>
           </p:cNvPr>
@@ -4143,21 +4140,105 @@
             <p:ph idx="1"/>
           </p:nvPr>
         </p:nvSpPr>
-        <p:spPr/>
-        <p:txBody>
-          <a:bodyPr/>
-          <a:lstStyle/>
-          <a:p>
-            <a:endParaRPr lang="de-DE"/>
-          </a:p>
-        </p:txBody>
-      </p:sp>
-      <p:sp>
-        <p:nvSpPr>
-          <p:cNvPr id="4" name="Foliennummernplatzhalter 3">
-            <a:extLst>
-              <a:ext uri="{FF2B5EF4-FFF2-40B4-BE49-F238E27FC236}">
-                <a16:creationId xmlns:a16="http://schemas.microsoft.com/office/drawing/2014/main" id="{9E37B51C-FCEA-9E89-A2F4-4EAC247475F0}"/>
+        <p:spPr>
+          <a:xfrm>
+            <a:off x="838200" y="1825625"/>
+            <a:ext cx="7012459" cy="4351338"/>
+          </a:xfrm>
+        </p:spPr>
+        <p:txBody>
+          <a:bodyPr>
+            <a:normAutofit fontScale="92500" lnSpcReduction="10000"/>
+          </a:bodyPr>
+          <a:lstStyle/>
+          <a:p>
+            <a:pPr marL="0" indent="0">
+              <a:buNone/>
+            </a:pPr>
+            <a:r>
+              <a:rPr lang="en-GB" sz="2600" dirty="0"/>
+              <a:t>tabular data usually heterogenous, often with sparse c</a:t>
+            </a:r>
+            <a:r>
+              <a:rPr lang="en-DE" sz="2600" dirty="0"/>
+              <a:t>ategorical variables (like color of an object)</a:t>
+            </a:r>
+          </a:p>
+          <a:p>
+            <a:pPr marL="0" indent="0">
+              <a:buNone/>
+            </a:pPr>
+            <a:r>
+              <a:rPr lang="en-GB" sz="2600" dirty="0">
+                <a:sym typeface="Wingdings" pitchFamily="2" charset="2"/>
+              </a:rPr>
+              <a:t> need for an encoding for categorical variables</a:t>
+            </a:r>
+            <a:endParaRPr lang="en-GB" sz="2600" dirty="0"/>
+          </a:p>
+          <a:p>
+            <a:pPr marL="0" indent="0">
+              <a:buNone/>
+            </a:pPr>
+            <a:endParaRPr lang="en-GB" sz="2600" dirty="0"/>
+          </a:p>
+          <a:p>
+            <a:pPr marL="0" indent="0">
+              <a:buNone/>
+            </a:pPr>
+            <a:r>
+              <a:rPr lang="en-GB" sz="2600" dirty="0"/>
+              <a:t>different possibilities:</a:t>
+            </a:r>
+            <a:endParaRPr lang="en-DE" sz="2600" dirty="0"/>
+          </a:p>
+          <a:p>
+            <a:r>
+              <a:rPr lang="en-GB" sz="2600" dirty="0"/>
+              <a:t>o</a:t>
+            </a:r>
+            <a:r>
+              <a:rPr lang="en-DE" sz="2600" dirty="0"/>
+              <a:t>rdinal encoding</a:t>
+            </a:r>
+          </a:p>
+          <a:p>
+            <a:r>
+              <a:rPr lang="en-DE" sz="2600" dirty="0"/>
+              <a:t>leave-one-out encoding (use mean of target for given category excluding current row)</a:t>
+            </a:r>
+          </a:p>
+          <a:p>
+            <a:r>
+              <a:rPr lang="en-DE" sz="2600" dirty="0"/>
+              <a:t>one-hot encoding (suffer</a:t>
+            </a:r>
+            <a:r>
+              <a:rPr lang="en-GB" sz="2600" dirty="0"/>
+              <a:t>s</a:t>
+            </a:r>
+            <a:r>
+              <a:rPr lang="en-DE" sz="2600" dirty="0"/>
+              <a:t> from curse of dimensionality)</a:t>
+            </a:r>
+          </a:p>
+          <a:p>
+            <a:r>
+              <a:rPr lang="en-DE" sz="2600" dirty="0"/>
+              <a:t>embeddings</a:t>
+            </a:r>
+          </a:p>
+          <a:p>
+            <a:endParaRPr lang="en-GB" dirty="0"/>
+          </a:p>
+        </p:txBody>
+      </p:sp>
+      <p:sp>
+        <p:nvSpPr>
+          <p:cNvPr id="4" name="Slide Number Placeholder 3">
+            <a:extLst>
+              <a:ext uri="{FF2B5EF4-FFF2-40B4-BE49-F238E27FC236}">
+                <a16:creationId xmlns:a16="http://schemas.microsoft.com/office/drawing/2014/main" id="{10A7ECF4-88CC-6FFA-B376-C462D8970327}"/>
               </a:ext>
             </a:extLst>
           </p:cNvPr>
@@ -4173,18 +4254,252 @@
           <a:bodyPr/>
           <a:lstStyle/>
           <a:p>
-            <a:fld id="{08C366F5-AFAD-49CB-854A-9D9E238FCA13}" type="slidenum">
-              <a:rPr lang="en-GB" smtClean="0"/>
+            <a:fld id="{290AF890-0265-4349-BF13-E30F01A2AA85}" type="slidenum">
+              <a:rPr lang="en-DE" smtClean="0"/>
               <a:t>10</a:t>
             </a:fld>
-            <a:endParaRPr lang="en-GB"/>
+            <a:endParaRPr lang="en-DE"/>
+          </a:p>
+        </p:txBody>
+      </p:sp>
+      <p:sp>
+        <p:nvSpPr>
+          <p:cNvPr id="5" name="TextBox 4">
+            <a:extLst>
+              <a:ext uri="{FF2B5EF4-FFF2-40B4-BE49-F238E27FC236}">
+                <a16:creationId xmlns:a16="http://schemas.microsoft.com/office/drawing/2014/main" id="{804D5CA4-59B9-8AEA-7DD8-3C2E7B69893D}"/>
+              </a:ext>
+            </a:extLst>
+          </p:cNvPr>
+          <p:cNvSpPr txBox="1"/>
+          <p:nvPr/>
+        </p:nvSpPr>
+        <p:spPr>
+          <a:xfrm>
+            <a:off x="8448767" y="4000749"/>
+            <a:ext cx="3066865" cy="830997"/>
+          </a:xfrm>
+          <a:prstGeom prst="rect">
+            <a:avLst/>
+          </a:prstGeom>
+          <a:noFill/>
+        </p:spPr>
+        <p:txBody>
+          <a:bodyPr wrap="none" rtlCol="0">
+            <a:spAutoFit/>
+          </a:bodyPr>
+          <a:lstStyle/>
+          <a:p>
+            <a:r>
+              <a:rPr lang="en-GB" sz="1200" dirty="0" err="1">
+                <a:latin typeface="Courier" pitchFamily="2" charset="0"/>
+              </a:rPr>
+              <a:t>X.sort_values</a:t>
+            </a:r>
+            <a:r>
+              <a:rPr lang="en-GB" sz="1200" dirty="0">
+                <a:latin typeface="Courier" pitchFamily="2" charset="0"/>
+              </a:rPr>
+              <a:t>(['date’])</a:t>
+            </a:r>
+          </a:p>
+          <a:p>
+            <a:r>
+              <a:rPr lang="en-GB" sz="1200" dirty="0">
+                <a:latin typeface="Courier" pitchFamily="2" charset="0"/>
+              </a:rPr>
+              <a:t>.</a:t>
+            </a:r>
+            <a:r>
+              <a:rPr lang="en-GB" sz="1200" dirty="0" err="1">
+                <a:latin typeface="Courier" pitchFamily="2" charset="0"/>
+              </a:rPr>
+              <a:t>groupby</a:t>
+            </a:r>
+            <a:r>
+              <a:rPr lang="en-GB" sz="1200" dirty="0">
+                <a:latin typeface="Courier" pitchFamily="2" charset="0"/>
+              </a:rPr>
+              <a:t>(['</a:t>
+            </a:r>
+            <a:r>
+              <a:rPr lang="en-GB" sz="1200" dirty="0" err="1">
+                <a:latin typeface="Courier" pitchFamily="2" charset="0"/>
+              </a:rPr>
+              <a:t>store','item</a:t>
+            </a:r>
+            <a:r>
+              <a:rPr lang="en-GB" sz="1200" dirty="0">
+                <a:latin typeface="Courier" pitchFamily="2" charset="0"/>
+              </a:rPr>
+              <a:t>'])['y’]</a:t>
+            </a:r>
+          </a:p>
+          <a:p>
+            <a:r>
+              <a:rPr lang="en-GB" sz="1200" dirty="0">
+                <a:latin typeface="Courier" pitchFamily="2" charset="0"/>
+              </a:rPr>
+              <a:t>.apply(lambda x: </a:t>
+            </a:r>
+            <a:r>
+              <a:rPr lang="en-GB" sz="1200" dirty="0" err="1">
+                <a:latin typeface="Courier" pitchFamily="2" charset="0"/>
+              </a:rPr>
+              <a:t>x.shift</a:t>
+            </a:r>
+            <a:r>
+              <a:rPr lang="en-GB" sz="1200" dirty="0">
+                <a:latin typeface="Courier" pitchFamily="2" charset="0"/>
+              </a:rPr>
+              <a:t>(3)</a:t>
+            </a:r>
+          </a:p>
+          <a:p>
+            <a:r>
+              <a:rPr lang="en-GB" sz="1200" dirty="0">
+                <a:latin typeface="Courier" pitchFamily="2" charset="0"/>
+              </a:rPr>
+              <a:t>.</a:t>
+            </a:r>
+            <a:r>
+              <a:rPr lang="en-GB" sz="1200" dirty="0" err="1">
+                <a:latin typeface="Courier" pitchFamily="2" charset="0"/>
+              </a:rPr>
+              <a:t>ewm</a:t>
+            </a:r>
+            <a:r>
+              <a:rPr lang="en-GB" sz="1200" dirty="0">
+                <a:latin typeface="Courier" pitchFamily="2" charset="0"/>
+              </a:rPr>
+              <a:t>(alpha=0.15).mean())</a:t>
+            </a:r>
+          </a:p>
+        </p:txBody>
+      </p:sp>
+      <p:sp>
+        <p:nvSpPr>
+          <p:cNvPr id="6" name="TextBox 5">
+            <a:extLst>
+              <a:ext uri="{FF2B5EF4-FFF2-40B4-BE49-F238E27FC236}">
+                <a16:creationId xmlns:a16="http://schemas.microsoft.com/office/drawing/2014/main" id="{4F914F96-5D83-53CF-A1A4-98198E01EFD9}"/>
+              </a:ext>
+            </a:extLst>
+          </p:cNvPr>
+          <p:cNvSpPr txBox="1"/>
+          <p:nvPr/>
+        </p:nvSpPr>
+        <p:spPr>
+          <a:xfrm>
+            <a:off x="10498489" y="4834909"/>
+            <a:ext cx="1615763" cy="323165"/>
+          </a:xfrm>
+          <a:prstGeom prst="rect">
+            <a:avLst/>
+          </a:prstGeom>
+          <a:noFill/>
+        </p:spPr>
+        <p:txBody>
+          <a:bodyPr wrap="none" rtlCol="0">
+            <a:spAutoFit/>
+          </a:bodyPr>
+          <a:lstStyle/>
+          <a:p>
+            <a:r>
+              <a:rPr lang="en-GB" sz="1500" dirty="0"/>
+              <a:t>p</a:t>
+            </a:r>
+            <a:r>
+              <a:rPr lang="en-DE" sz="1500" dirty="0"/>
+              <a:t>rediction horizon</a:t>
+            </a:r>
+          </a:p>
+        </p:txBody>
+      </p:sp>
+      <p:cxnSp>
+        <p:nvCxnSpPr>
+          <p:cNvPr id="7" name="Straight Arrow Connector 6">
+            <a:extLst>
+              <a:ext uri="{FF2B5EF4-FFF2-40B4-BE49-F238E27FC236}">
+                <a16:creationId xmlns:a16="http://schemas.microsoft.com/office/drawing/2014/main" id="{4D31E913-8076-767F-3FFA-49228926DD2A}"/>
+              </a:ext>
+            </a:extLst>
+          </p:cNvPr>
+          <p:cNvCxnSpPr>
+            <a:cxnSpLocks/>
+          </p:cNvCxnSpPr>
+          <p:nvPr/>
+        </p:nvCxnSpPr>
+        <p:spPr>
+          <a:xfrm flipH="1" flipV="1">
+            <a:off x="10898248" y="4580913"/>
+            <a:ext cx="132217" cy="278710"/>
+          </a:xfrm>
+          <a:prstGeom prst="straightConnector1">
+            <a:avLst/>
+          </a:prstGeom>
+          <a:ln w="12700" cmpd="sng">
+            <a:solidFill>
+              <a:schemeClr val="tx1"/>
+            </a:solidFill>
+            <a:tailEnd type="triangle"/>
+          </a:ln>
+          <a:effectLst/>
+        </p:spPr>
+        <p:style>
+          <a:lnRef idx="2">
+            <a:schemeClr val="accent1"/>
+          </a:lnRef>
+          <a:fillRef idx="0">
+            <a:schemeClr val="accent1"/>
+          </a:fillRef>
+          <a:effectRef idx="1">
+            <a:schemeClr val="accent1"/>
+          </a:effectRef>
+          <a:fontRef idx="minor">
+            <a:schemeClr val="tx1"/>
+          </a:fontRef>
+        </p:style>
+      </p:cxnSp>
+      <p:sp>
+        <p:nvSpPr>
+          <p:cNvPr id="8" name="TextBox 7">
+            <a:extLst>
+              <a:ext uri="{FF2B5EF4-FFF2-40B4-BE49-F238E27FC236}">
+                <a16:creationId xmlns:a16="http://schemas.microsoft.com/office/drawing/2014/main" id="{5B769A41-4005-10D3-8FBE-6E3F868A80AA}"/>
+              </a:ext>
+            </a:extLst>
+          </p:cNvPr>
+          <p:cNvSpPr txBox="1"/>
+          <p:nvPr/>
+        </p:nvSpPr>
+        <p:spPr>
+          <a:xfrm>
+            <a:off x="8448767" y="3628254"/>
+            <a:ext cx="1004827" cy="369332"/>
+          </a:xfrm>
+          <a:prstGeom prst="rect">
+            <a:avLst/>
+          </a:prstGeom>
+          <a:noFill/>
+        </p:spPr>
+        <p:txBody>
+          <a:bodyPr wrap="none" rtlCol="0">
+            <a:spAutoFit/>
+          </a:bodyPr>
+          <a:lstStyle/>
+          <a:p>
+            <a:r>
+              <a:rPr lang="en-GB" dirty="0"/>
+              <a:t>stacking:</a:t>
+            </a:r>
           </a:p>
         </p:txBody>
       </p:sp>
     </p:spTree>
     <p:extLst>
       <p:ext uri="{BB962C8B-B14F-4D97-AF65-F5344CB8AC3E}">
-        <p14:creationId xmlns:p14="http://schemas.microsoft.com/office/powerpoint/2010/main" val="3807041310"/>
+        <p14:creationId xmlns:p14="http://schemas.microsoft.com/office/powerpoint/2010/main" val="2471018423"/>
       </p:ext>
     </p:extLst>
   </p:cSld>
@@ -4216,7 +4531,7 @@
           <p:cNvPr id="2" name="Titel 1">
             <a:extLst>
               <a:ext uri="{FF2B5EF4-FFF2-40B4-BE49-F238E27FC236}">
-                <a16:creationId xmlns:a16="http://schemas.microsoft.com/office/drawing/2014/main" id="{A363CD46-F6B9-B6E6-2A62-1144B2CEFC34}"/>
+                <a16:creationId xmlns:a16="http://schemas.microsoft.com/office/drawing/2014/main" id="{EE16BB78-5A1D-D18F-121B-56F0A89A2E3A}"/>
               </a:ext>
             </a:extLst>
           </p:cNvPr>
@@ -4233,8 +4548,12 @@
           <a:lstStyle/>
           <a:p>
             <a:r>
+              <a:rPr lang="de-DE" dirty="0" err="1"/>
+              <a:t>One</a:t>
+            </a:r>
+            <a:r>
               <a:rPr lang="de-DE" dirty="0"/>
-              <a:t>Ordinal Encoding</a:t>
+              <a:t>-Hot Encoding</a:t>
             </a:r>
           </a:p>
         </p:txBody>
@@ -4244,7 +4563,7 @@
           <p:cNvPr id="3" name="Inhaltsplatzhalter 2">
             <a:extLst>
               <a:ext uri="{FF2B5EF4-FFF2-40B4-BE49-F238E27FC236}">
-                <a16:creationId xmlns:a16="http://schemas.microsoft.com/office/drawing/2014/main" id="{D787BFC7-509D-7528-9CA9-E4E2951B2590}"/>
+                <a16:creationId xmlns:a16="http://schemas.microsoft.com/office/drawing/2014/main" id="{CBFD71D2-F73E-37C5-322A-28888DF27125}"/>
               </a:ext>
             </a:extLst>
           </p:cNvPr>
@@ -4269,7 +4588,7 @@
           <p:cNvPr id="4" name="Foliennummernplatzhalter 3">
             <a:extLst>
               <a:ext uri="{FF2B5EF4-FFF2-40B4-BE49-F238E27FC236}">
-                <a16:creationId xmlns:a16="http://schemas.microsoft.com/office/drawing/2014/main" id="{1E400C3F-8C31-720B-A1F7-C9C361C4D5FC}"/>
+                <a16:creationId xmlns:a16="http://schemas.microsoft.com/office/drawing/2014/main" id="{9E37B51C-FCEA-9E89-A2F4-4EAC247475F0}"/>
               </a:ext>
             </a:extLst>
           </p:cNvPr>
@@ -4296,7 +4615,7 @@
     </p:spTree>
     <p:extLst>
       <p:ext uri="{BB962C8B-B14F-4D97-AF65-F5344CB8AC3E}">
-        <p14:creationId xmlns:p14="http://schemas.microsoft.com/office/powerpoint/2010/main" val="959113365"/>
+        <p14:creationId xmlns:p14="http://schemas.microsoft.com/office/powerpoint/2010/main" val="3807041310"/>
       </p:ext>
     </p:extLst>
   </p:cSld>
@@ -4328,7 +4647,7 @@
           <p:cNvPr id="2" name="Titel 1">
             <a:extLst>
               <a:ext uri="{FF2B5EF4-FFF2-40B4-BE49-F238E27FC236}">
-                <a16:creationId xmlns:a16="http://schemas.microsoft.com/office/drawing/2014/main" id="{C8FCCCC1-76F8-E4E0-DE25-A04646F0D58E}"/>
+                <a16:creationId xmlns:a16="http://schemas.microsoft.com/office/drawing/2014/main" id="{A363CD46-F6B9-B6E6-2A62-1144B2CEFC34}"/>
               </a:ext>
             </a:extLst>
           </p:cNvPr>
@@ -4346,15 +4665,7 @@
           <a:p>
             <a:r>
               <a:rPr lang="de-DE" dirty="0"/>
-              <a:t>Target and </a:t>
-            </a:r>
-            <a:r>
-              <a:rPr lang="de-DE" dirty="0" err="1"/>
-              <a:t>Frequency</a:t>
-            </a:r>
-            <a:r>
-              <a:rPr lang="de-DE" dirty="0"/>
-              <a:t> Encoding</a:t>
+              <a:t>Ordinal Encoding</a:t>
             </a:r>
           </a:p>
         </p:txBody>
@@ -4364,7 +4675,7 @@
           <p:cNvPr id="3" name="Inhaltsplatzhalter 2">
             <a:extLst>
               <a:ext uri="{FF2B5EF4-FFF2-40B4-BE49-F238E27FC236}">
-                <a16:creationId xmlns:a16="http://schemas.microsoft.com/office/drawing/2014/main" id="{436A7C9C-E319-B9BC-7A5F-20F895CA4734}"/>
+                <a16:creationId xmlns:a16="http://schemas.microsoft.com/office/drawing/2014/main" id="{D787BFC7-509D-7528-9CA9-E4E2951B2590}"/>
               </a:ext>
             </a:extLst>
           </p:cNvPr>
@@ -4389,7 +4700,7 @@
           <p:cNvPr id="4" name="Foliennummernplatzhalter 3">
             <a:extLst>
               <a:ext uri="{FF2B5EF4-FFF2-40B4-BE49-F238E27FC236}">
-                <a16:creationId xmlns:a16="http://schemas.microsoft.com/office/drawing/2014/main" id="{870448D9-DCF8-02EA-C143-C27C760981D2}"/>
+                <a16:creationId xmlns:a16="http://schemas.microsoft.com/office/drawing/2014/main" id="{1E400C3F-8C31-720B-A1F7-C9C361C4D5FC}"/>
               </a:ext>
             </a:extLst>
           </p:cNvPr>
@@ -4416,7 +4727,7 @@
     </p:spTree>
     <p:extLst>
       <p:ext uri="{BB962C8B-B14F-4D97-AF65-F5344CB8AC3E}">
-        <p14:creationId xmlns:p14="http://schemas.microsoft.com/office/powerpoint/2010/main" val="3347056250"/>
+        <p14:creationId xmlns:p14="http://schemas.microsoft.com/office/powerpoint/2010/main" val="959113365"/>
       </p:ext>
     </p:extLst>
   </p:cSld>
@@ -4445,6 +4756,126 @@
       </p:grpSpPr>
       <p:sp>
         <p:nvSpPr>
+          <p:cNvPr id="2" name="Titel 1">
+            <a:extLst>
+              <a:ext uri="{FF2B5EF4-FFF2-40B4-BE49-F238E27FC236}">
+                <a16:creationId xmlns:a16="http://schemas.microsoft.com/office/drawing/2014/main" id="{C8FCCCC1-76F8-E4E0-DE25-A04646F0D58E}"/>
+              </a:ext>
+            </a:extLst>
+          </p:cNvPr>
+          <p:cNvSpPr>
+            <a:spLocks noGrp="1"/>
+          </p:cNvSpPr>
+          <p:nvPr>
+            <p:ph type="title"/>
+          </p:nvPr>
+        </p:nvSpPr>
+        <p:spPr/>
+        <p:txBody>
+          <a:bodyPr/>
+          <a:lstStyle/>
+          <a:p>
+            <a:r>
+              <a:rPr lang="de-DE" dirty="0"/>
+              <a:t>Target and </a:t>
+            </a:r>
+            <a:r>
+              <a:rPr lang="de-DE" dirty="0" err="1"/>
+              <a:t>Frequency</a:t>
+            </a:r>
+            <a:r>
+              <a:rPr lang="de-DE" dirty="0"/>
+              <a:t> Encoding</a:t>
+            </a:r>
+          </a:p>
+        </p:txBody>
+      </p:sp>
+      <p:sp>
+        <p:nvSpPr>
+          <p:cNvPr id="3" name="Inhaltsplatzhalter 2">
+            <a:extLst>
+              <a:ext uri="{FF2B5EF4-FFF2-40B4-BE49-F238E27FC236}">
+                <a16:creationId xmlns:a16="http://schemas.microsoft.com/office/drawing/2014/main" id="{436A7C9C-E319-B9BC-7A5F-20F895CA4734}"/>
+              </a:ext>
+            </a:extLst>
+          </p:cNvPr>
+          <p:cNvSpPr>
+            <a:spLocks noGrp="1"/>
+          </p:cNvSpPr>
+          <p:nvPr>
+            <p:ph idx="1"/>
+          </p:nvPr>
+        </p:nvSpPr>
+        <p:spPr/>
+        <p:txBody>
+          <a:bodyPr/>
+          <a:lstStyle/>
+          <a:p>
+            <a:endParaRPr lang="de-DE"/>
+          </a:p>
+        </p:txBody>
+      </p:sp>
+      <p:sp>
+        <p:nvSpPr>
+          <p:cNvPr id="4" name="Foliennummernplatzhalter 3">
+            <a:extLst>
+              <a:ext uri="{FF2B5EF4-FFF2-40B4-BE49-F238E27FC236}">
+                <a16:creationId xmlns:a16="http://schemas.microsoft.com/office/drawing/2014/main" id="{870448D9-DCF8-02EA-C143-C27C760981D2}"/>
+              </a:ext>
+            </a:extLst>
+          </p:cNvPr>
+          <p:cNvSpPr>
+            <a:spLocks noGrp="1"/>
+          </p:cNvSpPr>
+          <p:nvPr>
+            <p:ph type="sldNum" sz="quarter" idx="12"/>
+          </p:nvPr>
+        </p:nvSpPr>
+        <p:spPr/>
+        <p:txBody>
+          <a:bodyPr/>
+          <a:lstStyle/>
+          <a:p>
+            <a:fld id="{08C366F5-AFAD-49CB-854A-9D9E238FCA13}" type="slidenum">
+              <a:rPr lang="en-GB" smtClean="0"/>
+              <a:t>13</a:t>
+            </a:fld>
+            <a:endParaRPr lang="en-GB"/>
+          </a:p>
+        </p:txBody>
+      </p:sp>
+    </p:spTree>
+    <p:extLst>
+      <p:ext uri="{BB962C8B-B14F-4D97-AF65-F5344CB8AC3E}">
+        <p14:creationId xmlns:p14="http://schemas.microsoft.com/office/powerpoint/2010/main" val="3347056250"/>
+      </p:ext>
+    </p:extLst>
+  </p:cSld>
+  <p:clrMapOvr>
+    <a:masterClrMapping/>
+  </p:clrMapOvr>
+</p:sld>
+</file>
+
+<file path=ppt/slides/slide14.xml><?xml version="1.0" encoding="utf-8"?>
+<p:sld xmlns:a="http://schemas.openxmlformats.org/drawingml/2006/main" xmlns:r="http://schemas.openxmlformats.org/officeDocument/2006/relationships" xmlns:p="http://schemas.openxmlformats.org/presentationml/2006/main">
+  <p:cSld>
+    <p:spTree>
+      <p:nvGrpSpPr>
+        <p:cNvPr id="1" name=""/>
+        <p:cNvGrpSpPr/>
+        <p:nvPr/>
+      </p:nvGrpSpPr>
+      <p:grpSpPr>
+        <a:xfrm>
+          <a:off x="0" y="0"/>
+          <a:ext cx="0" cy="0"/>
+          <a:chOff x="0" y="0"/>
+          <a:chExt cx="0" cy="0"/>
+        </a:xfrm>
+      </p:grpSpPr>
+      <p:sp>
+        <p:nvSpPr>
           <p:cNvPr id="2" name="Title 1">
             <a:extLst>
               <a:ext uri="{FF2B5EF4-FFF2-40B4-BE49-F238E27FC236}">
@@ -4800,7 +5231,7 @@
           <a:p>
             <a:fld id="{290AF890-0265-4349-BF13-E30F01A2AA85}" type="slidenum">
               <a:rPr lang="en-DE" smtClean="0"/>
-              <a:t>13</a:t>
+              <a:t>14</a:t>
             </a:fld>
             <a:endParaRPr lang="en-DE"/>
           </a:p>
@@ -4888,7 +5319,7 @@
 </p:sld>
 </file>
 
-<file path=ppt/slides/slide14.xml><?xml version="1.0" encoding="utf-8"?>
+<file path=ppt/slides/slide15.xml><?xml version="1.0" encoding="utf-8"?>
 <p:sld xmlns:a="http://schemas.openxmlformats.org/drawingml/2006/main" xmlns:r="http://schemas.openxmlformats.org/officeDocument/2006/relationships" xmlns:p="http://schemas.openxmlformats.org/presentationml/2006/main">
   <p:cSld>
     <p:spTree>
@@ -5050,7 +5481,7 @@
           <a:p>
             <a:fld id="{290AF890-0265-4349-BF13-E30F01A2AA85}" type="slidenum">
               <a:rPr lang="en-DE" smtClean="0"/>
-              <a:t>14</a:t>
+              <a:t>15</a:t>
             </a:fld>
             <a:endParaRPr lang="en-DE"/>
           </a:p>
@@ -5228,176 +5659,6 @@
     <p:extLst>
       <p:ext uri="{BB962C8B-B14F-4D97-AF65-F5344CB8AC3E}">
         <p14:creationId xmlns:p14="http://schemas.microsoft.com/office/powerpoint/2010/main" val="4055136420"/>
-      </p:ext>
-    </p:extLst>
-  </p:cSld>
-  <p:clrMapOvr>
-    <a:masterClrMapping/>
-  </p:clrMapOvr>
-</p:sld>
-</file>
-
-<file path=ppt/slides/slide15.xml><?xml version="1.0" encoding="utf-8"?>
-<p:sld xmlns:a="http://schemas.openxmlformats.org/drawingml/2006/main" xmlns:r="http://schemas.openxmlformats.org/officeDocument/2006/relationships" xmlns:p="http://schemas.openxmlformats.org/presentationml/2006/main">
-  <p:cSld>
-    <p:spTree>
-      <p:nvGrpSpPr>
-        <p:cNvPr id="1" name=""/>
-        <p:cNvGrpSpPr/>
-        <p:nvPr/>
-      </p:nvGrpSpPr>
-      <p:grpSpPr>
-        <a:xfrm>
-          <a:off x="0" y="0"/>
-          <a:ext cx="0" cy="0"/>
-          <a:chOff x="0" y="0"/>
-          <a:chExt cx="0" cy="0"/>
-        </a:xfrm>
-      </p:grpSpPr>
-      <p:sp>
-        <p:nvSpPr>
-          <p:cNvPr id="5" name="Titel 4">
-            <a:extLst>
-              <a:ext uri="{FF2B5EF4-FFF2-40B4-BE49-F238E27FC236}">
-                <a16:creationId xmlns:a16="http://schemas.microsoft.com/office/drawing/2014/main" id="{BBCDC7E5-D7A7-4A4D-D7BA-4ADED892241B}"/>
-              </a:ext>
-            </a:extLst>
-          </p:cNvPr>
-          <p:cNvSpPr>
-            <a:spLocks noGrp="1"/>
-          </p:cNvSpPr>
-          <p:nvPr>
-            <p:ph type="title"/>
-          </p:nvPr>
-        </p:nvSpPr>
-        <p:spPr/>
-        <p:txBody>
-          <a:bodyPr/>
-          <a:lstStyle/>
-          <a:p>
-            <a:r>
-              <a:rPr lang="de-DE" dirty="0" err="1"/>
-              <a:t>Tokenization</a:t>
-            </a:r>
-            <a:r>
-              <a:rPr lang="de-DE" dirty="0"/>
-              <a:t> &amp; </a:t>
-            </a:r>
-            <a:r>
-              <a:rPr lang="de-DE" dirty="0" err="1"/>
-              <a:t>Embeddings</a:t>
-            </a:r>
-            <a:endParaRPr lang="de-DE" dirty="0"/>
-          </a:p>
-        </p:txBody>
-      </p:sp>
-      <p:sp>
-        <p:nvSpPr>
-          <p:cNvPr id="4" name="Foliennummernplatzhalter 3">
-            <a:extLst>
-              <a:ext uri="{FF2B5EF4-FFF2-40B4-BE49-F238E27FC236}">
-                <a16:creationId xmlns:a16="http://schemas.microsoft.com/office/drawing/2014/main" id="{9E35D160-5F88-C8FA-1779-A31D24A90811}"/>
-              </a:ext>
-            </a:extLst>
-          </p:cNvPr>
-          <p:cNvSpPr>
-            <a:spLocks noGrp="1"/>
-          </p:cNvSpPr>
-          <p:nvPr>
-            <p:ph type="sldNum" sz="quarter" idx="12"/>
-          </p:nvPr>
-        </p:nvSpPr>
-        <p:spPr/>
-        <p:txBody>
-          <a:bodyPr/>
-          <a:lstStyle/>
-          <a:p>
-            <a:fld id="{3D4C94FE-FF23-4504-88E9-14D481113291}" type="slidenum">
-              <a:rPr lang="en-GB" smtClean="0"/>
-              <a:t>15</a:t>
-            </a:fld>
-            <a:endParaRPr lang="en-GB"/>
-          </a:p>
-        </p:txBody>
-      </p:sp>
-      <p:pic>
-        <p:nvPicPr>
-          <p:cNvPr id="7" name="Grafik 6" descr="Ein Bild, das Text, Screenshot, Zahl, Diagramm enthält.&#10;&#10;KI-generierte Inhalte können fehlerhaft sein.">
-            <a:extLst>
-              <a:ext uri="{FF2B5EF4-FFF2-40B4-BE49-F238E27FC236}">
-                <a16:creationId xmlns:a16="http://schemas.microsoft.com/office/drawing/2014/main" id="{A9B50630-A54E-D44F-A579-EE71DE87491E}"/>
-              </a:ext>
-            </a:extLst>
-          </p:cNvPr>
-          <p:cNvPicPr>
-            <a:picLocks noChangeAspect="1"/>
-          </p:cNvPicPr>
-          <p:nvPr/>
-        </p:nvPicPr>
-        <p:blipFill>
-          <a:blip r:embed="rId2">
-            <a:extLst>
-              <a:ext uri="{28A0092B-C50C-407E-A947-70E740481C1C}">
-                <a14:useLocalDpi xmlns:a14="http://schemas.microsoft.com/office/drawing/2010/main" val="0"/>
-              </a:ext>
-            </a:extLst>
-          </a:blip>
-          <a:stretch>
-            <a:fillRect/>
-          </a:stretch>
-        </p:blipFill>
-        <p:spPr>
-          <a:xfrm>
-            <a:off x="1524000" y="1690688"/>
-            <a:ext cx="9144000" cy="4523984"/>
-          </a:xfrm>
-          <a:prstGeom prst="rect">
-            <a:avLst/>
-          </a:prstGeom>
-        </p:spPr>
-      </p:pic>
-      <p:sp>
-        <p:nvSpPr>
-          <p:cNvPr id="8" name="TextBox 10">
-            <a:extLst>
-              <a:ext uri="{FF2B5EF4-FFF2-40B4-BE49-F238E27FC236}">
-                <a16:creationId xmlns:a16="http://schemas.microsoft.com/office/drawing/2014/main" id="{59B2AC5B-C9B6-DFBA-0AA1-6A856780D62D}"/>
-              </a:ext>
-            </a:extLst>
-          </p:cNvPr>
-          <p:cNvSpPr txBox="1"/>
-          <p:nvPr/>
-        </p:nvSpPr>
-        <p:spPr>
-          <a:xfrm>
-            <a:off x="9715941" y="6214672"/>
-            <a:ext cx="567784" cy="246221"/>
-          </a:xfrm>
-          <a:prstGeom prst="rect">
-            <a:avLst/>
-          </a:prstGeom>
-          <a:noFill/>
-        </p:spPr>
-        <p:txBody>
-          <a:bodyPr wrap="none" rtlCol="0">
-            <a:spAutoFit/>
-          </a:bodyPr>
-          <a:lstStyle/>
-          <a:p>
-            <a:r>
-              <a:rPr lang="de-DE" sz="1000" dirty="0">
-                <a:hlinkClick r:id="rId3"/>
-              </a:rPr>
-              <a:t>source</a:t>
-            </a:r>
-            <a:endParaRPr lang="de-DE" sz="1000" dirty="0"/>
-          </a:p>
-        </p:txBody>
-      </p:sp>
-    </p:spTree>
-    <p:extLst>
-      <p:ext uri="{BB962C8B-B14F-4D97-AF65-F5344CB8AC3E}">
-        <p14:creationId xmlns:p14="http://schemas.microsoft.com/office/powerpoint/2010/main" val="2333349658"/>
       </p:ext>
     </p:extLst>
   </p:cSld>
@@ -5426,10 +5687,10 @@
       </p:grpSpPr>
       <p:sp>
         <p:nvSpPr>
-          <p:cNvPr id="2" name="Titel 1">
-            <a:extLst>
-              <a:ext uri="{FF2B5EF4-FFF2-40B4-BE49-F238E27FC236}">
-                <a16:creationId xmlns:a16="http://schemas.microsoft.com/office/drawing/2014/main" id="{BDBD6BF8-3D11-D88B-C84A-AE77A321178F}"/>
+          <p:cNvPr id="5" name="Titel 4">
+            <a:extLst>
+              <a:ext uri="{FF2B5EF4-FFF2-40B4-BE49-F238E27FC236}">
+                <a16:creationId xmlns:a16="http://schemas.microsoft.com/office/drawing/2014/main" id="{BBCDC7E5-D7A7-4A4D-D7BA-4ADED892241B}"/>
               </a:ext>
             </a:extLst>
           </p:cNvPr>
@@ -5447,15 +5708,15 @@
           <a:p>
             <a:r>
               <a:rPr lang="de-DE" dirty="0" err="1"/>
-              <a:t>Dimensionality</a:t>
+              <a:t>Tokenization</a:t>
             </a:r>
             <a:r>
               <a:rPr lang="de-DE" dirty="0"/>
-              <a:t> </a:t>
+              <a:t> &amp; </a:t>
             </a:r>
             <a:r>
               <a:rPr lang="de-DE" dirty="0" err="1"/>
-              <a:t>Reduction</a:t>
+              <a:t>Embeddings</a:t>
             </a:r>
             <a:endParaRPr lang="de-DE" dirty="0"/>
           </a:p>
@@ -5463,35 +5724,10 @@
       </p:sp>
       <p:sp>
         <p:nvSpPr>
-          <p:cNvPr id="3" name="Inhaltsplatzhalter 2">
-            <a:extLst>
-              <a:ext uri="{FF2B5EF4-FFF2-40B4-BE49-F238E27FC236}">
-                <a16:creationId xmlns:a16="http://schemas.microsoft.com/office/drawing/2014/main" id="{5DBF8B8B-A809-EE1C-1E3D-A32FC508808F}"/>
-              </a:ext>
-            </a:extLst>
-          </p:cNvPr>
-          <p:cNvSpPr>
-            <a:spLocks noGrp="1"/>
-          </p:cNvSpPr>
-          <p:nvPr>
-            <p:ph idx="1"/>
-          </p:nvPr>
-        </p:nvSpPr>
-        <p:spPr/>
-        <p:txBody>
-          <a:bodyPr/>
-          <a:lstStyle/>
-          <a:p>
-            <a:endParaRPr lang="de-DE"/>
-          </a:p>
-        </p:txBody>
-      </p:sp>
-      <p:sp>
-        <p:nvSpPr>
           <p:cNvPr id="4" name="Foliennummernplatzhalter 3">
             <a:extLst>
               <a:ext uri="{FF2B5EF4-FFF2-40B4-BE49-F238E27FC236}">
-                <a16:creationId xmlns:a16="http://schemas.microsoft.com/office/drawing/2014/main" id="{BE5B58E1-0E39-CD68-78F4-A3CF38272C75}"/>
+                <a16:creationId xmlns:a16="http://schemas.microsoft.com/office/drawing/2014/main" id="{9E35D160-5F88-C8FA-1779-A31D24A90811}"/>
               </a:ext>
             </a:extLst>
           </p:cNvPr>
@@ -5507,7 +5743,7 @@
           <a:bodyPr/>
           <a:lstStyle/>
           <a:p>
-            <a:fld id="{08C366F5-AFAD-49CB-854A-9D9E238FCA13}" type="slidenum">
+            <a:fld id="{3D4C94FE-FF23-4504-88E9-14D481113291}" type="slidenum">
               <a:rPr lang="en-GB" smtClean="0"/>
               <a:t>16</a:t>
             </a:fld>
@@ -5515,10 +5751,84 @@
           </a:p>
         </p:txBody>
       </p:sp>
+      <p:pic>
+        <p:nvPicPr>
+          <p:cNvPr id="7" name="Grafik 6" descr="Ein Bild, das Text, Screenshot, Zahl, Diagramm enthält.&#10;&#10;KI-generierte Inhalte können fehlerhaft sein.">
+            <a:extLst>
+              <a:ext uri="{FF2B5EF4-FFF2-40B4-BE49-F238E27FC236}">
+                <a16:creationId xmlns:a16="http://schemas.microsoft.com/office/drawing/2014/main" id="{A9B50630-A54E-D44F-A579-EE71DE87491E}"/>
+              </a:ext>
+            </a:extLst>
+          </p:cNvPr>
+          <p:cNvPicPr>
+            <a:picLocks noChangeAspect="1"/>
+          </p:cNvPicPr>
+          <p:nvPr/>
+        </p:nvPicPr>
+        <p:blipFill>
+          <a:blip r:embed="rId2">
+            <a:extLst>
+              <a:ext uri="{28A0092B-C50C-407E-A947-70E740481C1C}">
+                <a14:useLocalDpi xmlns:a14="http://schemas.microsoft.com/office/drawing/2010/main" val="0"/>
+              </a:ext>
+            </a:extLst>
+          </a:blip>
+          <a:stretch>
+            <a:fillRect/>
+          </a:stretch>
+        </p:blipFill>
+        <p:spPr>
+          <a:xfrm>
+            <a:off x="1524000" y="1690688"/>
+            <a:ext cx="9144000" cy="4523984"/>
+          </a:xfrm>
+          <a:prstGeom prst="rect">
+            <a:avLst/>
+          </a:prstGeom>
+        </p:spPr>
+      </p:pic>
+      <p:sp>
+        <p:nvSpPr>
+          <p:cNvPr id="8" name="TextBox 10">
+            <a:extLst>
+              <a:ext uri="{FF2B5EF4-FFF2-40B4-BE49-F238E27FC236}">
+                <a16:creationId xmlns:a16="http://schemas.microsoft.com/office/drawing/2014/main" id="{59B2AC5B-C9B6-DFBA-0AA1-6A856780D62D}"/>
+              </a:ext>
+            </a:extLst>
+          </p:cNvPr>
+          <p:cNvSpPr txBox="1"/>
+          <p:nvPr/>
+        </p:nvSpPr>
+        <p:spPr>
+          <a:xfrm>
+            <a:off x="9715941" y="6214672"/>
+            <a:ext cx="567784" cy="246221"/>
+          </a:xfrm>
+          <a:prstGeom prst="rect">
+            <a:avLst/>
+          </a:prstGeom>
+          <a:noFill/>
+        </p:spPr>
+        <p:txBody>
+          <a:bodyPr wrap="none" rtlCol="0">
+            <a:spAutoFit/>
+          </a:bodyPr>
+          <a:lstStyle/>
+          <a:p>
+            <a:r>
+              <a:rPr lang="de-DE" sz="1000" dirty="0">
+                <a:hlinkClick r:id="rId3"/>
+              </a:rPr>
+              <a:t>source</a:t>
+            </a:r>
+            <a:endParaRPr lang="de-DE" sz="1000" dirty="0"/>
+          </a:p>
+        </p:txBody>
+      </p:sp>
     </p:spTree>
     <p:extLst>
       <p:ext uri="{BB962C8B-B14F-4D97-AF65-F5344CB8AC3E}">
-        <p14:creationId xmlns:p14="http://schemas.microsoft.com/office/powerpoint/2010/main" val="1841594860"/>
+        <p14:creationId xmlns:p14="http://schemas.microsoft.com/office/powerpoint/2010/main" val="2333349658"/>
       </p:ext>
     </p:extLst>
   </p:cSld>
@@ -5550,7 +5860,7 @@
           <p:cNvPr id="2" name="Titel 1">
             <a:extLst>
               <a:ext uri="{FF2B5EF4-FFF2-40B4-BE49-F238E27FC236}">
-                <a16:creationId xmlns:a16="http://schemas.microsoft.com/office/drawing/2014/main" id="{AE7B3083-59FB-DA8F-12C6-DF0A645DE621}"/>
+                <a16:creationId xmlns:a16="http://schemas.microsoft.com/office/drawing/2014/main" id="{BDBD6BF8-3D11-D88B-C84A-AE77A321178F}"/>
               </a:ext>
             </a:extLst>
           </p:cNvPr>
@@ -5568,7 +5878,7 @@
           <a:p>
             <a:r>
               <a:rPr lang="de-DE" dirty="0" err="1"/>
-              <a:t>Principal</a:t>
+              <a:t>Dimensionality</a:t>
             </a:r>
             <a:r>
               <a:rPr lang="de-DE" dirty="0"/>
@@ -5576,12 +5886,9 @@
             </a:r>
             <a:r>
               <a:rPr lang="de-DE" dirty="0" err="1"/>
-              <a:t>Component</a:t>
-            </a:r>
-            <a:r>
-              <a:rPr lang="de-DE" dirty="0"/>
-              <a:t> Analysis (PCA)</a:t>
-            </a:r>
+              <a:t>Reduction</a:t>
+            </a:r>
+            <a:endParaRPr lang="de-DE" dirty="0"/>
           </a:p>
         </p:txBody>
       </p:sp>
@@ -5590,7 +5897,7 @@
           <p:cNvPr id="3" name="Inhaltsplatzhalter 2">
             <a:extLst>
               <a:ext uri="{FF2B5EF4-FFF2-40B4-BE49-F238E27FC236}">
-                <a16:creationId xmlns:a16="http://schemas.microsoft.com/office/drawing/2014/main" id="{B7809814-34C7-FCFF-C03A-378CFA8499B8}"/>
+                <a16:creationId xmlns:a16="http://schemas.microsoft.com/office/drawing/2014/main" id="{5DBF8B8B-A809-EE1C-1E3D-A32FC508808F}"/>
               </a:ext>
             </a:extLst>
           </p:cNvPr>
@@ -5615,7 +5922,7 @@
           <p:cNvPr id="4" name="Foliennummernplatzhalter 3">
             <a:extLst>
               <a:ext uri="{FF2B5EF4-FFF2-40B4-BE49-F238E27FC236}">
-                <a16:creationId xmlns:a16="http://schemas.microsoft.com/office/drawing/2014/main" id="{A5D62EC6-ACEC-43A6-B331-EF1A0B5EB787}"/>
+                <a16:creationId xmlns:a16="http://schemas.microsoft.com/office/drawing/2014/main" id="{BE5B58E1-0E39-CD68-78F4-A3CF38272C75}"/>
               </a:ext>
             </a:extLst>
           </p:cNvPr>
@@ -5642,7 +5949,7 @@
     </p:spTree>
     <p:extLst>
       <p:ext uri="{BB962C8B-B14F-4D97-AF65-F5344CB8AC3E}">
-        <p14:creationId xmlns:p14="http://schemas.microsoft.com/office/powerpoint/2010/main" val="2193803085"/>
+        <p14:creationId xmlns:p14="http://schemas.microsoft.com/office/powerpoint/2010/main" val="1841594860"/>
       </p:ext>
     </p:extLst>
   </p:cSld>
@@ -5674,7 +5981,7 @@
           <p:cNvPr id="2" name="Titel 1">
             <a:extLst>
               <a:ext uri="{FF2B5EF4-FFF2-40B4-BE49-F238E27FC236}">
-                <a16:creationId xmlns:a16="http://schemas.microsoft.com/office/drawing/2014/main" id="{FFA6AFEC-8765-3AAD-81DF-22E46DF92DB8}"/>
+                <a16:creationId xmlns:a16="http://schemas.microsoft.com/office/drawing/2014/main" id="{AE7B3083-59FB-DA8F-12C6-DF0A645DE621}"/>
               </a:ext>
             </a:extLst>
           </p:cNvPr>
@@ -5692,7 +5999,7 @@
           <a:p>
             <a:r>
               <a:rPr lang="de-DE" dirty="0" err="1"/>
-              <a:t>Interpreting</a:t>
+              <a:t>Principal</a:t>
             </a:r>
             <a:r>
               <a:rPr lang="de-DE" dirty="0"/>
@@ -5700,11 +6007,11 @@
             </a:r>
             <a:r>
               <a:rPr lang="de-DE" dirty="0" err="1"/>
-              <a:t>Principal</a:t>
+              <a:t>Component</a:t>
             </a:r>
             <a:r>
               <a:rPr lang="de-DE" dirty="0"/>
-              <a:t> Components</a:t>
+              <a:t> Analysis (PCA)</a:t>
             </a:r>
           </a:p>
         </p:txBody>
@@ -5714,7 +6021,7 @@
           <p:cNvPr id="3" name="Inhaltsplatzhalter 2">
             <a:extLst>
               <a:ext uri="{FF2B5EF4-FFF2-40B4-BE49-F238E27FC236}">
-                <a16:creationId xmlns:a16="http://schemas.microsoft.com/office/drawing/2014/main" id="{BC68A9FB-8232-AD4B-8546-A970004A857B}"/>
+                <a16:creationId xmlns:a16="http://schemas.microsoft.com/office/drawing/2014/main" id="{B7809814-34C7-FCFF-C03A-378CFA8499B8}"/>
               </a:ext>
             </a:extLst>
           </p:cNvPr>
@@ -5739,7 +6046,7 @@
           <p:cNvPr id="4" name="Foliennummernplatzhalter 3">
             <a:extLst>
               <a:ext uri="{FF2B5EF4-FFF2-40B4-BE49-F238E27FC236}">
-                <a16:creationId xmlns:a16="http://schemas.microsoft.com/office/drawing/2014/main" id="{209CA560-5E44-0D4F-1B3A-321CECE9DB15}"/>
+                <a16:creationId xmlns:a16="http://schemas.microsoft.com/office/drawing/2014/main" id="{A5D62EC6-ACEC-43A6-B331-EF1A0B5EB787}"/>
               </a:ext>
             </a:extLst>
           </p:cNvPr>
@@ -5766,7 +6073,7 @@
     </p:spTree>
     <p:extLst>
       <p:ext uri="{BB962C8B-B14F-4D97-AF65-F5344CB8AC3E}">
-        <p14:creationId xmlns:p14="http://schemas.microsoft.com/office/powerpoint/2010/main" val="4133322017"/>
+        <p14:creationId xmlns:p14="http://schemas.microsoft.com/office/powerpoint/2010/main" val="2193803085"/>
       </p:ext>
     </p:extLst>
   </p:cSld>
@@ -5798,7 +6105,7 @@
           <p:cNvPr id="2" name="Titel 1">
             <a:extLst>
               <a:ext uri="{FF2B5EF4-FFF2-40B4-BE49-F238E27FC236}">
-                <a16:creationId xmlns:a16="http://schemas.microsoft.com/office/drawing/2014/main" id="{7BC65FE1-3D0F-A212-782E-9BD31CC63B98}"/>
+                <a16:creationId xmlns:a16="http://schemas.microsoft.com/office/drawing/2014/main" id="{FFA6AFEC-8765-3AAD-81DF-22E46DF92DB8}"/>
               </a:ext>
             </a:extLst>
           </p:cNvPr>
@@ -5816,17 +6123,20 @@
           <a:p>
             <a:r>
               <a:rPr lang="de-DE" dirty="0" err="1"/>
-              <a:t>Regularization</a:t>
+              <a:t>Interpreting</a:t>
             </a:r>
             <a:r>
               <a:rPr lang="de-DE" dirty="0"/>
-              <a:t> and Feature </a:t>
+              <a:t> </a:t>
             </a:r>
             <a:r>
               <a:rPr lang="de-DE" dirty="0" err="1"/>
-              <a:t>Selection</a:t>
-            </a:r>
-            <a:endParaRPr lang="de-DE" dirty="0"/>
+              <a:t>Principal</a:t>
+            </a:r>
+            <a:r>
+              <a:rPr lang="de-DE" dirty="0"/>
+              <a:t> Components</a:t>
+            </a:r>
           </a:p>
         </p:txBody>
       </p:sp>
@@ -5835,7 +6145,7 @@
           <p:cNvPr id="3" name="Inhaltsplatzhalter 2">
             <a:extLst>
               <a:ext uri="{FF2B5EF4-FFF2-40B4-BE49-F238E27FC236}">
-                <a16:creationId xmlns:a16="http://schemas.microsoft.com/office/drawing/2014/main" id="{EE0D3F02-061B-0FA9-ABF4-F9D34A0EF4A8}"/>
+                <a16:creationId xmlns:a16="http://schemas.microsoft.com/office/drawing/2014/main" id="{BC68A9FB-8232-AD4B-8546-A970004A857B}"/>
               </a:ext>
             </a:extLst>
           </p:cNvPr>
@@ -5860,7 +6170,7 @@
           <p:cNvPr id="4" name="Foliennummernplatzhalter 3">
             <a:extLst>
               <a:ext uri="{FF2B5EF4-FFF2-40B4-BE49-F238E27FC236}">
-                <a16:creationId xmlns:a16="http://schemas.microsoft.com/office/drawing/2014/main" id="{B838E8F3-9DF8-C3E8-2EFC-8D44C8F5D9A3}"/>
+                <a16:creationId xmlns:a16="http://schemas.microsoft.com/office/drawing/2014/main" id="{209CA560-5E44-0D4F-1B3A-321CECE9DB15}"/>
               </a:ext>
             </a:extLst>
           </p:cNvPr>
@@ -5887,7 +6197,7 @@
     </p:spTree>
     <p:extLst>
       <p:ext uri="{BB962C8B-B14F-4D97-AF65-F5344CB8AC3E}">
-        <p14:creationId xmlns:p14="http://schemas.microsoft.com/office/powerpoint/2010/main" val="2136778643"/>
+        <p14:creationId xmlns:p14="http://schemas.microsoft.com/office/powerpoint/2010/main" val="4133322017"/>
       </p:ext>
     </p:extLst>
   </p:cSld>
@@ -6225,6 +6535,127 @@
       </p:grpSpPr>
       <p:sp>
         <p:nvSpPr>
+          <p:cNvPr id="2" name="Titel 1">
+            <a:extLst>
+              <a:ext uri="{FF2B5EF4-FFF2-40B4-BE49-F238E27FC236}">
+                <a16:creationId xmlns:a16="http://schemas.microsoft.com/office/drawing/2014/main" id="{7BC65FE1-3D0F-A212-782E-9BD31CC63B98}"/>
+              </a:ext>
+            </a:extLst>
+          </p:cNvPr>
+          <p:cNvSpPr>
+            <a:spLocks noGrp="1"/>
+          </p:cNvSpPr>
+          <p:nvPr>
+            <p:ph type="title"/>
+          </p:nvPr>
+        </p:nvSpPr>
+        <p:spPr/>
+        <p:txBody>
+          <a:bodyPr/>
+          <a:lstStyle/>
+          <a:p>
+            <a:r>
+              <a:rPr lang="de-DE" dirty="0" err="1"/>
+              <a:t>Regularization</a:t>
+            </a:r>
+            <a:r>
+              <a:rPr lang="de-DE" dirty="0"/>
+              <a:t> and Feature </a:t>
+            </a:r>
+            <a:r>
+              <a:rPr lang="de-DE" dirty="0" err="1"/>
+              <a:t>Selection</a:t>
+            </a:r>
+            <a:endParaRPr lang="de-DE" dirty="0"/>
+          </a:p>
+        </p:txBody>
+      </p:sp>
+      <p:sp>
+        <p:nvSpPr>
+          <p:cNvPr id="3" name="Inhaltsplatzhalter 2">
+            <a:extLst>
+              <a:ext uri="{FF2B5EF4-FFF2-40B4-BE49-F238E27FC236}">
+                <a16:creationId xmlns:a16="http://schemas.microsoft.com/office/drawing/2014/main" id="{EE0D3F02-061B-0FA9-ABF4-F9D34A0EF4A8}"/>
+              </a:ext>
+            </a:extLst>
+          </p:cNvPr>
+          <p:cNvSpPr>
+            <a:spLocks noGrp="1"/>
+          </p:cNvSpPr>
+          <p:nvPr>
+            <p:ph idx="1"/>
+          </p:nvPr>
+        </p:nvSpPr>
+        <p:spPr/>
+        <p:txBody>
+          <a:bodyPr/>
+          <a:lstStyle/>
+          <a:p>
+            <a:endParaRPr lang="de-DE"/>
+          </a:p>
+        </p:txBody>
+      </p:sp>
+      <p:sp>
+        <p:nvSpPr>
+          <p:cNvPr id="4" name="Foliennummernplatzhalter 3">
+            <a:extLst>
+              <a:ext uri="{FF2B5EF4-FFF2-40B4-BE49-F238E27FC236}">
+                <a16:creationId xmlns:a16="http://schemas.microsoft.com/office/drawing/2014/main" id="{B838E8F3-9DF8-C3E8-2EFC-8D44C8F5D9A3}"/>
+              </a:ext>
+            </a:extLst>
+          </p:cNvPr>
+          <p:cNvSpPr>
+            <a:spLocks noGrp="1"/>
+          </p:cNvSpPr>
+          <p:nvPr>
+            <p:ph type="sldNum" sz="quarter" idx="12"/>
+          </p:nvPr>
+        </p:nvSpPr>
+        <p:spPr/>
+        <p:txBody>
+          <a:bodyPr/>
+          <a:lstStyle/>
+          <a:p>
+            <a:fld id="{08C366F5-AFAD-49CB-854A-9D9E238FCA13}" type="slidenum">
+              <a:rPr lang="en-GB" smtClean="0"/>
+              <a:t>20</a:t>
+            </a:fld>
+            <a:endParaRPr lang="en-GB"/>
+          </a:p>
+        </p:txBody>
+      </p:sp>
+    </p:spTree>
+    <p:extLst>
+      <p:ext uri="{BB962C8B-B14F-4D97-AF65-F5344CB8AC3E}">
+        <p14:creationId xmlns:p14="http://schemas.microsoft.com/office/powerpoint/2010/main" val="2136778643"/>
+      </p:ext>
+    </p:extLst>
+  </p:cSld>
+  <p:clrMapOvr>
+    <a:masterClrMapping/>
+  </p:clrMapOvr>
+</p:sld>
+</file>
+
+<file path=ppt/slides/slide21.xml><?xml version="1.0" encoding="utf-8"?>
+<p:sld xmlns:a="http://schemas.openxmlformats.org/drawingml/2006/main" xmlns:r="http://schemas.openxmlformats.org/officeDocument/2006/relationships" xmlns:p="http://schemas.openxmlformats.org/presentationml/2006/main">
+  <p:cSld>
+    <p:spTree>
+      <p:nvGrpSpPr>
+        <p:cNvPr id="1" name=""/>
+        <p:cNvGrpSpPr/>
+        <p:nvPr/>
+      </p:nvGrpSpPr>
+      <p:grpSpPr>
+        <a:xfrm>
+          <a:off x="0" y="0"/>
+          <a:ext cx="0" cy="0"/>
+          <a:chOff x="0" y="0"/>
+          <a:chExt cx="0" cy="0"/>
+        </a:xfrm>
+      </p:grpSpPr>
+      <p:sp>
+        <p:nvSpPr>
           <p:cNvPr id="2" name="Title 1">
             <a:extLst>
               <a:ext uri="{FF2B5EF4-FFF2-40B4-BE49-F238E27FC236}">
@@ -6340,7 +6771,7 @@
           <a:p>
             <a:fld id="{C4CC4FF7-4194-DC4A-997C-EF4C65C96866}" type="slidenum">
               <a:rPr lang="en-DE" smtClean="0"/>
-              <a:t>20</a:t>
+              <a:t>21</a:t>
             </a:fld>
             <a:endParaRPr lang="en-DE"/>
           </a:p>
@@ -6427,7 +6858,7 @@
 </p:sld>
 </file>
 
-<file path=ppt/slides/slide21.xml><?xml version="1.0" encoding="utf-8"?>
+<file path=ppt/slides/slide22.xml><?xml version="1.0" encoding="utf-8"?>
 <p:sld xmlns:a="http://schemas.openxmlformats.org/drawingml/2006/main" xmlns:r="http://schemas.openxmlformats.org/officeDocument/2006/relationships" xmlns:p="http://schemas.openxmlformats.org/presentationml/2006/main">
   <p:cSld>
     <p:spTree>
@@ -7020,7 +7451,7 @@
           <a:p>
             <a:fld id="{C4CC4FF7-4194-DC4A-997C-EF4C65C96866}" type="slidenum">
               <a:rPr lang="en-DE" smtClean="0"/>
-              <a:t>21</a:t>
+              <a:t>22</a:t>
             </a:fld>
             <a:endParaRPr lang="en-DE"/>
           </a:p>
@@ -7079,10 +7510,10 @@
           <p:nvPr/>
         </p:nvPicPr>
         <p:blipFill>
-          <a:blip r:embed="rId4">
+          <a:blip>
             <a:extLst>
               <a:ext uri="{96DAC541-7B7A-43D3-8B79-37D633B846F1}">
-                <asvg:svgBlip xmlns:asvg="http://schemas.microsoft.com/office/drawing/2016/SVG/main" r:embed="rId5"/>
+                <asvg:svgBlip xmlns:asvg="http://schemas.microsoft.com/office/drawing/2016/SVG/main" r:embed="rId4"/>
               </a:ext>
             </a:extLst>
           </a:blip>
@@ -7115,10 +7546,10 @@
           <p:nvPr/>
         </p:nvPicPr>
         <p:blipFill>
-          <a:blip r:embed="rId6">
+          <a:blip>
             <a:extLst>
               <a:ext uri="{96DAC541-7B7A-43D3-8B79-37D633B846F1}">
-                <asvg:svgBlip xmlns:asvg="http://schemas.microsoft.com/office/drawing/2016/SVG/main" r:embed="rId7"/>
+                <asvg:svgBlip xmlns:asvg="http://schemas.microsoft.com/office/drawing/2016/SVG/main" r:embed="rId5"/>
               </a:ext>
             </a:extLst>
           </a:blip>
@@ -7190,130 +7621,6 @@
 </p:sld>
 </file>
 
-<file path=ppt/slides/slide22.xml><?xml version="1.0" encoding="utf-8"?>
-<p:sld xmlns:a="http://schemas.openxmlformats.org/drawingml/2006/main" xmlns:r="http://schemas.openxmlformats.org/officeDocument/2006/relationships" xmlns:p="http://schemas.openxmlformats.org/presentationml/2006/main">
-  <p:cSld>
-    <p:spTree>
-      <p:nvGrpSpPr>
-        <p:cNvPr id="1" name=""/>
-        <p:cNvGrpSpPr/>
-        <p:nvPr/>
-      </p:nvGrpSpPr>
-      <p:grpSpPr>
-        <a:xfrm>
-          <a:off x="0" y="0"/>
-          <a:ext cx="0" cy="0"/>
-          <a:chOff x="0" y="0"/>
-          <a:chExt cx="0" cy="0"/>
-        </a:xfrm>
-      </p:grpSpPr>
-      <p:sp>
-        <p:nvSpPr>
-          <p:cNvPr id="2" name="Titel 1">
-            <a:extLst>
-              <a:ext uri="{FF2B5EF4-FFF2-40B4-BE49-F238E27FC236}">
-                <a16:creationId xmlns:a16="http://schemas.microsoft.com/office/drawing/2014/main" id="{DBACCFFB-9C8A-3344-6CB6-850411F5A9B9}"/>
-              </a:ext>
-            </a:extLst>
-          </p:cNvPr>
-          <p:cNvSpPr>
-            <a:spLocks noGrp="1"/>
-          </p:cNvSpPr>
-          <p:nvPr>
-            <p:ph type="title"/>
-          </p:nvPr>
-        </p:nvSpPr>
-        <p:spPr/>
-        <p:txBody>
-          <a:bodyPr/>
-          <a:lstStyle/>
-          <a:p>
-            <a:r>
-              <a:rPr lang="de-DE" dirty="0" err="1"/>
-              <a:t>Automatic</a:t>
-            </a:r>
-            <a:r>
-              <a:rPr lang="de-DE" dirty="0"/>
-              <a:t> </a:t>
-            </a:r>
-            <a:r>
-              <a:rPr lang="de-DE" dirty="0" err="1"/>
-              <a:t>Relevance</a:t>
-            </a:r>
-            <a:r>
-              <a:rPr lang="de-DE" dirty="0"/>
-              <a:t> Determination (ARD)</a:t>
-            </a:r>
-          </a:p>
-        </p:txBody>
-      </p:sp>
-      <p:sp>
-        <p:nvSpPr>
-          <p:cNvPr id="3" name="Inhaltsplatzhalter 2">
-            <a:extLst>
-              <a:ext uri="{FF2B5EF4-FFF2-40B4-BE49-F238E27FC236}">
-                <a16:creationId xmlns:a16="http://schemas.microsoft.com/office/drawing/2014/main" id="{7143B982-D0C2-2510-8BEB-176415008EF5}"/>
-              </a:ext>
-            </a:extLst>
-          </p:cNvPr>
-          <p:cNvSpPr>
-            <a:spLocks noGrp="1"/>
-          </p:cNvSpPr>
-          <p:nvPr>
-            <p:ph idx="1"/>
-          </p:nvPr>
-        </p:nvSpPr>
-        <p:spPr/>
-        <p:txBody>
-          <a:bodyPr/>
-          <a:lstStyle/>
-          <a:p>
-            <a:endParaRPr lang="de-DE"/>
-          </a:p>
-        </p:txBody>
-      </p:sp>
-      <p:sp>
-        <p:nvSpPr>
-          <p:cNvPr id="4" name="Foliennummernplatzhalter 3">
-            <a:extLst>
-              <a:ext uri="{FF2B5EF4-FFF2-40B4-BE49-F238E27FC236}">
-                <a16:creationId xmlns:a16="http://schemas.microsoft.com/office/drawing/2014/main" id="{A5F057AD-CB24-1B6C-D311-911DEFB8D41C}"/>
-              </a:ext>
-            </a:extLst>
-          </p:cNvPr>
-          <p:cNvSpPr>
-            <a:spLocks noGrp="1"/>
-          </p:cNvSpPr>
-          <p:nvPr>
-            <p:ph type="sldNum" sz="quarter" idx="12"/>
-          </p:nvPr>
-        </p:nvSpPr>
-        <p:spPr/>
-        <p:txBody>
-          <a:bodyPr/>
-          <a:lstStyle/>
-          <a:p>
-            <a:fld id="{08C366F5-AFAD-49CB-854A-9D9E238FCA13}" type="slidenum">
-              <a:rPr lang="en-GB" smtClean="0"/>
-              <a:t>22</a:t>
-            </a:fld>
-            <a:endParaRPr lang="en-GB"/>
-          </a:p>
-        </p:txBody>
-      </p:sp>
-    </p:spTree>
-    <p:extLst>
-      <p:ext uri="{BB962C8B-B14F-4D97-AF65-F5344CB8AC3E}">
-        <p14:creationId xmlns:p14="http://schemas.microsoft.com/office/powerpoint/2010/main" val="3959476641"/>
-      </p:ext>
-    </p:extLst>
-  </p:cSld>
-  <p:clrMapOvr>
-    <a:masterClrMapping/>
-  </p:clrMapOvr>
-</p:sld>
-</file>
-
 <file path=ppt/slides/slide23.xml><?xml version="1.0" encoding="utf-8"?>
 <p:sld xmlns:a="http://schemas.openxmlformats.org/drawingml/2006/main" xmlns:r="http://schemas.openxmlformats.org/officeDocument/2006/relationships" xmlns:p="http://schemas.openxmlformats.org/presentationml/2006/main">
   <p:cSld>
@@ -7336,7 +7643,7 @@
           <p:cNvPr id="2" name="Titel 1">
             <a:extLst>
               <a:ext uri="{FF2B5EF4-FFF2-40B4-BE49-F238E27FC236}">
-                <a16:creationId xmlns:a16="http://schemas.microsoft.com/office/drawing/2014/main" id="{2BC99A6E-985A-BCAE-71DF-63142D9EC1DA}"/>
+                <a16:creationId xmlns:a16="http://schemas.microsoft.com/office/drawing/2014/main" id="{DBACCFFB-9C8A-3344-6CB6-850411F5A9B9}"/>
               </a:ext>
             </a:extLst>
           </p:cNvPr>
@@ -7353,16 +7660,20 @@
           <a:lstStyle/>
           <a:p>
             <a:r>
+              <a:rPr lang="de-DE" dirty="0" err="1"/>
+              <a:t>Automatic</a:t>
+            </a:r>
+            <a:r>
               <a:rPr lang="de-DE" dirty="0"/>
-              <a:t>Handling </a:t>
+              <a:t> </a:t>
             </a:r>
             <a:r>
               <a:rPr lang="de-DE" dirty="0" err="1"/>
-              <a:t>Missing</a:t>
+              <a:t>Relevance</a:t>
             </a:r>
             <a:r>
               <a:rPr lang="de-DE" dirty="0"/>
-              <a:t> Values</a:t>
+              <a:t> Determination (ARD)</a:t>
             </a:r>
           </a:p>
         </p:txBody>
@@ -7372,7 +7683,7 @@
           <p:cNvPr id="3" name="Inhaltsplatzhalter 2">
             <a:extLst>
               <a:ext uri="{FF2B5EF4-FFF2-40B4-BE49-F238E27FC236}">
-                <a16:creationId xmlns:a16="http://schemas.microsoft.com/office/drawing/2014/main" id="{3D2E5862-7DC7-538D-50E5-A4A53633B1F2}"/>
+                <a16:creationId xmlns:a16="http://schemas.microsoft.com/office/drawing/2014/main" id="{7143B982-D0C2-2510-8BEB-176415008EF5}"/>
               </a:ext>
             </a:extLst>
           </p:cNvPr>
@@ -7397,7 +7708,7 @@
           <p:cNvPr id="4" name="Foliennummernplatzhalter 3">
             <a:extLst>
               <a:ext uri="{FF2B5EF4-FFF2-40B4-BE49-F238E27FC236}">
-                <a16:creationId xmlns:a16="http://schemas.microsoft.com/office/drawing/2014/main" id="{CEE1F3C2-F660-87DE-3784-C6B8FA9E4B31}"/>
+                <a16:creationId xmlns:a16="http://schemas.microsoft.com/office/drawing/2014/main" id="{A5F057AD-CB24-1B6C-D311-911DEFB8D41C}"/>
               </a:ext>
             </a:extLst>
           </p:cNvPr>
@@ -7424,7 +7735,7 @@
     </p:spTree>
     <p:extLst>
       <p:ext uri="{BB962C8B-B14F-4D97-AF65-F5344CB8AC3E}">
-        <p14:creationId xmlns:p14="http://schemas.microsoft.com/office/powerpoint/2010/main" val="2997267176"/>
+        <p14:creationId xmlns:p14="http://schemas.microsoft.com/office/powerpoint/2010/main" val="3959476641"/>
       </p:ext>
     </p:extLst>
   </p:cSld>
@@ -7456,7 +7767,7 @@
           <p:cNvPr id="2" name="Titel 1">
             <a:extLst>
               <a:ext uri="{FF2B5EF4-FFF2-40B4-BE49-F238E27FC236}">
-                <a16:creationId xmlns:a16="http://schemas.microsoft.com/office/drawing/2014/main" id="{6E13DF55-62FC-108F-C35D-02114E3B96AB}"/>
+                <a16:creationId xmlns:a16="http://schemas.microsoft.com/office/drawing/2014/main" id="{2BC99A6E-985A-BCAE-71DF-63142D9EC1DA}"/>
               </a:ext>
             </a:extLst>
           </p:cNvPr>
@@ -7474,13 +7785,16 @@
           <a:p>
             <a:r>
               <a:rPr lang="de-DE" dirty="0"/>
-              <a:t>Imputation </a:t>
+              <a:t>Handling </a:t>
             </a:r>
             <a:r>
               <a:rPr lang="de-DE" dirty="0" err="1"/>
-              <a:t>Strategies</a:t>
-            </a:r>
-            <a:endParaRPr lang="de-DE" dirty="0"/>
+              <a:t>Missing</a:t>
+            </a:r>
+            <a:r>
+              <a:rPr lang="de-DE" dirty="0"/>
+              <a:t> Values</a:t>
+            </a:r>
           </a:p>
         </p:txBody>
       </p:sp>
@@ -7489,7 +7803,7 @@
           <p:cNvPr id="3" name="Inhaltsplatzhalter 2">
             <a:extLst>
               <a:ext uri="{FF2B5EF4-FFF2-40B4-BE49-F238E27FC236}">
-                <a16:creationId xmlns:a16="http://schemas.microsoft.com/office/drawing/2014/main" id="{58C6F1E1-2D09-57EF-8441-1D37701B01D0}"/>
+                <a16:creationId xmlns:a16="http://schemas.microsoft.com/office/drawing/2014/main" id="{3D2E5862-7DC7-538D-50E5-A4A53633B1F2}"/>
               </a:ext>
             </a:extLst>
           </p:cNvPr>
@@ -7514,7 +7828,7 @@
           <p:cNvPr id="4" name="Foliennummernplatzhalter 3">
             <a:extLst>
               <a:ext uri="{FF2B5EF4-FFF2-40B4-BE49-F238E27FC236}">
-                <a16:creationId xmlns:a16="http://schemas.microsoft.com/office/drawing/2014/main" id="{F9FAF73B-825C-EAD4-7CCA-FCF1CD576A82}"/>
+                <a16:creationId xmlns:a16="http://schemas.microsoft.com/office/drawing/2014/main" id="{CEE1F3C2-F660-87DE-3784-C6B8FA9E4B31}"/>
               </a:ext>
             </a:extLst>
           </p:cNvPr>
@@ -7541,7 +7855,7 @@
     </p:spTree>
     <p:extLst>
       <p:ext uri="{BB962C8B-B14F-4D97-AF65-F5344CB8AC3E}">
-        <p14:creationId xmlns:p14="http://schemas.microsoft.com/office/powerpoint/2010/main" val="1173938632"/>
+        <p14:creationId xmlns:p14="http://schemas.microsoft.com/office/powerpoint/2010/main" val="2997267176"/>
       </p:ext>
     </p:extLst>
   </p:cSld>
@@ -7573,7 +7887,7 @@
           <p:cNvPr id="2" name="Titel 1">
             <a:extLst>
               <a:ext uri="{FF2B5EF4-FFF2-40B4-BE49-F238E27FC236}">
-                <a16:creationId xmlns:a16="http://schemas.microsoft.com/office/drawing/2014/main" id="{DD4EE415-C8FF-FA3E-F6A4-91C674C5E724}"/>
+                <a16:creationId xmlns:a16="http://schemas.microsoft.com/office/drawing/2014/main" id="{6E13DF55-62FC-108F-C35D-02114E3B96AB}"/>
               </a:ext>
             </a:extLst>
           </p:cNvPr>
@@ -7591,8 +7905,13 @@
           <a:p>
             <a:r>
               <a:rPr lang="de-DE" dirty="0"/>
-              <a:t>Feature Engineering Pipelines</a:t>
-            </a:r>
+              <a:t>Imputation </a:t>
+            </a:r>
+            <a:r>
+              <a:rPr lang="de-DE" dirty="0" err="1"/>
+              <a:t>Strategies</a:t>
+            </a:r>
+            <a:endParaRPr lang="de-DE" dirty="0"/>
           </a:p>
         </p:txBody>
       </p:sp>
@@ -7601,7 +7920,7 @@
           <p:cNvPr id="3" name="Inhaltsplatzhalter 2">
             <a:extLst>
               <a:ext uri="{FF2B5EF4-FFF2-40B4-BE49-F238E27FC236}">
-                <a16:creationId xmlns:a16="http://schemas.microsoft.com/office/drawing/2014/main" id="{DE250263-A1D9-0375-3352-51387D02F95B}"/>
+                <a16:creationId xmlns:a16="http://schemas.microsoft.com/office/drawing/2014/main" id="{58C6F1E1-2D09-57EF-8441-1D37701B01D0}"/>
               </a:ext>
             </a:extLst>
           </p:cNvPr>
@@ -7626,7 +7945,7 @@
           <p:cNvPr id="4" name="Foliennummernplatzhalter 3">
             <a:extLst>
               <a:ext uri="{FF2B5EF4-FFF2-40B4-BE49-F238E27FC236}">
-                <a16:creationId xmlns:a16="http://schemas.microsoft.com/office/drawing/2014/main" id="{6CCFB421-1136-E880-67A1-53A4654925D9}"/>
+                <a16:creationId xmlns:a16="http://schemas.microsoft.com/office/drawing/2014/main" id="{F9FAF73B-825C-EAD4-7CCA-FCF1CD576A82}"/>
               </a:ext>
             </a:extLst>
           </p:cNvPr>
@@ -7653,7 +7972,7 @@
     </p:spTree>
     <p:extLst>
       <p:ext uri="{BB962C8B-B14F-4D97-AF65-F5344CB8AC3E}">
-        <p14:creationId xmlns:p14="http://schemas.microsoft.com/office/powerpoint/2010/main" val="2711831897"/>
+        <p14:creationId xmlns:p14="http://schemas.microsoft.com/office/powerpoint/2010/main" val="1173938632"/>
       </p:ext>
     </p:extLst>
   </p:cSld>
@@ -7682,6 +8001,118 @@
       </p:grpSpPr>
       <p:sp>
         <p:nvSpPr>
+          <p:cNvPr id="2" name="Titel 1">
+            <a:extLst>
+              <a:ext uri="{FF2B5EF4-FFF2-40B4-BE49-F238E27FC236}">
+                <a16:creationId xmlns:a16="http://schemas.microsoft.com/office/drawing/2014/main" id="{DD4EE415-C8FF-FA3E-F6A4-91C674C5E724}"/>
+              </a:ext>
+            </a:extLst>
+          </p:cNvPr>
+          <p:cNvSpPr>
+            <a:spLocks noGrp="1"/>
+          </p:cNvSpPr>
+          <p:nvPr>
+            <p:ph type="title"/>
+          </p:nvPr>
+        </p:nvSpPr>
+        <p:spPr/>
+        <p:txBody>
+          <a:bodyPr/>
+          <a:lstStyle/>
+          <a:p>
+            <a:r>
+              <a:rPr lang="de-DE" dirty="0"/>
+              <a:t>Feature Engineering Pipelines</a:t>
+            </a:r>
+          </a:p>
+        </p:txBody>
+      </p:sp>
+      <p:sp>
+        <p:nvSpPr>
+          <p:cNvPr id="3" name="Inhaltsplatzhalter 2">
+            <a:extLst>
+              <a:ext uri="{FF2B5EF4-FFF2-40B4-BE49-F238E27FC236}">
+                <a16:creationId xmlns:a16="http://schemas.microsoft.com/office/drawing/2014/main" id="{DE250263-A1D9-0375-3352-51387D02F95B}"/>
+              </a:ext>
+            </a:extLst>
+          </p:cNvPr>
+          <p:cNvSpPr>
+            <a:spLocks noGrp="1"/>
+          </p:cNvSpPr>
+          <p:nvPr>
+            <p:ph idx="1"/>
+          </p:nvPr>
+        </p:nvSpPr>
+        <p:spPr/>
+        <p:txBody>
+          <a:bodyPr/>
+          <a:lstStyle/>
+          <a:p>
+            <a:endParaRPr lang="de-DE"/>
+          </a:p>
+        </p:txBody>
+      </p:sp>
+      <p:sp>
+        <p:nvSpPr>
+          <p:cNvPr id="4" name="Foliennummernplatzhalter 3">
+            <a:extLst>
+              <a:ext uri="{FF2B5EF4-FFF2-40B4-BE49-F238E27FC236}">
+                <a16:creationId xmlns:a16="http://schemas.microsoft.com/office/drawing/2014/main" id="{6CCFB421-1136-E880-67A1-53A4654925D9}"/>
+              </a:ext>
+            </a:extLst>
+          </p:cNvPr>
+          <p:cNvSpPr>
+            <a:spLocks noGrp="1"/>
+          </p:cNvSpPr>
+          <p:nvPr>
+            <p:ph type="sldNum" sz="quarter" idx="12"/>
+          </p:nvPr>
+        </p:nvSpPr>
+        <p:spPr/>
+        <p:txBody>
+          <a:bodyPr/>
+          <a:lstStyle/>
+          <a:p>
+            <a:fld id="{08C366F5-AFAD-49CB-854A-9D9E238FCA13}" type="slidenum">
+              <a:rPr lang="en-GB" smtClean="0"/>
+              <a:t>26</a:t>
+            </a:fld>
+            <a:endParaRPr lang="en-GB"/>
+          </a:p>
+        </p:txBody>
+      </p:sp>
+    </p:spTree>
+    <p:extLst>
+      <p:ext uri="{BB962C8B-B14F-4D97-AF65-F5344CB8AC3E}">
+        <p14:creationId xmlns:p14="http://schemas.microsoft.com/office/powerpoint/2010/main" val="2711831897"/>
+      </p:ext>
+    </p:extLst>
+  </p:cSld>
+  <p:clrMapOvr>
+    <a:masterClrMapping/>
+  </p:clrMapOvr>
+</p:sld>
+</file>
+
+<file path=ppt/slides/slide27.xml><?xml version="1.0" encoding="utf-8"?>
+<p:sld xmlns:a="http://schemas.openxmlformats.org/drawingml/2006/main" xmlns:r="http://schemas.openxmlformats.org/officeDocument/2006/relationships" xmlns:p="http://schemas.openxmlformats.org/presentationml/2006/main">
+  <p:cSld>
+    <p:spTree>
+      <p:nvGrpSpPr>
+        <p:cNvPr id="1" name=""/>
+        <p:cNvGrpSpPr/>
+        <p:nvPr/>
+      </p:nvGrpSpPr>
+      <p:grpSpPr>
+        <a:xfrm>
+          <a:off x="0" y="0"/>
+          <a:ext cx="0" cy="0"/>
+          <a:chOff x="0" y="0"/>
+          <a:chExt cx="0" cy="0"/>
+        </a:xfrm>
+      </p:grpSpPr>
+      <p:sp>
+        <p:nvSpPr>
           <p:cNvPr id="3" name="Title 2">
             <a:extLst>
               <a:ext uri="{FF2B5EF4-FFF2-40B4-BE49-F238E27FC236}">
@@ -7737,7 +8168,7 @@
           <a:p>
             <a:fld id="{523A240F-EAFE-E84F-B44C-6D7A08E0E409}" type="slidenum">
               <a:rPr lang="en-US" smtClean="0"/>
-              <a:t>26</a:t>
+              <a:t>27</a:t>
             </a:fld>
             <a:endParaRPr lang="en-US" dirty="0"/>
           </a:p>
@@ -8306,7 +8737,7 @@
 </p:sld>
 </file>
 
-<file path=ppt/slides/slide27.xml><?xml version="1.0" encoding="utf-8"?>
+<file path=ppt/slides/slide28.xml><?xml version="1.0" encoding="utf-8"?>
 <p:sld xmlns:a="http://schemas.openxmlformats.org/drawingml/2006/main" xmlns:r="http://schemas.openxmlformats.org/officeDocument/2006/relationships" xmlns:p="http://schemas.openxmlformats.org/presentationml/2006/main">
   <p:cSld>
     <p:spTree>
@@ -8404,7 +8835,7 @@
           <a:p>
             <a:fld id="{08C366F5-AFAD-49CB-854A-9D9E238FCA13}" type="slidenum">
               <a:rPr lang="en-GB" smtClean="0"/>
-              <a:t>27</a:t>
+              <a:t>28</a:t>
             </a:fld>
             <a:endParaRPr lang="en-GB"/>
           </a:p>
@@ -8638,10 +9069,10 @@
       </p:grpSpPr>
       <p:sp>
         <p:nvSpPr>
-          <p:cNvPr id="2" name="Titel 1">
-            <a:extLst>
-              <a:ext uri="{FF2B5EF4-FFF2-40B4-BE49-F238E27FC236}">
-                <a16:creationId xmlns:a16="http://schemas.microsoft.com/office/drawing/2014/main" id="{19AF520E-D347-5174-A597-846D87503250}"/>
+          <p:cNvPr id="2" name="Title 1">
+            <a:extLst>
+              <a:ext uri="{FF2B5EF4-FFF2-40B4-BE49-F238E27FC236}">
+                <a16:creationId xmlns:a16="http://schemas.microsoft.com/office/drawing/2014/main" id="{AFCE4DCC-1C88-BE0F-22BF-F3CD39DFE553}"/>
               </a:ext>
             </a:extLst>
           </p:cNvPr>
@@ -8658,47 +9089,23 @@
           <a:lstStyle/>
           <a:p>
             <a:r>
-              <a:rPr lang="de-DE" dirty="0" err="1"/>
-              <a:t>Why</a:t>
+              <a:rPr lang="en-DE"/>
+              <a:t>Model</a:t>
             </a:r>
             <a:r>
               <a:rPr lang="de-DE" dirty="0"/>
-              <a:t> Feature Engineering Matters</a:t>
-            </a:r>
-          </a:p>
-        </p:txBody>
-      </p:sp>
-      <p:sp>
-        <p:nvSpPr>
-          <p:cNvPr id="3" name="Inhaltsplatzhalter 2">
-            <a:extLst>
-              <a:ext uri="{FF2B5EF4-FFF2-40B4-BE49-F238E27FC236}">
-                <a16:creationId xmlns:a16="http://schemas.microsoft.com/office/drawing/2014/main" id="{D6FB7F72-B5A7-08FB-698C-916D7D774D7D}"/>
-              </a:ext>
-            </a:extLst>
-          </p:cNvPr>
-          <p:cNvSpPr>
-            <a:spLocks noGrp="1"/>
-          </p:cNvSpPr>
-          <p:nvPr>
-            <p:ph idx="1"/>
-          </p:nvPr>
-        </p:nvSpPr>
-        <p:spPr/>
-        <p:txBody>
-          <a:bodyPr/>
-          <a:lstStyle/>
-          <a:p>
-            <a:endParaRPr lang="de-DE"/>
-          </a:p>
-        </p:txBody>
-      </p:sp>
-      <p:sp>
-        <p:nvSpPr>
-          <p:cNvPr id="4" name="Foliennummernplatzhalter 3">
-            <a:extLst>
-              <a:ext uri="{FF2B5EF4-FFF2-40B4-BE49-F238E27FC236}">
-                <a16:creationId xmlns:a16="http://schemas.microsoft.com/office/drawing/2014/main" id="{092D1ED3-6740-ED39-D16C-062D2EF2B7AF}"/>
+              <a:t> Pipeline</a:t>
+            </a:r>
+            <a:endParaRPr lang="en-DE" dirty="0"/>
+          </a:p>
+        </p:txBody>
+      </p:sp>
+      <p:sp>
+        <p:nvSpPr>
+          <p:cNvPr id="4" name="Slide Number Placeholder 3">
+            <a:extLst>
+              <a:ext uri="{FF2B5EF4-FFF2-40B4-BE49-F238E27FC236}">
+                <a16:creationId xmlns:a16="http://schemas.microsoft.com/office/drawing/2014/main" id="{C34ED241-E6F8-CD92-2049-87B878408F0D}"/>
               </a:ext>
             </a:extLst>
           </p:cNvPr>
@@ -8714,18 +9121,476 @@
           <a:bodyPr/>
           <a:lstStyle/>
           <a:p>
-            <a:fld id="{08C366F5-AFAD-49CB-854A-9D9E238FCA13}" type="slidenum">
-              <a:rPr lang="en-GB" smtClean="0"/>
+            <a:fld id="{ADDEFC8A-584C-5E41-A633-418C2FB73F75}" type="slidenum">
+              <a:rPr lang="en-DE" smtClean="0"/>
               <a:t>4</a:t>
             </a:fld>
-            <a:endParaRPr lang="en-GB"/>
+            <a:endParaRPr lang="en-DE"/>
+          </a:p>
+        </p:txBody>
+      </p:sp>
+      <p:sp>
+        <p:nvSpPr>
+          <p:cNvPr id="5" name="Rectangle: Rounded Corners 6">
+            <a:extLst>
+              <a:ext uri="{FF2B5EF4-FFF2-40B4-BE49-F238E27FC236}">
+                <a16:creationId xmlns:a16="http://schemas.microsoft.com/office/drawing/2014/main" id="{94EC203B-994C-B8F7-37D8-BE2BCF67ADA5}"/>
+              </a:ext>
+            </a:extLst>
+          </p:cNvPr>
+          <p:cNvSpPr/>
+          <p:nvPr/>
+        </p:nvSpPr>
+        <p:spPr>
+          <a:xfrm>
+            <a:off x="836209" y="1982757"/>
+            <a:ext cx="2734305" cy="3671809"/>
+          </a:xfrm>
+          <a:prstGeom prst="roundRect">
+            <a:avLst>
+              <a:gd name="adj" fmla="val 2569"/>
+            </a:avLst>
+          </a:prstGeom>
+          <a:solidFill>
+            <a:schemeClr val="bg1">
+              <a:lumMod val="95000"/>
+            </a:schemeClr>
+          </a:solidFill>
+          <a:ln>
+            <a:solidFill>
+              <a:schemeClr val="bg1">
+                <a:lumMod val="75000"/>
+              </a:schemeClr>
+            </a:solidFill>
+          </a:ln>
+          <a:effectLst/>
+        </p:spPr>
+        <p:style>
+          <a:lnRef idx="1">
+            <a:schemeClr val="accent1"/>
+          </a:lnRef>
+          <a:fillRef idx="3">
+            <a:schemeClr val="accent1"/>
+          </a:fillRef>
+          <a:effectRef idx="2">
+            <a:schemeClr val="accent1"/>
+          </a:effectRef>
+          <a:fontRef idx="minor">
+            <a:schemeClr val="lt1"/>
+          </a:fontRef>
+        </p:style>
+        <p:txBody>
+          <a:bodyPr rtlCol="0" anchor="ctr"/>
+          <a:lstStyle/>
+          <a:p>
+            <a:pPr algn="ctr"/>
+            <a:endParaRPr lang="en-US"/>
+          </a:p>
+        </p:txBody>
+      </p:sp>
+      <p:sp>
+        <p:nvSpPr>
+          <p:cNvPr id="6" name="Rectangle: Rounded Corners 7">
+            <a:extLst>
+              <a:ext uri="{FF2B5EF4-FFF2-40B4-BE49-F238E27FC236}">
+                <a16:creationId xmlns:a16="http://schemas.microsoft.com/office/drawing/2014/main" id="{B9DE0669-7ABB-C6AA-8A93-7DCAFDEF3AC1}"/>
+              </a:ext>
+            </a:extLst>
+          </p:cNvPr>
+          <p:cNvSpPr/>
+          <p:nvPr/>
+        </p:nvSpPr>
+        <p:spPr>
+          <a:xfrm>
+            <a:off x="4663626" y="1982758"/>
+            <a:ext cx="2734305" cy="3671808"/>
+          </a:xfrm>
+          <a:prstGeom prst="roundRect">
+            <a:avLst>
+              <a:gd name="adj" fmla="val 2569"/>
+            </a:avLst>
+          </a:prstGeom>
+          <a:solidFill>
+            <a:schemeClr val="bg1">
+              <a:lumMod val="95000"/>
+            </a:schemeClr>
+          </a:solidFill>
+          <a:ln>
+            <a:solidFill>
+              <a:schemeClr val="bg1">
+                <a:lumMod val="75000"/>
+              </a:schemeClr>
+            </a:solidFill>
+          </a:ln>
+          <a:effectLst/>
+        </p:spPr>
+        <p:style>
+          <a:lnRef idx="1">
+            <a:schemeClr val="accent1"/>
+          </a:lnRef>
+          <a:fillRef idx="3">
+            <a:schemeClr val="accent1"/>
+          </a:fillRef>
+          <a:effectRef idx="2">
+            <a:schemeClr val="accent1"/>
+          </a:effectRef>
+          <a:fontRef idx="minor">
+            <a:schemeClr val="lt1"/>
+          </a:fontRef>
+        </p:style>
+        <p:txBody>
+          <a:bodyPr rtlCol="0" anchor="ctr"/>
+          <a:lstStyle/>
+          <a:p>
+            <a:pPr algn="ctr"/>
+            <a:endParaRPr lang="en-US"/>
+          </a:p>
+        </p:txBody>
+      </p:sp>
+      <p:sp>
+        <p:nvSpPr>
+          <p:cNvPr id="7" name="Rectangle: Rounded Corners 8">
+            <a:extLst>
+              <a:ext uri="{FF2B5EF4-FFF2-40B4-BE49-F238E27FC236}">
+                <a16:creationId xmlns:a16="http://schemas.microsoft.com/office/drawing/2014/main" id="{9F1AC96E-292E-4DC0-CD52-02319B3B33C6}"/>
+              </a:ext>
+            </a:extLst>
+          </p:cNvPr>
+          <p:cNvSpPr/>
+          <p:nvPr/>
+        </p:nvSpPr>
+        <p:spPr>
+          <a:xfrm>
+            <a:off x="8491043" y="1982759"/>
+            <a:ext cx="2734305" cy="3671808"/>
+          </a:xfrm>
+          <a:prstGeom prst="roundRect">
+            <a:avLst>
+              <a:gd name="adj" fmla="val 2569"/>
+            </a:avLst>
+          </a:prstGeom>
+          <a:solidFill>
+            <a:schemeClr val="bg1">
+              <a:lumMod val="95000"/>
+            </a:schemeClr>
+          </a:solidFill>
+          <a:ln>
+            <a:solidFill>
+              <a:schemeClr val="bg1">
+                <a:lumMod val="75000"/>
+              </a:schemeClr>
+            </a:solidFill>
+          </a:ln>
+          <a:effectLst/>
+        </p:spPr>
+        <p:style>
+          <a:lnRef idx="1">
+            <a:schemeClr val="accent1"/>
+          </a:lnRef>
+          <a:fillRef idx="3">
+            <a:schemeClr val="accent1"/>
+          </a:fillRef>
+          <a:effectRef idx="2">
+            <a:schemeClr val="accent1"/>
+          </a:effectRef>
+          <a:fontRef idx="minor">
+            <a:schemeClr val="lt1"/>
+          </a:fontRef>
+        </p:style>
+        <p:txBody>
+          <a:bodyPr rtlCol="0" anchor="ctr"/>
+          <a:lstStyle/>
+          <a:p>
+            <a:pPr algn="ctr"/>
+            <a:endParaRPr lang="en-US"/>
+          </a:p>
+        </p:txBody>
+      </p:sp>
+      <p:sp>
+        <p:nvSpPr>
+          <p:cNvPr id="8" name="TextBox 7">
+            <a:extLst>
+              <a:ext uri="{FF2B5EF4-FFF2-40B4-BE49-F238E27FC236}">
+                <a16:creationId xmlns:a16="http://schemas.microsoft.com/office/drawing/2014/main" id="{A8460A2F-50B9-4D78-7BDC-AB1DD672E17D}"/>
+              </a:ext>
+            </a:extLst>
+          </p:cNvPr>
+          <p:cNvSpPr txBox="1"/>
+          <p:nvPr/>
+        </p:nvSpPr>
+        <p:spPr>
+          <a:xfrm>
+            <a:off x="836208" y="2180716"/>
+            <a:ext cx="2734305" cy="400110"/>
+          </a:xfrm>
+          <a:prstGeom prst="rect">
+            <a:avLst/>
+          </a:prstGeom>
+          <a:noFill/>
+        </p:spPr>
+        <p:txBody>
+          <a:bodyPr wrap="square" rtlCol="0">
+            <a:spAutoFit/>
+          </a:bodyPr>
+          <a:lstStyle/>
+          <a:p>
+            <a:pPr algn="ctr"/>
+            <a:r>
+              <a:rPr lang="en-US" sz="2000" b="1" dirty="0">
+                <a:solidFill>
+                  <a:schemeClr val="accent1">
+                    <a:lumMod val="50000"/>
+                  </a:schemeClr>
+                </a:solidFill>
+              </a:rPr>
+              <a:t>extract features</a:t>
+            </a:r>
+          </a:p>
+        </p:txBody>
+      </p:sp>
+      <p:sp>
+        <p:nvSpPr>
+          <p:cNvPr id="9" name="TextBox 8">
+            <a:extLst>
+              <a:ext uri="{FF2B5EF4-FFF2-40B4-BE49-F238E27FC236}">
+                <a16:creationId xmlns:a16="http://schemas.microsoft.com/office/drawing/2014/main" id="{759242BC-2021-D731-E05C-5F6D1F238594}"/>
+              </a:ext>
+            </a:extLst>
+          </p:cNvPr>
+          <p:cNvSpPr txBox="1"/>
+          <p:nvPr/>
+        </p:nvSpPr>
+        <p:spPr>
+          <a:xfrm>
+            <a:off x="826478" y="3240533"/>
+            <a:ext cx="2734305" cy="1754326"/>
+          </a:xfrm>
+          <a:prstGeom prst="rect">
+            <a:avLst/>
+          </a:prstGeom>
+          <a:noFill/>
+        </p:spPr>
+        <p:txBody>
+          <a:bodyPr wrap="square" rtlCol="0">
+            <a:spAutoFit/>
+          </a:bodyPr>
+          <a:lstStyle/>
+          <a:p>
+            <a:pPr marL="285750" indent="-173038">
+              <a:buFont typeface="Arial" panose="020B0604020202020204" pitchFamily="34" charset="0"/>
+              <a:buChar char="•"/>
+            </a:pPr>
+            <a:r>
+              <a:rPr lang="en-GB" dirty="0"/>
+              <a:t>h</a:t>
+            </a:r>
+            <a:r>
+              <a:rPr lang="en-DE" dirty="0"/>
+              <a:t>elp the ML algorithm to better understand the data</a:t>
+            </a:r>
+          </a:p>
+          <a:p>
+            <a:pPr marL="285750" indent="-173038">
+              <a:buFont typeface="Arial" panose="020B0604020202020204" pitchFamily="34" charset="0"/>
+              <a:buChar char="•"/>
+            </a:pPr>
+            <a:r>
+              <a:rPr lang="en-GB" dirty="0"/>
+              <a:t>impose</a:t>
+            </a:r>
+            <a:r>
+              <a:rPr lang="en-DE" dirty="0"/>
+              <a:t> assumptions hard to discover in the raw data</a:t>
+            </a:r>
+          </a:p>
+        </p:txBody>
+      </p:sp>
+      <p:sp>
+        <p:nvSpPr>
+          <p:cNvPr id="11" name="TextBox 10">
+            <a:extLst>
+              <a:ext uri="{FF2B5EF4-FFF2-40B4-BE49-F238E27FC236}">
+                <a16:creationId xmlns:a16="http://schemas.microsoft.com/office/drawing/2014/main" id="{C6B4A46C-C416-C94F-D3A8-40A6AE912C2F}"/>
+              </a:ext>
+            </a:extLst>
+          </p:cNvPr>
+          <p:cNvSpPr txBox="1"/>
+          <p:nvPr/>
+        </p:nvSpPr>
+        <p:spPr>
+          <a:xfrm>
+            <a:off x="4663625" y="2180716"/>
+            <a:ext cx="2734305" cy="400110"/>
+          </a:xfrm>
+          <a:prstGeom prst="rect">
+            <a:avLst/>
+          </a:prstGeom>
+          <a:noFill/>
+        </p:spPr>
+        <p:txBody>
+          <a:bodyPr wrap="square" rtlCol="0">
+            <a:spAutoFit/>
+          </a:bodyPr>
+          <a:lstStyle/>
+          <a:p>
+            <a:pPr algn="ctr"/>
+            <a:r>
+              <a:rPr lang="en-US" sz="2000" b="1" dirty="0">
+                <a:solidFill>
+                  <a:schemeClr val="accent1">
+                    <a:lumMod val="50000"/>
+                  </a:schemeClr>
+                </a:solidFill>
+              </a:rPr>
+              <a:t>choose ML algorithm</a:t>
+            </a:r>
+          </a:p>
+        </p:txBody>
+      </p:sp>
+      <p:sp>
+        <p:nvSpPr>
+          <p:cNvPr id="12" name="TextBox 11">
+            <a:extLst>
+              <a:ext uri="{FF2B5EF4-FFF2-40B4-BE49-F238E27FC236}">
+                <a16:creationId xmlns:a16="http://schemas.microsoft.com/office/drawing/2014/main" id="{89763E0E-A1B5-65B0-D21D-F7217D0D2E32}"/>
+              </a:ext>
+            </a:extLst>
+          </p:cNvPr>
+          <p:cNvSpPr txBox="1"/>
+          <p:nvPr/>
+        </p:nvSpPr>
+        <p:spPr>
+          <a:xfrm>
+            <a:off x="4683088" y="2963534"/>
+            <a:ext cx="2724574" cy="2308324"/>
+          </a:xfrm>
+          <a:prstGeom prst="rect">
+            <a:avLst/>
+          </a:prstGeom>
+          <a:noFill/>
+        </p:spPr>
+        <p:txBody>
+          <a:bodyPr wrap="square" rtlCol="0">
+            <a:spAutoFit/>
+          </a:bodyPr>
+          <a:lstStyle/>
+          <a:p>
+            <a:pPr marL="285750" indent="-173038">
+              <a:buFont typeface="Arial" panose="020B0604020202020204" pitchFamily="34" charset="0"/>
+              <a:buChar char="•"/>
+            </a:pPr>
+            <a:r>
+              <a:rPr lang="en-US" dirty="0"/>
+              <a:t>from open-source libraries like scikit-learn or pytorch, rarely write an own one</a:t>
+            </a:r>
+          </a:p>
+          <a:p>
+            <a:pPr marL="285750" indent="-173038">
+              <a:buFont typeface="Arial" panose="020B0604020202020204" pitchFamily="34" charset="0"/>
+              <a:buChar char="•"/>
+            </a:pPr>
+            <a:r>
+              <a:rPr lang="en-US" dirty="0"/>
+              <a:t>many different algorithms available, differently suited for given task</a:t>
+            </a:r>
+          </a:p>
+        </p:txBody>
+      </p:sp>
+      <p:sp>
+        <p:nvSpPr>
+          <p:cNvPr id="14" name="TextBox 13">
+            <a:extLst>
+              <a:ext uri="{FF2B5EF4-FFF2-40B4-BE49-F238E27FC236}">
+                <a16:creationId xmlns:a16="http://schemas.microsoft.com/office/drawing/2014/main" id="{E4B1AEF1-8878-64A3-A46C-5840F03F9AEA}"/>
+              </a:ext>
+            </a:extLst>
+          </p:cNvPr>
+          <p:cNvSpPr txBox="1"/>
+          <p:nvPr/>
+        </p:nvSpPr>
+        <p:spPr>
+          <a:xfrm>
+            <a:off x="8491042" y="2015245"/>
+            <a:ext cx="2734305" cy="707886"/>
+          </a:xfrm>
+          <a:prstGeom prst="rect">
+            <a:avLst/>
+          </a:prstGeom>
+          <a:noFill/>
+        </p:spPr>
+        <p:txBody>
+          <a:bodyPr wrap="square" rtlCol="0">
+            <a:spAutoFit/>
+          </a:bodyPr>
+          <a:lstStyle/>
+          <a:p>
+            <a:pPr algn="ctr"/>
+            <a:r>
+              <a:rPr lang="en-US" sz="2000" b="1" dirty="0">
+                <a:solidFill>
+                  <a:schemeClr val="accent1">
+                    <a:lumMod val="50000"/>
+                  </a:schemeClr>
+                </a:solidFill>
+              </a:rPr>
+              <a:t>hyperparameter tuning</a:t>
+            </a:r>
+          </a:p>
+        </p:txBody>
+      </p:sp>
+      <p:sp>
+        <p:nvSpPr>
+          <p:cNvPr id="15" name="TextBox 14">
+            <a:extLst>
+              <a:ext uri="{FF2B5EF4-FFF2-40B4-BE49-F238E27FC236}">
+                <a16:creationId xmlns:a16="http://schemas.microsoft.com/office/drawing/2014/main" id="{4B7A94E2-7F9E-3256-BE43-8875134C565F}"/>
+              </a:ext>
+            </a:extLst>
+          </p:cNvPr>
+          <p:cNvSpPr txBox="1"/>
+          <p:nvPr/>
+        </p:nvSpPr>
+        <p:spPr>
+          <a:xfrm>
+            <a:off x="8500775" y="3240533"/>
+            <a:ext cx="2611174" cy="1754326"/>
+          </a:xfrm>
+          <a:prstGeom prst="rect">
+            <a:avLst/>
+          </a:prstGeom>
+          <a:noFill/>
+        </p:spPr>
+        <p:txBody>
+          <a:bodyPr wrap="square" rtlCol="0">
+            <a:spAutoFit/>
+          </a:bodyPr>
+          <a:lstStyle/>
+          <a:p>
+            <a:pPr marL="398462" indent="-285750">
+              <a:buFont typeface="Arial" panose="020B0604020202020204" pitchFamily="34" charset="0"/>
+              <a:buChar char="•"/>
+            </a:pPr>
+            <a:r>
+              <a:rPr lang="en-US" dirty="0"/>
+              <a:t>variety of different forms</a:t>
+            </a:r>
+          </a:p>
+          <a:p>
+            <a:pPr marL="398462" indent="-285750">
+              <a:buFont typeface="Arial" panose="020B0604020202020204" pitchFamily="34" charset="0"/>
+              <a:buChar char="•"/>
+            </a:pPr>
+            <a:r>
+              <a:rPr lang="en-US" dirty="0"/>
+              <a:t>model settings not all automatically adjusted by the ML algorithm</a:t>
+            </a:r>
           </a:p>
         </p:txBody>
       </p:sp>
     </p:spTree>
     <p:extLst>
       <p:ext uri="{BB962C8B-B14F-4D97-AF65-F5344CB8AC3E}">
-        <p14:creationId xmlns:p14="http://schemas.microsoft.com/office/powerpoint/2010/main" val="291395111"/>
+        <p14:creationId xmlns:p14="http://schemas.microsoft.com/office/powerpoint/2010/main" val="2058052398"/>
       </p:ext>
     </p:extLst>
   </p:cSld>
@@ -8757,7 +9622,7 @@
           <p:cNvPr id="2" name="Titel 1">
             <a:extLst>
               <a:ext uri="{FF2B5EF4-FFF2-40B4-BE49-F238E27FC236}">
-                <a16:creationId xmlns:a16="http://schemas.microsoft.com/office/drawing/2014/main" id="{BC1405FC-52F4-2F5F-315A-9FA5320006E4}"/>
+                <a16:creationId xmlns:a16="http://schemas.microsoft.com/office/drawing/2014/main" id="{19AF520E-D347-5174-A597-846D87503250}"/>
               </a:ext>
             </a:extLst>
           </p:cNvPr>
@@ -8775,11 +9640,11 @@
           <a:p>
             <a:r>
               <a:rPr lang="de-DE" dirty="0" err="1"/>
-              <a:t>Numerical</a:t>
+              <a:t>Why</a:t>
             </a:r>
             <a:r>
               <a:rPr lang="de-DE" dirty="0"/>
-              <a:t> Features</a:t>
+              <a:t> Feature Engineering Matters</a:t>
             </a:r>
           </a:p>
         </p:txBody>
@@ -8789,7 +9654,7 @@
           <p:cNvPr id="3" name="Inhaltsplatzhalter 2">
             <a:extLst>
               <a:ext uri="{FF2B5EF4-FFF2-40B4-BE49-F238E27FC236}">
-                <a16:creationId xmlns:a16="http://schemas.microsoft.com/office/drawing/2014/main" id="{C1893269-41D5-8612-4320-F99D5CD73F21}"/>
+                <a16:creationId xmlns:a16="http://schemas.microsoft.com/office/drawing/2014/main" id="{D6FB7F72-B5A7-08FB-698C-916D7D774D7D}"/>
               </a:ext>
             </a:extLst>
           </p:cNvPr>
@@ -8814,7 +9679,7 @@
           <p:cNvPr id="4" name="Foliennummernplatzhalter 3">
             <a:extLst>
               <a:ext uri="{FF2B5EF4-FFF2-40B4-BE49-F238E27FC236}">
-                <a16:creationId xmlns:a16="http://schemas.microsoft.com/office/drawing/2014/main" id="{ED175B19-DA1F-ED6E-AC1A-8B9350332439}"/>
+                <a16:creationId xmlns:a16="http://schemas.microsoft.com/office/drawing/2014/main" id="{092D1ED3-6740-ED39-D16C-062D2EF2B7AF}"/>
               </a:ext>
             </a:extLst>
           </p:cNvPr>
@@ -8841,7 +9706,7 @@
     </p:spTree>
     <p:extLst>
       <p:ext uri="{BB962C8B-B14F-4D97-AF65-F5344CB8AC3E}">
-        <p14:creationId xmlns:p14="http://schemas.microsoft.com/office/powerpoint/2010/main" val="44178729"/>
+        <p14:creationId xmlns:p14="http://schemas.microsoft.com/office/powerpoint/2010/main" val="291395111"/>
       </p:ext>
     </p:extLst>
   </p:cSld>
@@ -8873,7 +9738,7 @@
           <p:cNvPr id="2" name="Titel 1">
             <a:extLst>
               <a:ext uri="{FF2B5EF4-FFF2-40B4-BE49-F238E27FC236}">
-                <a16:creationId xmlns:a16="http://schemas.microsoft.com/office/drawing/2014/main" id="{7214784E-C89E-599D-6CA5-8A8472E9813F}"/>
+                <a16:creationId xmlns:a16="http://schemas.microsoft.com/office/drawing/2014/main" id="{BC1405FC-52F4-2F5F-315A-9FA5320006E4}"/>
               </a:ext>
             </a:extLst>
           </p:cNvPr>
@@ -8891,11 +9756,11 @@
           <a:p>
             <a:r>
               <a:rPr lang="de-DE" dirty="0" err="1"/>
-              <a:t>Transformations</a:t>
+              <a:t>Numerical</a:t>
             </a:r>
             <a:r>
               <a:rPr lang="de-DE" dirty="0"/>
-              <a:t> (log, power, Box-Cox)</a:t>
+              <a:t> Features</a:t>
             </a:r>
           </a:p>
         </p:txBody>
@@ -8905,7 +9770,7 @@
           <p:cNvPr id="3" name="Inhaltsplatzhalter 2">
             <a:extLst>
               <a:ext uri="{FF2B5EF4-FFF2-40B4-BE49-F238E27FC236}">
-                <a16:creationId xmlns:a16="http://schemas.microsoft.com/office/drawing/2014/main" id="{CF9A72DC-1DD9-B8AF-7853-20EE438280D3}"/>
+                <a16:creationId xmlns:a16="http://schemas.microsoft.com/office/drawing/2014/main" id="{C1893269-41D5-8612-4320-F99D5CD73F21}"/>
               </a:ext>
             </a:extLst>
           </p:cNvPr>
@@ -8930,7 +9795,7 @@
           <p:cNvPr id="4" name="Foliennummernplatzhalter 3">
             <a:extLst>
               <a:ext uri="{FF2B5EF4-FFF2-40B4-BE49-F238E27FC236}">
-                <a16:creationId xmlns:a16="http://schemas.microsoft.com/office/drawing/2014/main" id="{71277F55-8E21-5C74-2446-B039AB2EFE83}"/>
+                <a16:creationId xmlns:a16="http://schemas.microsoft.com/office/drawing/2014/main" id="{ED175B19-DA1F-ED6E-AC1A-8B9350332439}"/>
               </a:ext>
             </a:extLst>
           </p:cNvPr>
@@ -8957,7 +9822,7 @@
     </p:spTree>
     <p:extLst>
       <p:ext uri="{BB962C8B-B14F-4D97-AF65-F5344CB8AC3E}">
-        <p14:creationId xmlns:p14="http://schemas.microsoft.com/office/powerpoint/2010/main" val="2209339379"/>
+        <p14:creationId xmlns:p14="http://schemas.microsoft.com/office/powerpoint/2010/main" val="44178729"/>
       </p:ext>
     </p:extLst>
   </p:cSld>
@@ -8989,7 +9854,7 @@
           <p:cNvPr id="2" name="Titel 1">
             <a:extLst>
               <a:ext uri="{FF2B5EF4-FFF2-40B4-BE49-F238E27FC236}">
-                <a16:creationId xmlns:a16="http://schemas.microsoft.com/office/drawing/2014/main" id="{7DACA889-7ABE-2F23-9392-B7CDD4D20D73}"/>
+                <a16:creationId xmlns:a16="http://schemas.microsoft.com/office/drawing/2014/main" id="{7214784E-C89E-599D-6CA5-8A8472E9813F}"/>
               </a:ext>
             </a:extLst>
           </p:cNvPr>
@@ -9006,22 +9871,13 @@
           <a:lstStyle/>
           <a:p>
             <a:r>
+              <a:rPr lang="de-DE" dirty="0" err="1"/>
+              <a:t>Transformations</a:t>
+            </a:r>
+            <a:r>
               <a:rPr lang="de-DE" dirty="0"/>
-              <a:t>Feature </a:t>
-            </a:r>
-            <a:r>
-              <a:rPr lang="de-DE" dirty="0" err="1"/>
-              <a:t>Scaling</a:t>
-            </a:r>
-            <a:r>
-              <a:rPr lang="de-DE" dirty="0"/>
-              <a:t> and </a:t>
-            </a:r>
-            <a:r>
-              <a:rPr lang="de-DE" dirty="0" err="1"/>
-              <a:t>Normalization</a:t>
-            </a:r>
-            <a:endParaRPr lang="de-DE" dirty="0"/>
+              <a:t> (log, power, Box-Cox)</a:t>
+            </a:r>
           </a:p>
         </p:txBody>
       </p:sp>
@@ -9030,7 +9886,7 @@
           <p:cNvPr id="3" name="Inhaltsplatzhalter 2">
             <a:extLst>
               <a:ext uri="{FF2B5EF4-FFF2-40B4-BE49-F238E27FC236}">
-                <a16:creationId xmlns:a16="http://schemas.microsoft.com/office/drawing/2014/main" id="{E3DAEA28-7DDD-166A-19F0-6215D90D93F4}"/>
+                <a16:creationId xmlns:a16="http://schemas.microsoft.com/office/drawing/2014/main" id="{CF9A72DC-1DD9-B8AF-7853-20EE438280D3}"/>
               </a:ext>
             </a:extLst>
           </p:cNvPr>
@@ -9055,7 +9911,7 @@
           <p:cNvPr id="4" name="Foliennummernplatzhalter 3">
             <a:extLst>
               <a:ext uri="{FF2B5EF4-FFF2-40B4-BE49-F238E27FC236}">
-                <a16:creationId xmlns:a16="http://schemas.microsoft.com/office/drawing/2014/main" id="{936151DA-671E-E498-1F72-039FE6A91F7D}"/>
+                <a16:creationId xmlns:a16="http://schemas.microsoft.com/office/drawing/2014/main" id="{71277F55-8E21-5C74-2446-B039AB2EFE83}"/>
               </a:ext>
             </a:extLst>
           </p:cNvPr>
@@ -9082,7 +9938,7 @@
     </p:spTree>
     <p:extLst>
       <p:ext uri="{BB962C8B-B14F-4D97-AF65-F5344CB8AC3E}">
-        <p14:creationId xmlns:p14="http://schemas.microsoft.com/office/powerpoint/2010/main" val="3093517853"/>
+        <p14:creationId xmlns:p14="http://schemas.microsoft.com/office/powerpoint/2010/main" val="2209339379"/>
       </p:ext>
     </p:extLst>
   </p:cSld>
@@ -9114,7 +9970,7 @@
           <p:cNvPr id="2" name="Titel 1">
             <a:extLst>
               <a:ext uri="{FF2B5EF4-FFF2-40B4-BE49-F238E27FC236}">
-                <a16:creationId xmlns:a16="http://schemas.microsoft.com/office/drawing/2014/main" id="{FEB5AB67-F77C-1D58-03A5-AEF89F0815BB}"/>
+                <a16:creationId xmlns:a16="http://schemas.microsoft.com/office/drawing/2014/main" id="{7DACA889-7ABE-2F23-9392-B7CDD4D20D73}"/>
               </a:ext>
             </a:extLst>
           </p:cNvPr>
@@ -9131,16 +9987,20 @@
           <a:lstStyle/>
           <a:p>
             <a:r>
+              <a:rPr lang="de-DE" dirty="0"/>
+              <a:t>Feature </a:t>
+            </a:r>
+            <a:r>
               <a:rPr lang="de-DE" dirty="0" err="1"/>
-              <a:t>Categorical</a:t>
+              <a:t>Scaling</a:t>
             </a:r>
             <a:r>
               <a:rPr lang="de-DE" dirty="0"/>
-              <a:t> Features: </a:t>
+              <a:t> and </a:t>
             </a:r>
             <a:r>
               <a:rPr lang="de-DE" dirty="0" err="1"/>
-              <a:t>Types</a:t>
+              <a:t>Normalization</a:t>
             </a:r>
             <a:endParaRPr lang="de-DE" dirty="0"/>
           </a:p>
@@ -9151,7 +10011,7 @@
           <p:cNvPr id="3" name="Inhaltsplatzhalter 2">
             <a:extLst>
               <a:ext uri="{FF2B5EF4-FFF2-40B4-BE49-F238E27FC236}">
-                <a16:creationId xmlns:a16="http://schemas.microsoft.com/office/drawing/2014/main" id="{5A993410-D8E0-5839-5F99-8816796C65AB}"/>
+                <a16:creationId xmlns:a16="http://schemas.microsoft.com/office/drawing/2014/main" id="{E3DAEA28-7DDD-166A-19F0-6215D90D93F4}"/>
               </a:ext>
             </a:extLst>
           </p:cNvPr>
@@ -9176,7 +10036,7 @@
           <p:cNvPr id="4" name="Foliennummernplatzhalter 3">
             <a:extLst>
               <a:ext uri="{FF2B5EF4-FFF2-40B4-BE49-F238E27FC236}">
-                <a16:creationId xmlns:a16="http://schemas.microsoft.com/office/drawing/2014/main" id="{6252818F-E158-709B-1393-500769279306}"/>
+                <a16:creationId xmlns:a16="http://schemas.microsoft.com/office/drawing/2014/main" id="{936151DA-671E-E498-1F72-039FE6A91F7D}"/>
               </a:ext>
             </a:extLst>
           </p:cNvPr>
@@ -9203,7 +10063,7 @@
     </p:spTree>
     <p:extLst>
       <p:ext uri="{BB962C8B-B14F-4D97-AF65-F5344CB8AC3E}">
-        <p14:creationId xmlns:p14="http://schemas.microsoft.com/office/powerpoint/2010/main" val="1137842183"/>
+        <p14:creationId xmlns:p14="http://schemas.microsoft.com/office/powerpoint/2010/main" val="3093517853"/>
       </p:ext>
     </p:extLst>
   </p:cSld>
@@ -9232,10 +10092,10 @@
       </p:grpSpPr>
       <p:sp>
         <p:nvSpPr>
-          <p:cNvPr id="2" name="Title 1">
-            <a:extLst>
-              <a:ext uri="{FF2B5EF4-FFF2-40B4-BE49-F238E27FC236}">
-                <a16:creationId xmlns:a16="http://schemas.microsoft.com/office/drawing/2014/main" id="{A9196BE7-ED4C-5E2B-564B-33799AF07E7E}"/>
+          <p:cNvPr id="2" name="Titel 1">
+            <a:extLst>
+              <a:ext uri="{FF2B5EF4-FFF2-40B4-BE49-F238E27FC236}">
+                <a16:creationId xmlns:a16="http://schemas.microsoft.com/office/drawing/2014/main" id="{FEB5AB67-F77C-1D58-03A5-AEF89F0815BB}"/>
               </a:ext>
             </a:extLst>
           </p:cNvPr>
@@ -9252,18 +10112,27 @@
           <a:lstStyle/>
           <a:p>
             <a:r>
-              <a:rPr lang="en-DE" dirty="0"/>
-              <a:t>Categorical Variables</a:t>
-            </a:r>
-          </a:p>
-        </p:txBody>
-      </p:sp>
-      <p:sp>
-        <p:nvSpPr>
-          <p:cNvPr id="3" name="Content Placeholder 2">
-            <a:extLst>
-              <a:ext uri="{FF2B5EF4-FFF2-40B4-BE49-F238E27FC236}">
-                <a16:creationId xmlns:a16="http://schemas.microsoft.com/office/drawing/2014/main" id="{F32FCC10-8545-2083-F633-36ECF823DC08}"/>
+              <a:rPr lang="de-DE" dirty="0" err="1"/>
+              <a:t>Categorical</a:t>
+            </a:r>
+            <a:r>
+              <a:rPr lang="de-DE" dirty="0"/>
+              <a:t> Features: </a:t>
+            </a:r>
+            <a:r>
+              <a:rPr lang="de-DE" dirty="0" err="1"/>
+              <a:t>Types</a:t>
+            </a:r>
+            <a:endParaRPr lang="de-DE" dirty="0"/>
+          </a:p>
+        </p:txBody>
+      </p:sp>
+      <p:sp>
+        <p:nvSpPr>
+          <p:cNvPr id="3" name="Inhaltsplatzhalter 2">
+            <a:extLst>
+              <a:ext uri="{FF2B5EF4-FFF2-40B4-BE49-F238E27FC236}">
+                <a16:creationId xmlns:a16="http://schemas.microsoft.com/office/drawing/2014/main" id="{5A993410-D8E0-5839-5F99-8816796C65AB}"/>
               </a:ext>
             </a:extLst>
           </p:cNvPr>
@@ -9274,105 +10143,21 @@
             <p:ph idx="1"/>
           </p:nvPr>
         </p:nvSpPr>
-        <p:spPr>
-          <a:xfrm>
-            <a:off x="838200" y="1825625"/>
-            <a:ext cx="7012459" cy="4351338"/>
-          </a:xfrm>
-        </p:spPr>
-        <p:txBody>
-          <a:bodyPr>
-            <a:normAutofit fontScale="92500" lnSpcReduction="10000"/>
-          </a:bodyPr>
-          <a:lstStyle/>
-          <a:p>
-            <a:pPr marL="0" indent="0">
-              <a:buNone/>
-            </a:pPr>
-            <a:r>
-              <a:rPr lang="en-GB" sz="2600" dirty="0"/>
-              <a:t>tabular data usually heterogenous, often with sparse c</a:t>
-            </a:r>
-            <a:r>
-              <a:rPr lang="en-DE" sz="2600" dirty="0"/>
-              <a:t>ategorical variables (like color of an object)</a:t>
-            </a:r>
-          </a:p>
-          <a:p>
-            <a:pPr marL="0" indent="0">
-              <a:buNone/>
-            </a:pPr>
-            <a:r>
-              <a:rPr lang="en-GB" sz="2600" dirty="0">
-                <a:sym typeface="Wingdings" pitchFamily="2" charset="2"/>
-              </a:rPr>
-              <a:t> need for an encoding for categorical variables</a:t>
-            </a:r>
-            <a:endParaRPr lang="en-GB" sz="2600" dirty="0"/>
-          </a:p>
-          <a:p>
-            <a:pPr marL="0" indent="0">
-              <a:buNone/>
-            </a:pPr>
-            <a:endParaRPr lang="en-GB" sz="2600" dirty="0"/>
-          </a:p>
-          <a:p>
-            <a:pPr marL="0" indent="0">
-              <a:buNone/>
-            </a:pPr>
-            <a:r>
-              <a:rPr lang="en-GB" sz="2600" dirty="0"/>
-              <a:t>different possibilities:</a:t>
-            </a:r>
-            <a:endParaRPr lang="en-DE" sz="2600" dirty="0"/>
-          </a:p>
-          <a:p>
-            <a:r>
-              <a:rPr lang="en-GB" sz="2600" dirty="0"/>
-              <a:t>o</a:t>
-            </a:r>
-            <a:r>
-              <a:rPr lang="en-DE" sz="2600" dirty="0"/>
-              <a:t>rdinal encoding</a:t>
-            </a:r>
-          </a:p>
-          <a:p>
-            <a:r>
-              <a:rPr lang="en-DE" sz="2600" dirty="0"/>
-              <a:t>leave-one-out encoding (use mean of target for given category excluding current row)</a:t>
-            </a:r>
-          </a:p>
-          <a:p>
-            <a:r>
-              <a:rPr lang="en-DE" sz="2600" dirty="0"/>
-              <a:t>one-hot encoding (suffer</a:t>
-            </a:r>
-            <a:r>
-              <a:rPr lang="en-GB" sz="2600" dirty="0"/>
-              <a:t>s</a:t>
-            </a:r>
-            <a:r>
-              <a:rPr lang="en-DE" sz="2600" dirty="0"/>
-              <a:t> from curse of dimensionality)</a:t>
-            </a:r>
-          </a:p>
-          <a:p>
-            <a:r>
-              <a:rPr lang="en-DE" sz="2600" dirty="0"/>
-              <a:t>embeddings</a:t>
-            </a:r>
-          </a:p>
-          <a:p>
-            <a:endParaRPr lang="en-GB" dirty="0"/>
-          </a:p>
-        </p:txBody>
-      </p:sp>
-      <p:sp>
-        <p:nvSpPr>
-          <p:cNvPr id="4" name="Slide Number Placeholder 3">
-            <a:extLst>
-              <a:ext uri="{FF2B5EF4-FFF2-40B4-BE49-F238E27FC236}">
-                <a16:creationId xmlns:a16="http://schemas.microsoft.com/office/drawing/2014/main" id="{10A7ECF4-88CC-6FFA-B376-C462D8970327}"/>
+        <p:spPr/>
+        <p:txBody>
+          <a:bodyPr/>
+          <a:lstStyle/>
+          <a:p>
+            <a:endParaRPr lang="de-DE"/>
+          </a:p>
+        </p:txBody>
+      </p:sp>
+      <p:sp>
+        <p:nvSpPr>
+          <p:cNvPr id="4" name="Foliennummernplatzhalter 3">
+            <a:extLst>
+              <a:ext uri="{FF2B5EF4-FFF2-40B4-BE49-F238E27FC236}">
+                <a16:creationId xmlns:a16="http://schemas.microsoft.com/office/drawing/2014/main" id="{6252818F-E158-709B-1393-500769279306}"/>
               </a:ext>
             </a:extLst>
           </p:cNvPr>
@@ -9388,252 +10173,18 @@
           <a:bodyPr/>
           <a:lstStyle/>
           <a:p>
-            <a:fld id="{290AF890-0265-4349-BF13-E30F01A2AA85}" type="slidenum">
-              <a:rPr lang="en-DE" smtClean="0"/>
+            <a:fld id="{08C366F5-AFAD-49CB-854A-9D9E238FCA13}" type="slidenum">
+              <a:rPr lang="en-GB" smtClean="0"/>
               <a:t>9</a:t>
             </a:fld>
-            <a:endParaRPr lang="en-DE"/>
-          </a:p>
-        </p:txBody>
-      </p:sp>
-      <p:sp>
-        <p:nvSpPr>
-          <p:cNvPr id="5" name="TextBox 4">
-            <a:extLst>
-              <a:ext uri="{FF2B5EF4-FFF2-40B4-BE49-F238E27FC236}">
-                <a16:creationId xmlns:a16="http://schemas.microsoft.com/office/drawing/2014/main" id="{804D5CA4-59B9-8AEA-7DD8-3C2E7B69893D}"/>
-              </a:ext>
-            </a:extLst>
-          </p:cNvPr>
-          <p:cNvSpPr txBox="1"/>
-          <p:nvPr/>
-        </p:nvSpPr>
-        <p:spPr>
-          <a:xfrm>
-            <a:off x="8448767" y="4000749"/>
-            <a:ext cx="3066865" cy="830997"/>
-          </a:xfrm>
-          <a:prstGeom prst="rect">
-            <a:avLst/>
-          </a:prstGeom>
-          <a:noFill/>
-        </p:spPr>
-        <p:txBody>
-          <a:bodyPr wrap="none" rtlCol="0">
-            <a:spAutoFit/>
-          </a:bodyPr>
-          <a:lstStyle/>
-          <a:p>
-            <a:r>
-              <a:rPr lang="en-GB" sz="1200" dirty="0" err="1">
-                <a:latin typeface="Courier" pitchFamily="2" charset="0"/>
-              </a:rPr>
-              <a:t>X.sort_values</a:t>
-            </a:r>
-            <a:r>
-              <a:rPr lang="en-GB" sz="1200" dirty="0">
-                <a:latin typeface="Courier" pitchFamily="2" charset="0"/>
-              </a:rPr>
-              <a:t>(['date’])</a:t>
-            </a:r>
-          </a:p>
-          <a:p>
-            <a:r>
-              <a:rPr lang="en-GB" sz="1200" dirty="0">
-                <a:latin typeface="Courier" pitchFamily="2" charset="0"/>
-              </a:rPr>
-              <a:t>.</a:t>
-            </a:r>
-            <a:r>
-              <a:rPr lang="en-GB" sz="1200" dirty="0" err="1">
-                <a:latin typeface="Courier" pitchFamily="2" charset="0"/>
-              </a:rPr>
-              <a:t>groupby</a:t>
-            </a:r>
-            <a:r>
-              <a:rPr lang="en-GB" sz="1200" dirty="0">
-                <a:latin typeface="Courier" pitchFamily="2" charset="0"/>
-              </a:rPr>
-              <a:t>(['</a:t>
-            </a:r>
-            <a:r>
-              <a:rPr lang="en-GB" sz="1200" dirty="0" err="1">
-                <a:latin typeface="Courier" pitchFamily="2" charset="0"/>
-              </a:rPr>
-              <a:t>store','item</a:t>
-            </a:r>
-            <a:r>
-              <a:rPr lang="en-GB" sz="1200" dirty="0">
-                <a:latin typeface="Courier" pitchFamily="2" charset="0"/>
-              </a:rPr>
-              <a:t>'])['y’]</a:t>
-            </a:r>
-          </a:p>
-          <a:p>
-            <a:r>
-              <a:rPr lang="en-GB" sz="1200" dirty="0">
-                <a:latin typeface="Courier" pitchFamily="2" charset="0"/>
-              </a:rPr>
-              <a:t>.apply(lambda x: </a:t>
-            </a:r>
-            <a:r>
-              <a:rPr lang="en-GB" sz="1200" dirty="0" err="1">
-                <a:latin typeface="Courier" pitchFamily="2" charset="0"/>
-              </a:rPr>
-              <a:t>x.shift</a:t>
-            </a:r>
-            <a:r>
-              <a:rPr lang="en-GB" sz="1200" dirty="0">
-                <a:latin typeface="Courier" pitchFamily="2" charset="0"/>
-              </a:rPr>
-              <a:t>(3)</a:t>
-            </a:r>
-          </a:p>
-          <a:p>
-            <a:r>
-              <a:rPr lang="en-GB" sz="1200" dirty="0">
-                <a:latin typeface="Courier" pitchFamily="2" charset="0"/>
-              </a:rPr>
-              <a:t>.</a:t>
-            </a:r>
-            <a:r>
-              <a:rPr lang="en-GB" sz="1200" dirty="0" err="1">
-                <a:latin typeface="Courier" pitchFamily="2" charset="0"/>
-              </a:rPr>
-              <a:t>ewm</a:t>
-            </a:r>
-            <a:r>
-              <a:rPr lang="en-GB" sz="1200" dirty="0">
-                <a:latin typeface="Courier" pitchFamily="2" charset="0"/>
-              </a:rPr>
-              <a:t>(alpha=0.15).mean())</a:t>
-            </a:r>
-          </a:p>
-        </p:txBody>
-      </p:sp>
-      <p:sp>
-        <p:nvSpPr>
-          <p:cNvPr id="6" name="TextBox 5">
-            <a:extLst>
-              <a:ext uri="{FF2B5EF4-FFF2-40B4-BE49-F238E27FC236}">
-                <a16:creationId xmlns:a16="http://schemas.microsoft.com/office/drawing/2014/main" id="{4F914F96-5D83-53CF-A1A4-98198E01EFD9}"/>
-              </a:ext>
-            </a:extLst>
-          </p:cNvPr>
-          <p:cNvSpPr txBox="1"/>
-          <p:nvPr/>
-        </p:nvSpPr>
-        <p:spPr>
-          <a:xfrm>
-            <a:off x="10498489" y="4834909"/>
-            <a:ext cx="1615763" cy="323165"/>
-          </a:xfrm>
-          <a:prstGeom prst="rect">
-            <a:avLst/>
-          </a:prstGeom>
-          <a:noFill/>
-        </p:spPr>
-        <p:txBody>
-          <a:bodyPr wrap="none" rtlCol="0">
-            <a:spAutoFit/>
-          </a:bodyPr>
-          <a:lstStyle/>
-          <a:p>
-            <a:r>
-              <a:rPr lang="en-GB" sz="1500" dirty="0"/>
-              <a:t>p</a:t>
-            </a:r>
-            <a:r>
-              <a:rPr lang="en-DE" sz="1500" dirty="0"/>
-              <a:t>rediction horizon</a:t>
-            </a:r>
-          </a:p>
-        </p:txBody>
-      </p:sp>
-      <p:cxnSp>
-        <p:nvCxnSpPr>
-          <p:cNvPr id="7" name="Straight Arrow Connector 6">
-            <a:extLst>
-              <a:ext uri="{FF2B5EF4-FFF2-40B4-BE49-F238E27FC236}">
-                <a16:creationId xmlns:a16="http://schemas.microsoft.com/office/drawing/2014/main" id="{4D31E913-8076-767F-3FFA-49228926DD2A}"/>
-              </a:ext>
-            </a:extLst>
-          </p:cNvPr>
-          <p:cNvCxnSpPr>
-            <a:cxnSpLocks/>
-          </p:cNvCxnSpPr>
-          <p:nvPr/>
-        </p:nvCxnSpPr>
-        <p:spPr>
-          <a:xfrm flipH="1" flipV="1">
-            <a:off x="10898248" y="4580913"/>
-            <a:ext cx="132217" cy="278710"/>
-          </a:xfrm>
-          <a:prstGeom prst="straightConnector1">
-            <a:avLst/>
-          </a:prstGeom>
-          <a:ln w="12700" cmpd="sng">
-            <a:solidFill>
-              <a:schemeClr val="tx1"/>
-            </a:solidFill>
-            <a:tailEnd type="triangle"/>
-          </a:ln>
-          <a:effectLst/>
-        </p:spPr>
-        <p:style>
-          <a:lnRef idx="2">
-            <a:schemeClr val="accent1"/>
-          </a:lnRef>
-          <a:fillRef idx="0">
-            <a:schemeClr val="accent1"/>
-          </a:fillRef>
-          <a:effectRef idx="1">
-            <a:schemeClr val="accent1"/>
-          </a:effectRef>
-          <a:fontRef idx="minor">
-            <a:schemeClr val="tx1"/>
-          </a:fontRef>
-        </p:style>
-      </p:cxnSp>
-      <p:sp>
-        <p:nvSpPr>
-          <p:cNvPr id="8" name="TextBox 7">
-            <a:extLst>
-              <a:ext uri="{FF2B5EF4-FFF2-40B4-BE49-F238E27FC236}">
-                <a16:creationId xmlns:a16="http://schemas.microsoft.com/office/drawing/2014/main" id="{5B769A41-4005-10D3-8FBE-6E3F868A80AA}"/>
-              </a:ext>
-            </a:extLst>
-          </p:cNvPr>
-          <p:cNvSpPr txBox="1"/>
-          <p:nvPr/>
-        </p:nvSpPr>
-        <p:spPr>
-          <a:xfrm>
-            <a:off x="8448767" y="3628254"/>
-            <a:ext cx="1004827" cy="369332"/>
-          </a:xfrm>
-          <a:prstGeom prst="rect">
-            <a:avLst/>
-          </a:prstGeom>
-          <a:noFill/>
-        </p:spPr>
-        <p:txBody>
-          <a:bodyPr wrap="none" rtlCol="0">
-            <a:spAutoFit/>
-          </a:bodyPr>
-          <a:lstStyle/>
-          <a:p>
-            <a:r>
-              <a:rPr lang="en-GB" dirty="0"/>
-              <a:t>stacking:</a:t>
-            </a:r>
+            <a:endParaRPr lang="en-GB"/>
           </a:p>
         </p:txBody>
       </p:sp>
     </p:spTree>
     <p:extLst>
       <p:ext uri="{BB962C8B-B14F-4D97-AF65-F5344CB8AC3E}">
-        <p14:creationId xmlns:p14="http://schemas.microsoft.com/office/powerpoint/2010/main" val="2471018423"/>
+        <p14:creationId xmlns:p14="http://schemas.microsoft.com/office/powerpoint/2010/main" val="1137842183"/>
       </p:ext>
     </p:extLst>
   </p:cSld>

--- a/slides/6_feature_engineering.pptx
+++ b/slides/6_feature_engineering.pptx
@@ -5,7 +5,7 @@
     <p:sldMasterId id="2147483648" r:id="rId1"/>
   </p:sldMasterIdLst>
   <p:notesMasterIdLst>
-    <p:notesMasterId r:id="rId30"/>
+    <p:notesMasterId r:id="rId31"/>
   </p:notesMasterIdLst>
   <p:sldIdLst>
     <p:sldId id="256" r:id="rId2"/>
@@ -36,6 +36,7 @@
     <p:sldId id="283" r:id="rId27"/>
     <p:sldId id="669" r:id="rId28"/>
     <p:sldId id="284" r:id="rId29"/>
+    <p:sldId id="780" r:id="rId30"/>
   </p:sldIdLst>
   <p:sldSz cx="12192000" cy="6858000"/>
   <p:notesSz cx="6858000" cy="9144000"/>
@@ -506,7 +507,7 @@
           <a:p>
             <a:fld id="{506E0FD1-891F-4B1E-916D-E9B585160BB8}" type="datetimeFigureOut">
               <a:rPr lang="en-GB" smtClean="0"/>
-              <a:t>11/03/2026</a:t>
+              <a:t>20/03/2026</a:t>
             </a:fld>
             <a:endParaRPr lang="en-GB"/>
           </a:p>
@@ -923,7 +924,7 @@
           <a:p>
             <a:fld id="{D68C3F22-27B2-44E3-9C5F-D08126455F6F}" type="datetime1">
               <a:rPr lang="en-GB" smtClean="0"/>
-              <a:t>11/03/2026</a:t>
+              <a:t>20/03/2026</a:t>
             </a:fld>
             <a:endParaRPr lang="en-GB"/>
           </a:p>
@@ -1123,7 +1124,7 @@
           <a:p>
             <a:fld id="{1CD03846-7BF6-4FB6-A921-FF3379ADBD4C}" type="datetime1">
               <a:rPr lang="en-GB" smtClean="0"/>
-              <a:t>11/03/2026</a:t>
+              <a:t>20/03/2026</a:t>
             </a:fld>
             <a:endParaRPr lang="en-GB"/>
           </a:p>
@@ -1333,7 +1334,7 @@
           <a:p>
             <a:fld id="{99E1B91A-3FD0-4144-9C84-63E9688ED2FE}" type="datetime1">
               <a:rPr lang="en-GB" smtClean="0"/>
-              <a:t>11/03/2026</a:t>
+              <a:t>20/03/2026</a:t>
             </a:fld>
             <a:endParaRPr lang="en-GB"/>
           </a:p>
@@ -1533,7 +1534,7 @@
           <a:p>
             <a:fld id="{5295ED7B-FEAD-4734-819F-93EF4B0EA908}" type="datetime1">
               <a:rPr lang="en-GB" smtClean="0"/>
-              <a:t>11/03/2026</a:t>
+              <a:t>20/03/2026</a:t>
             </a:fld>
             <a:endParaRPr lang="en-GB"/>
           </a:p>
@@ -1809,7 +1810,7 @@
           <a:p>
             <a:fld id="{D2D5D4B4-C926-4B45-8815-1ED8911179A2}" type="datetime1">
               <a:rPr lang="en-GB" smtClean="0"/>
-              <a:t>11/03/2026</a:t>
+              <a:t>20/03/2026</a:t>
             </a:fld>
             <a:endParaRPr lang="en-GB"/>
           </a:p>
@@ -2077,7 +2078,7 @@
           <a:p>
             <a:fld id="{B4C5210A-0E37-4935-93AF-69F21A5F712F}" type="datetime1">
               <a:rPr lang="en-GB" smtClean="0"/>
-              <a:t>11/03/2026</a:t>
+              <a:t>20/03/2026</a:t>
             </a:fld>
             <a:endParaRPr lang="en-GB"/>
           </a:p>
@@ -2492,7 +2493,7 @@
           <a:p>
             <a:fld id="{3D3A6B2F-436C-4691-80E8-9C890E000E9D}" type="datetime1">
               <a:rPr lang="en-GB" smtClean="0"/>
-              <a:t>11/03/2026</a:t>
+              <a:t>20/03/2026</a:t>
             </a:fld>
             <a:endParaRPr lang="en-GB"/>
           </a:p>
@@ -2634,7 +2635,7 @@
           <a:p>
             <a:fld id="{84385F4C-D74B-496F-8D21-97E3549C783B}" type="datetime1">
               <a:rPr lang="en-GB" smtClean="0"/>
-              <a:t>11/03/2026</a:t>
+              <a:t>20/03/2026</a:t>
             </a:fld>
             <a:endParaRPr lang="en-GB"/>
           </a:p>
@@ -2747,7 +2748,7 @@
           <a:p>
             <a:fld id="{0CBDCB32-C241-4703-A832-4EB47BD54E83}" type="datetime1">
               <a:rPr lang="en-GB" smtClean="0"/>
-              <a:t>11/03/2026</a:t>
+              <a:t>20/03/2026</a:t>
             </a:fld>
             <a:endParaRPr lang="en-GB"/>
           </a:p>
@@ -3060,7 +3061,7 @@
           <a:p>
             <a:fld id="{85C150FF-BE95-4D25-A16A-E368A81CBF24}" type="datetime1">
               <a:rPr lang="en-GB" smtClean="0"/>
-              <a:t>11/03/2026</a:t>
+              <a:t>20/03/2026</a:t>
             </a:fld>
             <a:endParaRPr lang="en-GB"/>
           </a:p>
@@ -3349,7 +3350,7 @@
           <a:p>
             <a:fld id="{F3C5DB4B-B349-43C9-A424-BADA723AD9F1}" type="datetime1">
               <a:rPr lang="en-GB" smtClean="0"/>
-              <a:t>11/03/2026</a:t>
+              <a:t>20/03/2026</a:t>
             </a:fld>
             <a:endParaRPr lang="en-GB"/>
           </a:p>
@@ -3592,7 +3593,7 @@
           <a:p>
             <a:fld id="{12632426-0A0C-405F-A3D0-2D11AA44702A}" type="datetime1">
               <a:rPr lang="en-GB" smtClean="0"/>
-              <a:t>11/03/2026</a:t>
+              <a:t>20/03/2026</a:t>
             </a:fld>
             <a:endParaRPr lang="en-GB"/>
           </a:p>
@@ -8845,6 +8846,143 @@
     <p:extLst>
       <p:ext uri="{BB962C8B-B14F-4D97-AF65-F5344CB8AC3E}">
         <p14:creationId xmlns:p14="http://schemas.microsoft.com/office/powerpoint/2010/main" val="975400455"/>
+      </p:ext>
+    </p:extLst>
+  </p:cSld>
+  <p:clrMapOvr>
+    <a:masterClrMapping/>
+  </p:clrMapOvr>
+</p:sld>
+</file>
+
+<file path=ppt/slides/slide29.xml><?xml version="1.0" encoding="utf-8"?>
+<p:sld xmlns:a="http://schemas.openxmlformats.org/drawingml/2006/main" xmlns:r="http://schemas.openxmlformats.org/officeDocument/2006/relationships" xmlns:p="http://schemas.openxmlformats.org/presentationml/2006/main">
+  <p:cSld>
+    <p:spTree>
+      <p:nvGrpSpPr>
+        <p:cNvPr id="1" name=""/>
+        <p:cNvGrpSpPr/>
+        <p:nvPr/>
+      </p:nvGrpSpPr>
+      <p:grpSpPr>
+        <a:xfrm>
+          <a:off x="0" y="0"/>
+          <a:ext cx="0" cy="0"/>
+          <a:chOff x="0" y="0"/>
+          <a:chExt cx="0" cy="0"/>
+        </a:xfrm>
+      </p:grpSpPr>
+      <p:sp>
+        <p:nvSpPr>
+          <p:cNvPr id="3" name="Titel 2">
+            <a:extLst>
+              <a:ext uri="{FF2B5EF4-FFF2-40B4-BE49-F238E27FC236}">
+                <a16:creationId xmlns:a16="http://schemas.microsoft.com/office/drawing/2014/main" id="{67675B1F-E173-98A4-AD50-0B743B2D6DA1}"/>
+              </a:ext>
+            </a:extLst>
+          </p:cNvPr>
+          <p:cNvSpPr>
+            <a:spLocks noGrp="1"/>
+          </p:cNvSpPr>
+          <p:nvPr>
+            <p:ph type="title"/>
+          </p:nvPr>
+        </p:nvSpPr>
+        <p:spPr/>
+        <p:txBody>
+          <a:bodyPr/>
+          <a:lstStyle/>
+          <a:p>
+            <a:r>
+              <a:rPr lang="de-DE" dirty="0"/>
+              <a:t>Practice Project</a:t>
+            </a:r>
+          </a:p>
+        </p:txBody>
+      </p:sp>
+      <p:sp>
+        <p:nvSpPr>
+          <p:cNvPr id="4" name="Inhaltsplatzhalter 3">
+            <a:extLst>
+              <a:ext uri="{FF2B5EF4-FFF2-40B4-BE49-F238E27FC236}">
+                <a16:creationId xmlns:a16="http://schemas.microsoft.com/office/drawing/2014/main" id="{44DD3C46-343C-0713-2B34-80AA5550422A}"/>
+              </a:ext>
+            </a:extLst>
+          </p:cNvPr>
+          <p:cNvSpPr>
+            <a:spLocks noGrp="1"/>
+          </p:cNvSpPr>
+          <p:nvPr>
+            <p:ph idx="1"/>
+          </p:nvPr>
+        </p:nvSpPr>
+        <p:spPr/>
+        <p:txBody>
+          <a:bodyPr/>
+          <a:lstStyle/>
+          <a:p>
+            <a:pPr marL="0" indent="0">
+              <a:buNone/>
+            </a:pPr>
+            <a:endParaRPr lang="de-DE" dirty="0">
+              <a:hlinkClick r:id="rId2"/>
+            </a:endParaRPr>
+          </a:p>
+          <a:p>
+            <a:pPr marL="0" indent="0">
+              <a:buNone/>
+            </a:pPr>
+            <a:endParaRPr lang="de-DE" dirty="0">
+              <a:hlinkClick r:id="rId2"/>
+            </a:endParaRPr>
+          </a:p>
+          <a:p>
+            <a:pPr marL="0" indent="0">
+              <a:buNone/>
+            </a:pPr>
+            <a:r>
+              <a:rPr lang="de-DE" dirty="0">
+                <a:hlinkClick r:id="rId2"/>
+              </a:rPr>
+              <a:t>Kaggle competition: Spaceship Titanic</a:t>
+            </a:r>
+            <a:endParaRPr lang="de-DE" dirty="0"/>
+          </a:p>
+        </p:txBody>
+      </p:sp>
+      <p:sp>
+        <p:nvSpPr>
+          <p:cNvPr id="2" name="Foliennummernplatzhalter 1">
+            <a:extLst>
+              <a:ext uri="{FF2B5EF4-FFF2-40B4-BE49-F238E27FC236}">
+                <a16:creationId xmlns:a16="http://schemas.microsoft.com/office/drawing/2014/main" id="{4AD244A2-3D2F-65EC-08C2-585F58E4A017}"/>
+              </a:ext>
+            </a:extLst>
+          </p:cNvPr>
+          <p:cNvSpPr>
+            <a:spLocks noGrp="1"/>
+          </p:cNvSpPr>
+          <p:nvPr>
+            <p:ph type="sldNum" sz="quarter" idx="12"/>
+          </p:nvPr>
+        </p:nvSpPr>
+        <p:spPr/>
+        <p:txBody>
+          <a:bodyPr/>
+          <a:lstStyle/>
+          <a:p>
+            <a:fld id="{3D4C94FE-FF23-4504-88E9-14D481113291}" type="slidenum">
+              <a:rPr lang="en-GB" smtClean="0"/>
+              <a:t>29</a:t>
+            </a:fld>
+            <a:endParaRPr lang="en-GB"/>
+          </a:p>
+        </p:txBody>
+      </p:sp>
+    </p:spTree>
+    <p:extLst>
+      <p:ext uri="{BB962C8B-B14F-4D97-AF65-F5344CB8AC3E}">
+        <p14:creationId xmlns:p14="http://schemas.microsoft.com/office/powerpoint/2010/main" val="2139412117"/>
       </p:ext>
     </p:extLst>
   </p:cSld>

--- a/slides/6_feature_engineering.pptx
+++ b/slides/6_feature_engineering.pptx
@@ -5,7 +5,7 @@
     <p:sldMasterId id="2147483648" r:id="rId1"/>
   </p:sldMasterIdLst>
   <p:notesMasterIdLst>
-    <p:notesMasterId r:id="rId31"/>
+    <p:notesMasterId r:id="rId30"/>
   </p:notesMasterIdLst>
   <p:sldIdLst>
     <p:sldId id="256" r:id="rId2"/>
@@ -36,7 +36,6 @@
     <p:sldId id="283" r:id="rId27"/>
     <p:sldId id="669" r:id="rId28"/>
     <p:sldId id="284" r:id="rId29"/>
-    <p:sldId id="780" r:id="rId30"/>
   </p:sldIdLst>
   <p:sldSz cx="12192000" cy="6858000"/>
   <p:notesSz cx="6858000" cy="9144000"/>
@@ -507,7 +506,7 @@
           <a:p>
             <a:fld id="{506E0FD1-891F-4B1E-916D-E9B585160BB8}" type="datetimeFigureOut">
               <a:rPr lang="en-GB" smtClean="0"/>
-              <a:t>20/03/2026</a:t>
+              <a:t>09/04/2026</a:t>
             </a:fld>
             <a:endParaRPr lang="en-GB"/>
           </a:p>
@@ -924,7 +923,7 @@
           <a:p>
             <a:fld id="{D68C3F22-27B2-44E3-9C5F-D08126455F6F}" type="datetime1">
               <a:rPr lang="en-GB" smtClean="0"/>
-              <a:t>20/03/2026</a:t>
+              <a:t>09/04/2026</a:t>
             </a:fld>
             <a:endParaRPr lang="en-GB"/>
           </a:p>
@@ -1124,7 +1123,7 @@
           <a:p>
             <a:fld id="{1CD03846-7BF6-4FB6-A921-FF3379ADBD4C}" type="datetime1">
               <a:rPr lang="en-GB" smtClean="0"/>
-              <a:t>20/03/2026</a:t>
+              <a:t>09/04/2026</a:t>
             </a:fld>
             <a:endParaRPr lang="en-GB"/>
           </a:p>
@@ -1334,7 +1333,7 @@
           <a:p>
             <a:fld id="{99E1B91A-3FD0-4144-9C84-63E9688ED2FE}" type="datetime1">
               <a:rPr lang="en-GB" smtClean="0"/>
-              <a:t>20/03/2026</a:t>
+              <a:t>09/04/2026</a:t>
             </a:fld>
             <a:endParaRPr lang="en-GB"/>
           </a:p>
@@ -1534,7 +1533,7 @@
           <a:p>
             <a:fld id="{5295ED7B-FEAD-4734-819F-93EF4B0EA908}" type="datetime1">
               <a:rPr lang="en-GB" smtClean="0"/>
-              <a:t>20/03/2026</a:t>
+              <a:t>09/04/2026</a:t>
             </a:fld>
             <a:endParaRPr lang="en-GB"/>
           </a:p>
@@ -1810,7 +1809,7 @@
           <a:p>
             <a:fld id="{D2D5D4B4-C926-4B45-8815-1ED8911179A2}" type="datetime1">
               <a:rPr lang="en-GB" smtClean="0"/>
-              <a:t>20/03/2026</a:t>
+              <a:t>09/04/2026</a:t>
             </a:fld>
             <a:endParaRPr lang="en-GB"/>
           </a:p>
@@ -2078,7 +2077,7 @@
           <a:p>
             <a:fld id="{B4C5210A-0E37-4935-93AF-69F21A5F712F}" type="datetime1">
               <a:rPr lang="en-GB" smtClean="0"/>
-              <a:t>20/03/2026</a:t>
+              <a:t>09/04/2026</a:t>
             </a:fld>
             <a:endParaRPr lang="en-GB"/>
           </a:p>
@@ -2493,7 +2492,7 @@
           <a:p>
             <a:fld id="{3D3A6B2F-436C-4691-80E8-9C890E000E9D}" type="datetime1">
               <a:rPr lang="en-GB" smtClean="0"/>
-              <a:t>20/03/2026</a:t>
+              <a:t>09/04/2026</a:t>
             </a:fld>
             <a:endParaRPr lang="en-GB"/>
           </a:p>
@@ -2635,7 +2634,7 @@
           <a:p>
             <a:fld id="{84385F4C-D74B-496F-8D21-97E3549C783B}" type="datetime1">
               <a:rPr lang="en-GB" smtClean="0"/>
-              <a:t>20/03/2026</a:t>
+              <a:t>09/04/2026</a:t>
             </a:fld>
             <a:endParaRPr lang="en-GB"/>
           </a:p>
@@ -2748,7 +2747,7 @@
           <a:p>
             <a:fld id="{0CBDCB32-C241-4703-A832-4EB47BD54E83}" type="datetime1">
               <a:rPr lang="en-GB" smtClean="0"/>
-              <a:t>20/03/2026</a:t>
+              <a:t>09/04/2026</a:t>
             </a:fld>
             <a:endParaRPr lang="en-GB"/>
           </a:p>
@@ -3061,7 +3060,7 @@
           <a:p>
             <a:fld id="{85C150FF-BE95-4D25-A16A-E368A81CBF24}" type="datetime1">
               <a:rPr lang="en-GB" smtClean="0"/>
-              <a:t>20/03/2026</a:t>
+              <a:t>09/04/2026</a:t>
             </a:fld>
             <a:endParaRPr lang="en-GB"/>
           </a:p>
@@ -3350,7 +3349,7 @@
           <a:p>
             <a:fld id="{F3C5DB4B-B349-43C9-A424-BADA723AD9F1}" type="datetime1">
               <a:rPr lang="en-GB" smtClean="0"/>
-              <a:t>20/03/2026</a:t>
+              <a:t>09/04/2026</a:t>
             </a:fld>
             <a:endParaRPr lang="en-GB"/>
           </a:p>
@@ -3593,7 +3592,7 @@
           <a:p>
             <a:fld id="{12632426-0A0C-405F-A3D0-2D11AA44702A}" type="datetime1">
               <a:rPr lang="en-GB" smtClean="0"/>
-              <a:t>20/03/2026</a:t>
+              <a:t>09/04/2026</a:t>
             </a:fld>
             <a:endParaRPr lang="en-GB"/>
           </a:p>
@@ -8846,143 +8845,6 @@
     <p:extLst>
       <p:ext uri="{BB962C8B-B14F-4D97-AF65-F5344CB8AC3E}">
         <p14:creationId xmlns:p14="http://schemas.microsoft.com/office/powerpoint/2010/main" val="975400455"/>
-      </p:ext>
-    </p:extLst>
-  </p:cSld>
-  <p:clrMapOvr>
-    <a:masterClrMapping/>
-  </p:clrMapOvr>
-</p:sld>
-</file>
-
-<file path=ppt/slides/slide29.xml><?xml version="1.0" encoding="utf-8"?>
-<p:sld xmlns:a="http://schemas.openxmlformats.org/drawingml/2006/main" xmlns:r="http://schemas.openxmlformats.org/officeDocument/2006/relationships" xmlns:p="http://schemas.openxmlformats.org/presentationml/2006/main">
-  <p:cSld>
-    <p:spTree>
-      <p:nvGrpSpPr>
-        <p:cNvPr id="1" name=""/>
-        <p:cNvGrpSpPr/>
-        <p:nvPr/>
-      </p:nvGrpSpPr>
-      <p:grpSpPr>
-        <a:xfrm>
-          <a:off x="0" y="0"/>
-          <a:ext cx="0" cy="0"/>
-          <a:chOff x="0" y="0"/>
-          <a:chExt cx="0" cy="0"/>
-        </a:xfrm>
-      </p:grpSpPr>
-      <p:sp>
-        <p:nvSpPr>
-          <p:cNvPr id="3" name="Titel 2">
-            <a:extLst>
-              <a:ext uri="{FF2B5EF4-FFF2-40B4-BE49-F238E27FC236}">
-                <a16:creationId xmlns:a16="http://schemas.microsoft.com/office/drawing/2014/main" id="{67675B1F-E173-98A4-AD50-0B743B2D6DA1}"/>
-              </a:ext>
-            </a:extLst>
-          </p:cNvPr>
-          <p:cNvSpPr>
-            <a:spLocks noGrp="1"/>
-          </p:cNvSpPr>
-          <p:nvPr>
-            <p:ph type="title"/>
-          </p:nvPr>
-        </p:nvSpPr>
-        <p:spPr/>
-        <p:txBody>
-          <a:bodyPr/>
-          <a:lstStyle/>
-          <a:p>
-            <a:r>
-              <a:rPr lang="de-DE" dirty="0"/>
-              <a:t>Practice Project</a:t>
-            </a:r>
-          </a:p>
-        </p:txBody>
-      </p:sp>
-      <p:sp>
-        <p:nvSpPr>
-          <p:cNvPr id="4" name="Inhaltsplatzhalter 3">
-            <a:extLst>
-              <a:ext uri="{FF2B5EF4-FFF2-40B4-BE49-F238E27FC236}">
-                <a16:creationId xmlns:a16="http://schemas.microsoft.com/office/drawing/2014/main" id="{44DD3C46-343C-0713-2B34-80AA5550422A}"/>
-              </a:ext>
-            </a:extLst>
-          </p:cNvPr>
-          <p:cNvSpPr>
-            <a:spLocks noGrp="1"/>
-          </p:cNvSpPr>
-          <p:nvPr>
-            <p:ph idx="1"/>
-          </p:nvPr>
-        </p:nvSpPr>
-        <p:spPr/>
-        <p:txBody>
-          <a:bodyPr/>
-          <a:lstStyle/>
-          <a:p>
-            <a:pPr marL="0" indent="0">
-              <a:buNone/>
-            </a:pPr>
-            <a:endParaRPr lang="de-DE" dirty="0">
-              <a:hlinkClick r:id="rId2"/>
-            </a:endParaRPr>
-          </a:p>
-          <a:p>
-            <a:pPr marL="0" indent="0">
-              <a:buNone/>
-            </a:pPr>
-            <a:endParaRPr lang="de-DE" dirty="0">
-              <a:hlinkClick r:id="rId2"/>
-            </a:endParaRPr>
-          </a:p>
-          <a:p>
-            <a:pPr marL="0" indent="0">
-              <a:buNone/>
-            </a:pPr>
-            <a:r>
-              <a:rPr lang="de-DE" dirty="0">
-                <a:hlinkClick r:id="rId2"/>
-              </a:rPr>
-              <a:t>Kaggle competition: Spaceship Titanic</a:t>
-            </a:r>
-            <a:endParaRPr lang="de-DE" dirty="0"/>
-          </a:p>
-        </p:txBody>
-      </p:sp>
-      <p:sp>
-        <p:nvSpPr>
-          <p:cNvPr id="2" name="Foliennummernplatzhalter 1">
-            <a:extLst>
-              <a:ext uri="{FF2B5EF4-FFF2-40B4-BE49-F238E27FC236}">
-                <a16:creationId xmlns:a16="http://schemas.microsoft.com/office/drawing/2014/main" id="{4AD244A2-3D2F-65EC-08C2-585F58E4A017}"/>
-              </a:ext>
-            </a:extLst>
-          </p:cNvPr>
-          <p:cNvSpPr>
-            <a:spLocks noGrp="1"/>
-          </p:cNvSpPr>
-          <p:nvPr>
-            <p:ph type="sldNum" sz="quarter" idx="12"/>
-          </p:nvPr>
-        </p:nvSpPr>
-        <p:spPr/>
-        <p:txBody>
-          <a:bodyPr/>
-          <a:lstStyle/>
-          <a:p>
-            <a:fld id="{3D4C94FE-FF23-4504-88E9-14D481113291}" type="slidenum">
-              <a:rPr lang="en-GB" smtClean="0"/>
-              <a:t>29</a:t>
-            </a:fld>
-            <a:endParaRPr lang="en-GB"/>
-          </a:p>
-        </p:txBody>
-      </p:sp>
-    </p:spTree>
-    <p:extLst>
-      <p:ext uri="{BB962C8B-B14F-4D97-AF65-F5344CB8AC3E}">
-        <p14:creationId xmlns:p14="http://schemas.microsoft.com/office/powerpoint/2010/main" val="2139412117"/>
       </p:ext>
     </p:extLst>
   </p:cSld>

--- a/slides/6_feature_engineering.pptx
+++ b/slides/6_feature_engineering.pptx
@@ -5,37 +5,36 @@
     <p:sldMasterId id="2147483648" r:id="rId1"/>
   </p:sldMasterIdLst>
   <p:notesMasterIdLst>
-    <p:notesMasterId r:id="rId30"/>
+    <p:notesMasterId r:id="rId29"/>
   </p:notesMasterIdLst>
   <p:sldIdLst>
     <p:sldId id="256" r:id="rId2"/>
-    <p:sldId id="265" r:id="rId3"/>
-    <p:sldId id="266" r:id="rId4"/>
-    <p:sldId id="298" r:id="rId5"/>
-    <p:sldId id="267" r:id="rId6"/>
-    <p:sldId id="268" r:id="rId7"/>
-    <p:sldId id="269" r:id="rId8"/>
-    <p:sldId id="270" r:id="rId9"/>
-    <p:sldId id="271" r:id="rId10"/>
-    <p:sldId id="682" r:id="rId11"/>
-    <p:sldId id="272" r:id="rId12"/>
-    <p:sldId id="273" r:id="rId13"/>
-    <p:sldId id="274" r:id="rId14"/>
-    <p:sldId id="712" r:id="rId15"/>
-    <p:sldId id="672" r:id="rId16"/>
-    <p:sldId id="793" r:id="rId17"/>
-    <p:sldId id="275" r:id="rId18"/>
-    <p:sldId id="276" r:id="rId19"/>
-    <p:sldId id="277" r:id="rId20"/>
-    <p:sldId id="278" r:id="rId21"/>
-    <p:sldId id="636" r:id="rId22"/>
-    <p:sldId id="285" r:id="rId23"/>
-    <p:sldId id="280" r:id="rId24"/>
-    <p:sldId id="281" r:id="rId25"/>
-    <p:sldId id="282" r:id="rId26"/>
-    <p:sldId id="283" r:id="rId27"/>
-    <p:sldId id="669" r:id="rId28"/>
-    <p:sldId id="284" r:id="rId29"/>
+    <p:sldId id="266" r:id="rId3"/>
+    <p:sldId id="298" r:id="rId4"/>
+    <p:sldId id="267" r:id="rId5"/>
+    <p:sldId id="268" r:id="rId6"/>
+    <p:sldId id="269" r:id="rId7"/>
+    <p:sldId id="270" r:id="rId8"/>
+    <p:sldId id="271" r:id="rId9"/>
+    <p:sldId id="682" r:id="rId10"/>
+    <p:sldId id="272" r:id="rId11"/>
+    <p:sldId id="273" r:id="rId12"/>
+    <p:sldId id="274" r:id="rId13"/>
+    <p:sldId id="712" r:id="rId14"/>
+    <p:sldId id="672" r:id="rId15"/>
+    <p:sldId id="793" r:id="rId16"/>
+    <p:sldId id="275" r:id="rId17"/>
+    <p:sldId id="276" r:id="rId18"/>
+    <p:sldId id="277" r:id="rId19"/>
+    <p:sldId id="278" r:id="rId20"/>
+    <p:sldId id="636" r:id="rId21"/>
+    <p:sldId id="285" r:id="rId22"/>
+    <p:sldId id="280" r:id="rId23"/>
+    <p:sldId id="281" r:id="rId24"/>
+    <p:sldId id="282" r:id="rId25"/>
+    <p:sldId id="283" r:id="rId26"/>
+    <p:sldId id="669" r:id="rId27"/>
+    <p:sldId id="284" r:id="rId28"/>
   </p:sldIdLst>
   <p:sldSz cx="12192000" cy="6858000"/>
   <p:notesSz cx="6858000" cy="9144000"/>
@@ -506,7 +505,7 @@
           <a:p>
             <a:fld id="{506E0FD1-891F-4B1E-916D-E9B585160BB8}" type="datetimeFigureOut">
               <a:rPr lang="en-GB" smtClean="0"/>
-              <a:t>09/04/2026</a:t>
+              <a:t>17/04/2026</a:t>
             </a:fld>
             <a:endParaRPr lang="en-GB"/>
           </a:p>
@@ -923,7 +922,7 @@
           <a:p>
             <a:fld id="{D68C3F22-27B2-44E3-9C5F-D08126455F6F}" type="datetime1">
               <a:rPr lang="en-GB" smtClean="0"/>
-              <a:t>09/04/2026</a:t>
+              <a:t>17/04/2026</a:t>
             </a:fld>
             <a:endParaRPr lang="en-GB"/>
           </a:p>
@@ -1123,7 +1122,7 @@
           <a:p>
             <a:fld id="{1CD03846-7BF6-4FB6-A921-FF3379ADBD4C}" type="datetime1">
               <a:rPr lang="en-GB" smtClean="0"/>
-              <a:t>09/04/2026</a:t>
+              <a:t>17/04/2026</a:t>
             </a:fld>
             <a:endParaRPr lang="en-GB"/>
           </a:p>
@@ -1333,7 +1332,7 @@
           <a:p>
             <a:fld id="{99E1B91A-3FD0-4144-9C84-63E9688ED2FE}" type="datetime1">
               <a:rPr lang="en-GB" smtClean="0"/>
-              <a:t>09/04/2026</a:t>
+              <a:t>17/04/2026</a:t>
             </a:fld>
             <a:endParaRPr lang="en-GB"/>
           </a:p>
@@ -1533,7 +1532,7 @@
           <a:p>
             <a:fld id="{5295ED7B-FEAD-4734-819F-93EF4B0EA908}" type="datetime1">
               <a:rPr lang="en-GB" smtClean="0"/>
-              <a:t>09/04/2026</a:t>
+              <a:t>17/04/2026</a:t>
             </a:fld>
             <a:endParaRPr lang="en-GB"/>
           </a:p>
@@ -1809,7 +1808,7 @@
           <a:p>
             <a:fld id="{D2D5D4B4-C926-4B45-8815-1ED8911179A2}" type="datetime1">
               <a:rPr lang="en-GB" smtClean="0"/>
-              <a:t>09/04/2026</a:t>
+              <a:t>17/04/2026</a:t>
             </a:fld>
             <a:endParaRPr lang="en-GB"/>
           </a:p>
@@ -2077,7 +2076,7 @@
           <a:p>
             <a:fld id="{B4C5210A-0E37-4935-93AF-69F21A5F712F}" type="datetime1">
               <a:rPr lang="en-GB" smtClean="0"/>
-              <a:t>09/04/2026</a:t>
+              <a:t>17/04/2026</a:t>
             </a:fld>
             <a:endParaRPr lang="en-GB"/>
           </a:p>
@@ -2492,7 +2491,7 @@
           <a:p>
             <a:fld id="{3D3A6B2F-436C-4691-80E8-9C890E000E9D}" type="datetime1">
               <a:rPr lang="en-GB" smtClean="0"/>
-              <a:t>09/04/2026</a:t>
+              <a:t>17/04/2026</a:t>
             </a:fld>
             <a:endParaRPr lang="en-GB"/>
           </a:p>
@@ -2634,7 +2633,7 @@
           <a:p>
             <a:fld id="{84385F4C-D74B-496F-8D21-97E3549C783B}" type="datetime1">
               <a:rPr lang="en-GB" smtClean="0"/>
-              <a:t>09/04/2026</a:t>
+              <a:t>17/04/2026</a:t>
             </a:fld>
             <a:endParaRPr lang="en-GB"/>
           </a:p>
@@ -2747,7 +2746,7 @@
           <a:p>
             <a:fld id="{0CBDCB32-C241-4703-A832-4EB47BD54E83}" type="datetime1">
               <a:rPr lang="en-GB" smtClean="0"/>
-              <a:t>09/04/2026</a:t>
+              <a:t>17/04/2026</a:t>
             </a:fld>
             <a:endParaRPr lang="en-GB"/>
           </a:p>
@@ -3060,7 +3059,7 @@
           <a:p>
             <a:fld id="{85C150FF-BE95-4D25-A16A-E368A81CBF24}" type="datetime1">
               <a:rPr lang="en-GB" smtClean="0"/>
-              <a:t>09/04/2026</a:t>
+              <a:t>17/04/2026</a:t>
             </a:fld>
             <a:endParaRPr lang="en-GB"/>
           </a:p>
@@ -3349,7 +3348,7 @@
           <a:p>
             <a:fld id="{F3C5DB4B-B349-43C9-A424-BADA723AD9F1}" type="datetime1">
               <a:rPr lang="en-GB" smtClean="0"/>
-              <a:t>09/04/2026</a:t>
+              <a:t>17/04/2026</a:t>
             </a:fld>
             <a:endParaRPr lang="en-GB"/>
           </a:p>
@@ -3592,7 +3591,7 @@
           <a:p>
             <a:fld id="{12632426-0A0C-405F-A3D0-2D11AA44702A}" type="datetime1">
               <a:rPr lang="en-GB" smtClean="0"/>
-              <a:t>09/04/2026</a:t>
+              <a:t>17/04/2026</a:t>
             </a:fld>
             <a:endParaRPr lang="en-GB"/>
           </a:p>
@@ -4098,10 +4097,10 @@
       </p:grpSpPr>
       <p:sp>
         <p:nvSpPr>
-          <p:cNvPr id="2" name="Title 1">
-            <a:extLst>
-              <a:ext uri="{FF2B5EF4-FFF2-40B4-BE49-F238E27FC236}">
-                <a16:creationId xmlns:a16="http://schemas.microsoft.com/office/drawing/2014/main" id="{A9196BE7-ED4C-5E2B-564B-33799AF07E7E}"/>
+          <p:cNvPr id="2" name="Titel 1">
+            <a:extLst>
+              <a:ext uri="{FF2B5EF4-FFF2-40B4-BE49-F238E27FC236}">
+                <a16:creationId xmlns:a16="http://schemas.microsoft.com/office/drawing/2014/main" id="{EE16BB78-5A1D-D18F-121B-56F0A89A2E3A}"/>
               </a:ext>
             </a:extLst>
           </p:cNvPr>
@@ -4118,18 +4117,22 @@
           <a:lstStyle/>
           <a:p>
             <a:r>
-              <a:rPr lang="en-DE" dirty="0"/>
-              <a:t>Categorical Variables</a:t>
-            </a:r>
-          </a:p>
-        </p:txBody>
-      </p:sp>
-      <p:sp>
-        <p:nvSpPr>
-          <p:cNvPr id="3" name="Content Placeholder 2">
-            <a:extLst>
-              <a:ext uri="{FF2B5EF4-FFF2-40B4-BE49-F238E27FC236}">
-                <a16:creationId xmlns:a16="http://schemas.microsoft.com/office/drawing/2014/main" id="{F32FCC10-8545-2083-F633-36ECF823DC08}"/>
+              <a:rPr lang="de-DE" dirty="0" err="1"/>
+              <a:t>One</a:t>
+            </a:r>
+            <a:r>
+              <a:rPr lang="de-DE" dirty="0"/>
+              <a:t>-Hot Encoding</a:t>
+            </a:r>
+          </a:p>
+        </p:txBody>
+      </p:sp>
+      <p:sp>
+        <p:nvSpPr>
+          <p:cNvPr id="3" name="Inhaltsplatzhalter 2">
+            <a:extLst>
+              <a:ext uri="{FF2B5EF4-FFF2-40B4-BE49-F238E27FC236}">
+                <a16:creationId xmlns:a16="http://schemas.microsoft.com/office/drawing/2014/main" id="{CBFD71D2-F73E-37C5-322A-28888DF27125}"/>
               </a:ext>
             </a:extLst>
           </p:cNvPr>
@@ -4140,105 +4143,21 @@
             <p:ph idx="1"/>
           </p:nvPr>
         </p:nvSpPr>
-        <p:spPr>
-          <a:xfrm>
-            <a:off x="838200" y="1825625"/>
-            <a:ext cx="7012459" cy="4351338"/>
-          </a:xfrm>
-        </p:spPr>
-        <p:txBody>
-          <a:bodyPr>
-            <a:normAutofit fontScale="92500" lnSpcReduction="10000"/>
-          </a:bodyPr>
-          <a:lstStyle/>
-          <a:p>
-            <a:pPr marL="0" indent="0">
-              <a:buNone/>
-            </a:pPr>
-            <a:r>
-              <a:rPr lang="en-GB" sz="2600" dirty="0"/>
-              <a:t>tabular data usually heterogenous, often with sparse c</a:t>
-            </a:r>
-            <a:r>
-              <a:rPr lang="en-DE" sz="2600" dirty="0"/>
-              <a:t>ategorical variables (like color of an object)</a:t>
-            </a:r>
-          </a:p>
-          <a:p>
-            <a:pPr marL="0" indent="0">
-              <a:buNone/>
-            </a:pPr>
-            <a:r>
-              <a:rPr lang="en-GB" sz="2600" dirty="0">
-                <a:sym typeface="Wingdings" pitchFamily="2" charset="2"/>
-              </a:rPr>
-              <a:t> need for an encoding for categorical variables</a:t>
-            </a:r>
-            <a:endParaRPr lang="en-GB" sz="2600" dirty="0"/>
-          </a:p>
-          <a:p>
-            <a:pPr marL="0" indent="0">
-              <a:buNone/>
-            </a:pPr>
-            <a:endParaRPr lang="en-GB" sz="2600" dirty="0"/>
-          </a:p>
-          <a:p>
-            <a:pPr marL="0" indent="0">
-              <a:buNone/>
-            </a:pPr>
-            <a:r>
-              <a:rPr lang="en-GB" sz="2600" dirty="0"/>
-              <a:t>different possibilities:</a:t>
-            </a:r>
-            <a:endParaRPr lang="en-DE" sz="2600" dirty="0"/>
-          </a:p>
-          <a:p>
-            <a:r>
-              <a:rPr lang="en-GB" sz="2600" dirty="0"/>
-              <a:t>o</a:t>
-            </a:r>
-            <a:r>
-              <a:rPr lang="en-DE" sz="2600" dirty="0"/>
-              <a:t>rdinal encoding</a:t>
-            </a:r>
-          </a:p>
-          <a:p>
-            <a:r>
-              <a:rPr lang="en-DE" sz="2600" dirty="0"/>
-              <a:t>leave-one-out encoding (use mean of target for given category excluding current row)</a:t>
-            </a:r>
-          </a:p>
-          <a:p>
-            <a:r>
-              <a:rPr lang="en-DE" sz="2600" dirty="0"/>
-              <a:t>one-hot encoding (suffer</a:t>
-            </a:r>
-            <a:r>
-              <a:rPr lang="en-GB" sz="2600" dirty="0"/>
-              <a:t>s</a:t>
-            </a:r>
-            <a:r>
-              <a:rPr lang="en-DE" sz="2600" dirty="0"/>
-              <a:t> from curse of dimensionality)</a:t>
-            </a:r>
-          </a:p>
-          <a:p>
-            <a:r>
-              <a:rPr lang="en-DE" sz="2600" dirty="0"/>
-              <a:t>embeddings</a:t>
-            </a:r>
-          </a:p>
-          <a:p>
-            <a:endParaRPr lang="en-GB" dirty="0"/>
-          </a:p>
-        </p:txBody>
-      </p:sp>
-      <p:sp>
-        <p:nvSpPr>
-          <p:cNvPr id="4" name="Slide Number Placeholder 3">
-            <a:extLst>
-              <a:ext uri="{FF2B5EF4-FFF2-40B4-BE49-F238E27FC236}">
-                <a16:creationId xmlns:a16="http://schemas.microsoft.com/office/drawing/2014/main" id="{10A7ECF4-88CC-6FFA-B376-C462D8970327}"/>
+        <p:spPr/>
+        <p:txBody>
+          <a:bodyPr/>
+          <a:lstStyle/>
+          <a:p>
+            <a:endParaRPr lang="de-DE"/>
+          </a:p>
+        </p:txBody>
+      </p:sp>
+      <p:sp>
+        <p:nvSpPr>
+          <p:cNvPr id="4" name="Foliennummernplatzhalter 3">
+            <a:extLst>
+              <a:ext uri="{FF2B5EF4-FFF2-40B4-BE49-F238E27FC236}">
+                <a16:creationId xmlns:a16="http://schemas.microsoft.com/office/drawing/2014/main" id="{9E37B51C-FCEA-9E89-A2F4-4EAC247475F0}"/>
               </a:ext>
             </a:extLst>
           </p:cNvPr>
@@ -4254,252 +4173,18 @@
           <a:bodyPr/>
           <a:lstStyle/>
           <a:p>
-            <a:fld id="{290AF890-0265-4349-BF13-E30F01A2AA85}" type="slidenum">
-              <a:rPr lang="en-DE" smtClean="0"/>
+            <a:fld id="{08C366F5-AFAD-49CB-854A-9D9E238FCA13}" type="slidenum">
+              <a:rPr lang="en-GB" smtClean="0"/>
               <a:t>10</a:t>
             </a:fld>
-            <a:endParaRPr lang="en-DE"/>
-          </a:p>
-        </p:txBody>
-      </p:sp>
-      <p:sp>
-        <p:nvSpPr>
-          <p:cNvPr id="5" name="TextBox 4">
-            <a:extLst>
-              <a:ext uri="{FF2B5EF4-FFF2-40B4-BE49-F238E27FC236}">
-                <a16:creationId xmlns:a16="http://schemas.microsoft.com/office/drawing/2014/main" id="{804D5CA4-59B9-8AEA-7DD8-3C2E7B69893D}"/>
-              </a:ext>
-            </a:extLst>
-          </p:cNvPr>
-          <p:cNvSpPr txBox="1"/>
-          <p:nvPr/>
-        </p:nvSpPr>
-        <p:spPr>
-          <a:xfrm>
-            <a:off x="8448767" y="4000749"/>
-            <a:ext cx="3066865" cy="830997"/>
-          </a:xfrm>
-          <a:prstGeom prst="rect">
-            <a:avLst/>
-          </a:prstGeom>
-          <a:noFill/>
-        </p:spPr>
-        <p:txBody>
-          <a:bodyPr wrap="none" rtlCol="0">
-            <a:spAutoFit/>
-          </a:bodyPr>
-          <a:lstStyle/>
-          <a:p>
-            <a:r>
-              <a:rPr lang="en-GB" sz="1200" dirty="0" err="1">
-                <a:latin typeface="Courier" pitchFamily="2" charset="0"/>
-              </a:rPr>
-              <a:t>X.sort_values</a:t>
-            </a:r>
-            <a:r>
-              <a:rPr lang="en-GB" sz="1200" dirty="0">
-                <a:latin typeface="Courier" pitchFamily="2" charset="0"/>
-              </a:rPr>
-              <a:t>(['date’])</a:t>
-            </a:r>
-          </a:p>
-          <a:p>
-            <a:r>
-              <a:rPr lang="en-GB" sz="1200" dirty="0">
-                <a:latin typeface="Courier" pitchFamily="2" charset="0"/>
-              </a:rPr>
-              <a:t>.</a:t>
-            </a:r>
-            <a:r>
-              <a:rPr lang="en-GB" sz="1200" dirty="0" err="1">
-                <a:latin typeface="Courier" pitchFamily="2" charset="0"/>
-              </a:rPr>
-              <a:t>groupby</a:t>
-            </a:r>
-            <a:r>
-              <a:rPr lang="en-GB" sz="1200" dirty="0">
-                <a:latin typeface="Courier" pitchFamily="2" charset="0"/>
-              </a:rPr>
-              <a:t>(['</a:t>
-            </a:r>
-            <a:r>
-              <a:rPr lang="en-GB" sz="1200" dirty="0" err="1">
-                <a:latin typeface="Courier" pitchFamily="2" charset="0"/>
-              </a:rPr>
-              <a:t>store','item</a:t>
-            </a:r>
-            <a:r>
-              <a:rPr lang="en-GB" sz="1200" dirty="0">
-                <a:latin typeface="Courier" pitchFamily="2" charset="0"/>
-              </a:rPr>
-              <a:t>'])['y’]</a:t>
-            </a:r>
-          </a:p>
-          <a:p>
-            <a:r>
-              <a:rPr lang="en-GB" sz="1200" dirty="0">
-                <a:latin typeface="Courier" pitchFamily="2" charset="0"/>
-              </a:rPr>
-              <a:t>.apply(lambda x: </a:t>
-            </a:r>
-            <a:r>
-              <a:rPr lang="en-GB" sz="1200" dirty="0" err="1">
-                <a:latin typeface="Courier" pitchFamily="2" charset="0"/>
-              </a:rPr>
-              <a:t>x.shift</a:t>
-            </a:r>
-            <a:r>
-              <a:rPr lang="en-GB" sz="1200" dirty="0">
-                <a:latin typeface="Courier" pitchFamily="2" charset="0"/>
-              </a:rPr>
-              <a:t>(3)</a:t>
-            </a:r>
-          </a:p>
-          <a:p>
-            <a:r>
-              <a:rPr lang="en-GB" sz="1200" dirty="0">
-                <a:latin typeface="Courier" pitchFamily="2" charset="0"/>
-              </a:rPr>
-              <a:t>.</a:t>
-            </a:r>
-            <a:r>
-              <a:rPr lang="en-GB" sz="1200" dirty="0" err="1">
-                <a:latin typeface="Courier" pitchFamily="2" charset="0"/>
-              </a:rPr>
-              <a:t>ewm</a:t>
-            </a:r>
-            <a:r>
-              <a:rPr lang="en-GB" sz="1200" dirty="0">
-                <a:latin typeface="Courier" pitchFamily="2" charset="0"/>
-              </a:rPr>
-              <a:t>(alpha=0.15).mean())</a:t>
-            </a:r>
-          </a:p>
-        </p:txBody>
-      </p:sp>
-      <p:sp>
-        <p:nvSpPr>
-          <p:cNvPr id="6" name="TextBox 5">
-            <a:extLst>
-              <a:ext uri="{FF2B5EF4-FFF2-40B4-BE49-F238E27FC236}">
-                <a16:creationId xmlns:a16="http://schemas.microsoft.com/office/drawing/2014/main" id="{4F914F96-5D83-53CF-A1A4-98198E01EFD9}"/>
-              </a:ext>
-            </a:extLst>
-          </p:cNvPr>
-          <p:cNvSpPr txBox="1"/>
-          <p:nvPr/>
-        </p:nvSpPr>
-        <p:spPr>
-          <a:xfrm>
-            <a:off x="10498489" y="4834909"/>
-            <a:ext cx="1615763" cy="323165"/>
-          </a:xfrm>
-          <a:prstGeom prst="rect">
-            <a:avLst/>
-          </a:prstGeom>
-          <a:noFill/>
-        </p:spPr>
-        <p:txBody>
-          <a:bodyPr wrap="none" rtlCol="0">
-            <a:spAutoFit/>
-          </a:bodyPr>
-          <a:lstStyle/>
-          <a:p>
-            <a:r>
-              <a:rPr lang="en-GB" sz="1500" dirty="0"/>
-              <a:t>p</a:t>
-            </a:r>
-            <a:r>
-              <a:rPr lang="en-DE" sz="1500" dirty="0"/>
-              <a:t>rediction horizon</a:t>
-            </a:r>
-          </a:p>
-        </p:txBody>
-      </p:sp>
-      <p:cxnSp>
-        <p:nvCxnSpPr>
-          <p:cNvPr id="7" name="Straight Arrow Connector 6">
-            <a:extLst>
-              <a:ext uri="{FF2B5EF4-FFF2-40B4-BE49-F238E27FC236}">
-                <a16:creationId xmlns:a16="http://schemas.microsoft.com/office/drawing/2014/main" id="{4D31E913-8076-767F-3FFA-49228926DD2A}"/>
-              </a:ext>
-            </a:extLst>
-          </p:cNvPr>
-          <p:cNvCxnSpPr>
-            <a:cxnSpLocks/>
-          </p:cNvCxnSpPr>
-          <p:nvPr/>
-        </p:nvCxnSpPr>
-        <p:spPr>
-          <a:xfrm flipH="1" flipV="1">
-            <a:off x="10898248" y="4580913"/>
-            <a:ext cx="132217" cy="278710"/>
-          </a:xfrm>
-          <a:prstGeom prst="straightConnector1">
-            <a:avLst/>
-          </a:prstGeom>
-          <a:ln w="12700" cmpd="sng">
-            <a:solidFill>
-              <a:schemeClr val="tx1"/>
-            </a:solidFill>
-            <a:tailEnd type="triangle"/>
-          </a:ln>
-          <a:effectLst/>
-        </p:spPr>
-        <p:style>
-          <a:lnRef idx="2">
-            <a:schemeClr val="accent1"/>
-          </a:lnRef>
-          <a:fillRef idx="0">
-            <a:schemeClr val="accent1"/>
-          </a:fillRef>
-          <a:effectRef idx="1">
-            <a:schemeClr val="accent1"/>
-          </a:effectRef>
-          <a:fontRef idx="minor">
-            <a:schemeClr val="tx1"/>
-          </a:fontRef>
-        </p:style>
-      </p:cxnSp>
-      <p:sp>
-        <p:nvSpPr>
-          <p:cNvPr id="8" name="TextBox 7">
-            <a:extLst>
-              <a:ext uri="{FF2B5EF4-FFF2-40B4-BE49-F238E27FC236}">
-                <a16:creationId xmlns:a16="http://schemas.microsoft.com/office/drawing/2014/main" id="{5B769A41-4005-10D3-8FBE-6E3F868A80AA}"/>
-              </a:ext>
-            </a:extLst>
-          </p:cNvPr>
-          <p:cNvSpPr txBox="1"/>
-          <p:nvPr/>
-        </p:nvSpPr>
-        <p:spPr>
-          <a:xfrm>
-            <a:off x="8448767" y="3628254"/>
-            <a:ext cx="1004827" cy="369332"/>
-          </a:xfrm>
-          <a:prstGeom prst="rect">
-            <a:avLst/>
-          </a:prstGeom>
-          <a:noFill/>
-        </p:spPr>
-        <p:txBody>
-          <a:bodyPr wrap="none" rtlCol="0">
-            <a:spAutoFit/>
-          </a:bodyPr>
-          <a:lstStyle/>
-          <a:p>
-            <a:r>
-              <a:rPr lang="en-GB" dirty="0"/>
-              <a:t>stacking:</a:t>
-            </a:r>
+            <a:endParaRPr lang="en-GB"/>
           </a:p>
         </p:txBody>
       </p:sp>
     </p:spTree>
     <p:extLst>
       <p:ext uri="{BB962C8B-B14F-4D97-AF65-F5344CB8AC3E}">
-        <p14:creationId xmlns:p14="http://schemas.microsoft.com/office/powerpoint/2010/main" val="2471018423"/>
+        <p14:creationId xmlns:p14="http://schemas.microsoft.com/office/powerpoint/2010/main" val="3807041310"/>
       </p:ext>
     </p:extLst>
   </p:cSld>
@@ -4531,7 +4216,7 @@
           <p:cNvPr id="2" name="Titel 1">
             <a:extLst>
               <a:ext uri="{FF2B5EF4-FFF2-40B4-BE49-F238E27FC236}">
-                <a16:creationId xmlns:a16="http://schemas.microsoft.com/office/drawing/2014/main" id="{EE16BB78-5A1D-D18F-121B-56F0A89A2E3A}"/>
+                <a16:creationId xmlns:a16="http://schemas.microsoft.com/office/drawing/2014/main" id="{A363CD46-F6B9-B6E6-2A62-1144B2CEFC34}"/>
               </a:ext>
             </a:extLst>
           </p:cNvPr>
@@ -4548,12 +4233,8 @@
           <a:lstStyle/>
           <a:p>
             <a:r>
-              <a:rPr lang="de-DE" dirty="0" err="1"/>
-              <a:t>One</a:t>
-            </a:r>
-            <a:r>
               <a:rPr lang="de-DE" dirty="0"/>
-              <a:t>-Hot Encoding</a:t>
+              <a:t>Ordinal Encoding</a:t>
             </a:r>
           </a:p>
         </p:txBody>
@@ -4563,7 +4244,7 @@
           <p:cNvPr id="3" name="Inhaltsplatzhalter 2">
             <a:extLst>
               <a:ext uri="{FF2B5EF4-FFF2-40B4-BE49-F238E27FC236}">
-                <a16:creationId xmlns:a16="http://schemas.microsoft.com/office/drawing/2014/main" id="{CBFD71D2-F73E-37C5-322A-28888DF27125}"/>
+                <a16:creationId xmlns:a16="http://schemas.microsoft.com/office/drawing/2014/main" id="{D787BFC7-509D-7528-9CA9-E4E2951B2590}"/>
               </a:ext>
             </a:extLst>
           </p:cNvPr>
@@ -4588,7 +4269,7 @@
           <p:cNvPr id="4" name="Foliennummernplatzhalter 3">
             <a:extLst>
               <a:ext uri="{FF2B5EF4-FFF2-40B4-BE49-F238E27FC236}">
-                <a16:creationId xmlns:a16="http://schemas.microsoft.com/office/drawing/2014/main" id="{9E37B51C-FCEA-9E89-A2F4-4EAC247475F0}"/>
+                <a16:creationId xmlns:a16="http://schemas.microsoft.com/office/drawing/2014/main" id="{1E400C3F-8C31-720B-A1F7-C9C361C4D5FC}"/>
               </a:ext>
             </a:extLst>
           </p:cNvPr>
@@ -4615,7 +4296,7 @@
     </p:spTree>
     <p:extLst>
       <p:ext uri="{BB962C8B-B14F-4D97-AF65-F5344CB8AC3E}">
-        <p14:creationId xmlns:p14="http://schemas.microsoft.com/office/powerpoint/2010/main" val="3807041310"/>
+        <p14:creationId xmlns:p14="http://schemas.microsoft.com/office/powerpoint/2010/main" val="959113365"/>
       </p:ext>
     </p:extLst>
   </p:cSld>
@@ -4647,7 +4328,7 @@
           <p:cNvPr id="2" name="Titel 1">
             <a:extLst>
               <a:ext uri="{FF2B5EF4-FFF2-40B4-BE49-F238E27FC236}">
-                <a16:creationId xmlns:a16="http://schemas.microsoft.com/office/drawing/2014/main" id="{A363CD46-F6B9-B6E6-2A62-1144B2CEFC34}"/>
+                <a16:creationId xmlns:a16="http://schemas.microsoft.com/office/drawing/2014/main" id="{C8FCCCC1-76F8-E4E0-DE25-A04646F0D58E}"/>
               </a:ext>
             </a:extLst>
           </p:cNvPr>
@@ -4665,7 +4346,15 @@
           <a:p>
             <a:r>
               <a:rPr lang="de-DE" dirty="0"/>
-              <a:t>Ordinal Encoding</a:t>
+              <a:t>Target and </a:t>
+            </a:r>
+            <a:r>
+              <a:rPr lang="de-DE" dirty="0" err="1"/>
+              <a:t>Frequency</a:t>
+            </a:r>
+            <a:r>
+              <a:rPr lang="de-DE" dirty="0"/>
+              <a:t> Encoding</a:t>
             </a:r>
           </a:p>
         </p:txBody>
@@ -4675,7 +4364,7 @@
           <p:cNvPr id="3" name="Inhaltsplatzhalter 2">
             <a:extLst>
               <a:ext uri="{FF2B5EF4-FFF2-40B4-BE49-F238E27FC236}">
-                <a16:creationId xmlns:a16="http://schemas.microsoft.com/office/drawing/2014/main" id="{D787BFC7-509D-7528-9CA9-E4E2951B2590}"/>
+                <a16:creationId xmlns:a16="http://schemas.microsoft.com/office/drawing/2014/main" id="{436A7C9C-E319-B9BC-7A5F-20F895CA4734}"/>
               </a:ext>
             </a:extLst>
           </p:cNvPr>
@@ -4700,7 +4389,7 @@
           <p:cNvPr id="4" name="Foliennummernplatzhalter 3">
             <a:extLst>
               <a:ext uri="{FF2B5EF4-FFF2-40B4-BE49-F238E27FC236}">
-                <a16:creationId xmlns:a16="http://schemas.microsoft.com/office/drawing/2014/main" id="{1E400C3F-8C31-720B-A1F7-C9C361C4D5FC}"/>
+                <a16:creationId xmlns:a16="http://schemas.microsoft.com/office/drawing/2014/main" id="{870448D9-DCF8-02EA-C143-C27C760981D2}"/>
               </a:ext>
             </a:extLst>
           </p:cNvPr>
@@ -4727,7 +4416,7 @@
     </p:spTree>
     <p:extLst>
       <p:ext uri="{BB962C8B-B14F-4D97-AF65-F5344CB8AC3E}">
-        <p14:creationId xmlns:p14="http://schemas.microsoft.com/office/powerpoint/2010/main" val="959113365"/>
+        <p14:creationId xmlns:p14="http://schemas.microsoft.com/office/powerpoint/2010/main" val="3347056250"/>
       </p:ext>
     </p:extLst>
   </p:cSld>
@@ -4756,126 +4445,6 @@
       </p:grpSpPr>
       <p:sp>
         <p:nvSpPr>
-          <p:cNvPr id="2" name="Titel 1">
-            <a:extLst>
-              <a:ext uri="{FF2B5EF4-FFF2-40B4-BE49-F238E27FC236}">
-                <a16:creationId xmlns:a16="http://schemas.microsoft.com/office/drawing/2014/main" id="{C8FCCCC1-76F8-E4E0-DE25-A04646F0D58E}"/>
-              </a:ext>
-            </a:extLst>
-          </p:cNvPr>
-          <p:cNvSpPr>
-            <a:spLocks noGrp="1"/>
-          </p:cNvSpPr>
-          <p:nvPr>
-            <p:ph type="title"/>
-          </p:nvPr>
-        </p:nvSpPr>
-        <p:spPr/>
-        <p:txBody>
-          <a:bodyPr/>
-          <a:lstStyle/>
-          <a:p>
-            <a:r>
-              <a:rPr lang="de-DE" dirty="0"/>
-              <a:t>Target and </a:t>
-            </a:r>
-            <a:r>
-              <a:rPr lang="de-DE" dirty="0" err="1"/>
-              <a:t>Frequency</a:t>
-            </a:r>
-            <a:r>
-              <a:rPr lang="de-DE" dirty="0"/>
-              <a:t> Encoding</a:t>
-            </a:r>
-          </a:p>
-        </p:txBody>
-      </p:sp>
-      <p:sp>
-        <p:nvSpPr>
-          <p:cNvPr id="3" name="Inhaltsplatzhalter 2">
-            <a:extLst>
-              <a:ext uri="{FF2B5EF4-FFF2-40B4-BE49-F238E27FC236}">
-                <a16:creationId xmlns:a16="http://schemas.microsoft.com/office/drawing/2014/main" id="{436A7C9C-E319-B9BC-7A5F-20F895CA4734}"/>
-              </a:ext>
-            </a:extLst>
-          </p:cNvPr>
-          <p:cNvSpPr>
-            <a:spLocks noGrp="1"/>
-          </p:cNvSpPr>
-          <p:nvPr>
-            <p:ph idx="1"/>
-          </p:nvPr>
-        </p:nvSpPr>
-        <p:spPr/>
-        <p:txBody>
-          <a:bodyPr/>
-          <a:lstStyle/>
-          <a:p>
-            <a:endParaRPr lang="de-DE"/>
-          </a:p>
-        </p:txBody>
-      </p:sp>
-      <p:sp>
-        <p:nvSpPr>
-          <p:cNvPr id="4" name="Foliennummernplatzhalter 3">
-            <a:extLst>
-              <a:ext uri="{FF2B5EF4-FFF2-40B4-BE49-F238E27FC236}">
-                <a16:creationId xmlns:a16="http://schemas.microsoft.com/office/drawing/2014/main" id="{870448D9-DCF8-02EA-C143-C27C760981D2}"/>
-              </a:ext>
-            </a:extLst>
-          </p:cNvPr>
-          <p:cNvSpPr>
-            <a:spLocks noGrp="1"/>
-          </p:cNvSpPr>
-          <p:nvPr>
-            <p:ph type="sldNum" sz="quarter" idx="12"/>
-          </p:nvPr>
-        </p:nvSpPr>
-        <p:spPr/>
-        <p:txBody>
-          <a:bodyPr/>
-          <a:lstStyle/>
-          <a:p>
-            <a:fld id="{08C366F5-AFAD-49CB-854A-9D9E238FCA13}" type="slidenum">
-              <a:rPr lang="en-GB" smtClean="0"/>
-              <a:t>13</a:t>
-            </a:fld>
-            <a:endParaRPr lang="en-GB"/>
-          </a:p>
-        </p:txBody>
-      </p:sp>
-    </p:spTree>
-    <p:extLst>
-      <p:ext uri="{BB962C8B-B14F-4D97-AF65-F5344CB8AC3E}">
-        <p14:creationId xmlns:p14="http://schemas.microsoft.com/office/powerpoint/2010/main" val="3347056250"/>
-      </p:ext>
-    </p:extLst>
-  </p:cSld>
-  <p:clrMapOvr>
-    <a:masterClrMapping/>
-  </p:clrMapOvr>
-</p:sld>
-</file>
-
-<file path=ppt/slides/slide14.xml><?xml version="1.0" encoding="utf-8"?>
-<p:sld xmlns:a="http://schemas.openxmlformats.org/drawingml/2006/main" xmlns:r="http://schemas.openxmlformats.org/officeDocument/2006/relationships" xmlns:p="http://schemas.openxmlformats.org/presentationml/2006/main">
-  <p:cSld>
-    <p:spTree>
-      <p:nvGrpSpPr>
-        <p:cNvPr id="1" name=""/>
-        <p:cNvGrpSpPr/>
-        <p:nvPr/>
-      </p:nvGrpSpPr>
-      <p:grpSpPr>
-        <a:xfrm>
-          <a:off x="0" y="0"/>
-          <a:ext cx="0" cy="0"/>
-          <a:chOff x="0" y="0"/>
-          <a:chExt cx="0" cy="0"/>
-        </a:xfrm>
-      </p:grpSpPr>
-      <p:sp>
-        <p:nvSpPr>
           <p:cNvPr id="2" name="Title 1">
             <a:extLst>
               <a:ext uri="{FF2B5EF4-FFF2-40B4-BE49-F238E27FC236}">
@@ -5231,7 +4800,7 @@
           <a:p>
             <a:fld id="{290AF890-0265-4349-BF13-E30F01A2AA85}" type="slidenum">
               <a:rPr lang="en-DE" smtClean="0"/>
-              <a:t>14</a:t>
+              <a:t>13</a:t>
             </a:fld>
             <a:endParaRPr lang="en-DE"/>
           </a:p>
@@ -5319,7 +4888,7 @@
 </p:sld>
 </file>
 
-<file path=ppt/slides/slide15.xml><?xml version="1.0" encoding="utf-8"?>
+<file path=ppt/slides/slide14.xml><?xml version="1.0" encoding="utf-8"?>
 <p:sld xmlns:a="http://schemas.openxmlformats.org/drawingml/2006/main" xmlns:r="http://schemas.openxmlformats.org/officeDocument/2006/relationships" xmlns:p="http://schemas.openxmlformats.org/presentationml/2006/main">
   <p:cSld>
     <p:spTree>
@@ -5481,7 +5050,7 @@
           <a:p>
             <a:fld id="{290AF890-0265-4349-BF13-E30F01A2AA85}" type="slidenum">
               <a:rPr lang="en-DE" smtClean="0"/>
-              <a:t>15</a:t>
+              <a:t>14</a:t>
             </a:fld>
             <a:endParaRPr lang="en-DE"/>
           </a:p>
@@ -5659,6 +5228,176 @@
     <p:extLst>
       <p:ext uri="{BB962C8B-B14F-4D97-AF65-F5344CB8AC3E}">
         <p14:creationId xmlns:p14="http://schemas.microsoft.com/office/powerpoint/2010/main" val="4055136420"/>
+      </p:ext>
+    </p:extLst>
+  </p:cSld>
+  <p:clrMapOvr>
+    <a:masterClrMapping/>
+  </p:clrMapOvr>
+</p:sld>
+</file>
+
+<file path=ppt/slides/slide15.xml><?xml version="1.0" encoding="utf-8"?>
+<p:sld xmlns:a="http://schemas.openxmlformats.org/drawingml/2006/main" xmlns:r="http://schemas.openxmlformats.org/officeDocument/2006/relationships" xmlns:p="http://schemas.openxmlformats.org/presentationml/2006/main">
+  <p:cSld>
+    <p:spTree>
+      <p:nvGrpSpPr>
+        <p:cNvPr id="1" name=""/>
+        <p:cNvGrpSpPr/>
+        <p:nvPr/>
+      </p:nvGrpSpPr>
+      <p:grpSpPr>
+        <a:xfrm>
+          <a:off x="0" y="0"/>
+          <a:ext cx="0" cy="0"/>
+          <a:chOff x="0" y="0"/>
+          <a:chExt cx="0" cy="0"/>
+        </a:xfrm>
+      </p:grpSpPr>
+      <p:sp>
+        <p:nvSpPr>
+          <p:cNvPr id="5" name="Titel 4">
+            <a:extLst>
+              <a:ext uri="{FF2B5EF4-FFF2-40B4-BE49-F238E27FC236}">
+                <a16:creationId xmlns:a16="http://schemas.microsoft.com/office/drawing/2014/main" id="{BBCDC7E5-D7A7-4A4D-D7BA-4ADED892241B}"/>
+              </a:ext>
+            </a:extLst>
+          </p:cNvPr>
+          <p:cNvSpPr>
+            <a:spLocks noGrp="1"/>
+          </p:cNvSpPr>
+          <p:nvPr>
+            <p:ph type="title"/>
+          </p:nvPr>
+        </p:nvSpPr>
+        <p:spPr/>
+        <p:txBody>
+          <a:bodyPr/>
+          <a:lstStyle/>
+          <a:p>
+            <a:r>
+              <a:rPr lang="de-DE" dirty="0" err="1"/>
+              <a:t>Tokenization</a:t>
+            </a:r>
+            <a:r>
+              <a:rPr lang="de-DE" dirty="0"/>
+              <a:t> &amp; </a:t>
+            </a:r>
+            <a:r>
+              <a:rPr lang="de-DE" dirty="0" err="1"/>
+              <a:t>Embeddings</a:t>
+            </a:r>
+            <a:endParaRPr lang="de-DE" dirty="0"/>
+          </a:p>
+        </p:txBody>
+      </p:sp>
+      <p:sp>
+        <p:nvSpPr>
+          <p:cNvPr id="4" name="Foliennummernplatzhalter 3">
+            <a:extLst>
+              <a:ext uri="{FF2B5EF4-FFF2-40B4-BE49-F238E27FC236}">
+                <a16:creationId xmlns:a16="http://schemas.microsoft.com/office/drawing/2014/main" id="{9E35D160-5F88-C8FA-1779-A31D24A90811}"/>
+              </a:ext>
+            </a:extLst>
+          </p:cNvPr>
+          <p:cNvSpPr>
+            <a:spLocks noGrp="1"/>
+          </p:cNvSpPr>
+          <p:nvPr>
+            <p:ph type="sldNum" sz="quarter" idx="12"/>
+          </p:nvPr>
+        </p:nvSpPr>
+        <p:spPr/>
+        <p:txBody>
+          <a:bodyPr/>
+          <a:lstStyle/>
+          <a:p>
+            <a:fld id="{3D4C94FE-FF23-4504-88E9-14D481113291}" type="slidenum">
+              <a:rPr lang="en-GB" smtClean="0"/>
+              <a:t>15</a:t>
+            </a:fld>
+            <a:endParaRPr lang="en-GB"/>
+          </a:p>
+        </p:txBody>
+      </p:sp>
+      <p:pic>
+        <p:nvPicPr>
+          <p:cNvPr id="7" name="Grafik 6" descr="Ein Bild, das Text, Screenshot, Zahl, Diagramm enthält.&#10;&#10;KI-generierte Inhalte können fehlerhaft sein.">
+            <a:extLst>
+              <a:ext uri="{FF2B5EF4-FFF2-40B4-BE49-F238E27FC236}">
+                <a16:creationId xmlns:a16="http://schemas.microsoft.com/office/drawing/2014/main" id="{A9B50630-A54E-D44F-A579-EE71DE87491E}"/>
+              </a:ext>
+            </a:extLst>
+          </p:cNvPr>
+          <p:cNvPicPr>
+            <a:picLocks noChangeAspect="1"/>
+          </p:cNvPicPr>
+          <p:nvPr/>
+        </p:nvPicPr>
+        <p:blipFill>
+          <a:blip r:embed="rId2">
+            <a:extLst>
+              <a:ext uri="{28A0092B-C50C-407E-A947-70E740481C1C}">
+                <a14:useLocalDpi xmlns:a14="http://schemas.microsoft.com/office/drawing/2010/main" val="0"/>
+              </a:ext>
+            </a:extLst>
+          </a:blip>
+          <a:stretch>
+            <a:fillRect/>
+          </a:stretch>
+        </p:blipFill>
+        <p:spPr>
+          <a:xfrm>
+            <a:off x="1524000" y="1690688"/>
+            <a:ext cx="9144000" cy="4523984"/>
+          </a:xfrm>
+          <a:prstGeom prst="rect">
+            <a:avLst/>
+          </a:prstGeom>
+        </p:spPr>
+      </p:pic>
+      <p:sp>
+        <p:nvSpPr>
+          <p:cNvPr id="8" name="TextBox 10">
+            <a:extLst>
+              <a:ext uri="{FF2B5EF4-FFF2-40B4-BE49-F238E27FC236}">
+                <a16:creationId xmlns:a16="http://schemas.microsoft.com/office/drawing/2014/main" id="{59B2AC5B-C9B6-DFBA-0AA1-6A856780D62D}"/>
+              </a:ext>
+            </a:extLst>
+          </p:cNvPr>
+          <p:cNvSpPr txBox="1"/>
+          <p:nvPr/>
+        </p:nvSpPr>
+        <p:spPr>
+          <a:xfrm>
+            <a:off x="9715941" y="6214672"/>
+            <a:ext cx="567784" cy="246221"/>
+          </a:xfrm>
+          <a:prstGeom prst="rect">
+            <a:avLst/>
+          </a:prstGeom>
+          <a:noFill/>
+        </p:spPr>
+        <p:txBody>
+          <a:bodyPr wrap="none" rtlCol="0">
+            <a:spAutoFit/>
+          </a:bodyPr>
+          <a:lstStyle/>
+          <a:p>
+            <a:r>
+              <a:rPr lang="de-DE" sz="1000" dirty="0">
+                <a:hlinkClick r:id="rId3"/>
+              </a:rPr>
+              <a:t>source</a:t>
+            </a:r>
+            <a:endParaRPr lang="de-DE" sz="1000" dirty="0"/>
+          </a:p>
+        </p:txBody>
+      </p:sp>
+    </p:spTree>
+    <p:extLst>
+      <p:ext uri="{BB962C8B-B14F-4D97-AF65-F5344CB8AC3E}">
+        <p14:creationId xmlns:p14="http://schemas.microsoft.com/office/powerpoint/2010/main" val="2333349658"/>
       </p:ext>
     </p:extLst>
   </p:cSld>
@@ -5687,10 +5426,10 @@
       </p:grpSpPr>
       <p:sp>
         <p:nvSpPr>
-          <p:cNvPr id="5" name="Titel 4">
-            <a:extLst>
-              <a:ext uri="{FF2B5EF4-FFF2-40B4-BE49-F238E27FC236}">
-                <a16:creationId xmlns:a16="http://schemas.microsoft.com/office/drawing/2014/main" id="{BBCDC7E5-D7A7-4A4D-D7BA-4ADED892241B}"/>
+          <p:cNvPr id="2" name="Titel 1">
+            <a:extLst>
+              <a:ext uri="{FF2B5EF4-FFF2-40B4-BE49-F238E27FC236}">
+                <a16:creationId xmlns:a16="http://schemas.microsoft.com/office/drawing/2014/main" id="{BDBD6BF8-3D11-D88B-C84A-AE77A321178F}"/>
               </a:ext>
             </a:extLst>
           </p:cNvPr>
@@ -5708,15 +5447,15 @@
           <a:p>
             <a:r>
               <a:rPr lang="de-DE" dirty="0" err="1"/>
-              <a:t>Tokenization</a:t>
+              <a:t>Dimensionality</a:t>
             </a:r>
             <a:r>
               <a:rPr lang="de-DE" dirty="0"/>
-              <a:t> &amp; </a:t>
+              <a:t> </a:t>
             </a:r>
             <a:r>
               <a:rPr lang="de-DE" dirty="0" err="1"/>
-              <a:t>Embeddings</a:t>
+              <a:t>Reduction</a:t>
             </a:r>
             <a:endParaRPr lang="de-DE" dirty="0"/>
           </a:p>
@@ -5724,10 +5463,35 @@
       </p:sp>
       <p:sp>
         <p:nvSpPr>
+          <p:cNvPr id="3" name="Inhaltsplatzhalter 2">
+            <a:extLst>
+              <a:ext uri="{FF2B5EF4-FFF2-40B4-BE49-F238E27FC236}">
+                <a16:creationId xmlns:a16="http://schemas.microsoft.com/office/drawing/2014/main" id="{5DBF8B8B-A809-EE1C-1E3D-A32FC508808F}"/>
+              </a:ext>
+            </a:extLst>
+          </p:cNvPr>
+          <p:cNvSpPr>
+            <a:spLocks noGrp="1"/>
+          </p:cNvSpPr>
+          <p:nvPr>
+            <p:ph idx="1"/>
+          </p:nvPr>
+        </p:nvSpPr>
+        <p:spPr/>
+        <p:txBody>
+          <a:bodyPr/>
+          <a:lstStyle/>
+          <a:p>
+            <a:endParaRPr lang="de-DE"/>
+          </a:p>
+        </p:txBody>
+      </p:sp>
+      <p:sp>
+        <p:nvSpPr>
           <p:cNvPr id="4" name="Foliennummernplatzhalter 3">
             <a:extLst>
               <a:ext uri="{FF2B5EF4-FFF2-40B4-BE49-F238E27FC236}">
-                <a16:creationId xmlns:a16="http://schemas.microsoft.com/office/drawing/2014/main" id="{9E35D160-5F88-C8FA-1779-A31D24A90811}"/>
+                <a16:creationId xmlns:a16="http://schemas.microsoft.com/office/drawing/2014/main" id="{BE5B58E1-0E39-CD68-78F4-A3CF38272C75}"/>
               </a:ext>
             </a:extLst>
           </p:cNvPr>
@@ -5743,7 +5507,7 @@
           <a:bodyPr/>
           <a:lstStyle/>
           <a:p>
-            <a:fld id="{3D4C94FE-FF23-4504-88E9-14D481113291}" type="slidenum">
+            <a:fld id="{08C366F5-AFAD-49CB-854A-9D9E238FCA13}" type="slidenum">
               <a:rPr lang="en-GB" smtClean="0"/>
               <a:t>16</a:t>
             </a:fld>
@@ -5751,84 +5515,10 @@
           </a:p>
         </p:txBody>
       </p:sp>
-      <p:pic>
-        <p:nvPicPr>
-          <p:cNvPr id="7" name="Grafik 6" descr="Ein Bild, das Text, Screenshot, Zahl, Diagramm enthält.&#10;&#10;KI-generierte Inhalte können fehlerhaft sein.">
-            <a:extLst>
-              <a:ext uri="{FF2B5EF4-FFF2-40B4-BE49-F238E27FC236}">
-                <a16:creationId xmlns:a16="http://schemas.microsoft.com/office/drawing/2014/main" id="{A9B50630-A54E-D44F-A579-EE71DE87491E}"/>
-              </a:ext>
-            </a:extLst>
-          </p:cNvPr>
-          <p:cNvPicPr>
-            <a:picLocks noChangeAspect="1"/>
-          </p:cNvPicPr>
-          <p:nvPr/>
-        </p:nvPicPr>
-        <p:blipFill>
-          <a:blip r:embed="rId2">
-            <a:extLst>
-              <a:ext uri="{28A0092B-C50C-407E-A947-70E740481C1C}">
-                <a14:useLocalDpi xmlns:a14="http://schemas.microsoft.com/office/drawing/2010/main" val="0"/>
-              </a:ext>
-            </a:extLst>
-          </a:blip>
-          <a:stretch>
-            <a:fillRect/>
-          </a:stretch>
-        </p:blipFill>
-        <p:spPr>
-          <a:xfrm>
-            <a:off x="1524000" y="1690688"/>
-            <a:ext cx="9144000" cy="4523984"/>
-          </a:xfrm>
-          <a:prstGeom prst="rect">
-            <a:avLst/>
-          </a:prstGeom>
-        </p:spPr>
-      </p:pic>
-      <p:sp>
-        <p:nvSpPr>
-          <p:cNvPr id="8" name="TextBox 10">
-            <a:extLst>
-              <a:ext uri="{FF2B5EF4-FFF2-40B4-BE49-F238E27FC236}">
-                <a16:creationId xmlns:a16="http://schemas.microsoft.com/office/drawing/2014/main" id="{59B2AC5B-C9B6-DFBA-0AA1-6A856780D62D}"/>
-              </a:ext>
-            </a:extLst>
-          </p:cNvPr>
-          <p:cNvSpPr txBox="1"/>
-          <p:nvPr/>
-        </p:nvSpPr>
-        <p:spPr>
-          <a:xfrm>
-            <a:off x="9715941" y="6214672"/>
-            <a:ext cx="567784" cy="246221"/>
-          </a:xfrm>
-          <a:prstGeom prst="rect">
-            <a:avLst/>
-          </a:prstGeom>
-          <a:noFill/>
-        </p:spPr>
-        <p:txBody>
-          <a:bodyPr wrap="none" rtlCol="0">
-            <a:spAutoFit/>
-          </a:bodyPr>
-          <a:lstStyle/>
-          <a:p>
-            <a:r>
-              <a:rPr lang="de-DE" sz="1000" dirty="0">
-                <a:hlinkClick r:id="rId3"/>
-              </a:rPr>
-              <a:t>source</a:t>
-            </a:r>
-            <a:endParaRPr lang="de-DE" sz="1000" dirty="0"/>
-          </a:p>
-        </p:txBody>
-      </p:sp>
     </p:spTree>
     <p:extLst>
       <p:ext uri="{BB962C8B-B14F-4D97-AF65-F5344CB8AC3E}">
-        <p14:creationId xmlns:p14="http://schemas.microsoft.com/office/powerpoint/2010/main" val="2333349658"/>
+        <p14:creationId xmlns:p14="http://schemas.microsoft.com/office/powerpoint/2010/main" val="1841594860"/>
       </p:ext>
     </p:extLst>
   </p:cSld>
@@ -5860,7 +5550,7 @@
           <p:cNvPr id="2" name="Titel 1">
             <a:extLst>
               <a:ext uri="{FF2B5EF4-FFF2-40B4-BE49-F238E27FC236}">
-                <a16:creationId xmlns:a16="http://schemas.microsoft.com/office/drawing/2014/main" id="{BDBD6BF8-3D11-D88B-C84A-AE77A321178F}"/>
+                <a16:creationId xmlns:a16="http://schemas.microsoft.com/office/drawing/2014/main" id="{AE7B3083-59FB-DA8F-12C6-DF0A645DE621}"/>
               </a:ext>
             </a:extLst>
           </p:cNvPr>
@@ -5878,7 +5568,7 @@
           <a:p>
             <a:r>
               <a:rPr lang="de-DE" dirty="0" err="1"/>
-              <a:t>Dimensionality</a:t>
+              <a:t>Principal</a:t>
             </a:r>
             <a:r>
               <a:rPr lang="de-DE" dirty="0"/>
@@ -5886,9 +5576,12 @@
             </a:r>
             <a:r>
               <a:rPr lang="de-DE" dirty="0" err="1"/>
-              <a:t>Reduction</a:t>
-            </a:r>
-            <a:endParaRPr lang="de-DE" dirty="0"/>
+              <a:t>Component</a:t>
+            </a:r>
+            <a:r>
+              <a:rPr lang="de-DE" dirty="0"/>
+              <a:t> Analysis (PCA)</a:t>
+            </a:r>
           </a:p>
         </p:txBody>
       </p:sp>
@@ -5897,7 +5590,7 @@
           <p:cNvPr id="3" name="Inhaltsplatzhalter 2">
             <a:extLst>
               <a:ext uri="{FF2B5EF4-FFF2-40B4-BE49-F238E27FC236}">
-                <a16:creationId xmlns:a16="http://schemas.microsoft.com/office/drawing/2014/main" id="{5DBF8B8B-A809-EE1C-1E3D-A32FC508808F}"/>
+                <a16:creationId xmlns:a16="http://schemas.microsoft.com/office/drawing/2014/main" id="{B7809814-34C7-FCFF-C03A-378CFA8499B8}"/>
               </a:ext>
             </a:extLst>
           </p:cNvPr>
@@ -5922,7 +5615,7 @@
           <p:cNvPr id="4" name="Foliennummernplatzhalter 3">
             <a:extLst>
               <a:ext uri="{FF2B5EF4-FFF2-40B4-BE49-F238E27FC236}">
-                <a16:creationId xmlns:a16="http://schemas.microsoft.com/office/drawing/2014/main" id="{BE5B58E1-0E39-CD68-78F4-A3CF38272C75}"/>
+                <a16:creationId xmlns:a16="http://schemas.microsoft.com/office/drawing/2014/main" id="{A5D62EC6-ACEC-43A6-B331-EF1A0B5EB787}"/>
               </a:ext>
             </a:extLst>
           </p:cNvPr>
@@ -5949,7 +5642,7 @@
     </p:spTree>
     <p:extLst>
       <p:ext uri="{BB962C8B-B14F-4D97-AF65-F5344CB8AC3E}">
-        <p14:creationId xmlns:p14="http://schemas.microsoft.com/office/powerpoint/2010/main" val="1841594860"/>
+        <p14:creationId xmlns:p14="http://schemas.microsoft.com/office/powerpoint/2010/main" val="2193803085"/>
       </p:ext>
     </p:extLst>
   </p:cSld>
@@ -5981,7 +5674,7 @@
           <p:cNvPr id="2" name="Titel 1">
             <a:extLst>
               <a:ext uri="{FF2B5EF4-FFF2-40B4-BE49-F238E27FC236}">
-                <a16:creationId xmlns:a16="http://schemas.microsoft.com/office/drawing/2014/main" id="{AE7B3083-59FB-DA8F-12C6-DF0A645DE621}"/>
+                <a16:creationId xmlns:a16="http://schemas.microsoft.com/office/drawing/2014/main" id="{FFA6AFEC-8765-3AAD-81DF-22E46DF92DB8}"/>
               </a:ext>
             </a:extLst>
           </p:cNvPr>
@@ -5997,21 +5690,21 @@
           <a:bodyPr/>
           <a:lstStyle/>
           <a:p>
+            <a:r>
+              <a:rPr lang="de-DE" dirty="0" err="1"/>
+              <a:t>Interpreting</a:t>
+            </a:r>
+            <a:r>
+              <a:rPr lang="de-DE" dirty="0"/>
+              <a:t> </a:t>
+            </a:r>
             <a:r>
               <a:rPr lang="de-DE" dirty="0" err="1"/>
               <a:t>Principal</a:t>
             </a:r>
             <a:r>
               <a:rPr lang="de-DE" dirty="0"/>
-              <a:t> </a:t>
-            </a:r>
-            <a:r>
-              <a:rPr lang="de-DE" dirty="0" err="1"/>
-              <a:t>Component</a:t>
-            </a:r>
-            <a:r>
-              <a:rPr lang="de-DE" dirty="0"/>
-              <a:t> Analysis (PCA)</a:t>
+              <a:t> Components</a:t>
             </a:r>
           </a:p>
         </p:txBody>
@@ -6021,7 +5714,7 @@
           <p:cNvPr id="3" name="Inhaltsplatzhalter 2">
             <a:extLst>
               <a:ext uri="{FF2B5EF4-FFF2-40B4-BE49-F238E27FC236}">
-                <a16:creationId xmlns:a16="http://schemas.microsoft.com/office/drawing/2014/main" id="{B7809814-34C7-FCFF-C03A-378CFA8499B8}"/>
+                <a16:creationId xmlns:a16="http://schemas.microsoft.com/office/drawing/2014/main" id="{BC68A9FB-8232-AD4B-8546-A970004A857B}"/>
               </a:ext>
             </a:extLst>
           </p:cNvPr>
@@ -6046,7 +5739,7 @@
           <p:cNvPr id="4" name="Foliennummernplatzhalter 3">
             <a:extLst>
               <a:ext uri="{FF2B5EF4-FFF2-40B4-BE49-F238E27FC236}">
-                <a16:creationId xmlns:a16="http://schemas.microsoft.com/office/drawing/2014/main" id="{A5D62EC6-ACEC-43A6-B331-EF1A0B5EB787}"/>
+                <a16:creationId xmlns:a16="http://schemas.microsoft.com/office/drawing/2014/main" id="{209CA560-5E44-0D4F-1B3A-321CECE9DB15}"/>
               </a:ext>
             </a:extLst>
           </p:cNvPr>
@@ -6073,7 +5766,7 @@
     </p:spTree>
     <p:extLst>
       <p:ext uri="{BB962C8B-B14F-4D97-AF65-F5344CB8AC3E}">
-        <p14:creationId xmlns:p14="http://schemas.microsoft.com/office/powerpoint/2010/main" val="2193803085"/>
+        <p14:creationId xmlns:p14="http://schemas.microsoft.com/office/powerpoint/2010/main" val="4133322017"/>
       </p:ext>
     </p:extLst>
   </p:cSld>
@@ -6105,7 +5798,7 @@
           <p:cNvPr id="2" name="Titel 1">
             <a:extLst>
               <a:ext uri="{FF2B5EF4-FFF2-40B4-BE49-F238E27FC236}">
-                <a16:creationId xmlns:a16="http://schemas.microsoft.com/office/drawing/2014/main" id="{FFA6AFEC-8765-3AAD-81DF-22E46DF92DB8}"/>
+                <a16:creationId xmlns:a16="http://schemas.microsoft.com/office/drawing/2014/main" id="{7BC65FE1-3D0F-A212-782E-9BD31CC63B98}"/>
               </a:ext>
             </a:extLst>
           </p:cNvPr>
@@ -6123,20 +5816,17 @@
           <a:p>
             <a:r>
               <a:rPr lang="de-DE" dirty="0" err="1"/>
-              <a:t>Interpreting</a:t>
+              <a:t>Regularization</a:t>
             </a:r>
             <a:r>
               <a:rPr lang="de-DE" dirty="0"/>
-              <a:t> </a:t>
+              <a:t> and Feature </a:t>
             </a:r>
             <a:r>
               <a:rPr lang="de-DE" dirty="0" err="1"/>
-              <a:t>Principal</a:t>
-            </a:r>
-            <a:r>
-              <a:rPr lang="de-DE" dirty="0"/>
-              <a:t> Components</a:t>
-            </a:r>
+              <a:t>Selection</a:t>
+            </a:r>
+            <a:endParaRPr lang="de-DE" dirty="0"/>
           </a:p>
         </p:txBody>
       </p:sp>
@@ -6145,7 +5835,7 @@
           <p:cNvPr id="3" name="Inhaltsplatzhalter 2">
             <a:extLst>
               <a:ext uri="{FF2B5EF4-FFF2-40B4-BE49-F238E27FC236}">
-                <a16:creationId xmlns:a16="http://schemas.microsoft.com/office/drawing/2014/main" id="{BC68A9FB-8232-AD4B-8546-A970004A857B}"/>
+                <a16:creationId xmlns:a16="http://schemas.microsoft.com/office/drawing/2014/main" id="{EE0D3F02-061B-0FA9-ABF4-F9D34A0EF4A8}"/>
               </a:ext>
             </a:extLst>
           </p:cNvPr>
@@ -6170,7 +5860,7 @@
           <p:cNvPr id="4" name="Foliennummernplatzhalter 3">
             <a:extLst>
               <a:ext uri="{FF2B5EF4-FFF2-40B4-BE49-F238E27FC236}">
-                <a16:creationId xmlns:a16="http://schemas.microsoft.com/office/drawing/2014/main" id="{209CA560-5E44-0D4F-1B3A-321CECE9DB15}"/>
+                <a16:creationId xmlns:a16="http://schemas.microsoft.com/office/drawing/2014/main" id="{B838E8F3-9DF8-C3E8-2EFC-8D44C8F5D9A3}"/>
               </a:ext>
             </a:extLst>
           </p:cNvPr>
@@ -6197,7 +5887,7 @@
     </p:spTree>
     <p:extLst>
       <p:ext uri="{BB962C8B-B14F-4D97-AF65-F5344CB8AC3E}">
-        <p14:creationId xmlns:p14="http://schemas.microsoft.com/office/powerpoint/2010/main" val="4133322017"/>
+        <p14:creationId xmlns:p14="http://schemas.microsoft.com/office/powerpoint/2010/main" val="2136778643"/>
       </p:ext>
     </p:extLst>
   </p:cSld>
@@ -6226,10 +5916,10 @@
       </p:grpSpPr>
       <p:sp>
         <p:nvSpPr>
-          <p:cNvPr id="4" name="Title 3">
-            <a:extLst>
-              <a:ext uri="{FF2B5EF4-FFF2-40B4-BE49-F238E27FC236}">
-                <a16:creationId xmlns:a16="http://schemas.microsoft.com/office/drawing/2014/main" id="{080AD447-446B-E09E-6F4A-522C1DBB462E}"/>
+          <p:cNvPr id="6" name="Titel 5">
+            <a:extLst>
+              <a:ext uri="{FF2B5EF4-FFF2-40B4-BE49-F238E27FC236}">
+                <a16:creationId xmlns:a16="http://schemas.microsoft.com/office/drawing/2014/main" id="{E92B2E04-27B7-8A9A-6143-C8831F834080}"/>
               </a:ext>
             </a:extLst>
           </p:cNvPr>
@@ -6245,241 +5935,128 @@
           <a:bodyPr/>
           <a:lstStyle/>
           <a:p>
-            <a:r>
-              <a:rPr lang="en-GB" dirty="0"/>
-              <a:t>Course Schedule</a:t>
-            </a:r>
-          </a:p>
-        </p:txBody>
-      </p:sp>
-      <p:sp>
-        <p:nvSpPr>
-          <p:cNvPr id="6" name="Inhaltsplatzhalter 5">
-            <a:extLst>
-              <a:ext uri="{FF2B5EF4-FFF2-40B4-BE49-F238E27FC236}">
-                <a16:creationId xmlns:a16="http://schemas.microsoft.com/office/drawing/2014/main" id="{CF502483-E45D-7D7D-D169-ACA4F8327D26}"/>
-              </a:ext>
-            </a:extLst>
-          </p:cNvPr>
-          <p:cNvSpPr>
-            <a:spLocks noGrp="1"/>
-          </p:cNvSpPr>
-          <p:nvPr>
-            <p:ph sz="half" idx="1"/>
-          </p:nvPr>
-        </p:nvSpPr>
-        <p:spPr/>
-        <p:txBody>
-          <a:bodyPr>
-            <a:normAutofit lnSpcReduction="10000"/>
-          </a:bodyPr>
-          <a:lstStyle/>
-          <a:p>
-            <a:pPr marL="514350" indent="-514350">
-              <a:buFont typeface="+mj-lt"/>
-              <a:buAutoNum type="arabicPeriod"/>
-            </a:pPr>
-            <a:r>
-              <a:rPr lang="de-DE" dirty="0" err="1"/>
-              <a:t>Exploratory</a:t>
-            </a:r>
-            <a:r>
-              <a:rPr lang="de-DE" dirty="0"/>
-              <a:t> Data Analysis</a:t>
-            </a:r>
-          </a:p>
-          <a:p>
-            <a:pPr marL="514350" indent="-514350">
-              <a:buFont typeface="+mj-lt"/>
-              <a:buAutoNum type="arabicPeriod"/>
-            </a:pPr>
-            <a:endParaRPr lang="de-DE" dirty="0"/>
-          </a:p>
-          <a:p>
-            <a:pPr marL="514350" indent="-514350">
-              <a:buFont typeface="+mj-lt"/>
-              <a:buAutoNum type="arabicPeriod"/>
-            </a:pPr>
-            <a:r>
-              <a:rPr lang="de-DE" dirty="0"/>
-              <a:t>Clustering</a:t>
-            </a:r>
-          </a:p>
-          <a:p>
-            <a:pPr marL="514350" indent="-514350">
-              <a:buFont typeface="+mj-lt"/>
-              <a:buAutoNum type="arabicPeriod"/>
-            </a:pPr>
-            <a:endParaRPr lang="de-DE" dirty="0"/>
-          </a:p>
-          <a:p>
-            <a:pPr marL="514350" indent="-514350">
-              <a:buFont typeface="+mj-lt"/>
-              <a:buAutoNum type="arabicPeriod"/>
-            </a:pPr>
-            <a:r>
-              <a:rPr lang="de-DE" dirty="0" err="1"/>
-              <a:t>Probabilistic</a:t>
-            </a:r>
-            <a:r>
-              <a:rPr lang="de-DE" dirty="0"/>
-              <a:t> Models</a:t>
-            </a:r>
-          </a:p>
-          <a:p>
-            <a:pPr marL="514350" indent="-514350">
-              <a:buFont typeface="+mj-lt"/>
-              <a:buAutoNum type="arabicPeriod"/>
-            </a:pPr>
-            <a:endParaRPr lang="de-DE" dirty="0"/>
-          </a:p>
-          <a:p>
-            <a:pPr marL="514350" indent="-514350">
-              <a:buFont typeface="+mj-lt"/>
-              <a:buAutoNum type="arabicPeriod"/>
-            </a:pPr>
-            <a:r>
-              <a:rPr lang="de-DE" dirty="0"/>
-              <a:t>Statistical </a:t>
-            </a:r>
-            <a:r>
-              <a:rPr lang="de-DE" dirty="0" err="1"/>
-              <a:t>Inference</a:t>
-            </a:r>
-            <a:endParaRPr lang="de-DE" dirty="0"/>
-          </a:p>
-          <a:p>
-            <a:pPr marL="514350" indent="-514350">
-              <a:buFont typeface="+mj-lt"/>
-              <a:buAutoNum type="arabicPeriod"/>
-            </a:pPr>
-            <a:endParaRPr lang="de-DE" dirty="0"/>
-          </a:p>
-          <a:p>
-            <a:pPr marL="514350" indent="-514350">
-              <a:buFont typeface="+mj-lt"/>
-              <a:buAutoNum type="arabicPeriod"/>
-            </a:pPr>
-            <a:r>
-              <a:rPr lang="de-DE" dirty="0" err="1"/>
-              <a:t>Machine</a:t>
-            </a:r>
-            <a:r>
-              <a:rPr lang="de-DE" dirty="0"/>
-              <a:t> Learning</a:t>
-            </a:r>
-          </a:p>
-        </p:txBody>
-      </p:sp>
-      <p:sp>
-        <p:nvSpPr>
-          <p:cNvPr id="7" name="Inhaltsplatzhalter 6">
-            <a:extLst>
-              <a:ext uri="{FF2B5EF4-FFF2-40B4-BE49-F238E27FC236}">
-                <a16:creationId xmlns:a16="http://schemas.microsoft.com/office/drawing/2014/main" id="{B671907E-FFFA-73EF-8E7D-4AB4EBDD957B}"/>
-              </a:ext>
-            </a:extLst>
-          </p:cNvPr>
-          <p:cNvSpPr>
-            <a:spLocks noGrp="1"/>
-          </p:cNvSpPr>
-          <p:nvPr>
-            <p:ph sz="half" idx="2"/>
-          </p:nvPr>
-        </p:nvSpPr>
-        <p:spPr/>
-        <p:txBody>
-          <a:bodyPr>
-            <a:normAutofit lnSpcReduction="10000"/>
-          </a:bodyPr>
-          <a:lstStyle/>
-          <a:p>
-            <a:pPr marL="514350" indent="-514350">
-              <a:buFont typeface="+mj-lt"/>
-              <a:buAutoNum type="arabicPeriod" startAt="6"/>
-            </a:pPr>
             <a:r>
               <a:rPr lang="de-DE" dirty="0"/>
               <a:t>Feature Engineering</a:t>
             </a:r>
           </a:p>
-          <a:p>
-            <a:pPr marL="514350" indent="-514350">
-              <a:buFont typeface="+mj-lt"/>
-              <a:buAutoNum type="arabicPeriod" startAt="6"/>
-            </a:pPr>
+        </p:txBody>
+      </p:sp>
+      <p:sp>
+        <p:nvSpPr>
+          <p:cNvPr id="7" name="Inhaltsplatzhalter 6">
+            <a:extLst>
+              <a:ext uri="{FF2B5EF4-FFF2-40B4-BE49-F238E27FC236}">
+                <a16:creationId xmlns:a16="http://schemas.microsoft.com/office/drawing/2014/main" id="{16CBE6C5-FF71-FE69-AF96-EB26512AF61F}"/>
+              </a:ext>
+            </a:extLst>
+          </p:cNvPr>
+          <p:cNvSpPr>
+            <a:spLocks noGrp="1"/>
+          </p:cNvSpPr>
+          <p:nvPr>
+            <p:ph idx="1"/>
+          </p:nvPr>
+        </p:nvSpPr>
+        <p:spPr/>
+        <p:txBody>
+          <a:bodyPr/>
+          <a:lstStyle/>
+          <a:p>
+            <a:r>
+              <a:rPr lang="de-DE" dirty="0" err="1"/>
+              <a:t>numerical</a:t>
+            </a:r>
+            <a:r>
+              <a:rPr lang="de-DE" dirty="0"/>
+              <a:t> </a:t>
+            </a:r>
+            <a:r>
+              <a:rPr lang="de-DE" dirty="0" err="1"/>
+              <a:t>features</a:t>
+            </a:r>
+            <a:r>
+              <a:rPr lang="de-DE" dirty="0"/>
+              <a:t>, </a:t>
+            </a:r>
+            <a:r>
+              <a:rPr lang="de-DE" dirty="0" err="1"/>
+              <a:t>transformations</a:t>
+            </a:r>
+            <a:r>
+              <a:rPr lang="de-DE" dirty="0"/>
+              <a:t>, </a:t>
+            </a:r>
+            <a:r>
+              <a:rPr lang="de-DE" dirty="0" err="1"/>
+              <a:t>scaling</a:t>
+            </a:r>
             <a:endParaRPr lang="de-DE" dirty="0"/>
           </a:p>
           <a:p>
-            <a:pPr marL="514350" indent="-514350">
-              <a:buFont typeface="+mj-lt"/>
-              <a:buAutoNum type="arabicPeriod" startAt="6"/>
-            </a:pPr>
+            <a:r>
+              <a:rPr lang="de-DE" dirty="0" err="1"/>
+              <a:t>categorical</a:t>
+            </a:r>
             <a:r>
               <a:rPr lang="de-DE" dirty="0"/>
-              <a:t>Model Evaluation</a:t>
-            </a:r>
-          </a:p>
-          <a:p>
-            <a:pPr marL="514350" indent="-514350">
-              <a:buFont typeface="+mj-lt"/>
-              <a:buAutoNum type="arabicPeriod" startAt="6"/>
-            </a:pPr>
+              <a:t> (nominal, ordinal) </a:t>
+            </a:r>
+            <a:r>
+              <a:rPr lang="de-DE" dirty="0" err="1"/>
+              <a:t>features</a:t>
+            </a:r>
+            <a:r>
+              <a:rPr lang="de-DE" dirty="0"/>
+              <a:t>, </a:t>
+            </a:r>
+            <a:r>
+              <a:rPr lang="de-DE" dirty="0" err="1"/>
+              <a:t>encoding</a:t>
+            </a:r>
             <a:endParaRPr lang="de-DE" dirty="0"/>
           </a:p>
           <a:p>
-            <a:pPr marL="514350" indent="-514350">
-              <a:buFont typeface="+mj-lt"/>
-              <a:buAutoNum type="arabicPeriod" startAt="6"/>
-            </a:pPr>
             <a:r>
               <a:rPr lang="de-DE" dirty="0"/>
-              <a:t>Deep Learning</a:t>
-            </a:r>
-          </a:p>
-          <a:p>
-            <a:pPr marL="514350" indent="-514350">
-              <a:buFont typeface="+mj-lt"/>
-              <a:buAutoNum type="arabicPeriod" startAt="6"/>
-            </a:pPr>
+              <a:t>PCA</a:t>
+            </a:r>
+          </a:p>
+          <a:p>
+            <a:r>
+              <a:rPr lang="de-DE" dirty="0"/>
+              <a:t>LASSO</a:t>
+            </a:r>
+          </a:p>
+          <a:p>
+            <a:r>
+              <a:rPr lang="de-DE" dirty="0"/>
+              <a:t>ARD</a:t>
+            </a:r>
+          </a:p>
+          <a:p>
+            <a:r>
+              <a:rPr lang="de-DE" dirty="0" err="1"/>
+              <a:t>missing</a:t>
+            </a:r>
+            <a:r>
+              <a:rPr lang="de-DE" dirty="0"/>
+              <a:t> </a:t>
+            </a:r>
+            <a:r>
+              <a:rPr lang="de-DE" dirty="0" err="1"/>
+              <a:t>values</a:t>
+            </a:r>
             <a:endParaRPr lang="de-DE" dirty="0"/>
           </a:p>
-          <a:p>
-            <a:pPr marL="514350" indent="-514350">
-              <a:buFont typeface="+mj-lt"/>
-              <a:buAutoNum type="arabicPeriod" startAt="6"/>
-            </a:pPr>
-            <a:r>
-              <a:rPr lang="de-DE" dirty="0"/>
-              <a:t>Time Series</a:t>
-            </a:r>
-          </a:p>
-          <a:p>
-            <a:pPr marL="514350" indent="-514350">
-              <a:buFont typeface="+mj-lt"/>
-              <a:buAutoNum type="arabicPeriod" startAt="6"/>
-            </a:pPr>
-            <a:endParaRPr lang="de-DE" dirty="0"/>
-          </a:p>
-          <a:p>
-            <a:pPr marL="514350" indent="-514350">
-              <a:buFont typeface="+mj-lt"/>
-              <a:buAutoNum type="arabicPeriod" startAt="6"/>
-            </a:pPr>
-            <a:r>
-              <a:rPr lang="de-DE" dirty="0" err="1"/>
-              <a:t>Causality</a:t>
-            </a:r>
-            <a:endParaRPr lang="de-DE" dirty="0"/>
-          </a:p>
-        </p:txBody>
-      </p:sp>
-      <p:sp>
-        <p:nvSpPr>
-          <p:cNvPr id="3" name="Slide Number Placeholder 2">
-            <a:extLst>
-              <a:ext uri="{FF2B5EF4-FFF2-40B4-BE49-F238E27FC236}">
-                <a16:creationId xmlns:a16="http://schemas.microsoft.com/office/drawing/2014/main" id="{A0664D44-83AC-6A7A-17E0-C1AE2ED18FF5}"/>
+        </p:txBody>
+      </p:sp>
+      <p:sp>
+        <p:nvSpPr>
+          <p:cNvPr id="5" name="Foliennummernplatzhalter 4">
+            <a:extLst>
+              <a:ext uri="{FF2B5EF4-FFF2-40B4-BE49-F238E27FC236}">
+                <a16:creationId xmlns:a16="http://schemas.microsoft.com/office/drawing/2014/main" id="{422405FE-CC14-5A9E-E6BC-374EBECB4E84}"/>
               </a:ext>
             </a:extLst>
           </p:cNvPr>
@@ -6499,14 +6076,14 @@
               <a:rPr lang="en-GB" smtClean="0"/>
               <a:t>2</a:t>
             </a:fld>
-            <a:endParaRPr lang="en-GB" dirty="0"/>
+            <a:endParaRPr lang="en-GB"/>
           </a:p>
         </p:txBody>
       </p:sp>
     </p:spTree>
     <p:extLst>
       <p:ext uri="{BB962C8B-B14F-4D97-AF65-F5344CB8AC3E}">
-        <p14:creationId xmlns:p14="http://schemas.microsoft.com/office/powerpoint/2010/main" val="310336692"/>
+        <p14:creationId xmlns:p14="http://schemas.microsoft.com/office/powerpoint/2010/main" val="3204133960"/>
       </p:ext>
     </p:extLst>
   </p:cSld>
@@ -6535,127 +6112,6 @@
       </p:grpSpPr>
       <p:sp>
         <p:nvSpPr>
-          <p:cNvPr id="2" name="Titel 1">
-            <a:extLst>
-              <a:ext uri="{FF2B5EF4-FFF2-40B4-BE49-F238E27FC236}">
-                <a16:creationId xmlns:a16="http://schemas.microsoft.com/office/drawing/2014/main" id="{7BC65FE1-3D0F-A212-782E-9BD31CC63B98}"/>
-              </a:ext>
-            </a:extLst>
-          </p:cNvPr>
-          <p:cNvSpPr>
-            <a:spLocks noGrp="1"/>
-          </p:cNvSpPr>
-          <p:nvPr>
-            <p:ph type="title"/>
-          </p:nvPr>
-        </p:nvSpPr>
-        <p:spPr/>
-        <p:txBody>
-          <a:bodyPr/>
-          <a:lstStyle/>
-          <a:p>
-            <a:r>
-              <a:rPr lang="de-DE" dirty="0" err="1"/>
-              <a:t>Regularization</a:t>
-            </a:r>
-            <a:r>
-              <a:rPr lang="de-DE" dirty="0"/>
-              <a:t> and Feature </a:t>
-            </a:r>
-            <a:r>
-              <a:rPr lang="de-DE" dirty="0" err="1"/>
-              <a:t>Selection</a:t>
-            </a:r>
-            <a:endParaRPr lang="de-DE" dirty="0"/>
-          </a:p>
-        </p:txBody>
-      </p:sp>
-      <p:sp>
-        <p:nvSpPr>
-          <p:cNvPr id="3" name="Inhaltsplatzhalter 2">
-            <a:extLst>
-              <a:ext uri="{FF2B5EF4-FFF2-40B4-BE49-F238E27FC236}">
-                <a16:creationId xmlns:a16="http://schemas.microsoft.com/office/drawing/2014/main" id="{EE0D3F02-061B-0FA9-ABF4-F9D34A0EF4A8}"/>
-              </a:ext>
-            </a:extLst>
-          </p:cNvPr>
-          <p:cNvSpPr>
-            <a:spLocks noGrp="1"/>
-          </p:cNvSpPr>
-          <p:nvPr>
-            <p:ph idx="1"/>
-          </p:nvPr>
-        </p:nvSpPr>
-        <p:spPr/>
-        <p:txBody>
-          <a:bodyPr/>
-          <a:lstStyle/>
-          <a:p>
-            <a:endParaRPr lang="de-DE"/>
-          </a:p>
-        </p:txBody>
-      </p:sp>
-      <p:sp>
-        <p:nvSpPr>
-          <p:cNvPr id="4" name="Foliennummernplatzhalter 3">
-            <a:extLst>
-              <a:ext uri="{FF2B5EF4-FFF2-40B4-BE49-F238E27FC236}">
-                <a16:creationId xmlns:a16="http://schemas.microsoft.com/office/drawing/2014/main" id="{B838E8F3-9DF8-C3E8-2EFC-8D44C8F5D9A3}"/>
-              </a:ext>
-            </a:extLst>
-          </p:cNvPr>
-          <p:cNvSpPr>
-            <a:spLocks noGrp="1"/>
-          </p:cNvSpPr>
-          <p:nvPr>
-            <p:ph type="sldNum" sz="quarter" idx="12"/>
-          </p:nvPr>
-        </p:nvSpPr>
-        <p:spPr/>
-        <p:txBody>
-          <a:bodyPr/>
-          <a:lstStyle/>
-          <a:p>
-            <a:fld id="{08C366F5-AFAD-49CB-854A-9D9E238FCA13}" type="slidenum">
-              <a:rPr lang="en-GB" smtClean="0"/>
-              <a:t>20</a:t>
-            </a:fld>
-            <a:endParaRPr lang="en-GB"/>
-          </a:p>
-        </p:txBody>
-      </p:sp>
-    </p:spTree>
-    <p:extLst>
-      <p:ext uri="{BB962C8B-B14F-4D97-AF65-F5344CB8AC3E}">
-        <p14:creationId xmlns:p14="http://schemas.microsoft.com/office/powerpoint/2010/main" val="2136778643"/>
-      </p:ext>
-    </p:extLst>
-  </p:cSld>
-  <p:clrMapOvr>
-    <a:masterClrMapping/>
-  </p:clrMapOvr>
-</p:sld>
-</file>
-
-<file path=ppt/slides/slide21.xml><?xml version="1.0" encoding="utf-8"?>
-<p:sld xmlns:a="http://schemas.openxmlformats.org/drawingml/2006/main" xmlns:r="http://schemas.openxmlformats.org/officeDocument/2006/relationships" xmlns:p="http://schemas.openxmlformats.org/presentationml/2006/main">
-  <p:cSld>
-    <p:spTree>
-      <p:nvGrpSpPr>
-        <p:cNvPr id="1" name=""/>
-        <p:cNvGrpSpPr/>
-        <p:nvPr/>
-      </p:nvGrpSpPr>
-      <p:grpSpPr>
-        <a:xfrm>
-          <a:off x="0" y="0"/>
-          <a:ext cx="0" cy="0"/>
-          <a:chOff x="0" y="0"/>
-          <a:chExt cx="0" cy="0"/>
-        </a:xfrm>
-      </p:grpSpPr>
-      <p:sp>
-        <p:nvSpPr>
           <p:cNvPr id="2" name="Title 1">
             <a:extLst>
               <a:ext uri="{FF2B5EF4-FFF2-40B4-BE49-F238E27FC236}">
@@ -6771,7 +6227,7 @@
           <a:p>
             <a:fld id="{C4CC4FF7-4194-DC4A-997C-EF4C65C96866}" type="slidenum">
               <a:rPr lang="en-DE" smtClean="0"/>
-              <a:t>21</a:t>
+              <a:t>20</a:t>
             </a:fld>
             <a:endParaRPr lang="en-DE"/>
           </a:p>
@@ -6858,7 +6314,7 @@
 </p:sld>
 </file>
 
-<file path=ppt/slides/slide22.xml><?xml version="1.0" encoding="utf-8"?>
+<file path=ppt/slides/slide21.xml><?xml version="1.0" encoding="utf-8"?>
 <p:sld xmlns:a="http://schemas.openxmlformats.org/drawingml/2006/main" xmlns:r="http://schemas.openxmlformats.org/officeDocument/2006/relationships" xmlns:p="http://schemas.openxmlformats.org/presentationml/2006/main">
   <p:cSld>
     <p:spTree>
@@ -7451,7 +6907,7 @@
           <a:p>
             <a:fld id="{C4CC4FF7-4194-DC4A-997C-EF4C65C96866}" type="slidenum">
               <a:rPr lang="en-DE" smtClean="0"/>
-              <a:t>22</a:t>
+              <a:t>21</a:t>
             </a:fld>
             <a:endParaRPr lang="en-DE"/>
           </a:p>
@@ -7621,6 +7077,130 @@
 </p:sld>
 </file>
 
+<file path=ppt/slides/slide22.xml><?xml version="1.0" encoding="utf-8"?>
+<p:sld xmlns:a="http://schemas.openxmlformats.org/drawingml/2006/main" xmlns:r="http://schemas.openxmlformats.org/officeDocument/2006/relationships" xmlns:p="http://schemas.openxmlformats.org/presentationml/2006/main">
+  <p:cSld>
+    <p:spTree>
+      <p:nvGrpSpPr>
+        <p:cNvPr id="1" name=""/>
+        <p:cNvGrpSpPr/>
+        <p:nvPr/>
+      </p:nvGrpSpPr>
+      <p:grpSpPr>
+        <a:xfrm>
+          <a:off x="0" y="0"/>
+          <a:ext cx="0" cy="0"/>
+          <a:chOff x="0" y="0"/>
+          <a:chExt cx="0" cy="0"/>
+        </a:xfrm>
+      </p:grpSpPr>
+      <p:sp>
+        <p:nvSpPr>
+          <p:cNvPr id="2" name="Titel 1">
+            <a:extLst>
+              <a:ext uri="{FF2B5EF4-FFF2-40B4-BE49-F238E27FC236}">
+                <a16:creationId xmlns:a16="http://schemas.microsoft.com/office/drawing/2014/main" id="{DBACCFFB-9C8A-3344-6CB6-850411F5A9B9}"/>
+              </a:ext>
+            </a:extLst>
+          </p:cNvPr>
+          <p:cNvSpPr>
+            <a:spLocks noGrp="1"/>
+          </p:cNvSpPr>
+          <p:nvPr>
+            <p:ph type="title"/>
+          </p:nvPr>
+        </p:nvSpPr>
+        <p:spPr/>
+        <p:txBody>
+          <a:bodyPr/>
+          <a:lstStyle/>
+          <a:p>
+            <a:r>
+              <a:rPr lang="de-DE" dirty="0" err="1"/>
+              <a:t>Automatic</a:t>
+            </a:r>
+            <a:r>
+              <a:rPr lang="de-DE" dirty="0"/>
+              <a:t> </a:t>
+            </a:r>
+            <a:r>
+              <a:rPr lang="de-DE" dirty="0" err="1"/>
+              <a:t>Relevance</a:t>
+            </a:r>
+            <a:r>
+              <a:rPr lang="de-DE" dirty="0"/>
+              <a:t> Determination (ARD)</a:t>
+            </a:r>
+          </a:p>
+        </p:txBody>
+      </p:sp>
+      <p:sp>
+        <p:nvSpPr>
+          <p:cNvPr id="3" name="Inhaltsplatzhalter 2">
+            <a:extLst>
+              <a:ext uri="{FF2B5EF4-FFF2-40B4-BE49-F238E27FC236}">
+                <a16:creationId xmlns:a16="http://schemas.microsoft.com/office/drawing/2014/main" id="{7143B982-D0C2-2510-8BEB-176415008EF5}"/>
+              </a:ext>
+            </a:extLst>
+          </p:cNvPr>
+          <p:cNvSpPr>
+            <a:spLocks noGrp="1"/>
+          </p:cNvSpPr>
+          <p:nvPr>
+            <p:ph idx="1"/>
+          </p:nvPr>
+        </p:nvSpPr>
+        <p:spPr/>
+        <p:txBody>
+          <a:bodyPr/>
+          <a:lstStyle/>
+          <a:p>
+            <a:endParaRPr lang="de-DE"/>
+          </a:p>
+        </p:txBody>
+      </p:sp>
+      <p:sp>
+        <p:nvSpPr>
+          <p:cNvPr id="4" name="Foliennummernplatzhalter 3">
+            <a:extLst>
+              <a:ext uri="{FF2B5EF4-FFF2-40B4-BE49-F238E27FC236}">
+                <a16:creationId xmlns:a16="http://schemas.microsoft.com/office/drawing/2014/main" id="{A5F057AD-CB24-1B6C-D311-911DEFB8D41C}"/>
+              </a:ext>
+            </a:extLst>
+          </p:cNvPr>
+          <p:cNvSpPr>
+            <a:spLocks noGrp="1"/>
+          </p:cNvSpPr>
+          <p:nvPr>
+            <p:ph type="sldNum" sz="quarter" idx="12"/>
+          </p:nvPr>
+        </p:nvSpPr>
+        <p:spPr/>
+        <p:txBody>
+          <a:bodyPr/>
+          <a:lstStyle/>
+          <a:p>
+            <a:fld id="{08C366F5-AFAD-49CB-854A-9D9E238FCA13}" type="slidenum">
+              <a:rPr lang="en-GB" smtClean="0"/>
+              <a:t>22</a:t>
+            </a:fld>
+            <a:endParaRPr lang="en-GB"/>
+          </a:p>
+        </p:txBody>
+      </p:sp>
+    </p:spTree>
+    <p:extLst>
+      <p:ext uri="{BB962C8B-B14F-4D97-AF65-F5344CB8AC3E}">
+        <p14:creationId xmlns:p14="http://schemas.microsoft.com/office/powerpoint/2010/main" val="3959476641"/>
+      </p:ext>
+    </p:extLst>
+  </p:cSld>
+  <p:clrMapOvr>
+    <a:masterClrMapping/>
+  </p:clrMapOvr>
+</p:sld>
+</file>
+
 <file path=ppt/slides/slide23.xml><?xml version="1.0" encoding="utf-8"?>
 <p:sld xmlns:a="http://schemas.openxmlformats.org/drawingml/2006/main" xmlns:r="http://schemas.openxmlformats.org/officeDocument/2006/relationships" xmlns:p="http://schemas.openxmlformats.org/presentationml/2006/main">
   <p:cSld>
@@ -7643,7 +7223,7 @@
           <p:cNvPr id="2" name="Titel 1">
             <a:extLst>
               <a:ext uri="{FF2B5EF4-FFF2-40B4-BE49-F238E27FC236}">
-                <a16:creationId xmlns:a16="http://schemas.microsoft.com/office/drawing/2014/main" id="{DBACCFFB-9C8A-3344-6CB6-850411F5A9B9}"/>
+                <a16:creationId xmlns:a16="http://schemas.microsoft.com/office/drawing/2014/main" id="{2BC99A6E-985A-BCAE-71DF-63142D9EC1DA}"/>
               </a:ext>
             </a:extLst>
           </p:cNvPr>
@@ -7660,20 +7240,16 @@
           <a:lstStyle/>
           <a:p>
             <a:r>
+              <a:rPr lang="de-DE" dirty="0"/>
+              <a:t>Handling </a:t>
+            </a:r>
+            <a:r>
               <a:rPr lang="de-DE" dirty="0" err="1"/>
-              <a:t>Automatic</a:t>
+              <a:t>Missing</a:t>
             </a:r>
             <a:r>
               <a:rPr lang="de-DE" dirty="0"/>
-              <a:t> </a:t>
-            </a:r>
-            <a:r>
-              <a:rPr lang="de-DE" dirty="0" err="1"/>
-              <a:t>Relevance</a:t>
-            </a:r>
-            <a:r>
-              <a:rPr lang="de-DE" dirty="0"/>
-              <a:t> Determination (ARD)</a:t>
+              <a:t> Values</a:t>
             </a:r>
           </a:p>
         </p:txBody>
@@ -7683,7 +7259,7 @@
           <p:cNvPr id="3" name="Inhaltsplatzhalter 2">
             <a:extLst>
               <a:ext uri="{FF2B5EF4-FFF2-40B4-BE49-F238E27FC236}">
-                <a16:creationId xmlns:a16="http://schemas.microsoft.com/office/drawing/2014/main" id="{7143B982-D0C2-2510-8BEB-176415008EF5}"/>
+                <a16:creationId xmlns:a16="http://schemas.microsoft.com/office/drawing/2014/main" id="{3D2E5862-7DC7-538D-50E5-A4A53633B1F2}"/>
               </a:ext>
             </a:extLst>
           </p:cNvPr>
@@ -7708,7 +7284,7 @@
           <p:cNvPr id="4" name="Foliennummernplatzhalter 3">
             <a:extLst>
               <a:ext uri="{FF2B5EF4-FFF2-40B4-BE49-F238E27FC236}">
-                <a16:creationId xmlns:a16="http://schemas.microsoft.com/office/drawing/2014/main" id="{A5F057AD-CB24-1B6C-D311-911DEFB8D41C}"/>
+                <a16:creationId xmlns:a16="http://schemas.microsoft.com/office/drawing/2014/main" id="{CEE1F3C2-F660-87DE-3784-C6B8FA9E4B31}"/>
               </a:ext>
             </a:extLst>
           </p:cNvPr>
@@ -7735,7 +7311,7 @@
     </p:spTree>
     <p:extLst>
       <p:ext uri="{BB962C8B-B14F-4D97-AF65-F5344CB8AC3E}">
-        <p14:creationId xmlns:p14="http://schemas.microsoft.com/office/powerpoint/2010/main" val="3959476641"/>
+        <p14:creationId xmlns:p14="http://schemas.microsoft.com/office/powerpoint/2010/main" val="2997267176"/>
       </p:ext>
     </p:extLst>
   </p:cSld>
@@ -7767,7 +7343,7 @@
           <p:cNvPr id="2" name="Titel 1">
             <a:extLst>
               <a:ext uri="{FF2B5EF4-FFF2-40B4-BE49-F238E27FC236}">
-                <a16:creationId xmlns:a16="http://schemas.microsoft.com/office/drawing/2014/main" id="{2BC99A6E-985A-BCAE-71DF-63142D9EC1DA}"/>
+                <a16:creationId xmlns:a16="http://schemas.microsoft.com/office/drawing/2014/main" id="{6E13DF55-62FC-108F-C35D-02114E3B96AB}"/>
               </a:ext>
             </a:extLst>
           </p:cNvPr>
@@ -7785,16 +7361,13 @@
           <a:p>
             <a:r>
               <a:rPr lang="de-DE" dirty="0"/>
-              <a:t>Handling </a:t>
+              <a:t>Imputation </a:t>
             </a:r>
             <a:r>
               <a:rPr lang="de-DE" dirty="0" err="1"/>
-              <a:t>Missing</a:t>
-            </a:r>
-            <a:r>
-              <a:rPr lang="de-DE" dirty="0"/>
-              <a:t> Values</a:t>
-            </a:r>
+              <a:t>Strategies</a:t>
+            </a:r>
+            <a:endParaRPr lang="de-DE" dirty="0"/>
           </a:p>
         </p:txBody>
       </p:sp>
@@ -7803,7 +7376,7 @@
           <p:cNvPr id="3" name="Inhaltsplatzhalter 2">
             <a:extLst>
               <a:ext uri="{FF2B5EF4-FFF2-40B4-BE49-F238E27FC236}">
-                <a16:creationId xmlns:a16="http://schemas.microsoft.com/office/drawing/2014/main" id="{3D2E5862-7DC7-538D-50E5-A4A53633B1F2}"/>
+                <a16:creationId xmlns:a16="http://schemas.microsoft.com/office/drawing/2014/main" id="{58C6F1E1-2D09-57EF-8441-1D37701B01D0}"/>
               </a:ext>
             </a:extLst>
           </p:cNvPr>
@@ -7828,7 +7401,7 @@
           <p:cNvPr id="4" name="Foliennummernplatzhalter 3">
             <a:extLst>
               <a:ext uri="{FF2B5EF4-FFF2-40B4-BE49-F238E27FC236}">
-                <a16:creationId xmlns:a16="http://schemas.microsoft.com/office/drawing/2014/main" id="{CEE1F3C2-F660-87DE-3784-C6B8FA9E4B31}"/>
+                <a16:creationId xmlns:a16="http://schemas.microsoft.com/office/drawing/2014/main" id="{F9FAF73B-825C-EAD4-7CCA-FCF1CD576A82}"/>
               </a:ext>
             </a:extLst>
           </p:cNvPr>
@@ -7855,7 +7428,7 @@
     </p:spTree>
     <p:extLst>
       <p:ext uri="{BB962C8B-B14F-4D97-AF65-F5344CB8AC3E}">
-        <p14:creationId xmlns:p14="http://schemas.microsoft.com/office/powerpoint/2010/main" val="2997267176"/>
+        <p14:creationId xmlns:p14="http://schemas.microsoft.com/office/powerpoint/2010/main" val="1173938632"/>
       </p:ext>
     </p:extLst>
   </p:cSld>
@@ -7887,7 +7460,7 @@
           <p:cNvPr id="2" name="Titel 1">
             <a:extLst>
               <a:ext uri="{FF2B5EF4-FFF2-40B4-BE49-F238E27FC236}">
-                <a16:creationId xmlns:a16="http://schemas.microsoft.com/office/drawing/2014/main" id="{6E13DF55-62FC-108F-C35D-02114E3B96AB}"/>
+                <a16:creationId xmlns:a16="http://schemas.microsoft.com/office/drawing/2014/main" id="{DD4EE415-C8FF-FA3E-F6A4-91C674C5E724}"/>
               </a:ext>
             </a:extLst>
           </p:cNvPr>
@@ -7905,13 +7478,8 @@
           <a:p>
             <a:r>
               <a:rPr lang="de-DE" dirty="0"/>
-              <a:t>Imputation </a:t>
-            </a:r>
-            <a:r>
-              <a:rPr lang="de-DE" dirty="0" err="1"/>
-              <a:t>Strategies</a:t>
-            </a:r>
-            <a:endParaRPr lang="de-DE" dirty="0"/>
+              <a:t>Feature Engineering Pipelines</a:t>
+            </a:r>
           </a:p>
         </p:txBody>
       </p:sp>
@@ -7920,7 +7488,7 @@
           <p:cNvPr id="3" name="Inhaltsplatzhalter 2">
             <a:extLst>
               <a:ext uri="{FF2B5EF4-FFF2-40B4-BE49-F238E27FC236}">
-                <a16:creationId xmlns:a16="http://schemas.microsoft.com/office/drawing/2014/main" id="{58C6F1E1-2D09-57EF-8441-1D37701B01D0}"/>
+                <a16:creationId xmlns:a16="http://schemas.microsoft.com/office/drawing/2014/main" id="{DE250263-A1D9-0375-3352-51387D02F95B}"/>
               </a:ext>
             </a:extLst>
           </p:cNvPr>
@@ -7945,7 +7513,7 @@
           <p:cNvPr id="4" name="Foliennummernplatzhalter 3">
             <a:extLst>
               <a:ext uri="{FF2B5EF4-FFF2-40B4-BE49-F238E27FC236}">
-                <a16:creationId xmlns:a16="http://schemas.microsoft.com/office/drawing/2014/main" id="{F9FAF73B-825C-EAD4-7CCA-FCF1CD576A82}"/>
+                <a16:creationId xmlns:a16="http://schemas.microsoft.com/office/drawing/2014/main" id="{6CCFB421-1136-E880-67A1-53A4654925D9}"/>
               </a:ext>
             </a:extLst>
           </p:cNvPr>
@@ -7972,7 +7540,7 @@
     </p:spTree>
     <p:extLst>
       <p:ext uri="{BB962C8B-B14F-4D97-AF65-F5344CB8AC3E}">
-        <p14:creationId xmlns:p14="http://schemas.microsoft.com/office/powerpoint/2010/main" val="1173938632"/>
+        <p14:creationId xmlns:p14="http://schemas.microsoft.com/office/powerpoint/2010/main" val="2711831897"/>
       </p:ext>
     </p:extLst>
   </p:cSld>
@@ -8001,118 +7569,6 @@
       </p:grpSpPr>
       <p:sp>
         <p:nvSpPr>
-          <p:cNvPr id="2" name="Titel 1">
-            <a:extLst>
-              <a:ext uri="{FF2B5EF4-FFF2-40B4-BE49-F238E27FC236}">
-                <a16:creationId xmlns:a16="http://schemas.microsoft.com/office/drawing/2014/main" id="{DD4EE415-C8FF-FA3E-F6A4-91C674C5E724}"/>
-              </a:ext>
-            </a:extLst>
-          </p:cNvPr>
-          <p:cNvSpPr>
-            <a:spLocks noGrp="1"/>
-          </p:cNvSpPr>
-          <p:nvPr>
-            <p:ph type="title"/>
-          </p:nvPr>
-        </p:nvSpPr>
-        <p:spPr/>
-        <p:txBody>
-          <a:bodyPr/>
-          <a:lstStyle/>
-          <a:p>
-            <a:r>
-              <a:rPr lang="de-DE" dirty="0"/>
-              <a:t>Feature Engineering Pipelines</a:t>
-            </a:r>
-          </a:p>
-        </p:txBody>
-      </p:sp>
-      <p:sp>
-        <p:nvSpPr>
-          <p:cNvPr id="3" name="Inhaltsplatzhalter 2">
-            <a:extLst>
-              <a:ext uri="{FF2B5EF4-FFF2-40B4-BE49-F238E27FC236}">
-                <a16:creationId xmlns:a16="http://schemas.microsoft.com/office/drawing/2014/main" id="{DE250263-A1D9-0375-3352-51387D02F95B}"/>
-              </a:ext>
-            </a:extLst>
-          </p:cNvPr>
-          <p:cNvSpPr>
-            <a:spLocks noGrp="1"/>
-          </p:cNvSpPr>
-          <p:nvPr>
-            <p:ph idx="1"/>
-          </p:nvPr>
-        </p:nvSpPr>
-        <p:spPr/>
-        <p:txBody>
-          <a:bodyPr/>
-          <a:lstStyle/>
-          <a:p>
-            <a:endParaRPr lang="de-DE"/>
-          </a:p>
-        </p:txBody>
-      </p:sp>
-      <p:sp>
-        <p:nvSpPr>
-          <p:cNvPr id="4" name="Foliennummernplatzhalter 3">
-            <a:extLst>
-              <a:ext uri="{FF2B5EF4-FFF2-40B4-BE49-F238E27FC236}">
-                <a16:creationId xmlns:a16="http://schemas.microsoft.com/office/drawing/2014/main" id="{6CCFB421-1136-E880-67A1-53A4654925D9}"/>
-              </a:ext>
-            </a:extLst>
-          </p:cNvPr>
-          <p:cNvSpPr>
-            <a:spLocks noGrp="1"/>
-          </p:cNvSpPr>
-          <p:nvPr>
-            <p:ph type="sldNum" sz="quarter" idx="12"/>
-          </p:nvPr>
-        </p:nvSpPr>
-        <p:spPr/>
-        <p:txBody>
-          <a:bodyPr/>
-          <a:lstStyle/>
-          <a:p>
-            <a:fld id="{08C366F5-AFAD-49CB-854A-9D9E238FCA13}" type="slidenum">
-              <a:rPr lang="en-GB" smtClean="0"/>
-              <a:t>26</a:t>
-            </a:fld>
-            <a:endParaRPr lang="en-GB"/>
-          </a:p>
-        </p:txBody>
-      </p:sp>
-    </p:spTree>
-    <p:extLst>
-      <p:ext uri="{BB962C8B-B14F-4D97-AF65-F5344CB8AC3E}">
-        <p14:creationId xmlns:p14="http://schemas.microsoft.com/office/powerpoint/2010/main" val="2711831897"/>
-      </p:ext>
-    </p:extLst>
-  </p:cSld>
-  <p:clrMapOvr>
-    <a:masterClrMapping/>
-  </p:clrMapOvr>
-</p:sld>
-</file>
-
-<file path=ppt/slides/slide27.xml><?xml version="1.0" encoding="utf-8"?>
-<p:sld xmlns:a="http://schemas.openxmlformats.org/drawingml/2006/main" xmlns:r="http://schemas.openxmlformats.org/officeDocument/2006/relationships" xmlns:p="http://schemas.openxmlformats.org/presentationml/2006/main">
-  <p:cSld>
-    <p:spTree>
-      <p:nvGrpSpPr>
-        <p:cNvPr id="1" name=""/>
-        <p:cNvGrpSpPr/>
-        <p:nvPr/>
-      </p:nvGrpSpPr>
-      <p:grpSpPr>
-        <a:xfrm>
-          <a:off x="0" y="0"/>
-          <a:ext cx="0" cy="0"/>
-          <a:chOff x="0" y="0"/>
-          <a:chExt cx="0" cy="0"/>
-        </a:xfrm>
-      </p:grpSpPr>
-      <p:sp>
-        <p:nvSpPr>
           <p:cNvPr id="3" name="Title 2">
             <a:extLst>
               <a:ext uri="{FF2B5EF4-FFF2-40B4-BE49-F238E27FC236}">
@@ -8168,7 +7624,7 @@
           <a:p>
             <a:fld id="{523A240F-EAFE-E84F-B44C-6D7A08E0E409}" type="slidenum">
               <a:rPr lang="en-US" smtClean="0"/>
-              <a:t>27</a:t>
+              <a:t>26</a:t>
             </a:fld>
             <a:endParaRPr lang="en-US" dirty="0"/>
           </a:p>
@@ -8737,7 +8193,7 @@
 </p:sld>
 </file>
 
-<file path=ppt/slides/slide28.xml><?xml version="1.0" encoding="utf-8"?>
+<file path=ppt/slides/slide27.xml><?xml version="1.0" encoding="utf-8"?>
 <p:sld xmlns:a="http://schemas.openxmlformats.org/drawingml/2006/main" xmlns:r="http://schemas.openxmlformats.org/officeDocument/2006/relationships" xmlns:p="http://schemas.openxmlformats.org/presentationml/2006/main">
   <p:cSld>
     <p:spTree>
@@ -8835,7 +8291,7 @@
           <a:p>
             <a:fld id="{08C366F5-AFAD-49CB-854A-9D9E238FCA13}" type="slidenum">
               <a:rPr lang="en-GB" smtClean="0"/>
-              <a:t>28</a:t>
+              <a:t>27</a:t>
             </a:fld>
             <a:endParaRPr lang="en-GB"/>
           </a:p>
@@ -8873,202 +8329,6 @@
       </p:grpSpPr>
       <p:sp>
         <p:nvSpPr>
-          <p:cNvPr id="6" name="Titel 5">
-            <a:extLst>
-              <a:ext uri="{FF2B5EF4-FFF2-40B4-BE49-F238E27FC236}">
-                <a16:creationId xmlns:a16="http://schemas.microsoft.com/office/drawing/2014/main" id="{E92B2E04-27B7-8A9A-6143-C8831F834080}"/>
-              </a:ext>
-            </a:extLst>
-          </p:cNvPr>
-          <p:cNvSpPr>
-            <a:spLocks noGrp="1"/>
-          </p:cNvSpPr>
-          <p:nvPr>
-            <p:ph type="title"/>
-          </p:nvPr>
-        </p:nvSpPr>
-        <p:spPr/>
-        <p:txBody>
-          <a:bodyPr/>
-          <a:lstStyle/>
-          <a:p>
-            <a:r>
-              <a:rPr lang="de-DE" dirty="0"/>
-              <a:t>Feature Engineering</a:t>
-            </a:r>
-          </a:p>
-        </p:txBody>
-      </p:sp>
-      <p:sp>
-        <p:nvSpPr>
-          <p:cNvPr id="7" name="Inhaltsplatzhalter 6">
-            <a:extLst>
-              <a:ext uri="{FF2B5EF4-FFF2-40B4-BE49-F238E27FC236}">
-                <a16:creationId xmlns:a16="http://schemas.microsoft.com/office/drawing/2014/main" id="{16CBE6C5-FF71-FE69-AF96-EB26512AF61F}"/>
-              </a:ext>
-            </a:extLst>
-          </p:cNvPr>
-          <p:cNvSpPr>
-            <a:spLocks noGrp="1"/>
-          </p:cNvSpPr>
-          <p:nvPr>
-            <p:ph idx="1"/>
-          </p:nvPr>
-        </p:nvSpPr>
-        <p:spPr/>
-        <p:txBody>
-          <a:bodyPr/>
-          <a:lstStyle/>
-          <a:p>
-            <a:r>
-              <a:rPr lang="de-DE" dirty="0" err="1"/>
-              <a:t>numerical</a:t>
-            </a:r>
-            <a:r>
-              <a:rPr lang="de-DE" dirty="0"/>
-              <a:t> </a:t>
-            </a:r>
-            <a:r>
-              <a:rPr lang="de-DE" dirty="0" err="1"/>
-              <a:t>features</a:t>
-            </a:r>
-            <a:r>
-              <a:rPr lang="de-DE" dirty="0"/>
-              <a:t>, </a:t>
-            </a:r>
-            <a:r>
-              <a:rPr lang="de-DE" dirty="0" err="1"/>
-              <a:t>transformations</a:t>
-            </a:r>
-            <a:r>
-              <a:rPr lang="de-DE" dirty="0"/>
-              <a:t>, </a:t>
-            </a:r>
-            <a:r>
-              <a:rPr lang="de-DE" dirty="0" err="1"/>
-              <a:t>scaling</a:t>
-            </a:r>
-            <a:endParaRPr lang="de-DE" dirty="0"/>
-          </a:p>
-          <a:p>
-            <a:r>
-              <a:rPr lang="de-DE" dirty="0" err="1"/>
-              <a:t>categorical</a:t>
-            </a:r>
-            <a:r>
-              <a:rPr lang="de-DE" dirty="0"/>
-              <a:t> (nominal, ordinal) </a:t>
-            </a:r>
-            <a:r>
-              <a:rPr lang="de-DE" dirty="0" err="1"/>
-              <a:t>features</a:t>
-            </a:r>
-            <a:r>
-              <a:rPr lang="de-DE" dirty="0"/>
-              <a:t>, </a:t>
-            </a:r>
-            <a:r>
-              <a:rPr lang="de-DE" dirty="0" err="1"/>
-              <a:t>encoding</a:t>
-            </a:r>
-            <a:endParaRPr lang="de-DE" dirty="0"/>
-          </a:p>
-          <a:p>
-            <a:r>
-              <a:rPr lang="de-DE" dirty="0"/>
-              <a:t>PCA</a:t>
-            </a:r>
-          </a:p>
-          <a:p>
-            <a:r>
-              <a:rPr lang="de-DE" dirty="0"/>
-              <a:t>LASSO</a:t>
-            </a:r>
-          </a:p>
-          <a:p>
-            <a:r>
-              <a:rPr lang="de-DE" dirty="0"/>
-              <a:t>ARD</a:t>
-            </a:r>
-          </a:p>
-          <a:p>
-            <a:r>
-              <a:rPr lang="de-DE" dirty="0" err="1"/>
-              <a:t>missing</a:t>
-            </a:r>
-            <a:r>
-              <a:rPr lang="de-DE" dirty="0"/>
-              <a:t> </a:t>
-            </a:r>
-            <a:r>
-              <a:rPr lang="de-DE" dirty="0" err="1"/>
-              <a:t>values</a:t>
-            </a:r>
-            <a:endParaRPr lang="de-DE" dirty="0"/>
-          </a:p>
-        </p:txBody>
-      </p:sp>
-      <p:sp>
-        <p:nvSpPr>
-          <p:cNvPr id="5" name="Foliennummernplatzhalter 4">
-            <a:extLst>
-              <a:ext uri="{FF2B5EF4-FFF2-40B4-BE49-F238E27FC236}">
-                <a16:creationId xmlns:a16="http://schemas.microsoft.com/office/drawing/2014/main" id="{422405FE-CC14-5A9E-E6BC-374EBECB4E84}"/>
-              </a:ext>
-            </a:extLst>
-          </p:cNvPr>
-          <p:cNvSpPr>
-            <a:spLocks noGrp="1"/>
-          </p:cNvSpPr>
-          <p:nvPr>
-            <p:ph type="sldNum" sz="quarter" idx="12"/>
-          </p:nvPr>
-        </p:nvSpPr>
-        <p:spPr/>
-        <p:txBody>
-          <a:bodyPr/>
-          <a:lstStyle/>
-          <a:p>
-            <a:fld id="{08C366F5-AFAD-49CB-854A-9D9E238FCA13}" type="slidenum">
-              <a:rPr lang="en-GB" smtClean="0"/>
-              <a:t>3</a:t>
-            </a:fld>
-            <a:endParaRPr lang="en-GB"/>
-          </a:p>
-        </p:txBody>
-      </p:sp>
-    </p:spTree>
-    <p:extLst>
-      <p:ext uri="{BB962C8B-B14F-4D97-AF65-F5344CB8AC3E}">
-        <p14:creationId xmlns:p14="http://schemas.microsoft.com/office/powerpoint/2010/main" val="3204133960"/>
-      </p:ext>
-    </p:extLst>
-  </p:cSld>
-  <p:clrMapOvr>
-    <a:masterClrMapping/>
-  </p:clrMapOvr>
-</p:sld>
-</file>
-
-<file path=ppt/slides/slide4.xml><?xml version="1.0" encoding="utf-8"?>
-<p:sld xmlns:a="http://schemas.openxmlformats.org/drawingml/2006/main" xmlns:r="http://schemas.openxmlformats.org/officeDocument/2006/relationships" xmlns:p="http://schemas.openxmlformats.org/presentationml/2006/main">
-  <p:cSld>
-    <p:spTree>
-      <p:nvGrpSpPr>
-        <p:cNvPr id="1" name=""/>
-        <p:cNvGrpSpPr/>
-        <p:nvPr/>
-      </p:nvGrpSpPr>
-      <p:grpSpPr>
-        <a:xfrm>
-          <a:off x="0" y="0"/>
-          <a:ext cx="0" cy="0"/>
-          <a:chOff x="0" y="0"/>
-          <a:chExt cx="0" cy="0"/>
-        </a:xfrm>
-      </p:grpSpPr>
-      <p:sp>
-        <p:nvSpPr>
           <p:cNvPr id="2" name="Title 1">
             <a:extLst>
               <a:ext uri="{FF2B5EF4-FFF2-40B4-BE49-F238E27FC236}">
@@ -9123,7 +8383,7 @@
           <a:p>
             <a:fld id="{ADDEFC8A-584C-5E41-A633-418C2FB73F75}" type="slidenum">
               <a:rPr lang="en-DE" smtClean="0"/>
-              <a:t>4</a:t>
+              <a:t>3</a:t>
             </a:fld>
             <a:endParaRPr lang="en-DE"/>
           </a:p>
@@ -9600,6 +8860,122 @@
 </p:sld>
 </file>
 
+<file path=ppt/slides/slide4.xml><?xml version="1.0" encoding="utf-8"?>
+<p:sld xmlns:a="http://schemas.openxmlformats.org/drawingml/2006/main" xmlns:r="http://schemas.openxmlformats.org/officeDocument/2006/relationships" xmlns:p="http://schemas.openxmlformats.org/presentationml/2006/main">
+  <p:cSld>
+    <p:spTree>
+      <p:nvGrpSpPr>
+        <p:cNvPr id="1" name=""/>
+        <p:cNvGrpSpPr/>
+        <p:nvPr/>
+      </p:nvGrpSpPr>
+      <p:grpSpPr>
+        <a:xfrm>
+          <a:off x="0" y="0"/>
+          <a:ext cx="0" cy="0"/>
+          <a:chOff x="0" y="0"/>
+          <a:chExt cx="0" cy="0"/>
+        </a:xfrm>
+      </p:grpSpPr>
+      <p:sp>
+        <p:nvSpPr>
+          <p:cNvPr id="2" name="Titel 1">
+            <a:extLst>
+              <a:ext uri="{FF2B5EF4-FFF2-40B4-BE49-F238E27FC236}">
+                <a16:creationId xmlns:a16="http://schemas.microsoft.com/office/drawing/2014/main" id="{19AF520E-D347-5174-A597-846D87503250}"/>
+              </a:ext>
+            </a:extLst>
+          </p:cNvPr>
+          <p:cNvSpPr>
+            <a:spLocks noGrp="1"/>
+          </p:cNvSpPr>
+          <p:nvPr>
+            <p:ph type="title"/>
+          </p:nvPr>
+        </p:nvSpPr>
+        <p:spPr/>
+        <p:txBody>
+          <a:bodyPr/>
+          <a:lstStyle/>
+          <a:p>
+            <a:r>
+              <a:rPr lang="de-DE" dirty="0" err="1"/>
+              <a:t>Why</a:t>
+            </a:r>
+            <a:r>
+              <a:rPr lang="de-DE" dirty="0"/>
+              <a:t> Feature Engineering Matters</a:t>
+            </a:r>
+          </a:p>
+        </p:txBody>
+      </p:sp>
+      <p:sp>
+        <p:nvSpPr>
+          <p:cNvPr id="3" name="Inhaltsplatzhalter 2">
+            <a:extLst>
+              <a:ext uri="{FF2B5EF4-FFF2-40B4-BE49-F238E27FC236}">
+                <a16:creationId xmlns:a16="http://schemas.microsoft.com/office/drawing/2014/main" id="{D6FB7F72-B5A7-08FB-698C-916D7D774D7D}"/>
+              </a:ext>
+            </a:extLst>
+          </p:cNvPr>
+          <p:cNvSpPr>
+            <a:spLocks noGrp="1"/>
+          </p:cNvSpPr>
+          <p:nvPr>
+            <p:ph idx="1"/>
+          </p:nvPr>
+        </p:nvSpPr>
+        <p:spPr/>
+        <p:txBody>
+          <a:bodyPr/>
+          <a:lstStyle/>
+          <a:p>
+            <a:endParaRPr lang="de-DE"/>
+          </a:p>
+        </p:txBody>
+      </p:sp>
+      <p:sp>
+        <p:nvSpPr>
+          <p:cNvPr id="4" name="Foliennummernplatzhalter 3">
+            <a:extLst>
+              <a:ext uri="{FF2B5EF4-FFF2-40B4-BE49-F238E27FC236}">
+                <a16:creationId xmlns:a16="http://schemas.microsoft.com/office/drawing/2014/main" id="{092D1ED3-6740-ED39-D16C-062D2EF2B7AF}"/>
+              </a:ext>
+            </a:extLst>
+          </p:cNvPr>
+          <p:cNvSpPr>
+            <a:spLocks noGrp="1"/>
+          </p:cNvSpPr>
+          <p:nvPr>
+            <p:ph type="sldNum" sz="quarter" idx="12"/>
+          </p:nvPr>
+        </p:nvSpPr>
+        <p:spPr/>
+        <p:txBody>
+          <a:bodyPr/>
+          <a:lstStyle/>
+          <a:p>
+            <a:fld id="{08C366F5-AFAD-49CB-854A-9D9E238FCA13}" type="slidenum">
+              <a:rPr lang="en-GB" smtClean="0"/>
+              <a:t>4</a:t>
+            </a:fld>
+            <a:endParaRPr lang="en-GB"/>
+          </a:p>
+        </p:txBody>
+      </p:sp>
+    </p:spTree>
+    <p:extLst>
+      <p:ext uri="{BB962C8B-B14F-4D97-AF65-F5344CB8AC3E}">
+        <p14:creationId xmlns:p14="http://schemas.microsoft.com/office/powerpoint/2010/main" val="291395111"/>
+      </p:ext>
+    </p:extLst>
+  </p:cSld>
+  <p:clrMapOvr>
+    <a:masterClrMapping/>
+  </p:clrMapOvr>
+</p:sld>
+</file>
+
 <file path=ppt/slides/slide5.xml><?xml version="1.0" encoding="utf-8"?>
 <p:sld xmlns:a="http://schemas.openxmlformats.org/drawingml/2006/main" xmlns:r="http://schemas.openxmlformats.org/officeDocument/2006/relationships" xmlns:p="http://schemas.openxmlformats.org/presentationml/2006/main">
   <p:cSld>
@@ -9622,7 +8998,7 @@
           <p:cNvPr id="2" name="Titel 1">
             <a:extLst>
               <a:ext uri="{FF2B5EF4-FFF2-40B4-BE49-F238E27FC236}">
-                <a16:creationId xmlns:a16="http://schemas.microsoft.com/office/drawing/2014/main" id="{19AF520E-D347-5174-A597-846D87503250}"/>
+                <a16:creationId xmlns:a16="http://schemas.microsoft.com/office/drawing/2014/main" id="{BC1405FC-52F4-2F5F-315A-9FA5320006E4}"/>
               </a:ext>
             </a:extLst>
           </p:cNvPr>
@@ -9640,11 +9016,11 @@
           <a:p>
             <a:r>
               <a:rPr lang="de-DE" dirty="0" err="1"/>
-              <a:t>Why</a:t>
+              <a:t>Numerical</a:t>
             </a:r>
             <a:r>
               <a:rPr lang="de-DE" dirty="0"/>
-              <a:t> Feature Engineering Matters</a:t>
+              <a:t> Features</a:t>
             </a:r>
           </a:p>
         </p:txBody>
@@ -9654,7 +9030,7 @@
           <p:cNvPr id="3" name="Inhaltsplatzhalter 2">
             <a:extLst>
               <a:ext uri="{FF2B5EF4-FFF2-40B4-BE49-F238E27FC236}">
-                <a16:creationId xmlns:a16="http://schemas.microsoft.com/office/drawing/2014/main" id="{D6FB7F72-B5A7-08FB-698C-916D7D774D7D}"/>
+                <a16:creationId xmlns:a16="http://schemas.microsoft.com/office/drawing/2014/main" id="{C1893269-41D5-8612-4320-F99D5CD73F21}"/>
               </a:ext>
             </a:extLst>
           </p:cNvPr>
@@ -9679,7 +9055,7 @@
           <p:cNvPr id="4" name="Foliennummernplatzhalter 3">
             <a:extLst>
               <a:ext uri="{FF2B5EF4-FFF2-40B4-BE49-F238E27FC236}">
-                <a16:creationId xmlns:a16="http://schemas.microsoft.com/office/drawing/2014/main" id="{092D1ED3-6740-ED39-D16C-062D2EF2B7AF}"/>
+                <a16:creationId xmlns:a16="http://schemas.microsoft.com/office/drawing/2014/main" id="{ED175B19-DA1F-ED6E-AC1A-8B9350332439}"/>
               </a:ext>
             </a:extLst>
           </p:cNvPr>
@@ -9706,7 +9082,7 @@
     </p:spTree>
     <p:extLst>
       <p:ext uri="{BB962C8B-B14F-4D97-AF65-F5344CB8AC3E}">
-        <p14:creationId xmlns:p14="http://schemas.microsoft.com/office/powerpoint/2010/main" val="291395111"/>
+        <p14:creationId xmlns:p14="http://schemas.microsoft.com/office/powerpoint/2010/main" val="44178729"/>
       </p:ext>
     </p:extLst>
   </p:cSld>
@@ -9738,7 +9114,7 @@
           <p:cNvPr id="2" name="Titel 1">
             <a:extLst>
               <a:ext uri="{FF2B5EF4-FFF2-40B4-BE49-F238E27FC236}">
-                <a16:creationId xmlns:a16="http://schemas.microsoft.com/office/drawing/2014/main" id="{BC1405FC-52F4-2F5F-315A-9FA5320006E4}"/>
+                <a16:creationId xmlns:a16="http://schemas.microsoft.com/office/drawing/2014/main" id="{7214784E-C89E-599D-6CA5-8A8472E9813F}"/>
               </a:ext>
             </a:extLst>
           </p:cNvPr>
@@ -9756,11 +9132,11 @@
           <a:p>
             <a:r>
               <a:rPr lang="de-DE" dirty="0" err="1"/>
-              <a:t>Numerical</a:t>
+              <a:t>Transformations</a:t>
             </a:r>
             <a:r>
               <a:rPr lang="de-DE" dirty="0"/>
-              <a:t> Features</a:t>
+              <a:t> (log, power, Box-Cox)</a:t>
             </a:r>
           </a:p>
         </p:txBody>
@@ -9770,7 +9146,7 @@
           <p:cNvPr id="3" name="Inhaltsplatzhalter 2">
             <a:extLst>
               <a:ext uri="{FF2B5EF4-FFF2-40B4-BE49-F238E27FC236}">
-                <a16:creationId xmlns:a16="http://schemas.microsoft.com/office/drawing/2014/main" id="{C1893269-41D5-8612-4320-F99D5CD73F21}"/>
+                <a16:creationId xmlns:a16="http://schemas.microsoft.com/office/drawing/2014/main" id="{CF9A72DC-1DD9-B8AF-7853-20EE438280D3}"/>
               </a:ext>
             </a:extLst>
           </p:cNvPr>
@@ -9795,7 +9171,7 @@
           <p:cNvPr id="4" name="Foliennummernplatzhalter 3">
             <a:extLst>
               <a:ext uri="{FF2B5EF4-FFF2-40B4-BE49-F238E27FC236}">
-                <a16:creationId xmlns:a16="http://schemas.microsoft.com/office/drawing/2014/main" id="{ED175B19-DA1F-ED6E-AC1A-8B9350332439}"/>
+                <a16:creationId xmlns:a16="http://schemas.microsoft.com/office/drawing/2014/main" id="{71277F55-8E21-5C74-2446-B039AB2EFE83}"/>
               </a:ext>
             </a:extLst>
           </p:cNvPr>
@@ -9822,7 +9198,7 @@
     </p:spTree>
     <p:extLst>
       <p:ext uri="{BB962C8B-B14F-4D97-AF65-F5344CB8AC3E}">
-        <p14:creationId xmlns:p14="http://schemas.microsoft.com/office/powerpoint/2010/main" val="44178729"/>
+        <p14:creationId xmlns:p14="http://schemas.microsoft.com/office/powerpoint/2010/main" val="2209339379"/>
       </p:ext>
     </p:extLst>
   </p:cSld>
@@ -9854,7 +9230,7 @@
           <p:cNvPr id="2" name="Titel 1">
             <a:extLst>
               <a:ext uri="{FF2B5EF4-FFF2-40B4-BE49-F238E27FC236}">
-                <a16:creationId xmlns:a16="http://schemas.microsoft.com/office/drawing/2014/main" id="{7214784E-C89E-599D-6CA5-8A8472E9813F}"/>
+                <a16:creationId xmlns:a16="http://schemas.microsoft.com/office/drawing/2014/main" id="{7DACA889-7ABE-2F23-9392-B7CDD4D20D73}"/>
               </a:ext>
             </a:extLst>
           </p:cNvPr>
@@ -9871,13 +9247,22 @@
           <a:lstStyle/>
           <a:p>
             <a:r>
+              <a:rPr lang="de-DE" dirty="0"/>
+              <a:t>Feature </a:t>
+            </a:r>
+            <a:r>
               <a:rPr lang="de-DE" dirty="0" err="1"/>
-              <a:t>Transformations</a:t>
+              <a:t>Scaling</a:t>
             </a:r>
             <a:r>
               <a:rPr lang="de-DE" dirty="0"/>
-              <a:t> (log, power, Box-Cox)</a:t>
-            </a:r>
+              <a:t> and </a:t>
+            </a:r>
+            <a:r>
+              <a:rPr lang="de-DE" dirty="0" err="1"/>
+              <a:t>Normalization</a:t>
+            </a:r>
+            <a:endParaRPr lang="de-DE" dirty="0"/>
           </a:p>
         </p:txBody>
       </p:sp>
@@ -9886,7 +9271,7 @@
           <p:cNvPr id="3" name="Inhaltsplatzhalter 2">
             <a:extLst>
               <a:ext uri="{FF2B5EF4-FFF2-40B4-BE49-F238E27FC236}">
-                <a16:creationId xmlns:a16="http://schemas.microsoft.com/office/drawing/2014/main" id="{CF9A72DC-1DD9-B8AF-7853-20EE438280D3}"/>
+                <a16:creationId xmlns:a16="http://schemas.microsoft.com/office/drawing/2014/main" id="{E3DAEA28-7DDD-166A-19F0-6215D90D93F4}"/>
               </a:ext>
             </a:extLst>
           </p:cNvPr>
@@ -9911,7 +9296,7 @@
           <p:cNvPr id="4" name="Foliennummernplatzhalter 3">
             <a:extLst>
               <a:ext uri="{FF2B5EF4-FFF2-40B4-BE49-F238E27FC236}">
-                <a16:creationId xmlns:a16="http://schemas.microsoft.com/office/drawing/2014/main" id="{71277F55-8E21-5C74-2446-B039AB2EFE83}"/>
+                <a16:creationId xmlns:a16="http://schemas.microsoft.com/office/drawing/2014/main" id="{936151DA-671E-E498-1F72-039FE6A91F7D}"/>
               </a:ext>
             </a:extLst>
           </p:cNvPr>
@@ -9938,7 +9323,7 @@
     </p:spTree>
     <p:extLst>
       <p:ext uri="{BB962C8B-B14F-4D97-AF65-F5344CB8AC3E}">
-        <p14:creationId xmlns:p14="http://schemas.microsoft.com/office/powerpoint/2010/main" val="2209339379"/>
+        <p14:creationId xmlns:p14="http://schemas.microsoft.com/office/powerpoint/2010/main" val="3093517853"/>
       </p:ext>
     </p:extLst>
   </p:cSld>
@@ -9970,7 +9355,7 @@
           <p:cNvPr id="2" name="Titel 1">
             <a:extLst>
               <a:ext uri="{FF2B5EF4-FFF2-40B4-BE49-F238E27FC236}">
-                <a16:creationId xmlns:a16="http://schemas.microsoft.com/office/drawing/2014/main" id="{7DACA889-7ABE-2F23-9392-B7CDD4D20D73}"/>
+                <a16:creationId xmlns:a16="http://schemas.microsoft.com/office/drawing/2014/main" id="{FEB5AB67-F77C-1D58-03A5-AEF89F0815BB}"/>
               </a:ext>
             </a:extLst>
           </p:cNvPr>
@@ -9987,20 +9372,16 @@
           <a:lstStyle/>
           <a:p>
             <a:r>
+              <a:rPr lang="de-DE" dirty="0" err="1"/>
+              <a:t>Categorical</a:t>
+            </a:r>
+            <a:r>
               <a:rPr lang="de-DE" dirty="0"/>
-              <a:t>Feature </a:t>
+              <a:t> Features: </a:t>
             </a:r>
             <a:r>
               <a:rPr lang="de-DE" dirty="0" err="1"/>
-              <a:t>Scaling</a:t>
-            </a:r>
-            <a:r>
-              <a:rPr lang="de-DE" dirty="0"/>
-              <a:t> and </a:t>
-            </a:r>
-            <a:r>
-              <a:rPr lang="de-DE" dirty="0" err="1"/>
-              <a:t>Normalization</a:t>
+              <a:t>Types</a:t>
             </a:r>
             <a:endParaRPr lang="de-DE" dirty="0"/>
           </a:p>
@@ -10011,7 +9392,7 @@
           <p:cNvPr id="3" name="Inhaltsplatzhalter 2">
             <a:extLst>
               <a:ext uri="{FF2B5EF4-FFF2-40B4-BE49-F238E27FC236}">
-                <a16:creationId xmlns:a16="http://schemas.microsoft.com/office/drawing/2014/main" id="{E3DAEA28-7DDD-166A-19F0-6215D90D93F4}"/>
+                <a16:creationId xmlns:a16="http://schemas.microsoft.com/office/drawing/2014/main" id="{5A993410-D8E0-5839-5F99-8816796C65AB}"/>
               </a:ext>
             </a:extLst>
           </p:cNvPr>
@@ -10036,7 +9417,7 @@
           <p:cNvPr id="4" name="Foliennummernplatzhalter 3">
             <a:extLst>
               <a:ext uri="{FF2B5EF4-FFF2-40B4-BE49-F238E27FC236}">
-                <a16:creationId xmlns:a16="http://schemas.microsoft.com/office/drawing/2014/main" id="{936151DA-671E-E498-1F72-039FE6A91F7D}"/>
+                <a16:creationId xmlns:a16="http://schemas.microsoft.com/office/drawing/2014/main" id="{6252818F-E158-709B-1393-500769279306}"/>
               </a:ext>
             </a:extLst>
           </p:cNvPr>
@@ -10063,7 +9444,7 @@
     </p:spTree>
     <p:extLst>
       <p:ext uri="{BB962C8B-B14F-4D97-AF65-F5344CB8AC3E}">
-        <p14:creationId xmlns:p14="http://schemas.microsoft.com/office/powerpoint/2010/main" val="3093517853"/>
+        <p14:creationId xmlns:p14="http://schemas.microsoft.com/office/powerpoint/2010/main" val="1137842183"/>
       </p:ext>
     </p:extLst>
   </p:cSld>
@@ -10092,10 +9473,10 @@
       </p:grpSpPr>
       <p:sp>
         <p:nvSpPr>
-          <p:cNvPr id="2" name="Titel 1">
-            <a:extLst>
-              <a:ext uri="{FF2B5EF4-FFF2-40B4-BE49-F238E27FC236}">
-                <a16:creationId xmlns:a16="http://schemas.microsoft.com/office/drawing/2014/main" id="{FEB5AB67-F77C-1D58-03A5-AEF89F0815BB}"/>
+          <p:cNvPr id="2" name="Title 1">
+            <a:extLst>
+              <a:ext uri="{FF2B5EF4-FFF2-40B4-BE49-F238E27FC236}">
+                <a16:creationId xmlns:a16="http://schemas.microsoft.com/office/drawing/2014/main" id="{A9196BE7-ED4C-5E2B-564B-33799AF07E7E}"/>
               </a:ext>
             </a:extLst>
           </p:cNvPr>
@@ -10112,27 +9493,18 @@
           <a:lstStyle/>
           <a:p>
             <a:r>
-              <a:rPr lang="de-DE" dirty="0" err="1"/>
-              <a:t>Categorical</a:t>
-            </a:r>
-            <a:r>
-              <a:rPr lang="de-DE" dirty="0"/>
-              <a:t> Features: </a:t>
-            </a:r>
-            <a:r>
-              <a:rPr lang="de-DE" dirty="0" err="1"/>
-              <a:t>Types</a:t>
-            </a:r>
-            <a:endParaRPr lang="de-DE" dirty="0"/>
-          </a:p>
-        </p:txBody>
-      </p:sp>
-      <p:sp>
-        <p:nvSpPr>
-          <p:cNvPr id="3" name="Inhaltsplatzhalter 2">
-            <a:extLst>
-              <a:ext uri="{FF2B5EF4-FFF2-40B4-BE49-F238E27FC236}">
-                <a16:creationId xmlns:a16="http://schemas.microsoft.com/office/drawing/2014/main" id="{5A993410-D8E0-5839-5F99-8816796C65AB}"/>
+              <a:rPr lang="en-DE" dirty="0"/>
+              <a:t>Categorical Variables</a:t>
+            </a:r>
+          </a:p>
+        </p:txBody>
+      </p:sp>
+      <p:sp>
+        <p:nvSpPr>
+          <p:cNvPr id="3" name="Content Placeholder 2">
+            <a:extLst>
+              <a:ext uri="{FF2B5EF4-FFF2-40B4-BE49-F238E27FC236}">
+                <a16:creationId xmlns:a16="http://schemas.microsoft.com/office/drawing/2014/main" id="{F32FCC10-8545-2083-F633-36ECF823DC08}"/>
               </a:ext>
             </a:extLst>
           </p:cNvPr>
@@ -10143,21 +9515,105 @@
             <p:ph idx="1"/>
           </p:nvPr>
         </p:nvSpPr>
-        <p:spPr/>
-        <p:txBody>
-          <a:bodyPr/>
-          <a:lstStyle/>
-          <a:p>
-            <a:endParaRPr lang="de-DE"/>
-          </a:p>
-        </p:txBody>
-      </p:sp>
-      <p:sp>
-        <p:nvSpPr>
-          <p:cNvPr id="4" name="Foliennummernplatzhalter 3">
-            <a:extLst>
-              <a:ext uri="{FF2B5EF4-FFF2-40B4-BE49-F238E27FC236}">
-                <a16:creationId xmlns:a16="http://schemas.microsoft.com/office/drawing/2014/main" id="{6252818F-E158-709B-1393-500769279306}"/>
+        <p:spPr>
+          <a:xfrm>
+            <a:off x="838200" y="1825625"/>
+            <a:ext cx="7012459" cy="4351338"/>
+          </a:xfrm>
+        </p:spPr>
+        <p:txBody>
+          <a:bodyPr>
+            <a:normAutofit fontScale="92500" lnSpcReduction="10000"/>
+          </a:bodyPr>
+          <a:lstStyle/>
+          <a:p>
+            <a:pPr marL="0" indent="0">
+              <a:buNone/>
+            </a:pPr>
+            <a:r>
+              <a:rPr lang="en-GB" sz="2600" dirty="0"/>
+              <a:t>tabular data usually heterogenous, often with sparse c</a:t>
+            </a:r>
+            <a:r>
+              <a:rPr lang="en-DE" sz="2600" dirty="0"/>
+              <a:t>ategorical variables (like color of an object)</a:t>
+            </a:r>
+          </a:p>
+          <a:p>
+            <a:pPr marL="0" indent="0">
+              <a:buNone/>
+            </a:pPr>
+            <a:r>
+              <a:rPr lang="en-GB" sz="2600" dirty="0">
+                <a:sym typeface="Wingdings" pitchFamily="2" charset="2"/>
+              </a:rPr>
+              <a:t> need for an encoding for categorical variables</a:t>
+            </a:r>
+            <a:endParaRPr lang="en-GB" sz="2600" dirty="0"/>
+          </a:p>
+          <a:p>
+            <a:pPr marL="0" indent="0">
+              <a:buNone/>
+            </a:pPr>
+            <a:endParaRPr lang="en-GB" sz="2600" dirty="0"/>
+          </a:p>
+          <a:p>
+            <a:pPr marL="0" indent="0">
+              <a:buNone/>
+            </a:pPr>
+            <a:r>
+              <a:rPr lang="en-GB" sz="2600" dirty="0"/>
+              <a:t>different possibilities:</a:t>
+            </a:r>
+            <a:endParaRPr lang="en-DE" sz="2600" dirty="0"/>
+          </a:p>
+          <a:p>
+            <a:r>
+              <a:rPr lang="en-GB" sz="2600" dirty="0"/>
+              <a:t>o</a:t>
+            </a:r>
+            <a:r>
+              <a:rPr lang="en-DE" sz="2600" dirty="0"/>
+              <a:t>rdinal encoding</a:t>
+            </a:r>
+          </a:p>
+          <a:p>
+            <a:r>
+              <a:rPr lang="en-DE" sz="2600" dirty="0"/>
+              <a:t>leave-one-out encoding (use mean of target for given category excluding current row)</a:t>
+            </a:r>
+          </a:p>
+          <a:p>
+            <a:r>
+              <a:rPr lang="en-DE" sz="2600" dirty="0"/>
+              <a:t>one-hot encoding (suffer</a:t>
+            </a:r>
+            <a:r>
+              <a:rPr lang="en-GB" sz="2600" dirty="0"/>
+              <a:t>s</a:t>
+            </a:r>
+            <a:r>
+              <a:rPr lang="en-DE" sz="2600" dirty="0"/>
+              <a:t> from curse of dimensionality)</a:t>
+            </a:r>
+          </a:p>
+          <a:p>
+            <a:r>
+              <a:rPr lang="en-DE" sz="2600" dirty="0"/>
+              <a:t>embeddings</a:t>
+            </a:r>
+          </a:p>
+          <a:p>
+            <a:endParaRPr lang="en-GB" dirty="0"/>
+          </a:p>
+        </p:txBody>
+      </p:sp>
+      <p:sp>
+        <p:nvSpPr>
+          <p:cNvPr id="4" name="Slide Number Placeholder 3">
+            <a:extLst>
+              <a:ext uri="{FF2B5EF4-FFF2-40B4-BE49-F238E27FC236}">
+                <a16:creationId xmlns:a16="http://schemas.microsoft.com/office/drawing/2014/main" id="{10A7ECF4-88CC-6FFA-B376-C462D8970327}"/>
               </a:ext>
             </a:extLst>
           </p:cNvPr>
@@ -10173,18 +9629,252 @@
           <a:bodyPr/>
           <a:lstStyle/>
           <a:p>
-            <a:fld id="{08C366F5-AFAD-49CB-854A-9D9E238FCA13}" type="slidenum">
-              <a:rPr lang="en-GB" smtClean="0"/>
+            <a:fld id="{290AF890-0265-4349-BF13-E30F01A2AA85}" type="slidenum">
+              <a:rPr lang="en-DE" smtClean="0"/>
               <a:t>9</a:t>
             </a:fld>
-            <a:endParaRPr lang="en-GB"/>
+            <a:endParaRPr lang="en-DE"/>
+          </a:p>
+        </p:txBody>
+      </p:sp>
+      <p:sp>
+        <p:nvSpPr>
+          <p:cNvPr id="5" name="TextBox 4">
+            <a:extLst>
+              <a:ext uri="{FF2B5EF4-FFF2-40B4-BE49-F238E27FC236}">
+                <a16:creationId xmlns:a16="http://schemas.microsoft.com/office/drawing/2014/main" id="{804D5CA4-59B9-8AEA-7DD8-3C2E7B69893D}"/>
+              </a:ext>
+            </a:extLst>
+          </p:cNvPr>
+          <p:cNvSpPr txBox="1"/>
+          <p:nvPr/>
+        </p:nvSpPr>
+        <p:spPr>
+          <a:xfrm>
+            <a:off x="8448767" y="4000749"/>
+            <a:ext cx="3066865" cy="830997"/>
+          </a:xfrm>
+          <a:prstGeom prst="rect">
+            <a:avLst/>
+          </a:prstGeom>
+          <a:noFill/>
+        </p:spPr>
+        <p:txBody>
+          <a:bodyPr wrap="none" rtlCol="0">
+            <a:spAutoFit/>
+          </a:bodyPr>
+          <a:lstStyle/>
+          <a:p>
+            <a:r>
+              <a:rPr lang="en-GB" sz="1200" dirty="0" err="1">
+                <a:latin typeface="Courier" pitchFamily="2" charset="0"/>
+              </a:rPr>
+              <a:t>X.sort_values</a:t>
+            </a:r>
+            <a:r>
+              <a:rPr lang="en-GB" sz="1200" dirty="0">
+                <a:latin typeface="Courier" pitchFamily="2" charset="0"/>
+              </a:rPr>
+              <a:t>(['date’])</a:t>
+            </a:r>
+          </a:p>
+          <a:p>
+            <a:r>
+              <a:rPr lang="en-GB" sz="1200" dirty="0">
+                <a:latin typeface="Courier" pitchFamily="2" charset="0"/>
+              </a:rPr>
+              <a:t>.</a:t>
+            </a:r>
+            <a:r>
+              <a:rPr lang="en-GB" sz="1200" dirty="0" err="1">
+                <a:latin typeface="Courier" pitchFamily="2" charset="0"/>
+              </a:rPr>
+              <a:t>groupby</a:t>
+            </a:r>
+            <a:r>
+              <a:rPr lang="en-GB" sz="1200" dirty="0">
+                <a:latin typeface="Courier" pitchFamily="2" charset="0"/>
+              </a:rPr>
+              <a:t>(['</a:t>
+            </a:r>
+            <a:r>
+              <a:rPr lang="en-GB" sz="1200" dirty="0" err="1">
+                <a:latin typeface="Courier" pitchFamily="2" charset="0"/>
+              </a:rPr>
+              <a:t>store','item</a:t>
+            </a:r>
+            <a:r>
+              <a:rPr lang="en-GB" sz="1200" dirty="0">
+                <a:latin typeface="Courier" pitchFamily="2" charset="0"/>
+              </a:rPr>
+              <a:t>'])['y’]</a:t>
+            </a:r>
+          </a:p>
+          <a:p>
+            <a:r>
+              <a:rPr lang="en-GB" sz="1200" dirty="0">
+                <a:latin typeface="Courier" pitchFamily="2" charset="0"/>
+              </a:rPr>
+              <a:t>.apply(lambda x: </a:t>
+            </a:r>
+            <a:r>
+              <a:rPr lang="en-GB" sz="1200" dirty="0" err="1">
+                <a:latin typeface="Courier" pitchFamily="2" charset="0"/>
+              </a:rPr>
+              <a:t>x.shift</a:t>
+            </a:r>
+            <a:r>
+              <a:rPr lang="en-GB" sz="1200" dirty="0">
+                <a:latin typeface="Courier" pitchFamily="2" charset="0"/>
+              </a:rPr>
+              <a:t>(3)</a:t>
+            </a:r>
+          </a:p>
+          <a:p>
+            <a:r>
+              <a:rPr lang="en-GB" sz="1200" dirty="0">
+                <a:latin typeface="Courier" pitchFamily="2" charset="0"/>
+              </a:rPr>
+              <a:t>.</a:t>
+            </a:r>
+            <a:r>
+              <a:rPr lang="en-GB" sz="1200" dirty="0" err="1">
+                <a:latin typeface="Courier" pitchFamily="2" charset="0"/>
+              </a:rPr>
+              <a:t>ewm</a:t>
+            </a:r>
+            <a:r>
+              <a:rPr lang="en-GB" sz="1200" dirty="0">
+                <a:latin typeface="Courier" pitchFamily="2" charset="0"/>
+              </a:rPr>
+              <a:t>(alpha=0.15).mean())</a:t>
+            </a:r>
+          </a:p>
+        </p:txBody>
+      </p:sp>
+      <p:sp>
+        <p:nvSpPr>
+          <p:cNvPr id="6" name="TextBox 5">
+            <a:extLst>
+              <a:ext uri="{FF2B5EF4-FFF2-40B4-BE49-F238E27FC236}">
+                <a16:creationId xmlns:a16="http://schemas.microsoft.com/office/drawing/2014/main" id="{4F914F96-5D83-53CF-A1A4-98198E01EFD9}"/>
+              </a:ext>
+            </a:extLst>
+          </p:cNvPr>
+          <p:cNvSpPr txBox="1"/>
+          <p:nvPr/>
+        </p:nvSpPr>
+        <p:spPr>
+          <a:xfrm>
+            <a:off x="10498489" y="4834909"/>
+            <a:ext cx="1615763" cy="323165"/>
+          </a:xfrm>
+          <a:prstGeom prst="rect">
+            <a:avLst/>
+          </a:prstGeom>
+          <a:noFill/>
+        </p:spPr>
+        <p:txBody>
+          <a:bodyPr wrap="none" rtlCol="0">
+            <a:spAutoFit/>
+          </a:bodyPr>
+          <a:lstStyle/>
+          <a:p>
+            <a:r>
+              <a:rPr lang="en-GB" sz="1500" dirty="0"/>
+              <a:t>p</a:t>
+            </a:r>
+            <a:r>
+              <a:rPr lang="en-DE" sz="1500" dirty="0"/>
+              <a:t>rediction horizon</a:t>
+            </a:r>
+          </a:p>
+        </p:txBody>
+      </p:sp>
+      <p:cxnSp>
+        <p:nvCxnSpPr>
+          <p:cNvPr id="7" name="Straight Arrow Connector 6">
+            <a:extLst>
+              <a:ext uri="{FF2B5EF4-FFF2-40B4-BE49-F238E27FC236}">
+                <a16:creationId xmlns:a16="http://schemas.microsoft.com/office/drawing/2014/main" id="{4D31E913-8076-767F-3FFA-49228926DD2A}"/>
+              </a:ext>
+            </a:extLst>
+          </p:cNvPr>
+          <p:cNvCxnSpPr>
+            <a:cxnSpLocks/>
+          </p:cNvCxnSpPr>
+          <p:nvPr/>
+        </p:nvCxnSpPr>
+        <p:spPr>
+          <a:xfrm flipH="1" flipV="1">
+            <a:off x="10898248" y="4580913"/>
+            <a:ext cx="132217" cy="278710"/>
+          </a:xfrm>
+          <a:prstGeom prst="straightConnector1">
+            <a:avLst/>
+          </a:prstGeom>
+          <a:ln w="12700" cmpd="sng">
+            <a:solidFill>
+              <a:schemeClr val="tx1"/>
+            </a:solidFill>
+            <a:tailEnd type="triangle"/>
+          </a:ln>
+          <a:effectLst/>
+        </p:spPr>
+        <p:style>
+          <a:lnRef idx="2">
+            <a:schemeClr val="accent1"/>
+          </a:lnRef>
+          <a:fillRef idx="0">
+            <a:schemeClr val="accent1"/>
+          </a:fillRef>
+          <a:effectRef idx="1">
+            <a:schemeClr val="accent1"/>
+          </a:effectRef>
+          <a:fontRef idx="minor">
+            <a:schemeClr val="tx1"/>
+          </a:fontRef>
+        </p:style>
+      </p:cxnSp>
+      <p:sp>
+        <p:nvSpPr>
+          <p:cNvPr id="8" name="TextBox 7">
+            <a:extLst>
+              <a:ext uri="{FF2B5EF4-FFF2-40B4-BE49-F238E27FC236}">
+                <a16:creationId xmlns:a16="http://schemas.microsoft.com/office/drawing/2014/main" id="{5B769A41-4005-10D3-8FBE-6E3F868A80AA}"/>
+              </a:ext>
+            </a:extLst>
+          </p:cNvPr>
+          <p:cNvSpPr txBox="1"/>
+          <p:nvPr/>
+        </p:nvSpPr>
+        <p:spPr>
+          <a:xfrm>
+            <a:off x="8448767" y="3628254"/>
+            <a:ext cx="1004827" cy="369332"/>
+          </a:xfrm>
+          <a:prstGeom prst="rect">
+            <a:avLst/>
+          </a:prstGeom>
+          <a:noFill/>
+        </p:spPr>
+        <p:txBody>
+          <a:bodyPr wrap="none" rtlCol="0">
+            <a:spAutoFit/>
+          </a:bodyPr>
+          <a:lstStyle/>
+          <a:p>
+            <a:r>
+              <a:rPr lang="en-GB" dirty="0"/>
+              <a:t>stacking:</a:t>
+            </a:r>
           </a:p>
         </p:txBody>
       </p:sp>
     </p:spTree>
     <p:extLst>
       <p:ext uri="{BB962C8B-B14F-4D97-AF65-F5344CB8AC3E}">
-        <p14:creationId xmlns:p14="http://schemas.microsoft.com/office/powerpoint/2010/main" val="1137842183"/>
+        <p14:creationId xmlns:p14="http://schemas.microsoft.com/office/powerpoint/2010/main" val="2471018423"/>
       </p:ext>
     </p:extLst>
   </p:cSld>

--- a/slides/6_feature_engineering.pptx
+++ b/slides/6_feature_engineering.pptx
@@ -521,7 +521,7 @@
           <a:p>
             <a:fld id="{506E0FD1-891F-4B1E-916D-E9B585160BB8}" type="datetimeFigureOut">
               <a:rPr lang="en-GB" smtClean="0"/>
-              <a:t>03/05/2026</a:t>
+              <a:t>11/05/2026</a:t>
             </a:fld>
             <a:endParaRPr lang="en-GB"/>
           </a:p>
@@ -938,7 +938,7 @@
           <a:p>
             <a:fld id="{D68C3F22-27B2-44E3-9C5F-D08126455F6F}" type="datetime1">
               <a:rPr lang="en-GB" smtClean="0"/>
-              <a:t>03/05/2026</a:t>
+              <a:t>11/05/2026</a:t>
             </a:fld>
             <a:endParaRPr lang="en-GB"/>
           </a:p>
@@ -1138,7 +1138,7 @@
           <a:p>
             <a:fld id="{1CD03846-7BF6-4FB6-A921-FF3379ADBD4C}" type="datetime1">
               <a:rPr lang="en-GB" smtClean="0"/>
-              <a:t>03/05/2026</a:t>
+              <a:t>11/05/2026</a:t>
             </a:fld>
             <a:endParaRPr lang="en-GB"/>
           </a:p>
@@ -1348,7 +1348,7 @@
           <a:p>
             <a:fld id="{99E1B91A-3FD0-4144-9C84-63E9688ED2FE}" type="datetime1">
               <a:rPr lang="en-GB" smtClean="0"/>
-              <a:t>03/05/2026</a:t>
+              <a:t>11/05/2026</a:t>
             </a:fld>
             <a:endParaRPr lang="en-GB"/>
           </a:p>
@@ -1548,7 +1548,7 @@
           <a:p>
             <a:fld id="{5295ED7B-FEAD-4734-819F-93EF4B0EA908}" type="datetime1">
               <a:rPr lang="en-GB" smtClean="0"/>
-              <a:t>03/05/2026</a:t>
+              <a:t>11/05/2026</a:t>
             </a:fld>
             <a:endParaRPr lang="en-GB"/>
           </a:p>
@@ -1824,7 +1824,7 @@
           <a:p>
             <a:fld id="{D2D5D4B4-C926-4B45-8815-1ED8911179A2}" type="datetime1">
               <a:rPr lang="en-GB" smtClean="0"/>
-              <a:t>03/05/2026</a:t>
+              <a:t>11/05/2026</a:t>
             </a:fld>
             <a:endParaRPr lang="en-GB"/>
           </a:p>
@@ -2092,7 +2092,7 @@
           <a:p>
             <a:fld id="{B4C5210A-0E37-4935-93AF-69F21A5F712F}" type="datetime1">
               <a:rPr lang="en-GB" smtClean="0"/>
-              <a:t>03/05/2026</a:t>
+              <a:t>11/05/2026</a:t>
             </a:fld>
             <a:endParaRPr lang="en-GB"/>
           </a:p>
@@ -2507,7 +2507,7 @@
           <a:p>
             <a:fld id="{3D3A6B2F-436C-4691-80E8-9C890E000E9D}" type="datetime1">
               <a:rPr lang="en-GB" smtClean="0"/>
-              <a:t>03/05/2026</a:t>
+              <a:t>11/05/2026</a:t>
             </a:fld>
             <a:endParaRPr lang="en-GB"/>
           </a:p>
@@ -2649,7 +2649,7 @@
           <a:p>
             <a:fld id="{84385F4C-D74B-496F-8D21-97E3549C783B}" type="datetime1">
               <a:rPr lang="en-GB" smtClean="0"/>
-              <a:t>03/05/2026</a:t>
+              <a:t>11/05/2026</a:t>
             </a:fld>
             <a:endParaRPr lang="en-GB"/>
           </a:p>
@@ -2762,7 +2762,7 @@
           <a:p>
             <a:fld id="{0CBDCB32-C241-4703-A832-4EB47BD54E83}" type="datetime1">
               <a:rPr lang="en-GB" smtClean="0"/>
-              <a:t>03/05/2026</a:t>
+              <a:t>11/05/2026</a:t>
             </a:fld>
             <a:endParaRPr lang="en-GB"/>
           </a:p>
@@ -3075,7 +3075,7 @@
           <a:p>
             <a:fld id="{85C150FF-BE95-4D25-A16A-E368A81CBF24}" type="datetime1">
               <a:rPr lang="en-GB" smtClean="0"/>
-              <a:t>03/05/2026</a:t>
+              <a:t>11/05/2026</a:t>
             </a:fld>
             <a:endParaRPr lang="en-GB"/>
           </a:p>
@@ -3364,7 +3364,7 @@
           <a:p>
             <a:fld id="{F3C5DB4B-B349-43C9-A424-BADA723AD9F1}" type="datetime1">
               <a:rPr lang="en-GB" smtClean="0"/>
-              <a:t>03/05/2026</a:t>
+              <a:t>11/05/2026</a:t>
             </a:fld>
             <a:endParaRPr lang="en-GB"/>
           </a:p>
@@ -3607,7 +3607,7 @@
           <a:p>
             <a:fld id="{12632426-0A0C-405F-A3D0-2D11AA44702A}" type="datetime1">
               <a:rPr lang="en-GB" smtClean="0"/>
-              <a:t>03/05/2026</a:t>
+              <a:t>11/05/2026</a:t>
             </a:fld>
             <a:endParaRPr lang="en-GB"/>
           </a:p>
@@ -14257,23 +14257,73 @@
             </a:r>
             <a:r>
               <a:rPr lang="de-DE" dirty="0"/>
-              <a:t>: “I </a:t>
-            </a:r>
-            <a:r>
-              <a:rPr lang="de-DE" dirty="0" err="1"/>
-              <a:t>love</a:t>
-            </a:r>
-            <a:r>
-              <a:rPr lang="de-DE" dirty="0"/>
-              <a:t> </a:t>
-            </a:r>
-            <a:r>
-              <a:rPr lang="de-DE" dirty="0" err="1"/>
-              <a:t>data</a:t>
-            </a:r>
-            <a:r>
-              <a:rPr lang="de-DE" dirty="0"/>
-              <a:t>” → {I:1, love:1, data:1}</a:t>
+              <a:t>: “John </a:t>
+            </a:r>
+            <a:r>
+              <a:rPr lang="de-DE" dirty="0" err="1"/>
+              <a:t>likes</a:t>
+            </a:r>
+            <a:r>
+              <a:rPr lang="de-DE" dirty="0"/>
+              <a:t> </a:t>
+            </a:r>
+            <a:r>
+              <a:rPr lang="de-DE" dirty="0" err="1"/>
+              <a:t>to</a:t>
+            </a:r>
+            <a:r>
+              <a:rPr lang="de-DE" dirty="0"/>
+              <a:t> </a:t>
+            </a:r>
+            <a:r>
+              <a:rPr lang="de-DE" dirty="0" err="1"/>
+              <a:t>watch</a:t>
+            </a:r>
+            <a:r>
+              <a:rPr lang="de-DE" dirty="0"/>
+              <a:t> </a:t>
+            </a:r>
+            <a:r>
+              <a:rPr lang="de-DE" dirty="0" err="1"/>
+              <a:t>movies</a:t>
+            </a:r>
+            <a:r>
+              <a:rPr lang="de-DE" dirty="0"/>
+              <a:t>. Mary </a:t>
+            </a:r>
+            <a:r>
+              <a:rPr lang="de-DE" dirty="0" err="1"/>
+              <a:t>likes</a:t>
+            </a:r>
+            <a:r>
+              <a:rPr lang="de-DE" dirty="0"/>
+              <a:t> </a:t>
+            </a:r>
+            <a:r>
+              <a:rPr lang="de-DE" dirty="0" err="1"/>
+              <a:t>movies</a:t>
+            </a:r>
+            <a:r>
+              <a:rPr lang="de-DE" dirty="0"/>
+              <a:t> </a:t>
+            </a:r>
+            <a:r>
+              <a:rPr lang="de-DE" dirty="0" err="1"/>
+              <a:t>too</a:t>
+            </a:r>
+            <a:r>
+              <a:rPr lang="de-DE" dirty="0"/>
+              <a:t>.” </a:t>
+            </a:r>
+            <a:r>
+              <a:rPr lang="de-DE" dirty="0">
+                <a:sym typeface="Wingdings" pitchFamily="2" charset="2"/>
+              </a:rPr>
+              <a:t> </a:t>
+            </a:r>
+            <a:r>
+              <a:rPr lang="de-DE" dirty="0"/>
+              <a:t>{"John":1,"likes":2,"to":1,"watch":1,"movies":2,"Mary":1,"too":1}</a:t>
             </a:r>
           </a:p>
           <a:p>
